--- a/presentations/20261030/M棚橋261030.pptx
+++ b/presentations/20261030/M棚橋261030.pptx
@@ -20,6 +20,7 @@
     <p:sldId id="266" r:id="rId18"/>
     <p:sldId id="267" r:id="rId19"/>
     <p:sldId id="268" r:id="rId20"/>
+    <p:sldId id="269" r:id="rId21"/>
   </p:sldIdLst>
   <p:sldSz cx="12192000" cy="6858000"/>
   <p:notesSz cx="6858000" cy="9144000"/>
@@ -711,7 +712,7 @@
           <a:lstStyle/>
           <a:p>
             <a:r>
-              <a:t>スコアボード認識と投球検出による野球イベント検出について、今週の進捗を報告します。今週は、これまで個別に使っていたYOLO、PaddleOCR、VideoMAEによる処理をまとめ、同じ動画の時刻で結果を照合しました。</a:t>
+              <a:t>今週は、これまでに実装してきたスコアボード認識と投球区間の検出を、5回裏の同じ動画全体に適用しました。今回は、全部を適用してどのような状況を投球に対応付けられたかと、そこで残った課題を報告します。</a:t>
             </a:r>
           </a:p>
         </p:txBody>
@@ -797,7 +798,7 @@
           <a:lstStyle/>
           <a:p>
             <a:r>
-              <a:t>来週はまず、5回裏の動画全体に、投球の開始と終了、ファウルなどの結果の正解注釈を付けます。そのうえで、投球検出の見逃しと誤検出を数え、区間の重なりも評価します。イベントの判定精度は、投球区間の検出精度とは分けて確認します。また、投球直後の古い表示を採用しないように、表示の更新を待つ方法や、画面に戻ってから照合する方法を検討します。投球と守備動作の区別や、映像と表示の統合に関する先行研究も整理し、別の動画でも再現するかを確認したいと考えています。</a:t>
+              <a:t>今週新たに確認した点は、投球区間に、カウント、走者、回、得点をまとめて付与できたことです。前後の全項目が揃ったのは9候補群でした。また、表示変化の時刻だけではなく、それに対応する投球候補まで示せるようになりました。一方、前後の表示が不足する23候補群があり、取得できても採用する時刻によって不変という整理が変わる例がありました。各認識処理の結果を並べるだけでなく、どの時点の表示を投球に対応付けるかが、イベント判定に必要だと分かりました。</a:t>
             </a:r>
           </a:p>
         </p:txBody>
@@ -867,7 +868,7 @@
           <a:lstStyle/>
           <a:p>
             <a:r>
-              <a:t>前回の10動画、24球については、目視で設定したおおよその投球区間と、各投球に対応する最高スコア候補を比較し、平均tIoUが0.711でした。これは区間の重なりを見た結果で、守備動作への余分な候補を罰する評価ではありません。今回の5回裏全体は、まだ正解注釈を作っていないため、同じ数値を算出していません。前回の0.711を、今回の統合処理の精度として示すことはできません。</a:t>
+              <a:t>次は5回裏全体に、実際の投球区間と、ファウルなどの結果の正解注釈を付けます。そのうえで、表示の更新や再表示を待つ方法と、前後の採用値の決め方を検討します。投球区間の見逃しや誤検出の評価と、その投球へ正しい状況や結果を対応付けたかの評価は分けて行います。今回の動画を使った調整の後には、別の動画でも確認します。今週は、全部を適用した結果を取得する段階から、投球と状況の対応付けを評価するための具体的な課題まで整理しました。</a:t>
             </a:r>
           </a:p>
         </p:txBody>
@@ -937,7 +938,77 @@
           <a:lstStyle/>
           <a:p>
             <a:r>
-              <a:t>スコアボードと内部のランプは、提供された2段階のYOLOで検出しました。表示は0.5秒ごと、OCRは表示があるときに原則2秒以上の間隔で実行しています。VideoMAEは16フレームを8フレーム間隔で取得し、768次元の特徴量を抽出しました。区間検出には、以前inning1tで学習したCompact ActionFormerを使っています。Soft-NMS後のスコア0.15以上を保持し、表示用の候補群は時間的IoUが0.25以上の重なりを基準にまとめました。表示が取得できなかった時刻は0に置き換えていません。</a:t>
+              <a:t>ほかの全項目が揃った例では、19.86秒から22.01秒と、44.07秒から46.34秒に対応してストライク表示が増え、33.66秒から35.91秒ではボール表示が増えました。前後のB/S/Oを照合できた11候補群の内訳は、ストライク表示増加3、ボール表示増加1、2ストライク未満で不変5、2ストライクで不変2です。最後の不変2は元の最初の安定状態を使った整理で、後の時刻を追うと候補11ではボール表示が増えています。これは結果の一貫性を調べた追加確認で、正解注釈に基づく分類精度ではありません。</a:t>
+            </a:r>
+          </a:p>
+        </p:txBody>
+      </p:sp>
+      <p:sp>
+        <p:nvSpPr>
+          <p:cNvPr id="4" name="Slide Number Placeholder 3"/>
+          <p:cNvSpPr>
+            <a:spLocks noGrp="1"/>
+          </p:cNvSpPr>
+          <p:nvPr>
+            <p:ph type="sldNum" idx="5" sz="quarter"/>
+          </p:nvPr>
+        </p:nvSpPr>
+        <p:spPr/>
+      </p:sp>
+    </p:spTree>
+  </p:cSld>
+  <p:clrMapOvr>
+    <a:masterClrMapping/>
+  </p:clrMapOvr>
+</p:notes>
+</file>
+
+<file path=ppt/notesSlides/notesSlide13.xml><?xml version="1.0" encoding="utf-8"?>
+<p:notes xmlns:a="http://schemas.openxmlformats.org/drawingml/2006/main" xmlns:p="http://schemas.openxmlformats.org/presentationml/2006/main" xmlns:r="http://schemas.openxmlformats.org/officeDocument/2006/relationships">
+  <p:cSld>
+    <p:spTree>
+      <p:nvGrpSpPr>
+        <p:cNvPr id="1" name=""/>
+        <p:cNvGrpSpPr/>
+        <p:nvPr/>
+      </p:nvGrpSpPr>
+      <p:grpSpPr>
+        <a:xfrm>
+          <a:off x="0" y="0"/>
+          <a:ext cx="0" cy="0"/>
+          <a:chOff x="0" y="0"/>
+          <a:chExt cx="0" cy="0"/>
+        </a:xfrm>
+      </p:grpSpPr>
+      <p:sp>
+        <p:nvSpPr>
+          <p:cNvPr id="2" name="Slide Image Placeholder 1"/>
+          <p:cNvSpPr>
+            <a:spLocks noGrp="1"/>
+          </p:cNvSpPr>
+          <p:nvPr>
+            <p:ph type="sldImg" idx="2"/>
+          </p:nvPr>
+        </p:nvSpPr>
+        <p:spPr/>
+      </p:sp>
+      <p:sp>
+        <p:nvSpPr>
+          <p:cNvPr id="3" name="Notes Placeholder 2"/>
+          <p:cNvSpPr>
+            <a:spLocks noGrp="1"/>
+          </p:cNvSpPr>
+          <p:nvPr>
+            <p:ph type="body" idx="3" sz="quarter"/>
+          </p:nvPr>
+        </p:nvSpPr>
+        <p:spPr/>
+        <p:txBody>
+          <a:bodyPr/>
+          <a:lstStyle/>
+          <a:p>
+            <a:r>
+              <a:t>7月には静止画上のカウントや走者を対象に適合率と再現率を確認しました。10月の短編10動画24球では、目視の参考区間に対する選んだ投球候補の平均tIoUが0.711でした。今回の9候補群や23候補群は、同じ動画に全処理を適用したときの項目の取得状況を数えたものです。対象や数えているものが異なるため、前の精度より良くなったか悪くなったかは比較できません。今回の正解注釈を作り、投球区間とイベントの対応付けをそれぞれ評価する必要があります。</a:t>
             </a:r>
           </a:p>
         </p:txBody>
@@ -1007,7 +1078,7 @@
           <a:lstStyle/>
           <a:p>
             <a:r>
-              <a:t>今週は、これまで別々に使っていた3つの処理を、同じ映像に適用して結果をまとめました。YOLOでスコアボードとカウントなどの表示を検出し、PaddleOCRでイニングと得点を読み、VideoMAEの特徴量とCompact ActionFormerで投球区間の候補を出しました。対象は5回裏の動画全体です。さらに、投球候補と前後の表示を照合し、確認画像、時系列グラフ、CSVとして保存できるようにしました。</a:t>
+              <a:t>これまでは、YOLOでカウントと走者を検出し、PaddleOCRでイニングと得点を認識してきました。9月には、表示の変化を使ったイベントの推定とCSVへの出力も行っています。その後、VideoMAEの特徴量とCompact ActionFormerを使い、投球区間を確認してきました。今週は、これらの処理を5回裏全体にまとめて適用し、投球候補と、カウント、走者、回、得点を同じ動画の時刻で対応付けました。投球と各状況を一緒に照合した結果が、今回の報告の中心です。</a:t>
             </a:r>
           </a:p>
         </p:txBody>
@@ -1077,7 +1148,7 @@
           <a:lstStyle/>
           <a:p>
             <a:r>
-              <a:t>目的は、投球が行われた時刻と、スコアボードの変化を対応付け、野球のイベント判定につなげることです。今回は5回裏の動画全体、約8分50秒を使用しました。フレームレートは30fpsで、総フレーム数は15,906です。約134分あるtest.mp4は、このCPU環境では1時間以内の処理が見込めなかったため、指定した代替の5ura.mp4を使いました。既存の学習済みモデルを利用し、今回の動画で追加学習はしていません。</a:t>
+              <a:t>対象は5ura.mp4の全体、530.2秒です。既存の学習済みモデルを使い、今回の動画での追加学習はしていません。YOLOでB/S/Oと走者、PaddleOCRで回と得点を読み、VideoMAEとCompact ActionFormerで投球区間の候補を出しました。投球候補の前後で同じB/S/Oが連続して得られる範囲を探し、状況を対応付けました。現行の照合では、投球後に最初に得られた安定状態を使っています。この表示の採用時刻が、後で説明する課題につながりました。</a:t>
             </a:r>
           </a:p>
         </p:txBody>
@@ -1147,7 +1218,7 @@
           <a:lstStyle/>
           <a:p>
             <a:r>
-              <a:t>処理の役割は、YOLOがスコアボードの位置と、内部のボール、ストライク、アウト、走者の表示です。PaddleOCRは、YOLOが切り出した枠内のイニングと得点を読みます。一方、VideoMAEは元映像の16フレームから特徴量を抽出し、Compact ActionFormerが投球の開始と終了を推定します。この区間候補の前後で、表示がどう変わったかを同じ動画の時刻で照合しました。例えば、投球前が2ストライクで、前後のカウントが変わらない場合を確認対象にします。ただし、この条件だけでファウルと確定するものではありません。</a:t>
+              <a:t>全体の適用結果です。投球区間の候補は65区間で、重なりを表示上まとめると34候補群でした。34は実際の投球数を確定した値ではありません。上から、投球区間候補、B/S/O、走者、得点を同じ時刻で並べています。走者欄の黄色はあり、灰色はなしと認識した時刻で、白は未取得です。このように、投球だけでなく、その付近の試合状況も同じ時系列で追える形にしました。読み取れない場所は、0や走者なしで埋めていません。</a:t>
             </a:r>
           </a:p>
         </p:txBody>
@@ -1217,7 +1288,7 @@
           <a:lstStyle/>
           <a:p>
             <a:r>
-              <a:t>動画全体への適用では、Soft-NMS後に65個の区間候補が残りました。重なる候補を表示上まとめると34候補群になりました。この34という数は、実際の投球数を確定したものではありません。赤線が投球区間候補で、その高さがモデルのスコアです。中央はYOLOによるボール、ストライク、アウト、下段はOCRによる得点の取得値です。表示がない場面や読み取れない場面は、不明として残しています。今回の動画には正解注釈をまだ作っていないため、正解の区間を示す帯や、平均tIoUは付けていません。</a:t>
+              <a:t>34候補群のうち、前後のB/S/Oを照合できたものは11候補群でした。そのうち9候補群では、B/S/Oに加えて、回と表裏、両チームの得点、各塁の走者の認識値も前後で揃いました。残りの2候補群は、OCRの項目が一部取得できていません。前後のB/S/Oが不足したものは23候補群でした。これは、全処理を適用したときに必要な項目が揃った数であり、9候補群で正しくイベントを判定できたという意味ではありません。</a:t>
             </a:r>
           </a:p>
         </p:txBody>
@@ -1287,7 +1358,7 @@
           <a:lstStyle/>
           <a:p>
             <a:r>
-              <a:t>34候補群を、前後のカウントから整理した結果です。ストライク表示が増えたものが3候補群、ボール表示が増えたものが1候補群でした。2ストライク未満でカウントが変わらないものが5候補群、2ストライクで変わらないものが2候補群でした。残りの23候補群は、前後のどちらか、または両方の表示が不足し、判定を保留しています。これは表示変化を機械的に整理した数であり、それぞれの投球結果が正しく分類できた割合を表すものではありません。</a:t>
+              <a:t>全項目を対応付けた例です。293.11秒から294.85秒に投球候補があり、その前後は5回裏、0対0、一塁走者あり、2アウトという状況でした。投球前の291.5秒では2ボール0ストライク、投球後に表示を取得した297.5秒では2ボール1ストライクです。回、得点、走者が変わらず、ストライク表示が増えたことを、この投球候補に対応付けられました。投球区間だけを出す場合や、表示の変化だけを見る場合よりも、どの状況の投球で表示が変わったかまで記録できています。</a:t>
             </a:r>
           </a:p>
         </p:txBody>
@@ -1357,7 +1428,7 @@
           <a:lstStyle/>
           <a:p>
             <a:r>
-              <a:t>具体例として、約113.41秒から115.02秒の候補を示します。この候補の投球検出スコアは約0.966でした。直前の113.0秒と直後の116.0秒を比べると、どちらも0ボール、2ストライク、1アウトと読み取られています。このため、2ストライク後にカウントが変わらない確認対象として残しました。同じ条件に該当したものは、約155.31秒から157.27秒にもあり、合計2候補群でした。ここでのスコアは投球区間の検出スコアで、ファウルの確率ではありません。</a:t>
+              <a:t>別の例では、候補26の区間内にある367.0秒で、5回裏、0対0、3ボール2ストライク2アウト、二塁走者ありという値を取得しました。一方、候補31の直後の436.5秒では、5回裏、0対1、0ボール0ストライク2アウト、一塁走者ありでした。得点だけでなく、投球候補と、その付近のカウントや走者を一緒に記録できています。ただし、間の表示が不足しているため、候補26が得点につながった投球だった、あるいは何秒で得点した、という対応までは確定していません。</a:t>
             </a:r>
           </a:p>
         </p:txBody>
@@ -1427,7 +1498,7 @@
           <a:lstStyle/>
           <a:p>
             <a:r>
-              <a:t>ただし、投球直後はスコアボードの更新が間に合っていない可能性があります。約155.31秒から157.27秒の候補では、158.0秒に打者が走り出す場面が含まれますが、取得された表示は、投球前と同じ0ボール、2ストライク、1アウトでした。この例からも、短時間カウントが同じというだけで、ファウルと判断することはできません。今回の2候補群は、あくまで確認対象です。今後は、表示の更新を待つ処理に加え、投球後の映像や次の表示も確認し、実際の結果と対応付ける必要があります。</a:t>
+              <a:t>9月に考えた、2ストライクで投球の前後の状況が変わらない場面という条件を、今回は検出した投球区間の前後に適用しました。現行の最初の安定状態を使う照合では、113.41秒から115.02秒と、155.31秒から157.27秒の2候補群が、B/S/O不変として残りました。どちらも0ボール2ストライク1アウトです。ただし、これは自動処理が確認対象として残した数で、ファウルを2件正しく検出できたという意味ではありません。</a:t>
             </a:r>
           </a:p>
         </p:txBody>
@@ -1497,7 +1568,7 @@
           <a:lstStyle/>
           <a:p>
             <a:r>
-              <a:t>得点表示については、367.0秒の取得値が0対0、434.5秒の取得値が0対1でした。これにより、異なる時刻の得点表示を読み取れていることを確認しました。ただし、その間の表示が不足しているため、正確に何秒で得点したかまでは特定していません。また、細い数字の1を文字検出が見落とす場面がありました。この場合は、切り出した得点欄を同じOCRの文字認識モデルへ直接渡し、2通りの切り出しで同じ数値が得られた場合だけ採用しました。</a:t>
+              <a:t>候補11について、投球後の表示を続けて確認しました。投球前の154.5秒と、直後の158.0秒は、どちらも0ボール2ストライク1アウトです。しかし、その後の161.5秒では、1ボール2ストライク1アウトを取得しています。元の照合は、158.0秒から158.5秒の最初の安定状態を採用したため、不変と整理されていました。同じ認識記録でも、その後の値を確認すると、ボールが増えた状態になります。このため、直後の古い表示で判定していないかを確認する必要があります。認識値の違いを示したもので、実際の投球結果の正解判定は別に必要です。</a:t>
             </a:r>
           </a:p>
         </p:txBody>
@@ -5200,7 +5271,7 @@
                 <a:latin typeface="游ゴシック Light"/>
                 <a:ea typeface="游ゴシック Light"/>
               </a:rPr>
-              <a:t>来週すること</a:t>
+              <a:t>全処理の適用で分かったこと</a:t>
             </a:r>
           </a:p>
         </p:txBody>
@@ -5276,40 +5347,30 @@
                 <a:spcPct val="112000"/>
               </a:lnSpc>
               <a:spcAft>
-                <a:spcPts val="2200"/>
+                <a:spcPts val="1900"/>
               </a:spcAft>
               <a:buNone/>
             </a:pPr>
             <a:r>
-              <a:rPr sz="2800" b="0" lang="ja-JP">
+              <a:rPr sz="2700" b="0" lang="ja-JP">
                 <a:solidFill>
                   <a:srgbClr val="111111"/>
                 </a:solidFill>
                 <a:latin typeface="游ゴシック"/>
                 <a:ea typeface="游ゴシック"/>
               </a:rPr>
-              <a:t>• 動画全体に、投球区間とファウル等の正解注釈を付ける</a:t>
-            </a:r>
-          </a:p>
-          <a:p>
-            <a:pPr algn="l">
-              <a:lnSpc>
-                <a:spcPct val="112000"/>
-              </a:lnSpc>
-              <a:spcAft>
-                <a:spcPts val="2200"/>
-              </a:spcAft>
-              <a:buNone/>
-            </a:pPr>
-            <a:r>
-              <a:rPr sz="2800" b="0" lang="ja-JP">
+              <a:t>• 投球候補に、B/S/O・走者・回・得点を対応付けられた</a:t>
+            </a:r>
+            <a:br/>
+            <a:r>
+              <a:rPr sz="2700" b="0" lang="ja-JP">
                 <a:solidFill>
                   <a:srgbClr val="111111"/>
                 </a:solidFill>
                 <a:latin typeface="游ゴシック"/>
                 <a:ea typeface="游ゴシック"/>
               </a:rPr>
-              <a:t>• 表示の更新・再表示を待つ照合方法を検討する</a:t>
+              <a:t>　前後の全項目が揃ったものは9候補群</a:t>
             </a:r>
           </a:p>
           <a:p>
@@ -5318,40 +5379,62 @@
                 <a:spcPct val="112000"/>
               </a:lnSpc>
               <a:spcAft>
-                <a:spcPts val="2200"/>
+                <a:spcPts val="1900"/>
               </a:spcAft>
               <a:buNone/>
             </a:pPr>
             <a:r>
-              <a:rPr sz="2800" b="0" lang="ja-JP">
+              <a:rPr sz="2700" b="0" lang="ja-JP">
                 <a:solidFill>
                   <a:srgbClr val="111111"/>
                 </a:solidFill>
                 <a:latin typeface="游ゴシック"/>
                 <a:ea typeface="游ゴシック"/>
               </a:rPr>
-              <a:t>• 投球検出とイベント判定を分け、見逃し・誤検出を評価する</a:t>
-            </a:r>
-          </a:p>
-          <a:p>
-            <a:pPr algn="l">
-              <a:lnSpc>
-                <a:spcPct val="112000"/>
-              </a:lnSpc>
-              <a:spcAft>
-                <a:spcPts val="2200"/>
-              </a:spcAft>
-              <a:buNone/>
-            </a:pPr>
-            <a:r>
-              <a:rPr sz="2800" b="0" lang="ja-JP">
+              <a:t>• 表示変化を投球候補に対応付けられた</a:t>
+            </a:r>
+            <a:br/>
+            <a:r>
+              <a:rPr sz="2700" b="0" lang="ja-JP">
                 <a:solidFill>
                   <a:srgbClr val="111111"/>
                 </a:solidFill>
                 <a:latin typeface="游ゴシック"/>
                 <a:ea typeface="游ゴシック"/>
               </a:rPr>
-              <a:t>• 先行研究を整理し、別動画でも確認する</a:t>
+              <a:t>　現行の整理：ストライク表示増加3群、ボール表示増加1群</a:t>
+            </a:r>
+          </a:p>
+          <a:p>
+            <a:pPr algn="l">
+              <a:lnSpc>
+                <a:spcPct val="112000"/>
+              </a:lnSpc>
+              <a:spcAft>
+                <a:spcPts val="1900"/>
+              </a:spcAft>
+              <a:buNone/>
+            </a:pPr>
+            <a:r>
+              <a:rPr sz="2700" b="0" lang="ja-JP">
+                <a:solidFill>
+                  <a:srgbClr val="111111"/>
+                </a:solidFill>
+                <a:latin typeface="游ゴシック"/>
+                <a:ea typeface="游ゴシック"/>
+              </a:rPr>
+              <a:t>• 表示の取得不足と、採用時刻による違いを確認した</a:t>
+            </a:r>
+            <a:br/>
+            <a:r>
+              <a:rPr sz="2700" b="0" lang="ja-JP">
+                <a:solidFill>
+                  <a:srgbClr val="111111"/>
+                </a:solidFill>
+                <a:latin typeface="游ゴシック"/>
+                <a:ea typeface="游ゴシック"/>
+              </a:rPr>
+              <a:t>　投球と表示をどう対応付けるかが、次の検討課題</a:t>
             </a:r>
           </a:p>
         </p:txBody>
@@ -5413,7 +5496,7 @@
                 <a:latin typeface="游ゴシック Light"/>
                 <a:ea typeface="游ゴシック Light"/>
               </a:rPr>
-              <a:t>補足：前回の結果との違い</a:t>
+              <a:t>来週すること</a:t>
             </a:r>
           </a:p>
         </p:txBody>
@@ -5471,7 +5554,7 @@
         <p:spPr>
           <a:xfrm>
             <a:off x="838504" y="1819656"/>
-            <a:ext cx="10515600" cy="457200"/>
+            <a:ext cx="10515600" cy="4389120"/>
           </a:xfrm>
           <a:prstGeom prst="rect">
             <a:avLst/>
@@ -5489,6 +5572,219 @@
                 <a:spcPct val="112000"/>
               </a:lnSpc>
               <a:spcAft>
+                <a:spcPts val="2200"/>
+              </a:spcAft>
+              <a:buNone/>
+            </a:pPr>
+            <a:r>
+              <a:rPr sz="2800" b="0" lang="ja-JP">
+                <a:solidFill>
+                  <a:srgbClr val="111111"/>
+                </a:solidFill>
+                <a:latin typeface="游ゴシック"/>
+                <a:ea typeface="游ゴシック"/>
+              </a:rPr>
+              <a:t>• 5回ウラ全体に、投球区間と結果の正解注釈を付ける</a:t>
+            </a:r>
+          </a:p>
+          <a:p>
+            <a:pPr algn="l">
+              <a:lnSpc>
+                <a:spcPct val="112000"/>
+              </a:lnSpc>
+              <a:spcAft>
+                <a:spcPts val="2200"/>
+              </a:spcAft>
+              <a:buNone/>
+            </a:pPr>
+            <a:r>
+              <a:rPr sz="2800" b="0" lang="ja-JP">
+                <a:solidFill>
+                  <a:srgbClr val="111111"/>
+                </a:solidFill>
+                <a:latin typeface="游ゴシック"/>
+                <a:ea typeface="游ゴシック"/>
+              </a:rPr>
+              <a:t>• 表示の更新・再表示を確認し、前後の採用値を決める</a:t>
+            </a:r>
+          </a:p>
+          <a:p>
+            <a:pPr algn="l">
+              <a:lnSpc>
+                <a:spcPct val="112000"/>
+              </a:lnSpc>
+              <a:spcAft>
+                <a:spcPts val="2200"/>
+              </a:spcAft>
+              <a:buNone/>
+            </a:pPr>
+            <a:r>
+              <a:rPr sz="2800" b="0" lang="ja-JP">
+                <a:solidFill>
+                  <a:srgbClr val="111111"/>
+                </a:solidFill>
+                <a:latin typeface="游ゴシック"/>
+                <a:ea typeface="游ゴシック"/>
+              </a:rPr>
+              <a:t>• 投球検出と、状況・結果の対応付けを分けて評価する</a:t>
+            </a:r>
+          </a:p>
+          <a:p>
+            <a:pPr algn="l">
+              <a:lnSpc>
+                <a:spcPct val="112000"/>
+              </a:lnSpc>
+              <a:spcAft>
+                <a:spcPts val="2200"/>
+              </a:spcAft>
+              <a:buNone/>
+            </a:pPr>
+            <a:r>
+              <a:rPr sz="2800" b="0" lang="ja-JP">
+                <a:solidFill>
+                  <a:srgbClr val="111111"/>
+                </a:solidFill>
+                <a:latin typeface="游ゴシック"/>
+                <a:ea typeface="游ゴシック"/>
+              </a:rPr>
+              <a:t>• 今回の動画で検討した後、別動画でも確認する</a:t>
+            </a:r>
+          </a:p>
+        </p:txBody>
+      </p:sp>
+    </p:spTree>
+  </p:cSld>
+  <p:clrMapOvr>
+    <a:masterClrMapping/>
+  </p:clrMapOvr>
+</p:sld>
+</file>
+
+<file path=ppt/slides/slide12.xml><?xml version="1.0" encoding="utf-8"?>
+<p:sld xmlns:a="http://schemas.openxmlformats.org/drawingml/2006/main" xmlns:p="http://schemas.openxmlformats.org/presentationml/2006/main" xmlns:r="http://schemas.openxmlformats.org/officeDocument/2006/relationships">
+  <p:cSld>
+    <p:spTree>
+      <p:nvGrpSpPr>
+        <p:cNvPr id="1" name=""/>
+        <p:cNvGrpSpPr/>
+        <p:nvPr/>
+      </p:nvGrpSpPr>
+      <p:grpSpPr/>
+      <p:sp>
+        <p:nvSpPr>
+          <p:cNvPr id="2" name="Title 1"/>
+          <p:cNvSpPr>
+            <a:spLocks noGrp="1"/>
+          </p:cNvSpPr>
+          <p:nvPr>
+            <p:ph type="title"/>
+          </p:nvPr>
+        </p:nvSpPr>
+        <p:spPr>
+          <a:xfrm>
+            <a:off x="838504" y="364845"/>
+            <a:ext cx="10515600" cy="1325880"/>
+          </a:xfrm>
+        </p:spPr>
+        <p:txBody>
+          <a:bodyPr wrap="square" lIns="0" rIns="0" tIns="0" bIns="0">
+            <a:noAutofit/>
+          </a:bodyPr>
+          <a:lstStyle/>
+          <a:p>
+            <a:pPr algn="l">
+              <a:lnSpc>
+                <a:spcPct val="112000"/>
+              </a:lnSpc>
+              <a:spcAft>
+                <a:spcPts val="0"/>
+              </a:spcAft>
+              <a:buNone/>
+            </a:pPr>
+            <a:r>
+              <a:rPr sz="4400" b="0" lang="ja-JP">
+                <a:solidFill>
+                  <a:srgbClr val="111111"/>
+                </a:solidFill>
+                <a:latin typeface="游ゴシック Light"/>
+                <a:ea typeface="游ゴシック Light"/>
+              </a:rPr>
+              <a:t>補足：他の照合例と結果の内訳</a:t>
+            </a:r>
+          </a:p>
+        </p:txBody>
+      </p:sp>
+      <p:sp>
+        <p:nvSpPr>
+          <p:cNvPr id="3" name="TextBox 2"/>
+          <p:cNvSpPr txBox="1"/>
+          <p:nvPr/>
+        </p:nvSpPr>
+        <p:spPr>
+          <a:xfrm>
+            <a:off x="10881360" y="6510528"/>
+            <a:ext cx="457200" cy="201168"/>
+          </a:xfrm>
+          <a:prstGeom prst="rect">
+            <a:avLst/>
+          </a:prstGeom>
+          <a:noFill/>
+        </p:spPr>
+        <p:txBody>
+          <a:bodyPr wrap="square" lIns="0" rIns="0" tIns="0" bIns="0">
+            <a:noAutofit/>
+          </a:bodyPr>
+          <a:lstStyle/>
+          <a:p>
+            <a:pPr algn="r">
+              <a:lnSpc>
+                <a:spcPct val="112000"/>
+              </a:lnSpc>
+              <a:spcAft>
+                <a:spcPts val="0"/>
+              </a:spcAft>
+              <a:buNone/>
+            </a:pPr>
+            <a:r>
+              <a:rPr sz="1200" b="0" lang="ja-JP">
+                <a:solidFill>
+                  <a:srgbClr val="555555"/>
+                </a:solidFill>
+                <a:latin typeface="游ゴシック"/>
+                <a:ea typeface="游ゴシック"/>
+              </a:rPr>
+              <a:t>12</a:t>
+            </a:r>
+          </a:p>
+        </p:txBody>
+      </p:sp>
+      <p:sp>
+        <p:nvSpPr>
+          <p:cNvPr id="4" name="TextBox 3"/>
+          <p:cNvSpPr txBox="1"/>
+          <p:nvPr/>
+        </p:nvSpPr>
+        <p:spPr>
+          <a:xfrm>
+            <a:off x="838504" y="1819656"/>
+            <a:ext cx="10515600" cy="411480"/>
+          </a:xfrm>
+          <a:prstGeom prst="rect">
+            <a:avLst/>
+          </a:prstGeom>
+          <a:noFill/>
+        </p:spPr>
+        <p:txBody>
+          <a:bodyPr wrap="square" lIns="0" rIns="0" tIns="0" bIns="0">
+            <a:noAutofit/>
+          </a:bodyPr>
+          <a:lstStyle/>
+          <a:p>
+            <a:pPr algn="l">
+              <a:lnSpc>
+                <a:spcPct val="112000"/>
+              </a:lnSpc>
+              <a:spcAft>
                 <a:spcPts val="1000"/>
               </a:spcAft>
               <a:buNone/>
@@ -5501,7 +5797,7 @@
                 <a:latin typeface="游ゴシック"/>
                 <a:ea typeface="游ゴシック"/>
               </a:rPr>
-              <a:t>前回の平均tIoUを、今回の統合精度として扱わない。</a:t>
+              <a:t>回・得点・走者も前後で取得できた候補群の例</a:t>
             </a:r>
           </a:p>
         </p:txBody>
@@ -5515,8 +5811,1829 @@
           <p:nvPr/>
         </p:nvGraphicFramePr>
         <p:xfrm>
-          <a:off x="838504" y="2560320"/>
-          <a:ext cx="10515600" cy="3108960"/>
+          <a:off x="838504" y="2523744"/>
+          <a:ext cx="10515600" cy="2880360"/>
+        </p:xfrm>
+        <a:graphic>
+          <a:graphicData uri="http://schemas.openxmlformats.org/drawingml/2006/table">
+            <a:tbl>
+              <a:tblPr firstRow="1" bandRow="1">
+                <a:tableStyleId>{5C22544A-7EE6-4342-B048-85BDC9FD1C3A}</a:tableStyleId>
+              </a:tblPr>
+              <a:tblGrid>
+                <a:gridCol w="914400"/>
+                <a:gridCol w="2468880"/>
+                <a:gridCol w="1554480"/>
+                <a:gridCol w="1554480"/>
+                <a:gridCol w="1463040"/>
+                <a:gridCol w="2560320"/>
+              </a:tblGrid>
+              <a:tr h="576072">
+                <a:tc>
+                  <a:txBody>
+                    <a:bodyPr wrap="square" lIns="0" rIns="0" tIns="0" bIns="0">
+                      <a:noAutofit/>
+                    </a:bodyPr>
+                    <a:lstStyle/>
+                    <a:p>
+                      <a:pPr algn="l">
+                        <a:lnSpc>
+                          <a:spcPct val="112000"/>
+                        </a:lnSpc>
+                        <a:spcAft>
+                          <a:spcPts val="0"/>
+                        </a:spcAft>
+                        <a:buNone/>
+                      </a:pPr>
+                      <a:r>
+                        <a:rPr sz="2000" b="1" lang="ja-JP">
+                          <a:solidFill>
+                            <a:srgbClr val="111111"/>
+                          </a:solidFill>
+                          <a:latin typeface="游ゴシック"/>
+                          <a:ea typeface="游ゴシック"/>
+                        </a:rPr>
+                        <a:t>候補</a:t>
+                      </a:r>
+                    </a:p>
+                  </a:txBody>
+                  <a:tcPr marL="118872" marR="91440" marT="64008" marB="36576" anchor="ctr">
+                    <a:solidFill>
+                      <a:srgbClr val="EEEEEE"/>
+                    </a:solidFill>
+                    <a:lnL w="7000">
+                      <a:solidFill>
+                        <a:srgbClr val="BFBFBF"/>
+                      </a:solidFill>
+                    </a:lnL>
+                    <a:lnR w="7000">
+                      <a:solidFill>
+                        <a:srgbClr val="BFBFBF"/>
+                      </a:solidFill>
+                    </a:lnR>
+                    <a:lnT w="7000">
+                      <a:solidFill>
+                        <a:srgbClr val="BFBFBF"/>
+                      </a:solidFill>
+                    </a:lnT>
+                    <a:lnB w="7000">
+                      <a:solidFill>
+                        <a:srgbClr val="BFBFBF"/>
+                      </a:solidFill>
+                    </a:lnB>
+                  </a:tcPr>
+                </a:tc>
+                <a:tc>
+                  <a:txBody>
+                    <a:bodyPr wrap="square" lIns="0" rIns="0" tIns="0" bIns="0">
+                      <a:noAutofit/>
+                    </a:bodyPr>
+                    <a:lstStyle/>
+                    <a:p>
+                      <a:pPr algn="l">
+                        <a:lnSpc>
+                          <a:spcPct val="112000"/>
+                        </a:lnSpc>
+                        <a:spcAft>
+                          <a:spcPts val="0"/>
+                        </a:spcAft>
+                        <a:buNone/>
+                      </a:pPr>
+                      <a:r>
+                        <a:rPr sz="2000" b="1" lang="ja-JP">
+                          <a:solidFill>
+                            <a:srgbClr val="111111"/>
+                          </a:solidFill>
+                          <a:latin typeface="游ゴシック"/>
+                          <a:ea typeface="游ゴシック"/>
+                        </a:rPr>
+                        <a:t>区間［秒］</a:t>
+                      </a:r>
+                    </a:p>
+                  </a:txBody>
+                  <a:tcPr marL="118872" marR="91440" marT="64008" marB="36576" anchor="ctr">
+                    <a:solidFill>
+                      <a:srgbClr val="EEEEEE"/>
+                    </a:solidFill>
+                    <a:lnL w="7000">
+                      <a:solidFill>
+                        <a:srgbClr val="BFBFBF"/>
+                      </a:solidFill>
+                    </a:lnL>
+                    <a:lnR w="7000">
+                      <a:solidFill>
+                        <a:srgbClr val="BFBFBF"/>
+                      </a:solidFill>
+                    </a:lnR>
+                    <a:lnT w="7000">
+                      <a:solidFill>
+                        <a:srgbClr val="BFBFBF"/>
+                      </a:solidFill>
+                    </a:lnT>
+                    <a:lnB w="7000">
+                      <a:solidFill>
+                        <a:srgbClr val="BFBFBF"/>
+                      </a:solidFill>
+                    </a:lnB>
+                  </a:tcPr>
+                </a:tc>
+                <a:tc>
+                  <a:txBody>
+                    <a:bodyPr wrap="square" lIns="0" rIns="0" tIns="0" bIns="0">
+                      <a:noAutofit/>
+                    </a:bodyPr>
+                    <a:lstStyle/>
+                    <a:p>
+                      <a:pPr algn="l">
+                        <a:lnSpc>
+                          <a:spcPct val="112000"/>
+                        </a:lnSpc>
+                        <a:spcAft>
+                          <a:spcPts val="0"/>
+                        </a:spcAft>
+                        <a:buNone/>
+                      </a:pPr>
+                      <a:r>
+                        <a:rPr sz="2000" b="1" lang="ja-JP">
+                          <a:solidFill>
+                            <a:srgbClr val="111111"/>
+                          </a:solidFill>
+                          <a:latin typeface="游ゴシック"/>
+                          <a:ea typeface="游ゴシック"/>
+                        </a:rPr>
+                        <a:t>前 B/S/O</a:t>
+                      </a:r>
+                    </a:p>
+                  </a:txBody>
+                  <a:tcPr marL="118872" marR="91440" marT="64008" marB="36576" anchor="ctr">
+                    <a:solidFill>
+                      <a:srgbClr val="EEEEEE"/>
+                    </a:solidFill>
+                    <a:lnL w="7000">
+                      <a:solidFill>
+                        <a:srgbClr val="BFBFBF"/>
+                      </a:solidFill>
+                    </a:lnL>
+                    <a:lnR w="7000">
+                      <a:solidFill>
+                        <a:srgbClr val="BFBFBF"/>
+                      </a:solidFill>
+                    </a:lnR>
+                    <a:lnT w="7000">
+                      <a:solidFill>
+                        <a:srgbClr val="BFBFBF"/>
+                      </a:solidFill>
+                    </a:lnT>
+                    <a:lnB w="7000">
+                      <a:solidFill>
+                        <a:srgbClr val="BFBFBF"/>
+                      </a:solidFill>
+                    </a:lnB>
+                  </a:tcPr>
+                </a:tc>
+                <a:tc>
+                  <a:txBody>
+                    <a:bodyPr wrap="square" lIns="0" rIns="0" tIns="0" bIns="0">
+                      <a:noAutofit/>
+                    </a:bodyPr>
+                    <a:lstStyle/>
+                    <a:p>
+                      <a:pPr algn="l">
+                        <a:lnSpc>
+                          <a:spcPct val="112000"/>
+                        </a:lnSpc>
+                        <a:spcAft>
+                          <a:spcPts val="0"/>
+                        </a:spcAft>
+                        <a:buNone/>
+                      </a:pPr>
+                      <a:r>
+                        <a:rPr sz="2000" b="1" lang="ja-JP">
+                          <a:solidFill>
+                            <a:srgbClr val="111111"/>
+                          </a:solidFill>
+                          <a:latin typeface="游ゴシック"/>
+                          <a:ea typeface="游ゴシック"/>
+                        </a:rPr>
+                        <a:t>後 B/S/O</a:t>
+                      </a:r>
+                    </a:p>
+                  </a:txBody>
+                  <a:tcPr marL="118872" marR="91440" marT="64008" marB="36576" anchor="ctr">
+                    <a:solidFill>
+                      <a:srgbClr val="EEEEEE"/>
+                    </a:solidFill>
+                    <a:lnL w="7000">
+                      <a:solidFill>
+                        <a:srgbClr val="BFBFBF"/>
+                      </a:solidFill>
+                    </a:lnL>
+                    <a:lnR w="7000">
+                      <a:solidFill>
+                        <a:srgbClr val="BFBFBF"/>
+                      </a:solidFill>
+                    </a:lnR>
+                    <a:lnT w="7000">
+                      <a:solidFill>
+                        <a:srgbClr val="BFBFBF"/>
+                      </a:solidFill>
+                    </a:lnT>
+                    <a:lnB w="7000">
+                      <a:solidFill>
+                        <a:srgbClr val="BFBFBF"/>
+                      </a:solidFill>
+                    </a:lnB>
+                  </a:tcPr>
+                </a:tc>
+                <a:tc>
+                  <a:txBody>
+                    <a:bodyPr wrap="square" lIns="0" rIns="0" tIns="0" bIns="0">
+                      <a:noAutofit/>
+                    </a:bodyPr>
+                    <a:lstStyle/>
+                    <a:p>
+                      <a:pPr algn="l">
+                        <a:lnSpc>
+                          <a:spcPct val="112000"/>
+                        </a:lnSpc>
+                        <a:spcAft>
+                          <a:spcPts val="0"/>
+                        </a:spcAft>
+                        <a:buNone/>
+                      </a:pPr>
+                      <a:r>
+                        <a:rPr sz="2000" b="1" lang="ja-JP">
+                          <a:solidFill>
+                            <a:srgbClr val="111111"/>
+                          </a:solidFill>
+                          <a:latin typeface="游ゴシック"/>
+                          <a:ea typeface="游ゴシック"/>
+                        </a:rPr>
+                        <a:t>走者</a:t>
+                      </a:r>
+                    </a:p>
+                  </a:txBody>
+                  <a:tcPr marL="118872" marR="91440" marT="64008" marB="36576" anchor="ctr">
+                    <a:solidFill>
+                      <a:srgbClr val="EEEEEE"/>
+                    </a:solidFill>
+                    <a:lnL w="7000">
+                      <a:solidFill>
+                        <a:srgbClr val="BFBFBF"/>
+                      </a:solidFill>
+                    </a:lnL>
+                    <a:lnR w="7000">
+                      <a:solidFill>
+                        <a:srgbClr val="BFBFBF"/>
+                      </a:solidFill>
+                    </a:lnR>
+                    <a:lnT w="7000">
+                      <a:solidFill>
+                        <a:srgbClr val="BFBFBF"/>
+                      </a:solidFill>
+                    </a:lnT>
+                    <a:lnB w="7000">
+                      <a:solidFill>
+                        <a:srgbClr val="BFBFBF"/>
+                      </a:solidFill>
+                    </a:lnB>
+                  </a:tcPr>
+                </a:tc>
+                <a:tc>
+                  <a:txBody>
+                    <a:bodyPr wrap="square" lIns="0" rIns="0" tIns="0" bIns="0">
+                      <a:noAutofit/>
+                    </a:bodyPr>
+                    <a:lstStyle/>
+                    <a:p>
+                      <a:pPr algn="l">
+                        <a:lnSpc>
+                          <a:spcPct val="112000"/>
+                        </a:lnSpc>
+                        <a:spcAft>
+                          <a:spcPts val="0"/>
+                        </a:spcAft>
+                        <a:buNone/>
+                      </a:pPr>
+                      <a:r>
+                        <a:rPr sz="2000" b="1" lang="ja-JP">
+                          <a:solidFill>
+                            <a:srgbClr val="111111"/>
+                          </a:solidFill>
+                          <a:latin typeface="游ゴシック"/>
+                          <a:ea typeface="游ゴシック"/>
+                        </a:rPr>
+                        <a:t>回・得点</a:t>
+                      </a:r>
+                    </a:p>
+                  </a:txBody>
+                  <a:tcPr marL="118872" marR="91440" marT="64008" marB="36576" anchor="ctr">
+                    <a:solidFill>
+                      <a:srgbClr val="EEEEEE"/>
+                    </a:solidFill>
+                    <a:lnL w="7000">
+                      <a:solidFill>
+                        <a:srgbClr val="BFBFBF"/>
+                      </a:solidFill>
+                    </a:lnL>
+                    <a:lnR w="7000">
+                      <a:solidFill>
+                        <a:srgbClr val="BFBFBF"/>
+                      </a:solidFill>
+                    </a:lnR>
+                    <a:lnT w="7000">
+                      <a:solidFill>
+                        <a:srgbClr val="BFBFBF"/>
+                      </a:solidFill>
+                    </a:lnT>
+                    <a:lnB w="7000">
+                      <a:solidFill>
+                        <a:srgbClr val="BFBFBF"/>
+                      </a:solidFill>
+                    </a:lnB>
+                  </a:tcPr>
+                </a:tc>
+              </a:tr>
+              <a:tr h="576072">
+                <a:tc>
+                  <a:txBody>
+                    <a:bodyPr wrap="square" lIns="0" rIns="0" tIns="0" bIns="0">
+                      <a:noAutofit/>
+                    </a:bodyPr>
+                    <a:lstStyle/>
+                    <a:p>
+                      <a:pPr algn="l">
+                        <a:lnSpc>
+                          <a:spcPct val="112000"/>
+                        </a:lnSpc>
+                        <a:spcAft>
+                          <a:spcPts val="0"/>
+                        </a:spcAft>
+                        <a:buNone/>
+                      </a:pPr>
+                      <a:r>
+                        <a:rPr sz="2000" b="0" lang="ja-JP">
+                          <a:solidFill>
+                            <a:srgbClr val="111111"/>
+                          </a:solidFill>
+                          <a:latin typeface="游ゴシック"/>
+                          <a:ea typeface="游ゴシック"/>
+                        </a:rPr>
+                        <a:t>2</a:t>
+                      </a:r>
+                    </a:p>
+                  </a:txBody>
+                  <a:tcPr marL="118872" marR="91440" marT="64008" marB="36576" anchor="ctr">
+                    <a:solidFill>
+                      <a:srgbClr val="FFFFFF"/>
+                    </a:solidFill>
+                    <a:lnL w="7000">
+                      <a:solidFill>
+                        <a:srgbClr val="BFBFBF"/>
+                      </a:solidFill>
+                    </a:lnL>
+                    <a:lnR w="7000">
+                      <a:solidFill>
+                        <a:srgbClr val="BFBFBF"/>
+                      </a:solidFill>
+                    </a:lnR>
+                    <a:lnT w="7000">
+                      <a:solidFill>
+                        <a:srgbClr val="BFBFBF"/>
+                      </a:solidFill>
+                    </a:lnT>
+                    <a:lnB w="7000">
+                      <a:solidFill>
+                        <a:srgbClr val="BFBFBF"/>
+                      </a:solidFill>
+                    </a:lnB>
+                  </a:tcPr>
+                </a:tc>
+                <a:tc>
+                  <a:txBody>
+                    <a:bodyPr wrap="square" lIns="0" rIns="0" tIns="0" bIns="0">
+                      <a:noAutofit/>
+                    </a:bodyPr>
+                    <a:lstStyle/>
+                    <a:p>
+                      <a:pPr algn="l">
+                        <a:lnSpc>
+                          <a:spcPct val="112000"/>
+                        </a:lnSpc>
+                        <a:spcAft>
+                          <a:spcPts val="0"/>
+                        </a:spcAft>
+                        <a:buNone/>
+                      </a:pPr>
+                      <a:r>
+                        <a:rPr sz="2000" b="0" lang="ja-JP">
+                          <a:solidFill>
+                            <a:srgbClr val="111111"/>
+                          </a:solidFill>
+                          <a:latin typeface="游ゴシック"/>
+                          <a:ea typeface="游ゴシック"/>
+                        </a:rPr>
+                        <a:t>19.86–22.01</a:t>
+                      </a:r>
+                    </a:p>
+                  </a:txBody>
+                  <a:tcPr marL="118872" marR="91440" marT="64008" marB="36576" anchor="ctr">
+                    <a:solidFill>
+                      <a:srgbClr val="FFFFFF"/>
+                    </a:solidFill>
+                    <a:lnL w="7000">
+                      <a:solidFill>
+                        <a:srgbClr val="BFBFBF"/>
+                      </a:solidFill>
+                    </a:lnL>
+                    <a:lnR w="7000">
+                      <a:solidFill>
+                        <a:srgbClr val="BFBFBF"/>
+                      </a:solidFill>
+                    </a:lnR>
+                    <a:lnT w="7000">
+                      <a:solidFill>
+                        <a:srgbClr val="BFBFBF"/>
+                      </a:solidFill>
+                    </a:lnT>
+                    <a:lnB w="7000">
+                      <a:solidFill>
+                        <a:srgbClr val="BFBFBF"/>
+                      </a:solidFill>
+                    </a:lnB>
+                  </a:tcPr>
+                </a:tc>
+                <a:tc>
+                  <a:txBody>
+                    <a:bodyPr wrap="square" lIns="0" rIns="0" tIns="0" bIns="0">
+                      <a:noAutofit/>
+                    </a:bodyPr>
+                    <a:lstStyle/>
+                    <a:p>
+                      <a:pPr algn="l">
+                        <a:lnSpc>
+                          <a:spcPct val="112000"/>
+                        </a:lnSpc>
+                        <a:spcAft>
+                          <a:spcPts val="0"/>
+                        </a:spcAft>
+                        <a:buNone/>
+                      </a:pPr>
+                      <a:r>
+                        <a:rPr sz="2000" b="0" lang="ja-JP">
+                          <a:solidFill>
+                            <a:srgbClr val="111111"/>
+                          </a:solidFill>
+                          <a:latin typeface="游ゴシック"/>
+                          <a:ea typeface="游ゴシック"/>
+                        </a:rPr>
+                        <a:t>1 / 0 / 0</a:t>
+                      </a:r>
+                    </a:p>
+                  </a:txBody>
+                  <a:tcPr marL="118872" marR="91440" marT="64008" marB="36576" anchor="ctr">
+                    <a:solidFill>
+                      <a:srgbClr val="FFFFFF"/>
+                    </a:solidFill>
+                    <a:lnL w="7000">
+                      <a:solidFill>
+                        <a:srgbClr val="BFBFBF"/>
+                      </a:solidFill>
+                    </a:lnL>
+                    <a:lnR w="7000">
+                      <a:solidFill>
+                        <a:srgbClr val="BFBFBF"/>
+                      </a:solidFill>
+                    </a:lnR>
+                    <a:lnT w="7000">
+                      <a:solidFill>
+                        <a:srgbClr val="BFBFBF"/>
+                      </a:solidFill>
+                    </a:lnT>
+                    <a:lnB w="7000">
+                      <a:solidFill>
+                        <a:srgbClr val="BFBFBF"/>
+                      </a:solidFill>
+                    </a:lnB>
+                  </a:tcPr>
+                </a:tc>
+                <a:tc>
+                  <a:txBody>
+                    <a:bodyPr wrap="square" lIns="0" rIns="0" tIns="0" bIns="0">
+                      <a:noAutofit/>
+                    </a:bodyPr>
+                    <a:lstStyle/>
+                    <a:p>
+                      <a:pPr algn="l">
+                        <a:lnSpc>
+                          <a:spcPct val="112000"/>
+                        </a:lnSpc>
+                        <a:spcAft>
+                          <a:spcPts val="0"/>
+                        </a:spcAft>
+                        <a:buNone/>
+                      </a:pPr>
+                      <a:r>
+                        <a:rPr sz="2000" b="0" lang="ja-JP">
+                          <a:solidFill>
+                            <a:srgbClr val="111111"/>
+                          </a:solidFill>
+                          <a:latin typeface="游ゴシック"/>
+                          <a:ea typeface="游ゴシック"/>
+                        </a:rPr>
+                        <a:t>1 / 1 / 0</a:t>
+                      </a:r>
+                    </a:p>
+                  </a:txBody>
+                  <a:tcPr marL="118872" marR="91440" marT="64008" marB="36576" anchor="ctr">
+                    <a:solidFill>
+                      <a:srgbClr val="FFFFFF"/>
+                    </a:solidFill>
+                    <a:lnL w="7000">
+                      <a:solidFill>
+                        <a:srgbClr val="BFBFBF"/>
+                      </a:solidFill>
+                    </a:lnL>
+                    <a:lnR w="7000">
+                      <a:solidFill>
+                        <a:srgbClr val="BFBFBF"/>
+                      </a:solidFill>
+                    </a:lnR>
+                    <a:lnT w="7000">
+                      <a:solidFill>
+                        <a:srgbClr val="BFBFBF"/>
+                      </a:solidFill>
+                    </a:lnT>
+                    <a:lnB w="7000">
+                      <a:solidFill>
+                        <a:srgbClr val="BFBFBF"/>
+                      </a:solidFill>
+                    </a:lnB>
+                  </a:tcPr>
+                </a:tc>
+                <a:tc>
+                  <a:txBody>
+                    <a:bodyPr wrap="square" lIns="0" rIns="0" tIns="0" bIns="0">
+                      <a:noAutofit/>
+                    </a:bodyPr>
+                    <a:lstStyle/>
+                    <a:p>
+                      <a:pPr algn="l">
+                        <a:lnSpc>
+                          <a:spcPct val="112000"/>
+                        </a:lnSpc>
+                        <a:spcAft>
+                          <a:spcPts val="0"/>
+                        </a:spcAft>
+                        <a:buNone/>
+                      </a:pPr>
+                      <a:r>
+                        <a:rPr sz="2000" b="0" lang="ja-JP">
+                          <a:solidFill>
+                            <a:srgbClr val="111111"/>
+                          </a:solidFill>
+                          <a:latin typeface="游ゴシック"/>
+                          <a:ea typeface="游ゴシック"/>
+                        </a:rPr>
+                        <a:t>なし</a:t>
+                      </a:r>
+                    </a:p>
+                  </a:txBody>
+                  <a:tcPr marL="118872" marR="91440" marT="64008" marB="36576" anchor="ctr">
+                    <a:solidFill>
+                      <a:srgbClr val="FFFFFF"/>
+                    </a:solidFill>
+                    <a:lnL w="7000">
+                      <a:solidFill>
+                        <a:srgbClr val="BFBFBF"/>
+                      </a:solidFill>
+                    </a:lnL>
+                    <a:lnR w="7000">
+                      <a:solidFill>
+                        <a:srgbClr val="BFBFBF"/>
+                      </a:solidFill>
+                    </a:lnR>
+                    <a:lnT w="7000">
+                      <a:solidFill>
+                        <a:srgbClr val="BFBFBF"/>
+                      </a:solidFill>
+                    </a:lnT>
+                    <a:lnB w="7000">
+                      <a:solidFill>
+                        <a:srgbClr val="BFBFBF"/>
+                      </a:solidFill>
+                    </a:lnB>
+                  </a:tcPr>
+                </a:tc>
+                <a:tc>
+                  <a:txBody>
+                    <a:bodyPr wrap="square" lIns="0" rIns="0" tIns="0" bIns="0">
+                      <a:noAutofit/>
+                    </a:bodyPr>
+                    <a:lstStyle/>
+                    <a:p>
+                      <a:pPr algn="l">
+                        <a:lnSpc>
+                          <a:spcPct val="112000"/>
+                        </a:lnSpc>
+                        <a:spcAft>
+                          <a:spcPts val="0"/>
+                        </a:spcAft>
+                        <a:buNone/>
+                      </a:pPr>
+                      <a:r>
+                        <a:rPr sz="2000" b="0" lang="ja-JP">
+                          <a:solidFill>
+                            <a:srgbClr val="111111"/>
+                          </a:solidFill>
+                          <a:latin typeface="游ゴシック"/>
+                          <a:ea typeface="游ゴシック"/>
+                        </a:rPr>
+                        <a:t>5回ウラ 0–0</a:t>
+                      </a:r>
+                    </a:p>
+                  </a:txBody>
+                  <a:tcPr marL="118872" marR="91440" marT="64008" marB="36576" anchor="ctr">
+                    <a:solidFill>
+                      <a:srgbClr val="FFFFFF"/>
+                    </a:solidFill>
+                    <a:lnL w="7000">
+                      <a:solidFill>
+                        <a:srgbClr val="BFBFBF"/>
+                      </a:solidFill>
+                    </a:lnL>
+                    <a:lnR w="7000">
+                      <a:solidFill>
+                        <a:srgbClr val="BFBFBF"/>
+                      </a:solidFill>
+                    </a:lnR>
+                    <a:lnT w="7000">
+                      <a:solidFill>
+                        <a:srgbClr val="BFBFBF"/>
+                      </a:solidFill>
+                    </a:lnT>
+                    <a:lnB w="7000">
+                      <a:solidFill>
+                        <a:srgbClr val="BFBFBF"/>
+                      </a:solidFill>
+                    </a:lnB>
+                  </a:tcPr>
+                </a:tc>
+              </a:tr>
+              <a:tr h="576072">
+                <a:tc>
+                  <a:txBody>
+                    <a:bodyPr wrap="square" lIns="0" rIns="0" tIns="0" bIns="0">
+                      <a:noAutofit/>
+                    </a:bodyPr>
+                    <a:lstStyle/>
+                    <a:p>
+                      <a:pPr algn="l">
+                        <a:lnSpc>
+                          <a:spcPct val="112000"/>
+                        </a:lnSpc>
+                        <a:spcAft>
+                          <a:spcPts val="0"/>
+                        </a:spcAft>
+                        <a:buNone/>
+                      </a:pPr>
+                      <a:r>
+                        <a:rPr sz="2000" b="0" lang="ja-JP">
+                          <a:solidFill>
+                            <a:srgbClr val="111111"/>
+                          </a:solidFill>
+                          <a:latin typeface="游ゴシック"/>
+                          <a:ea typeface="游ゴシック"/>
+                        </a:rPr>
+                        <a:t>3</a:t>
+                      </a:r>
+                    </a:p>
+                  </a:txBody>
+                  <a:tcPr marL="118872" marR="91440" marT="64008" marB="36576" anchor="ctr">
+                    <a:solidFill>
+                      <a:srgbClr val="FFFFFF"/>
+                    </a:solidFill>
+                    <a:lnL w="7000">
+                      <a:solidFill>
+                        <a:srgbClr val="BFBFBF"/>
+                      </a:solidFill>
+                    </a:lnL>
+                    <a:lnR w="7000">
+                      <a:solidFill>
+                        <a:srgbClr val="BFBFBF"/>
+                      </a:solidFill>
+                    </a:lnR>
+                    <a:lnT w="7000">
+                      <a:solidFill>
+                        <a:srgbClr val="BFBFBF"/>
+                      </a:solidFill>
+                    </a:lnT>
+                    <a:lnB w="7000">
+                      <a:solidFill>
+                        <a:srgbClr val="BFBFBF"/>
+                      </a:solidFill>
+                    </a:lnB>
+                  </a:tcPr>
+                </a:tc>
+                <a:tc>
+                  <a:txBody>
+                    <a:bodyPr wrap="square" lIns="0" rIns="0" tIns="0" bIns="0">
+                      <a:noAutofit/>
+                    </a:bodyPr>
+                    <a:lstStyle/>
+                    <a:p>
+                      <a:pPr algn="l">
+                        <a:lnSpc>
+                          <a:spcPct val="112000"/>
+                        </a:lnSpc>
+                        <a:spcAft>
+                          <a:spcPts val="0"/>
+                        </a:spcAft>
+                        <a:buNone/>
+                      </a:pPr>
+                      <a:r>
+                        <a:rPr sz="2000" b="0" lang="ja-JP">
+                          <a:solidFill>
+                            <a:srgbClr val="111111"/>
+                          </a:solidFill>
+                          <a:latin typeface="游ゴシック"/>
+                          <a:ea typeface="游ゴシック"/>
+                        </a:rPr>
+                        <a:t>33.66–35.91</a:t>
+                      </a:r>
+                    </a:p>
+                  </a:txBody>
+                  <a:tcPr marL="118872" marR="91440" marT="64008" marB="36576" anchor="ctr">
+                    <a:solidFill>
+                      <a:srgbClr val="FFFFFF"/>
+                    </a:solidFill>
+                    <a:lnL w="7000">
+                      <a:solidFill>
+                        <a:srgbClr val="BFBFBF"/>
+                      </a:solidFill>
+                    </a:lnL>
+                    <a:lnR w="7000">
+                      <a:solidFill>
+                        <a:srgbClr val="BFBFBF"/>
+                      </a:solidFill>
+                    </a:lnR>
+                    <a:lnT w="7000">
+                      <a:solidFill>
+                        <a:srgbClr val="BFBFBF"/>
+                      </a:solidFill>
+                    </a:lnT>
+                    <a:lnB w="7000">
+                      <a:solidFill>
+                        <a:srgbClr val="BFBFBF"/>
+                      </a:solidFill>
+                    </a:lnB>
+                  </a:tcPr>
+                </a:tc>
+                <a:tc>
+                  <a:txBody>
+                    <a:bodyPr wrap="square" lIns="0" rIns="0" tIns="0" bIns="0">
+                      <a:noAutofit/>
+                    </a:bodyPr>
+                    <a:lstStyle/>
+                    <a:p>
+                      <a:pPr algn="l">
+                        <a:lnSpc>
+                          <a:spcPct val="112000"/>
+                        </a:lnSpc>
+                        <a:spcAft>
+                          <a:spcPts val="0"/>
+                        </a:spcAft>
+                        <a:buNone/>
+                      </a:pPr>
+                      <a:r>
+                        <a:rPr sz="2000" b="0" lang="ja-JP">
+                          <a:solidFill>
+                            <a:srgbClr val="111111"/>
+                          </a:solidFill>
+                          <a:latin typeface="游ゴシック"/>
+                          <a:ea typeface="游ゴシック"/>
+                        </a:rPr>
+                        <a:t>1 / 1 / 0</a:t>
+                      </a:r>
+                    </a:p>
+                  </a:txBody>
+                  <a:tcPr marL="118872" marR="91440" marT="64008" marB="36576" anchor="ctr">
+                    <a:solidFill>
+                      <a:srgbClr val="FFFFFF"/>
+                    </a:solidFill>
+                    <a:lnL w="7000">
+                      <a:solidFill>
+                        <a:srgbClr val="BFBFBF"/>
+                      </a:solidFill>
+                    </a:lnL>
+                    <a:lnR w="7000">
+                      <a:solidFill>
+                        <a:srgbClr val="BFBFBF"/>
+                      </a:solidFill>
+                    </a:lnR>
+                    <a:lnT w="7000">
+                      <a:solidFill>
+                        <a:srgbClr val="BFBFBF"/>
+                      </a:solidFill>
+                    </a:lnT>
+                    <a:lnB w="7000">
+                      <a:solidFill>
+                        <a:srgbClr val="BFBFBF"/>
+                      </a:solidFill>
+                    </a:lnB>
+                  </a:tcPr>
+                </a:tc>
+                <a:tc>
+                  <a:txBody>
+                    <a:bodyPr wrap="square" lIns="0" rIns="0" tIns="0" bIns="0">
+                      <a:noAutofit/>
+                    </a:bodyPr>
+                    <a:lstStyle/>
+                    <a:p>
+                      <a:pPr algn="l">
+                        <a:lnSpc>
+                          <a:spcPct val="112000"/>
+                        </a:lnSpc>
+                        <a:spcAft>
+                          <a:spcPts val="0"/>
+                        </a:spcAft>
+                        <a:buNone/>
+                      </a:pPr>
+                      <a:r>
+                        <a:rPr sz="2000" b="0" lang="ja-JP">
+                          <a:solidFill>
+                            <a:srgbClr val="111111"/>
+                          </a:solidFill>
+                          <a:latin typeface="游ゴシック"/>
+                          <a:ea typeface="游ゴシック"/>
+                        </a:rPr>
+                        <a:t>2 / 1 / 0</a:t>
+                      </a:r>
+                    </a:p>
+                  </a:txBody>
+                  <a:tcPr marL="118872" marR="91440" marT="64008" marB="36576" anchor="ctr">
+                    <a:solidFill>
+                      <a:srgbClr val="FFFFFF"/>
+                    </a:solidFill>
+                    <a:lnL w="7000">
+                      <a:solidFill>
+                        <a:srgbClr val="BFBFBF"/>
+                      </a:solidFill>
+                    </a:lnL>
+                    <a:lnR w="7000">
+                      <a:solidFill>
+                        <a:srgbClr val="BFBFBF"/>
+                      </a:solidFill>
+                    </a:lnR>
+                    <a:lnT w="7000">
+                      <a:solidFill>
+                        <a:srgbClr val="BFBFBF"/>
+                      </a:solidFill>
+                    </a:lnT>
+                    <a:lnB w="7000">
+                      <a:solidFill>
+                        <a:srgbClr val="BFBFBF"/>
+                      </a:solidFill>
+                    </a:lnB>
+                  </a:tcPr>
+                </a:tc>
+                <a:tc>
+                  <a:txBody>
+                    <a:bodyPr wrap="square" lIns="0" rIns="0" tIns="0" bIns="0">
+                      <a:noAutofit/>
+                    </a:bodyPr>
+                    <a:lstStyle/>
+                    <a:p>
+                      <a:pPr algn="l">
+                        <a:lnSpc>
+                          <a:spcPct val="112000"/>
+                        </a:lnSpc>
+                        <a:spcAft>
+                          <a:spcPts val="0"/>
+                        </a:spcAft>
+                        <a:buNone/>
+                      </a:pPr>
+                      <a:r>
+                        <a:rPr sz="2000" b="0" lang="ja-JP">
+                          <a:solidFill>
+                            <a:srgbClr val="111111"/>
+                          </a:solidFill>
+                          <a:latin typeface="游ゴシック"/>
+                          <a:ea typeface="游ゴシック"/>
+                        </a:rPr>
+                        <a:t>なし</a:t>
+                      </a:r>
+                    </a:p>
+                  </a:txBody>
+                  <a:tcPr marL="118872" marR="91440" marT="64008" marB="36576" anchor="ctr">
+                    <a:solidFill>
+                      <a:srgbClr val="FFFFFF"/>
+                    </a:solidFill>
+                    <a:lnL w="7000">
+                      <a:solidFill>
+                        <a:srgbClr val="BFBFBF"/>
+                      </a:solidFill>
+                    </a:lnL>
+                    <a:lnR w="7000">
+                      <a:solidFill>
+                        <a:srgbClr val="BFBFBF"/>
+                      </a:solidFill>
+                    </a:lnR>
+                    <a:lnT w="7000">
+                      <a:solidFill>
+                        <a:srgbClr val="BFBFBF"/>
+                      </a:solidFill>
+                    </a:lnT>
+                    <a:lnB w="7000">
+                      <a:solidFill>
+                        <a:srgbClr val="BFBFBF"/>
+                      </a:solidFill>
+                    </a:lnB>
+                  </a:tcPr>
+                </a:tc>
+                <a:tc>
+                  <a:txBody>
+                    <a:bodyPr wrap="square" lIns="0" rIns="0" tIns="0" bIns="0">
+                      <a:noAutofit/>
+                    </a:bodyPr>
+                    <a:lstStyle/>
+                    <a:p>
+                      <a:pPr algn="l">
+                        <a:lnSpc>
+                          <a:spcPct val="112000"/>
+                        </a:lnSpc>
+                        <a:spcAft>
+                          <a:spcPts val="0"/>
+                        </a:spcAft>
+                        <a:buNone/>
+                      </a:pPr>
+                      <a:r>
+                        <a:rPr sz="2000" b="0" lang="ja-JP">
+                          <a:solidFill>
+                            <a:srgbClr val="111111"/>
+                          </a:solidFill>
+                          <a:latin typeface="游ゴシック"/>
+                          <a:ea typeface="游ゴシック"/>
+                        </a:rPr>
+                        <a:t>5回ウラ 0–0</a:t>
+                      </a:r>
+                    </a:p>
+                  </a:txBody>
+                  <a:tcPr marL="118872" marR="91440" marT="64008" marB="36576" anchor="ctr">
+                    <a:solidFill>
+                      <a:srgbClr val="FFFFFF"/>
+                    </a:solidFill>
+                    <a:lnL w="7000">
+                      <a:solidFill>
+                        <a:srgbClr val="BFBFBF"/>
+                      </a:solidFill>
+                    </a:lnL>
+                    <a:lnR w="7000">
+                      <a:solidFill>
+                        <a:srgbClr val="BFBFBF"/>
+                      </a:solidFill>
+                    </a:lnR>
+                    <a:lnT w="7000">
+                      <a:solidFill>
+                        <a:srgbClr val="BFBFBF"/>
+                      </a:solidFill>
+                    </a:lnT>
+                    <a:lnB w="7000">
+                      <a:solidFill>
+                        <a:srgbClr val="BFBFBF"/>
+                      </a:solidFill>
+                    </a:lnB>
+                  </a:tcPr>
+                </a:tc>
+              </a:tr>
+              <a:tr h="576072">
+                <a:tc>
+                  <a:txBody>
+                    <a:bodyPr wrap="square" lIns="0" rIns="0" tIns="0" bIns="0">
+                      <a:noAutofit/>
+                    </a:bodyPr>
+                    <a:lstStyle/>
+                    <a:p>
+                      <a:pPr algn="l">
+                        <a:lnSpc>
+                          <a:spcPct val="112000"/>
+                        </a:lnSpc>
+                        <a:spcAft>
+                          <a:spcPts val="0"/>
+                        </a:spcAft>
+                        <a:buNone/>
+                      </a:pPr>
+                      <a:r>
+                        <a:rPr sz="2000" b="0" lang="ja-JP">
+                          <a:solidFill>
+                            <a:srgbClr val="111111"/>
+                          </a:solidFill>
+                          <a:latin typeface="游ゴシック"/>
+                          <a:ea typeface="游ゴシック"/>
+                        </a:rPr>
+                        <a:t>4</a:t>
+                      </a:r>
+                    </a:p>
+                  </a:txBody>
+                  <a:tcPr marL="118872" marR="91440" marT="64008" marB="36576" anchor="ctr">
+                    <a:solidFill>
+                      <a:srgbClr val="FFFFFF"/>
+                    </a:solidFill>
+                    <a:lnL w="7000">
+                      <a:solidFill>
+                        <a:srgbClr val="BFBFBF"/>
+                      </a:solidFill>
+                    </a:lnL>
+                    <a:lnR w="7000">
+                      <a:solidFill>
+                        <a:srgbClr val="BFBFBF"/>
+                      </a:solidFill>
+                    </a:lnR>
+                    <a:lnT w="7000">
+                      <a:solidFill>
+                        <a:srgbClr val="BFBFBF"/>
+                      </a:solidFill>
+                    </a:lnT>
+                    <a:lnB w="7000">
+                      <a:solidFill>
+                        <a:srgbClr val="BFBFBF"/>
+                      </a:solidFill>
+                    </a:lnB>
+                  </a:tcPr>
+                </a:tc>
+                <a:tc>
+                  <a:txBody>
+                    <a:bodyPr wrap="square" lIns="0" rIns="0" tIns="0" bIns="0">
+                      <a:noAutofit/>
+                    </a:bodyPr>
+                    <a:lstStyle/>
+                    <a:p>
+                      <a:pPr algn="l">
+                        <a:lnSpc>
+                          <a:spcPct val="112000"/>
+                        </a:lnSpc>
+                        <a:spcAft>
+                          <a:spcPts val="0"/>
+                        </a:spcAft>
+                        <a:buNone/>
+                      </a:pPr>
+                      <a:r>
+                        <a:rPr sz="2000" b="0" lang="ja-JP">
+                          <a:solidFill>
+                            <a:srgbClr val="111111"/>
+                          </a:solidFill>
+                          <a:latin typeface="游ゴシック"/>
+                          <a:ea typeface="游ゴシック"/>
+                        </a:rPr>
+                        <a:t>44.07–46.34</a:t>
+                      </a:r>
+                    </a:p>
+                  </a:txBody>
+                  <a:tcPr marL="118872" marR="91440" marT="64008" marB="36576" anchor="ctr">
+                    <a:solidFill>
+                      <a:srgbClr val="FFFFFF"/>
+                    </a:solidFill>
+                    <a:lnL w="7000">
+                      <a:solidFill>
+                        <a:srgbClr val="BFBFBF"/>
+                      </a:solidFill>
+                    </a:lnL>
+                    <a:lnR w="7000">
+                      <a:solidFill>
+                        <a:srgbClr val="BFBFBF"/>
+                      </a:solidFill>
+                    </a:lnR>
+                    <a:lnT w="7000">
+                      <a:solidFill>
+                        <a:srgbClr val="BFBFBF"/>
+                      </a:solidFill>
+                    </a:lnT>
+                    <a:lnB w="7000">
+                      <a:solidFill>
+                        <a:srgbClr val="BFBFBF"/>
+                      </a:solidFill>
+                    </a:lnB>
+                  </a:tcPr>
+                </a:tc>
+                <a:tc>
+                  <a:txBody>
+                    <a:bodyPr wrap="square" lIns="0" rIns="0" tIns="0" bIns="0">
+                      <a:noAutofit/>
+                    </a:bodyPr>
+                    <a:lstStyle/>
+                    <a:p>
+                      <a:pPr algn="l">
+                        <a:lnSpc>
+                          <a:spcPct val="112000"/>
+                        </a:lnSpc>
+                        <a:spcAft>
+                          <a:spcPts val="0"/>
+                        </a:spcAft>
+                        <a:buNone/>
+                      </a:pPr>
+                      <a:r>
+                        <a:rPr sz="2000" b="0" lang="ja-JP">
+                          <a:solidFill>
+                            <a:srgbClr val="111111"/>
+                          </a:solidFill>
+                          <a:latin typeface="游ゴシック"/>
+                          <a:ea typeface="游ゴシック"/>
+                        </a:rPr>
+                        <a:t>2 / 1 / 0</a:t>
+                      </a:r>
+                    </a:p>
+                  </a:txBody>
+                  <a:tcPr marL="118872" marR="91440" marT="64008" marB="36576" anchor="ctr">
+                    <a:solidFill>
+                      <a:srgbClr val="FFFFFF"/>
+                    </a:solidFill>
+                    <a:lnL w="7000">
+                      <a:solidFill>
+                        <a:srgbClr val="BFBFBF"/>
+                      </a:solidFill>
+                    </a:lnL>
+                    <a:lnR w="7000">
+                      <a:solidFill>
+                        <a:srgbClr val="BFBFBF"/>
+                      </a:solidFill>
+                    </a:lnR>
+                    <a:lnT w="7000">
+                      <a:solidFill>
+                        <a:srgbClr val="BFBFBF"/>
+                      </a:solidFill>
+                    </a:lnT>
+                    <a:lnB w="7000">
+                      <a:solidFill>
+                        <a:srgbClr val="BFBFBF"/>
+                      </a:solidFill>
+                    </a:lnB>
+                  </a:tcPr>
+                </a:tc>
+                <a:tc>
+                  <a:txBody>
+                    <a:bodyPr wrap="square" lIns="0" rIns="0" tIns="0" bIns="0">
+                      <a:noAutofit/>
+                    </a:bodyPr>
+                    <a:lstStyle/>
+                    <a:p>
+                      <a:pPr algn="l">
+                        <a:lnSpc>
+                          <a:spcPct val="112000"/>
+                        </a:lnSpc>
+                        <a:spcAft>
+                          <a:spcPts val="0"/>
+                        </a:spcAft>
+                        <a:buNone/>
+                      </a:pPr>
+                      <a:r>
+                        <a:rPr sz="2000" b="0" lang="ja-JP">
+                          <a:solidFill>
+                            <a:srgbClr val="111111"/>
+                          </a:solidFill>
+                          <a:latin typeface="游ゴシック"/>
+                          <a:ea typeface="游ゴシック"/>
+                        </a:rPr>
+                        <a:t>2 / 2 / 0</a:t>
+                      </a:r>
+                    </a:p>
+                  </a:txBody>
+                  <a:tcPr marL="118872" marR="91440" marT="64008" marB="36576" anchor="ctr">
+                    <a:solidFill>
+                      <a:srgbClr val="FFFFFF"/>
+                    </a:solidFill>
+                    <a:lnL w="7000">
+                      <a:solidFill>
+                        <a:srgbClr val="BFBFBF"/>
+                      </a:solidFill>
+                    </a:lnL>
+                    <a:lnR w="7000">
+                      <a:solidFill>
+                        <a:srgbClr val="BFBFBF"/>
+                      </a:solidFill>
+                    </a:lnR>
+                    <a:lnT w="7000">
+                      <a:solidFill>
+                        <a:srgbClr val="BFBFBF"/>
+                      </a:solidFill>
+                    </a:lnT>
+                    <a:lnB w="7000">
+                      <a:solidFill>
+                        <a:srgbClr val="BFBFBF"/>
+                      </a:solidFill>
+                    </a:lnB>
+                  </a:tcPr>
+                </a:tc>
+                <a:tc>
+                  <a:txBody>
+                    <a:bodyPr wrap="square" lIns="0" rIns="0" tIns="0" bIns="0">
+                      <a:noAutofit/>
+                    </a:bodyPr>
+                    <a:lstStyle/>
+                    <a:p>
+                      <a:pPr algn="l">
+                        <a:lnSpc>
+                          <a:spcPct val="112000"/>
+                        </a:lnSpc>
+                        <a:spcAft>
+                          <a:spcPts val="0"/>
+                        </a:spcAft>
+                        <a:buNone/>
+                      </a:pPr>
+                      <a:r>
+                        <a:rPr sz="2000" b="0" lang="ja-JP">
+                          <a:solidFill>
+                            <a:srgbClr val="111111"/>
+                          </a:solidFill>
+                          <a:latin typeface="游ゴシック"/>
+                          <a:ea typeface="游ゴシック"/>
+                        </a:rPr>
+                        <a:t>なし</a:t>
+                      </a:r>
+                    </a:p>
+                  </a:txBody>
+                  <a:tcPr marL="118872" marR="91440" marT="64008" marB="36576" anchor="ctr">
+                    <a:solidFill>
+                      <a:srgbClr val="FFFFFF"/>
+                    </a:solidFill>
+                    <a:lnL w="7000">
+                      <a:solidFill>
+                        <a:srgbClr val="BFBFBF"/>
+                      </a:solidFill>
+                    </a:lnL>
+                    <a:lnR w="7000">
+                      <a:solidFill>
+                        <a:srgbClr val="BFBFBF"/>
+                      </a:solidFill>
+                    </a:lnR>
+                    <a:lnT w="7000">
+                      <a:solidFill>
+                        <a:srgbClr val="BFBFBF"/>
+                      </a:solidFill>
+                    </a:lnT>
+                    <a:lnB w="7000">
+                      <a:solidFill>
+                        <a:srgbClr val="BFBFBF"/>
+                      </a:solidFill>
+                    </a:lnB>
+                  </a:tcPr>
+                </a:tc>
+                <a:tc>
+                  <a:txBody>
+                    <a:bodyPr wrap="square" lIns="0" rIns="0" tIns="0" bIns="0">
+                      <a:noAutofit/>
+                    </a:bodyPr>
+                    <a:lstStyle/>
+                    <a:p>
+                      <a:pPr algn="l">
+                        <a:lnSpc>
+                          <a:spcPct val="112000"/>
+                        </a:lnSpc>
+                        <a:spcAft>
+                          <a:spcPts val="0"/>
+                        </a:spcAft>
+                        <a:buNone/>
+                      </a:pPr>
+                      <a:r>
+                        <a:rPr sz="2000" b="0" lang="ja-JP">
+                          <a:solidFill>
+                            <a:srgbClr val="111111"/>
+                          </a:solidFill>
+                          <a:latin typeface="游ゴシック"/>
+                          <a:ea typeface="游ゴシック"/>
+                        </a:rPr>
+                        <a:t>5回ウラ 0–0</a:t>
+                      </a:r>
+                    </a:p>
+                  </a:txBody>
+                  <a:tcPr marL="118872" marR="91440" marT="64008" marB="36576" anchor="ctr">
+                    <a:solidFill>
+                      <a:srgbClr val="FFFFFF"/>
+                    </a:solidFill>
+                    <a:lnL w="7000">
+                      <a:solidFill>
+                        <a:srgbClr val="BFBFBF"/>
+                      </a:solidFill>
+                    </a:lnL>
+                    <a:lnR w="7000">
+                      <a:solidFill>
+                        <a:srgbClr val="BFBFBF"/>
+                      </a:solidFill>
+                    </a:lnR>
+                    <a:lnT w="7000">
+                      <a:solidFill>
+                        <a:srgbClr val="BFBFBF"/>
+                      </a:solidFill>
+                    </a:lnT>
+                    <a:lnB w="7000">
+                      <a:solidFill>
+                        <a:srgbClr val="BFBFBF"/>
+                      </a:solidFill>
+                    </a:lnB>
+                  </a:tcPr>
+                </a:tc>
+              </a:tr>
+              <a:tr h="576072">
+                <a:tc>
+                  <a:txBody>
+                    <a:bodyPr wrap="square" lIns="0" rIns="0" tIns="0" bIns="0">
+                      <a:noAutofit/>
+                    </a:bodyPr>
+                    <a:lstStyle/>
+                    <a:p>
+                      <a:pPr algn="l">
+                        <a:lnSpc>
+                          <a:spcPct val="112000"/>
+                        </a:lnSpc>
+                        <a:spcAft>
+                          <a:spcPts val="0"/>
+                        </a:spcAft>
+                        <a:buNone/>
+                      </a:pPr>
+                      <a:r>
+                        <a:rPr sz="2000" b="0" lang="ja-JP">
+                          <a:solidFill>
+                            <a:srgbClr val="111111"/>
+                          </a:solidFill>
+                          <a:latin typeface="游ゴシック"/>
+                          <a:ea typeface="游ゴシック"/>
+                        </a:rPr>
+                        <a:t>22</a:t>
+                      </a:r>
+                    </a:p>
+                  </a:txBody>
+                  <a:tcPr marL="118872" marR="91440" marT="64008" marB="36576" anchor="ctr">
+                    <a:solidFill>
+                      <a:srgbClr val="FFFFFF"/>
+                    </a:solidFill>
+                    <a:lnL w="7000">
+                      <a:solidFill>
+                        <a:srgbClr val="BFBFBF"/>
+                      </a:solidFill>
+                    </a:lnL>
+                    <a:lnR w="7000">
+                      <a:solidFill>
+                        <a:srgbClr val="BFBFBF"/>
+                      </a:solidFill>
+                    </a:lnR>
+                    <a:lnT w="7000">
+                      <a:solidFill>
+                        <a:srgbClr val="BFBFBF"/>
+                      </a:solidFill>
+                    </a:lnT>
+                    <a:lnB w="7000">
+                      <a:solidFill>
+                        <a:srgbClr val="BFBFBF"/>
+                      </a:solidFill>
+                    </a:lnB>
+                  </a:tcPr>
+                </a:tc>
+                <a:tc>
+                  <a:txBody>
+                    <a:bodyPr wrap="square" lIns="0" rIns="0" tIns="0" bIns="0">
+                      <a:noAutofit/>
+                    </a:bodyPr>
+                    <a:lstStyle/>
+                    <a:p>
+                      <a:pPr algn="l">
+                        <a:lnSpc>
+                          <a:spcPct val="112000"/>
+                        </a:lnSpc>
+                        <a:spcAft>
+                          <a:spcPts val="0"/>
+                        </a:spcAft>
+                        <a:buNone/>
+                      </a:pPr>
+                      <a:r>
+                        <a:rPr sz="2000" b="0" lang="ja-JP">
+                          <a:solidFill>
+                            <a:srgbClr val="111111"/>
+                          </a:solidFill>
+                          <a:latin typeface="游ゴシック"/>
+                          <a:ea typeface="游ゴシック"/>
+                        </a:rPr>
+                        <a:t>293.11–294.85</a:t>
+                      </a:r>
+                    </a:p>
+                  </a:txBody>
+                  <a:tcPr marL="118872" marR="91440" marT="64008" marB="36576" anchor="ctr">
+                    <a:solidFill>
+                      <a:srgbClr val="FFFFFF"/>
+                    </a:solidFill>
+                    <a:lnL w="7000">
+                      <a:solidFill>
+                        <a:srgbClr val="BFBFBF"/>
+                      </a:solidFill>
+                    </a:lnL>
+                    <a:lnR w="7000">
+                      <a:solidFill>
+                        <a:srgbClr val="BFBFBF"/>
+                      </a:solidFill>
+                    </a:lnR>
+                    <a:lnT w="7000">
+                      <a:solidFill>
+                        <a:srgbClr val="BFBFBF"/>
+                      </a:solidFill>
+                    </a:lnT>
+                    <a:lnB w="7000">
+                      <a:solidFill>
+                        <a:srgbClr val="BFBFBF"/>
+                      </a:solidFill>
+                    </a:lnB>
+                  </a:tcPr>
+                </a:tc>
+                <a:tc>
+                  <a:txBody>
+                    <a:bodyPr wrap="square" lIns="0" rIns="0" tIns="0" bIns="0">
+                      <a:noAutofit/>
+                    </a:bodyPr>
+                    <a:lstStyle/>
+                    <a:p>
+                      <a:pPr algn="l">
+                        <a:lnSpc>
+                          <a:spcPct val="112000"/>
+                        </a:lnSpc>
+                        <a:spcAft>
+                          <a:spcPts val="0"/>
+                        </a:spcAft>
+                        <a:buNone/>
+                      </a:pPr>
+                      <a:r>
+                        <a:rPr sz="2000" b="0" lang="ja-JP">
+                          <a:solidFill>
+                            <a:srgbClr val="111111"/>
+                          </a:solidFill>
+                          <a:latin typeface="游ゴシック"/>
+                          <a:ea typeface="游ゴシック"/>
+                        </a:rPr>
+                        <a:t>2 / 0 / 2</a:t>
+                      </a:r>
+                    </a:p>
+                  </a:txBody>
+                  <a:tcPr marL="118872" marR="91440" marT="64008" marB="36576" anchor="ctr">
+                    <a:solidFill>
+                      <a:srgbClr val="FFFFFF"/>
+                    </a:solidFill>
+                    <a:lnL w="7000">
+                      <a:solidFill>
+                        <a:srgbClr val="BFBFBF"/>
+                      </a:solidFill>
+                    </a:lnL>
+                    <a:lnR w="7000">
+                      <a:solidFill>
+                        <a:srgbClr val="BFBFBF"/>
+                      </a:solidFill>
+                    </a:lnR>
+                    <a:lnT w="7000">
+                      <a:solidFill>
+                        <a:srgbClr val="BFBFBF"/>
+                      </a:solidFill>
+                    </a:lnT>
+                    <a:lnB w="7000">
+                      <a:solidFill>
+                        <a:srgbClr val="BFBFBF"/>
+                      </a:solidFill>
+                    </a:lnB>
+                  </a:tcPr>
+                </a:tc>
+                <a:tc>
+                  <a:txBody>
+                    <a:bodyPr wrap="square" lIns="0" rIns="0" tIns="0" bIns="0">
+                      <a:noAutofit/>
+                    </a:bodyPr>
+                    <a:lstStyle/>
+                    <a:p>
+                      <a:pPr algn="l">
+                        <a:lnSpc>
+                          <a:spcPct val="112000"/>
+                        </a:lnSpc>
+                        <a:spcAft>
+                          <a:spcPts val="0"/>
+                        </a:spcAft>
+                        <a:buNone/>
+                      </a:pPr>
+                      <a:r>
+                        <a:rPr sz="2000" b="0" lang="ja-JP">
+                          <a:solidFill>
+                            <a:srgbClr val="111111"/>
+                          </a:solidFill>
+                          <a:latin typeface="游ゴシック"/>
+                          <a:ea typeface="游ゴシック"/>
+                        </a:rPr>
+                        <a:t>2 / 1 / 2</a:t>
+                      </a:r>
+                    </a:p>
+                  </a:txBody>
+                  <a:tcPr marL="118872" marR="91440" marT="64008" marB="36576" anchor="ctr">
+                    <a:solidFill>
+                      <a:srgbClr val="FFFFFF"/>
+                    </a:solidFill>
+                    <a:lnL w="7000">
+                      <a:solidFill>
+                        <a:srgbClr val="BFBFBF"/>
+                      </a:solidFill>
+                    </a:lnL>
+                    <a:lnR w="7000">
+                      <a:solidFill>
+                        <a:srgbClr val="BFBFBF"/>
+                      </a:solidFill>
+                    </a:lnR>
+                    <a:lnT w="7000">
+                      <a:solidFill>
+                        <a:srgbClr val="BFBFBF"/>
+                      </a:solidFill>
+                    </a:lnT>
+                    <a:lnB w="7000">
+                      <a:solidFill>
+                        <a:srgbClr val="BFBFBF"/>
+                      </a:solidFill>
+                    </a:lnB>
+                  </a:tcPr>
+                </a:tc>
+                <a:tc>
+                  <a:txBody>
+                    <a:bodyPr wrap="square" lIns="0" rIns="0" tIns="0" bIns="0">
+                      <a:noAutofit/>
+                    </a:bodyPr>
+                    <a:lstStyle/>
+                    <a:p>
+                      <a:pPr algn="l">
+                        <a:lnSpc>
+                          <a:spcPct val="112000"/>
+                        </a:lnSpc>
+                        <a:spcAft>
+                          <a:spcPts val="0"/>
+                        </a:spcAft>
+                        <a:buNone/>
+                      </a:pPr>
+                      <a:r>
+                        <a:rPr sz="2000" b="0" lang="ja-JP">
+                          <a:solidFill>
+                            <a:srgbClr val="111111"/>
+                          </a:solidFill>
+                          <a:latin typeface="游ゴシック"/>
+                          <a:ea typeface="游ゴシック"/>
+                        </a:rPr>
+                        <a:t>一塁</a:t>
+                      </a:r>
+                    </a:p>
+                  </a:txBody>
+                  <a:tcPr marL="118872" marR="91440" marT="64008" marB="36576" anchor="ctr">
+                    <a:solidFill>
+                      <a:srgbClr val="FFFFFF"/>
+                    </a:solidFill>
+                    <a:lnL w="7000">
+                      <a:solidFill>
+                        <a:srgbClr val="BFBFBF"/>
+                      </a:solidFill>
+                    </a:lnL>
+                    <a:lnR w="7000">
+                      <a:solidFill>
+                        <a:srgbClr val="BFBFBF"/>
+                      </a:solidFill>
+                    </a:lnR>
+                    <a:lnT w="7000">
+                      <a:solidFill>
+                        <a:srgbClr val="BFBFBF"/>
+                      </a:solidFill>
+                    </a:lnT>
+                    <a:lnB w="7000">
+                      <a:solidFill>
+                        <a:srgbClr val="BFBFBF"/>
+                      </a:solidFill>
+                    </a:lnB>
+                  </a:tcPr>
+                </a:tc>
+                <a:tc>
+                  <a:txBody>
+                    <a:bodyPr wrap="square" lIns="0" rIns="0" tIns="0" bIns="0">
+                      <a:noAutofit/>
+                    </a:bodyPr>
+                    <a:lstStyle/>
+                    <a:p>
+                      <a:pPr algn="l">
+                        <a:lnSpc>
+                          <a:spcPct val="112000"/>
+                        </a:lnSpc>
+                        <a:spcAft>
+                          <a:spcPts val="0"/>
+                        </a:spcAft>
+                        <a:buNone/>
+                      </a:pPr>
+                      <a:r>
+                        <a:rPr sz="2000" b="0" lang="ja-JP">
+                          <a:solidFill>
+                            <a:srgbClr val="111111"/>
+                          </a:solidFill>
+                          <a:latin typeface="游ゴシック"/>
+                          <a:ea typeface="游ゴシック"/>
+                        </a:rPr>
+                        <a:t>5回ウラ 0–0</a:t>
+                      </a:r>
+                    </a:p>
+                  </a:txBody>
+                  <a:tcPr marL="118872" marR="91440" marT="64008" marB="36576" anchor="ctr">
+                    <a:solidFill>
+                      <a:srgbClr val="FFFFFF"/>
+                    </a:solidFill>
+                    <a:lnL w="7000">
+                      <a:solidFill>
+                        <a:srgbClr val="BFBFBF"/>
+                      </a:solidFill>
+                    </a:lnL>
+                    <a:lnR w="7000">
+                      <a:solidFill>
+                        <a:srgbClr val="BFBFBF"/>
+                      </a:solidFill>
+                    </a:lnR>
+                    <a:lnT w="7000">
+                      <a:solidFill>
+                        <a:srgbClr val="BFBFBF"/>
+                      </a:solidFill>
+                    </a:lnT>
+                    <a:lnB w="7000">
+                      <a:solidFill>
+                        <a:srgbClr val="BFBFBF"/>
+                      </a:solidFill>
+                    </a:lnB>
+                  </a:tcPr>
+                </a:tc>
+              </a:tr>
+            </a:tbl>
+          </a:graphicData>
+        </a:graphic>
+      </p:graphicFrame>
+      <p:sp>
+        <p:nvSpPr>
+          <p:cNvPr id="6" name="TextBox 5"/>
+          <p:cNvSpPr txBox="1"/>
+          <p:nvPr/>
+        </p:nvSpPr>
+        <p:spPr>
+          <a:xfrm>
+            <a:off x="838504" y="5623560"/>
+            <a:ext cx="10515600" cy="822960"/>
+          </a:xfrm>
+          <a:prstGeom prst="rect">
+            <a:avLst/>
+          </a:prstGeom>
+          <a:noFill/>
+        </p:spPr>
+        <p:txBody>
+          <a:bodyPr wrap="square" lIns="0" rIns="0" tIns="0" bIns="0">
+            <a:noAutofit/>
+          </a:bodyPr>
+          <a:lstStyle/>
+          <a:p>
+            <a:pPr algn="l">
+              <a:lnSpc>
+                <a:spcPct val="112000"/>
+              </a:lnSpc>
+              <a:spcAft>
+                <a:spcPts val="0"/>
+              </a:spcAft>
+              <a:buNone/>
+            </a:pPr>
+            <a:r>
+              <a:rPr sz="2300" b="0" lang="ja-JP">
+                <a:solidFill>
+                  <a:srgbClr val="111111"/>
+                </a:solidFill>
+                <a:latin typeface="游ゴシック"/>
+                <a:ea typeface="游ゴシック"/>
+              </a:rPr>
+              <a:t>B/S/O照合11群の内訳：S増3・B増1・不変7（うち2S不変2）</a:t>
+            </a:r>
+            <a:br/>
+            <a:r>
+              <a:rPr sz="2300" b="0" lang="ja-JP">
+                <a:solidFill>
+                  <a:srgbClr val="111111"/>
+                </a:solidFill>
+                <a:latin typeface="游ゴシック"/>
+                <a:ea typeface="游ゴシック"/>
+              </a:rPr>
+              <a:t>不変2は、最初の安定状態を採用した元の照合結果。</a:t>
+            </a:r>
+          </a:p>
+        </p:txBody>
+      </p:sp>
+    </p:spTree>
+  </p:cSld>
+  <p:clrMapOvr>
+    <a:masterClrMapping/>
+  </p:clrMapOvr>
+</p:sld>
+</file>
+
+<file path=ppt/slides/slide13.xml><?xml version="1.0" encoding="utf-8"?>
+<p:sld xmlns:a="http://schemas.openxmlformats.org/drawingml/2006/main" xmlns:p="http://schemas.openxmlformats.org/presentationml/2006/main" xmlns:r="http://schemas.openxmlformats.org/officeDocument/2006/relationships">
+  <p:cSld>
+    <p:spTree>
+      <p:nvGrpSpPr>
+        <p:cNvPr id="1" name=""/>
+        <p:cNvGrpSpPr/>
+        <p:nvPr/>
+      </p:nvGrpSpPr>
+      <p:grpSpPr/>
+      <p:sp>
+        <p:nvSpPr>
+          <p:cNvPr id="2" name="Title 1"/>
+          <p:cNvSpPr>
+            <a:spLocks noGrp="1"/>
+          </p:cNvSpPr>
+          <p:nvPr>
+            <p:ph type="title"/>
+          </p:nvPr>
+        </p:nvSpPr>
+        <p:spPr>
+          <a:xfrm>
+            <a:off x="838504" y="364845"/>
+            <a:ext cx="10515600" cy="1325880"/>
+          </a:xfrm>
+        </p:spPr>
+        <p:txBody>
+          <a:bodyPr wrap="square" lIns="0" rIns="0" tIns="0" bIns="0">
+            <a:noAutofit/>
+          </a:bodyPr>
+          <a:lstStyle/>
+          <a:p>
+            <a:pPr algn="l">
+              <a:lnSpc>
+                <a:spcPct val="112000"/>
+              </a:lnSpc>
+              <a:spcAft>
+                <a:spcPts val="0"/>
+              </a:spcAft>
+              <a:buNone/>
+            </a:pPr>
+            <a:r>
+              <a:rPr sz="4400" b="0" lang="ja-JP">
+                <a:solidFill>
+                  <a:srgbClr val="111111"/>
+                </a:solidFill>
+                <a:latin typeface="游ゴシック Light"/>
+                <a:ea typeface="游ゴシック Light"/>
+              </a:rPr>
+              <a:t>補足：従来の精度評価との違い</a:t>
+            </a:r>
+          </a:p>
+        </p:txBody>
+      </p:sp>
+      <p:sp>
+        <p:nvSpPr>
+          <p:cNvPr id="3" name="TextBox 2"/>
+          <p:cNvSpPr txBox="1"/>
+          <p:nvPr/>
+        </p:nvSpPr>
+        <p:spPr>
+          <a:xfrm>
+            <a:off x="10881360" y="6510528"/>
+            <a:ext cx="457200" cy="201168"/>
+          </a:xfrm>
+          <a:prstGeom prst="rect">
+            <a:avLst/>
+          </a:prstGeom>
+          <a:noFill/>
+        </p:spPr>
+        <p:txBody>
+          <a:bodyPr wrap="square" lIns="0" rIns="0" tIns="0" bIns="0">
+            <a:noAutofit/>
+          </a:bodyPr>
+          <a:lstStyle/>
+          <a:p>
+            <a:pPr algn="r">
+              <a:lnSpc>
+                <a:spcPct val="112000"/>
+              </a:lnSpc>
+              <a:spcAft>
+                <a:spcPts val="0"/>
+              </a:spcAft>
+              <a:buNone/>
+            </a:pPr>
+            <a:r>
+              <a:rPr sz="1200" b="0" lang="ja-JP">
+                <a:solidFill>
+                  <a:srgbClr val="555555"/>
+                </a:solidFill>
+                <a:latin typeface="游ゴシック"/>
+                <a:ea typeface="游ゴシック"/>
+              </a:rPr>
+              <a:t>13</a:t>
+            </a:r>
+          </a:p>
+        </p:txBody>
+      </p:sp>
+      <p:graphicFrame>
+        <p:nvGraphicFramePr>
+          <p:cNvPr id="4" name="Table 3"/>
+          <p:cNvGraphicFramePr>
+            <a:graphicFrameLocks noGrp="1"/>
+          </p:cNvGraphicFramePr>
+          <p:nvPr/>
+        </p:nvGraphicFramePr>
+        <p:xfrm>
+          <a:off x="838504" y="1920240"/>
+          <a:ext cx="10515600" cy="3072384"/>
         </p:xfrm>
         <a:graphic>
           <a:graphicData uri="http://schemas.openxmlformats.org/drawingml/2006/table">
@@ -5529,7 +7646,7 @@
                 <a:gridCol w="4297680"/>
                 <a:gridCol w="4297680"/>
               </a:tblGrid>
-              <a:tr h="621792">
+              <a:tr h="768096">
                 <a:tc>
                   <a:txBody>
                     <a:bodyPr wrap="square" lIns="0" rIns="0" tIns="0" bIns="0">
@@ -5554,7 +7671,7 @@
                           <a:latin typeface="游ゴシック"/>
                           <a:ea typeface="游ゴシック"/>
                         </a:rPr>
-                        <a:t>項目</a:t>
+                        <a:t>時期</a:t>
                       </a:r>
                     </a:p>
                   </a:txBody>
@@ -5608,7 +7725,7 @@
                           <a:latin typeface="游ゴシック"/>
                           <a:ea typeface="游ゴシック"/>
                         </a:rPr>
-                        <a:t>前回：10/23の報告</a:t>
+                        <a:t>評価・集計した対象</a:t>
                       </a:r>
                     </a:p>
                   </a:txBody>
@@ -5662,7 +7779,7 @@
                           <a:latin typeface="游ゴシック"/>
                           <a:ea typeface="游ゴシック"/>
                         </a:rPr>
-                        <a:t>今回：10/30の統合実験</a:t>
+                        <a:t>数値の意味</a:t>
                       </a:r>
                     </a:p>
                   </a:txBody>
@@ -5693,7 +7810,7 @@
                   </a:tcPr>
                 </a:tc>
               </a:tr>
-              <a:tr h="621792">
+              <a:tr h="768096">
                 <a:tc>
                   <a:txBody>
                     <a:bodyPr wrap="square" lIns="0" rIns="0" tIns="0" bIns="0">
@@ -5718,7 +7835,7 @@
                           <a:latin typeface="游ゴシック"/>
                           <a:ea typeface="游ゴシック"/>
                         </a:rPr>
-                        <a:t>対象</a:t>
+                        <a:t>7月</a:t>
                       </a:r>
                     </a:p>
                   </a:txBody>
@@ -5772,7 +7889,7 @@
                           <a:latin typeface="游ゴシック"/>
                           <a:ea typeface="游ゴシック"/>
                         </a:rPr>
-                        <a:t>短編10動画・24球</a:t>
+                        <a:t>静止画上のB/S/O・走者</a:t>
                       </a:r>
                     </a:p>
                   </a:txBody>
@@ -5826,7 +7943,7 @@
                           <a:latin typeface="游ゴシック"/>
                           <a:ea typeface="游ゴシック"/>
                         </a:rPr>
-                        <a:t>5回ウラ全体・530.2秒</a:t>
+                        <a:t>適合率・再現率</a:t>
                       </a:r>
                     </a:p>
                   </a:txBody>
@@ -5857,7 +7974,7 @@
                   </a:tcPr>
                 </a:tc>
               </a:tr>
-              <a:tr h="621792">
+              <a:tr h="768096">
                 <a:tc>
                   <a:txBody>
                     <a:bodyPr wrap="square" lIns="0" rIns="0" tIns="0" bIns="0">
@@ -5882,7 +7999,7 @@
                           <a:latin typeface="游ゴシック"/>
                           <a:ea typeface="游ゴシック"/>
                         </a:rPr>
-                        <a:t>正解区間</a:t>
+                        <a:t>10月の短編</a:t>
                       </a:r>
                     </a:p>
                   </a:txBody>
@@ -5936,7 +8053,7 @@
                           <a:latin typeface="游ゴシック"/>
                           <a:ea typeface="游ゴシック"/>
                         </a:rPr>
-                        <a:t>目視による参考区間あり</a:t>
+                        <a:t>10動画24球と目視の参考区間</a:t>
                       </a:r>
                     </a:p>
                   </a:txBody>
@@ -5990,7 +8107,7 @@
                           <a:latin typeface="游ゴシック"/>
                           <a:ea typeface="游ゴシック"/>
                         </a:rPr>
-                        <a:t>まだ作成していない</a:t>
+                        <a:t>選んだ候補の平均tIoU 0.711</a:t>
                       </a:r>
                     </a:p>
                   </a:txBody>
@@ -6021,7 +8138,7 @@
                   </a:tcPr>
                 </a:tc>
               </a:tr>
-              <a:tr h="621792">
+              <a:tr h="768096">
                 <a:tc>
                   <a:txBody>
                     <a:bodyPr wrap="square" lIns="0" rIns="0" tIns="0" bIns="0">
@@ -6046,7 +8163,7 @@
                           <a:latin typeface="游ゴシック"/>
                           <a:ea typeface="游ゴシック"/>
                         </a:rPr>
-                        <a:t>評価</a:t>
+                        <a:t>今週</a:t>
                       </a:r>
                     </a:p>
                   </a:txBody>
@@ -6100,7 +8217,7 @@
                           <a:latin typeface="游ゴシック"/>
                           <a:ea typeface="游ゴシック"/>
                         </a:rPr>
-                        <a:t>平均tIoU：0.711</a:t>
+                        <a:t>同じ動画の投球候補と各状況</a:t>
                       </a:r>
                     </a:p>
                   </a:txBody>
@@ -6154,7 +8271,7 @@
                           <a:latin typeface="游ゴシック"/>
                           <a:ea typeface="游ゴシック"/>
                         </a:rPr>
-                        <a:t>精度・tIoUは未算出</a:t>
+                        <a:t>前後の全項目：9群／34群</a:t>
                       </a:r>
                     </a:p>
                   </a:txBody>
@@ -6185,184 +8302,20 @@
                   </a:tcPr>
                 </a:tc>
               </a:tr>
-              <a:tr h="621792">
-                <a:tc>
-                  <a:txBody>
-                    <a:bodyPr wrap="square" lIns="0" rIns="0" tIns="0" bIns="0">
-                      <a:noAutofit/>
-                    </a:bodyPr>
-                    <a:lstStyle/>
-                    <a:p>
-                      <a:pPr algn="l">
-                        <a:lnSpc>
-                          <a:spcPct val="112000"/>
-                        </a:lnSpc>
-                        <a:spcAft>
-                          <a:spcPts val="0"/>
-                        </a:spcAft>
-                        <a:buNone/>
-                      </a:pPr>
-                      <a:r>
-                        <a:rPr sz="2200" b="0" lang="ja-JP">
-                          <a:solidFill>
-                            <a:srgbClr val="111111"/>
-                          </a:solidFill>
-                          <a:latin typeface="游ゴシック"/>
-                          <a:ea typeface="游ゴシック"/>
-                        </a:rPr>
-                        <a:t>注意点</a:t>
-                      </a:r>
-                    </a:p>
-                  </a:txBody>
-                  <a:tcPr marL="118872" marR="91440" marT="64008" marB="36576" anchor="ctr">
-                    <a:solidFill>
-                      <a:srgbClr val="FFFFFF"/>
-                    </a:solidFill>
-                    <a:lnL w="7000">
-                      <a:solidFill>
-                        <a:srgbClr val="BFBFBF"/>
-                      </a:solidFill>
-                    </a:lnL>
-                    <a:lnR w="7000">
-                      <a:solidFill>
-                        <a:srgbClr val="BFBFBF"/>
-                      </a:solidFill>
-                    </a:lnR>
-                    <a:lnT w="7000">
-                      <a:solidFill>
-                        <a:srgbClr val="BFBFBF"/>
-                      </a:solidFill>
-                    </a:lnT>
-                    <a:lnB w="7000">
-                      <a:solidFill>
-                        <a:srgbClr val="BFBFBF"/>
-                      </a:solidFill>
-                    </a:lnB>
-                  </a:tcPr>
-                </a:tc>
-                <a:tc>
-                  <a:txBody>
-                    <a:bodyPr wrap="square" lIns="0" rIns="0" tIns="0" bIns="0">
-                      <a:noAutofit/>
-                    </a:bodyPr>
-                    <a:lstStyle/>
-                    <a:p>
-                      <a:pPr algn="l">
-                        <a:lnSpc>
-                          <a:spcPct val="112000"/>
-                        </a:lnSpc>
-                        <a:spcAft>
-                          <a:spcPts val="0"/>
-                        </a:spcAft>
-                        <a:buNone/>
-                      </a:pPr>
-                      <a:r>
-                        <a:rPr sz="2200" b="0" lang="ja-JP">
-                          <a:solidFill>
-                            <a:srgbClr val="111111"/>
-                          </a:solidFill>
-                          <a:latin typeface="游ゴシック"/>
-                          <a:ea typeface="游ゴシック"/>
-                        </a:rPr>
-                        <a:t>余分な候補は評価に未反映</a:t>
-                      </a:r>
-                    </a:p>
-                  </a:txBody>
-                  <a:tcPr marL="118872" marR="91440" marT="64008" marB="36576" anchor="ctr">
-                    <a:solidFill>
-                      <a:srgbClr val="FFFFFF"/>
-                    </a:solidFill>
-                    <a:lnL w="7000">
-                      <a:solidFill>
-                        <a:srgbClr val="BFBFBF"/>
-                      </a:solidFill>
-                    </a:lnL>
-                    <a:lnR w="7000">
-                      <a:solidFill>
-                        <a:srgbClr val="BFBFBF"/>
-                      </a:solidFill>
-                    </a:lnR>
-                    <a:lnT w="7000">
-                      <a:solidFill>
-                        <a:srgbClr val="BFBFBF"/>
-                      </a:solidFill>
-                    </a:lnT>
-                    <a:lnB w="7000">
-                      <a:solidFill>
-                        <a:srgbClr val="BFBFBF"/>
-                      </a:solidFill>
-                    </a:lnB>
-                  </a:tcPr>
-                </a:tc>
-                <a:tc>
-                  <a:txBody>
-                    <a:bodyPr wrap="square" lIns="0" rIns="0" tIns="0" bIns="0">
-                      <a:noAutofit/>
-                    </a:bodyPr>
-                    <a:lstStyle/>
-                    <a:p>
-                      <a:pPr algn="l">
-                        <a:lnSpc>
-                          <a:spcPct val="112000"/>
-                        </a:lnSpc>
-                        <a:spcAft>
-                          <a:spcPts val="0"/>
-                        </a:spcAft>
-                        <a:buNone/>
-                      </a:pPr>
-                      <a:r>
-                        <a:rPr sz="2200" b="0" lang="ja-JP">
-                          <a:solidFill>
-                            <a:srgbClr val="111111"/>
-                          </a:solidFill>
-                          <a:latin typeface="游ゴシック"/>
-                          <a:ea typeface="游ゴシック"/>
-                        </a:rPr>
-                        <a:t>投球数・ファウル数は未確定</a:t>
-                      </a:r>
-                    </a:p>
-                  </a:txBody>
-                  <a:tcPr marL="118872" marR="91440" marT="64008" marB="36576" anchor="ctr">
-                    <a:solidFill>
-                      <a:srgbClr val="FFFFFF"/>
-                    </a:solidFill>
-                    <a:lnL w="7000">
-                      <a:solidFill>
-                        <a:srgbClr val="BFBFBF"/>
-                      </a:solidFill>
-                    </a:lnL>
-                    <a:lnR w="7000">
-                      <a:solidFill>
-                        <a:srgbClr val="BFBFBF"/>
-                      </a:solidFill>
-                    </a:lnR>
-                    <a:lnT w="7000">
-                      <a:solidFill>
-                        <a:srgbClr val="BFBFBF"/>
-                      </a:solidFill>
-                    </a:lnT>
-                    <a:lnB w="7000">
-                      <a:solidFill>
-                        <a:srgbClr val="BFBFBF"/>
-                      </a:solidFill>
-                    </a:lnB>
-                  </a:tcPr>
-                </a:tc>
-              </a:tr>
             </a:tbl>
           </a:graphicData>
         </a:graphic>
       </p:graphicFrame>
       <p:sp>
         <p:nvSpPr>
-          <p:cNvPr id="6" name="TextBox 5"/>
+          <p:cNvPr id="5" name="TextBox 4"/>
           <p:cNvSpPr txBox="1"/>
           <p:nvPr/>
         </p:nvSpPr>
         <p:spPr>
           <a:xfrm>
-            <a:off x="838504" y="5943600"/>
-            <a:ext cx="10515600" cy="384048"/>
+            <a:off x="838504" y="5367528"/>
+            <a:ext cx="10515600" cy="1005840"/>
           </a:xfrm>
           <a:prstGeom prst="rect">
             <a:avLst/>
@@ -6380,1185 +8333,30 @@
                 <a:spcPct val="112000"/>
               </a:lnSpc>
               <a:spcAft>
-                <a:spcPts val="1000"/>
+                <a:spcPts val="0"/>
               </a:spcAft>
               <a:buNone/>
             </a:pPr>
             <a:r>
-              <a:rPr sz="2300" b="0" lang="ja-JP">
+              <a:rPr sz="2500" b="0" lang="ja-JP">
                 <a:solidFill>
                   <a:srgbClr val="B02121"/>
                 </a:solidFill>
                 <a:latin typeface="游ゴシック"/>
                 <a:ea typeface="游ゴシック"/>
               </a:rPr>
-              <a:t>平均tIoUは、検出全体の正解率やファウル判定精度ではない。</a:t>
-            </a:r>
-          </a:p>
-        </p:txBody>
-      </p:sp>
-    </p:spTree>
-  </p:cSld>
-  <p:clrMapOvr>
-    <a:masterClrMapping/>
-  </p:clrMapOvr>
-</p:sld>
-</file>
-
-<file path=ppt/slides/slide12.xml><?xml version="1.0" encoding="utf-8"?>
-<p:sld xmlns:a="http://schemas.openxmlformats.org/drawingml/2006/main" xmlns:p="http://schemas.openxmlformats.org/presentationml/2006/main" xmlns:r="http://schemas.openxmlformats.org/officeDocument/2006/relationships">
-  <p:cSld>
-    <p:spTree>
-      <p:nvGrpSpPr>
-        <p:cNvPr id="1" name=""/>
-        <p:cNvGrpSpPr/>
-        <p:nvPr/>
-      </p:nvGrpSpPr>
-      <p:grpSpPr/>
-      <p:sp>
-        <p:nvSpPr>
-          <p:cNvPr id="2" name="Title 1"/>
-          <p:cNvSpPr>
-            <a:spLocks noGrp="1"/>
-          </p:cNvSpPr>
-          <p:nvPr>
-            <p:ph type="title"/>
-          </p:nvPr>
-        </p:nvSpPr>
-        <p:spPr>
-          <a:xfrm>
-            <a:off x="838504" y="364845"/>
-            <a:ext cx="10515600" cy="1325880"/>
-          </a:xfrm>
-        </p:spPr>
-        <p:txBody>
-          <a:bodyPr wrap="square" lIns="0" rIns="0" tIns="0" bIns="0">
-            <a:noAutofit/>
-          </a:bodyPr>
-          <a:lstStyle/>
-          <a:p>
-            <a:pPr algn="l">
-              <a:lnSpc>
-                <a:spcPct val="112000"/>
-              </a:lnSpc>
-              <a:spcAft>
-                <a:spcPts val="0"/>
-              </a:spcAft>
-              <a:buNone/>
-            </a:pPr>
-            <a:r>
-              <a:rPr sz="4400" b="0" lang="ja-JP">
+              <a:t>対象と数えているものが違うため、精度の改善とは比較できない。</a:t>
+            </a:r>
+            <a:br/>
+            <a:r>
+              <a:rPr sz="2500" b="0" lang="ja-JP">
                 <a:solidFill>
-                  <a:srgbClr val="111111"/>
-                </a:solidFill>
-                <a:latin typeface="游ゴシック Light"/>
-                <a:ea typeface="游ゴシック Light"/>
-              </a:rPr>
-              <a:t>補足：今回の処理条件</a:t>
-            </a:r>
-          </a:p>
-        </p:txBody>
-      </p:sp>
-      <p:sp>
-        <p:nvSpPr>
-          <p:cNvPr id="3" name="TextBox 2"/>
-          <p:cNvSpPr txBox="1"/>
-          <p:nvPr/>
-        </p:nvSpPr>
-        <p:spPr>
-          <a:xfrm>
-            <a:off x="10881360" y="6510528"/>
-            <a:ext cx="457200" cy="201168"/>
-          </a:xfrm>
-          <a:prstGeom prst="rect">
-            <a:avLst/>
-          </a:prstGeom>
-          <a:noFill/>
-        </p:spPr>
-        <p:txBody>
-          <a:bodyPr wrap="square" lIns="0" rIns="0" tIns="0" bIns="0">
-            <a:noAutofit/>
-          </a:bodyPr>
-          <a:lstStyle/>
-          <a:p>
-            <a:pPr algn="r">
-              <a:lnSpc>
-                <a:spcPct val="112000"/>
-              </a:lnSpc>
-              <a:spcAft>
-                <a:spcPts val="0"/>
-              </a:spcAft>
-              <a:buNone/>
-            </a:pPr>
-            <a:r>
-              <a:rPr sz="1200" b="0" lang="ja-JP">
-                <a:solidFill>
-                  <a:srgbClr val="555555"/>
+                  <a:srgbClr val="B02121"/>
                 </a:solidFill>
                 <a:latin typeface="游ゴシック"/>
                 <a:ea typeface="游ゴシック"/>
               </a:rPr>
-              <a:t>12</a:t>
-            </a:r>
-          </a:p>
-        </p:txBody>
-      </p:sp>
-      <p:graphicFrame>
-        <p:nvGraphicFramePr>
-          <p:cNvPr id="4" name="Table 3"/>
-          <p:cNvGraphicFramePr>
-            <a:graphicFrameLocks noGrp="1"/>
-          </p:cNvGraphicFramePr>
-          <p:nvPr/>
-        </p:nvGraphicFramePr>
-        <p:xfrm>
-          <a:off x="838504" y="1810512"/>
-          <a:ext cx="10515600" cy="4361688"/>
-        </p:xfrm>
-        <a:graphic>
-          <a:graphicData uri="http://schemas.openxmlformats.org/drawingml/2006/table">
-            <a:tbl>
-              <a:tblPr firstRow="1" bandRow="1">
-                <a:tableStyleId>{5C22544A-7EE6-4342-B048-85BDC9FD1C3A}</a:tableStyleId>
-              </a:tblPr>
-              <a:tblGrid>
-                <a:gridCol w="2743200"/>
-                <a:gridCol w="7772400"/>
-              </a:tblGrid>
-              <a:tr h="484632">
-                <a:tc>
-                  <a:txBody>
-                    <a:bodyPr wrap="square" lIns="0" rIns="0" tIns="0" bIns="0">
-                      <a:noAutofit/>
-                    </a:bodyPr>
-                    <a:lstStyle/>
-                    <a:p>
-                      <a:pPr algn="l">
-                        <a:lnSpc>
-                          <a:spcPct val="112000"/>
-                        </a:lnSpc>
-                        <a:spcAft>
-                          <a:spcPts val="0"/>
-                        </a:spcAft>
-                        <a:buNone/>
-                      </a:pPr>
-                      <a:r>
-                        <a:rPr sz="2000" b="1" lang="ja-JP">
-                          <a:solidFill>
-                            <a:srgbClr val="111111"/>
-                          </a:solidFill>
-                          <a:latin typeface="游ゴシック"/>
-                          <a:ea typeface="游ゴシック"/>
-                        </a:rPr>
-                        <a:t>項目</a:t>
-                      </a:r>
-                    </a:p>
-                  </a:txBody>
-                  <a:tcPr marL="118872" marR="91440" marT="64008" marB="36576" anchor="ctr">
-                    <a:solidFill>
-                      <a:srgbClr val="EEEEEE"/>
-                    </a:solidFill>
-                    <a:lnL w="7000">
-                      <a:solidFill>
-                        <a:srgbClr val="BFBFBF"/>
-                      </a:solidFill>
-                    </a:lnL>
-                    <a:lnR w="7000">
-                      <a:solidFill>
-                        <a:srgbClr val="BFBFBF"/>
-                      </a:solidFill>
-                    </a:lnR>
-                    <a:lnT w="7000">
-                      <a:solidFill>
-                        <a:srgbClr val="BFBFBF"/>
-                      </a:solidFill>
-                    </a:lnT>
-                    <a:lnB w="7000">
-                      <a:solidFill>
-                        <a:srgbClr val="BFBFBF"/>
-                      </a:solidFill>
-                    </a:lnB>
-                  </a:tcPr>
-                </a:tc>
-                <a:tc>
-                  <a:txBody>
-                    <a:bodyPr wrap="square" lIns="0" rIns="0" tIns="0" bIns="0">
-                      <a:noAutofit/>
-                    </a:bodyPr>
-                    <a:lstStyle/>
-                    <a:p>
-                      <a:pPr algn="l">
-                        <a:lnSpc>
-                          <a:spcPct val="112000"/>
-                        </a:lnSpc>
-                        <a:spcAft>
-                          <a:spcPts val="0"/>
-                        </a:spcAft>
-                        <a:buNone/>
-                      </a:pPr>
-                      <a:r>
-                        <a:rPr sz="2000" b="1" lang="ja-JP">
-                          <a:solidFill>
-                            <a:srgbClr val="111111"/>
-                          </a:solidFill>
-                          <a:latin typeface="游ゴシック"/>
-                          <a:ea typeface="游ゴシック"/>
-                        </a:rPr>
-                        <a:t>設定</a:t>
-                      </a:r>
-                    </a:p>
-                  </a:txBody>
-                  <a:tcPr marL="118872" marR="91440" marT="64008" marB="36576" anchor="ctr">
-                    <a:solidFill>
-                      <a:srgbClr val="EEEEEE"/>
-                    </a:solidFill>
-                    <a:lnL w="7000">
-                      <a:solidFill>
-                        <a:srgbClr val="BFBFBF"/>
-                      </a:solidFill>
-                    </a:lnL>
-                    <a:lnR w="7000">
-                      <a:solidFill>
-                        <a:srgbClr val="BFBFBF"/>
-                      </a:solidFill>
-                    </a:lnR>
-                    <a:lnT w="7000">
-                      <a:solidFill>
-                        <a:srgbClr val="BFBFBF"/>
-                      </a:solidFill>
-                    </a:lnT>
-                    <a:lnB w="7000">
-                      <a:solidFill>
-                        <a:srgbClr val="BFBFBF"/>
-                      </a:solidFill>
-                    </a:lnB>
-                  </a:tcPr>
-                </a:tc>
-              </a:tr>
-              <a:tr h="484632">
-                <a:tc>
-                  <a:txBody>
-                    <a:bodyPr wrap="square" lIns="0" rIns="0" tIns="0" bIns="0">
-                      <a:noAutofit/>
-                    </a:bodyPr>
-                    <a:lstStyle/>
-                    <a:p>
-                      <a:pPr algn="l">
-                        <a:lnSpc>
-                          <a:spcPct val="112000"/>
-                        </a:lnSpc>
-                        <a:spcAft>
-                          <a:spcPts val="0"/>
-                        </a:spcAft>
-                        <a:buNone/>
-                      </a:pPr>
-                      <a:r>
-                        <a:rPr sz="2000" b="0" lang="ja-JP">
-                          <a:solidFill>
-                            <a:srgbClr val="111111"/>
-                          </a:solidFill>
-                          <a:latin typeface="游ゴシック"/>
-                          <a:ea typeface="游ゴシック"/>
-                        </a:rPr>
-                        <a:t>表示の観測</a:t>
-                      </a:r>
-                    </a:p>
-                  </a:txBody>
-                  <a:tcPr marL="118872" marR="91440" marT="64008" marB="36576" anchor="ctr">
-                    <a:solidFill>
-                      <a:srgbClr val="FFFFFF"/>
-                    </a:solidFill>
-                    <a:lnL w="7000">
-                      <a:solidFill>
-                        <a:srgbClr val="BFBFBF"/>
-                      </a:solidFill>
-                    </a:lnL>
-                    <a:lnR w="7000">
-                      <a:solidFill>
-                        <a:srgbClr val="BFBFBF"/>
-                      </a:solidFill>
-                    </a:lnR>
-                    <a:lnT w="7000">
-                      <a:solidFill>
-                        <a:srgbClr val="BFBFBF"/>
-                      </a:solidFill>
-                    </a:lnT>
-                    <a:lnB w="7000">
-                      <a:solidFill>
-                        <a:srgbClr val="BFBFBF"/>
-                      </a:solidFill>
-                    </a:lnB>
-                  </a:tcPr>
-                </a:tc>
-                <a:tc>
-                  <a:txBody>
-                    <a:bodyPr wrap="square" lIns="0" rIns="0" tIns="0" bIns="0">
-                      <a:noAutofit/>
-                    </a:bodyPr>
-                    <a:lstStyle/>
-                    <a:p>
-                      <a:pPr algn="l">
-                        <a:lnSpc>
-                          <a:spcPct val="112000"/>
-                        </a:lnSpc>
-                        <a:spcAft>
-                          <a:spcPts val="0"/>
-                        </a:spcAft>
-                        <a:buNone/>
-                      </a:pPr>
-                      <a:r>
-                        <a:rPr sz="2000" b="0" lang="ja-JP">
-                          <a:solidFill>
-                            <a:srgbClr val="111111"/>
-                          </a:solidFill>
-                          <a:latin typeface="游ゴシック"/>
-                          <a:ea typeface="游ゴシック"/>
-                        </a:rPr>
-                        <a:t>0.5秒間隔（1,061観測）</a:t>
-                      </a:r>
-                    </a:p>
-                  </a:txBody>
-                  <a:tcPr marL="118872" marR="91440" marT="64008" marB="36576" anchor="ctr">
-                    <a:solidFill>
-                      <a:srgbClr val="FFFFFF"/>
-                    </a:solidFill>
-                    <a:lnL w="7000">
-                      <a:solidFill>
-                        <a:srgbClr val="BFBFBF"/>
-                      </a:solidFill>
-                    </a:lnL>
-                    <a:lnR w="7000">
-                      <a:solidFill>
-                        <a:srgbClr val="BFBFBF"/>
-                      </a:solidFill>
-                    </a:lnR>
-                    <a:lnT w="7000">
-                      <a:solidFill>
-                        <a:srgbClr val="BFBFBF"/>
-                      </a:solidFill>
-                    </a:lnT>
-                    <a:lnB w="7000">
-                      <a:solidFill>
-                        <a:srgbClr val="BFBFBF"/>
-                      </a:solidFill>
-                    </a:lnB>
-                  </a:tcPr>
-                </a:tc>
-              </a:tr>
-              <a:tr h="484632">
-                <a:tc>
-                  <a:txBody>
-                    <a:bodyPr wrap="square" lIns="0" rIns="0" tIns="0" bIns="0">
-                      <a:noAutofit/>
-                    </a:bodyPr>
-                    <a:lstStyle/>
-                    <a:p>
-                      <a:pPr algn="l">
-                        <a:lnSpc>
-                          <a:spcPct val="112000"/>
-                        </a:lnSpc>
-                        <a:spcAft>
-                          <a:spcPts val="0"/>
-                        </a:spcAft>
-                        <a:buNone/>
-                      </a:pPr>
-                      <a:r>
-                        <a:rPr sz="2000" b="0" lang="ja-JP">
-                          <a:solidFill>
-                            <a:srgbClr val="111111"/>
-                          </a:solidFill>
-                          <a:latin typeface="游ゴシック"/>
-                          <a:ea typeface="游ゴシック"/>
-                        </a:rPr>
-                        <a:t>OCR</a:t>
-                      </a:r>
-                    </a:p>
-                  </a:txBody>
-                  <a:tcPr marL="118872" marR="91440" marT="64008" marB="36576" anchor="ctr">
-                    <a:solidFill>
-                      <a:srgbClr val="FFFFFF"/>
-                    </a:solidFill>
-                    <a:lnL w="7000">
-                      <a:solidFill>
-                        <a:srgbClr val="BFBFBF"/>
-                      </a:solidFill>
-                    </a:lnL>
-                    <a:lnR w="7000">
-                      <a:solidFill>
-                        <a:srgbClr val="BFBFBF"/>
-                      </a:solidFill>
-                    </a:lnR>
-                    <a:lnT w="7000">
-                      <a:solidFill>
-                        <a:srgbClr val="BFBFBF"/>
-                      </a:solidFill>
-                    </a:lnT>
-                    <a:lnB w="7000">
-                      <a:solidFill>
-                        <a:srgbClr val="BFBFBF"/>
-                      </a:solidFill>
-                    </a:lnB>
-                  </a:tcPr>
-                </a:tc>
-                <a:tc>
-                  <a:txBody>
-                    <a:bodyPr wrap="square" lIns="0" rIns="0" tIns="0" bIns="0">
-                      <a:noAutofit/>
-                    </a:bodyPr>
-                    <a:lstStyle/>
-                    <a:p>
-                      <a:pPr algn="l">
-                        <a:lnSpc>
-                          <a:spcPct val="112000"/>
-                        </a:lnSpc>
-                        <a:spcAft>
-                          <a:spcPts val="0"/>
-                        </a:spcAft>
-                        <a:buNone/>
-                      </a:pPr>
-                      <a:r>
-                        <a:rPr sz="2000" b="0" lang="ja-JP">
-                          <a:solidFill>
-                            <a:srgbClr val="111111"/>
-                          </a:solidFill>
-                          <a:latin typeface="游ゴシック"/>
-                          <a:ea typeface="游ゴシック"/>
-                        </a:rPr>
-                        <a:t>表示があるとき、原則2秒以上の間隔</a:t>
-                      </a:r>
-                    </a:p>
-                  </a:txBody>
-                  <a:tcPr marL="118872" marR="91440" marT="64008" marB="36576" anchor="ctr">
-                    <a:solidFill>
-                      <a:srgbClr val="FFFFFF"/>
-                    </a:solidFill>
-                    <a:lnL w="7000">
-                      <a:solidFill>
-                        <a:srgbClr val="BFBFBF"/>
-                      </a:solidFill>
-                    </a:lnL>
-                    <a:lnR w="7000">
-                      <a:solidFill>
-                        <a:srgbClr val="BFBFBF"/>
-                      </a:solidFill>
-                    </a:lnR>
-                    <a:lnT w="7000">
-                      <a:solidFill>
-                        <a:srgbClr val="BFBFBF"/>
-                      </a:solidFill>
-                    </a:lnT>
-                    <a:lnB w="7000">
-                      <a:solidFill>
-                        <a:srgbClr val="BFBFBF"/>
-                      </a:solidFill>
-                    </a:lnB>
-                  </a:tcPr>
-                </a:tc>
-              </a:tr>
-              <a:tr h="484632">
-                <a:tc>
-                  <a:txBody>
-                    <a:bodyPr wrap="square" lIns="0" rIns="0" tIns="0" bIns="0">
-                      <a:noAutofit/>
-                    </a:bodyPr>
-                    <a:lstStyle/>
-                    <a:p>
-                      <a:pPr algn="l">
-                        <a:lnSpc>
-                          <a:spcPct val="112000"/>
-                        </a:lnSpc>
-                        <a:spcAft>
-                          <a:spcPts val="0"/>
-                        </a:spcAft>
-                        <a:buNone/>
-                      </a:pPr>
-                      <a:r>
-                        <a:rPr sz="2000" b="0" lang="ja-JP">
-                          <a:solidFill>
-                            <a:srgbClr val="111111"/>
-                          </a:solidFill>
-                          <a:latin typeface="游ゴシック"/>
-                          <a:ea typeface="游ゴシック"/>
-                        </a:rPr>
-                        <a:t>VideoMAE</a:t>
-                      </a:r>
-                    </a:p>
-                  </a:txBody>
-                  <a:tcPr marL="118872" marR="91440" marT="64008" marB="36576" anchor="ctr">
-                    <a:solidFill>
-                      <a:srgbClr val="FFFFFF"/>
-                    </a:solidFill>
-                    <a:lnL w="7000">
-                      <a:solidFill>
-                        <a:srgbClr val="BFBFBF"/>
-                      </a:solidFill>
-                    </a:lnL>
-                    <a:lnR w="7000">
-                      <a:solidFill>
-                        <a:srgbClr val="BFBFBF"/>
-                      </a:solidFill>
-                    </a:lnR>
-                    <a:lnT w="7000">
-                      <a:solidFill>
-                        <a:srgbClr val="BFBFBF"/>
-                      </a:solidFill>
-                    </a:lnT>
-                    <a:lnB w="7000">
-                      <a:solidFill>
-                        <a:srgbClr val="BFBFBF"/>
-                      </a:solidFill>
-                    </a:lnB>
-                  </a:tcPr>
-                </a:tc>
-                <a:tc>
-                  <a:txBody>
-                    <a:bodyPr wrap="square" lIns="0" rIns="0" tIns="0" bIns="0">
-                      <a:noAutofit/>
-                    </a:bodyPr>
-                    <a:lstStyle/>
-                    <a:p>
-                      <a:pPr algn="l">
-                        <a:lnSpc>
-                          <a:spcPct val="112000"/>
-                        </a:lnSpc>
-                        <a:spcAft>
-                          <a:spcPts val="0"/>
-                        </a:spcAft>
-                        <a:buNone/>
-                      </a:pPr>
-                      <a:r>
-                        <a:rPr sz="2000" b="0" lang="ja-JP">
-                          <a:solidFill>
-                            <a:srgbClr val="111111"/>
-                          </a:solidFill>
-                          <a:latin typeface="游ゴシック"/>
-                          <a:ea typeface="游ゴシック"/>
-                        </a:rPr>
-                        <a:t>16フレーム窓 ／ 8フレーム間隔 ／ 768次元</a:t>
-                      </a:r>
-                    </a:p>
-                  </a:txBody>
-                  <a:tcPr marL="118872" marR="91440" marT="64008" marB="36576" anchor="ctr">
-                    <a:solidFill>
-                      <a:srgbClr val="FFFFFF"/>
-                    </a:solidFill>
-                    <a:lnL w="7000">
-                      <a:solidFill>
-                        <a:srgbClr val="BFBFBF"/>
-                      </a:solidFill>
-                    </a:lnL>
-                    <a:lnR w="7000">
-                      <a:solidFill>
-                        <a:srgbClr val="BFBFBF"/>
-                      </a:solidFill>
-                    </a:lnR>
-                    <a:lnT w="7000">
-                      <a:solidFill>
-                        <a:srgbClr val="BFBFBF"/>
-                      </a:solidFill>
-                    </a:lnT>
-                    <a:lnB w="7000">
-                      <a:solidFill>
-                        <a:srgbClr val="BFBFBF"/>
-                      </a:solidFill>
-                    </a:lnB>
-                  </a:tcPr>
-                </a:tc>
-              </a:tr>
-              <a:tr h="484632">
-                <a:tc>
-                  <a:txBody>
-                    <a:bodyPr wrap="square" lIns="0" rIns="0" tIns="0" bIns="0">
-                      <a:noAutofit/>
-                    </a:bodyPr>
-                    <a:lstStyle/>
-                    <a:p>
-                      <a:pPr algn="l">
-                        <a:lnSpc>
-                          <a:spcPct val="112000"/>
-                        </a:lnSpc>
-                        <a:spcAft>
-                          <a:spcPts val="0"/>
-                        </a:spcAft>
-                        <a:buNone/>
-                      </a:pPr>
-                      <a:r>
-                        <a:rPr sz="2000" b="0" lang="ja-JP">
-                          <a:solidFill>
-                            <a:srgbClr val="111111"/>
-                          </a:solidFill>
-                          <a:latin typeface="游ゴシック"/>
-                          <a:ea typeface="游ゴシック"/>
-                        </a:rPr>
-                        <a:t>区間検出</a:t>
-                      </a:r>
-                    </a:p>
-                  </a:txBody>
-                  <a:tcPr marL="118872" marR="91440" marT="64008" marB="36576" anchor="ctr">
-                    <a:solidFill>
-                      <a:srgbClr val="FFFFFF"/>
-                    </a:solidFill>
-                    <a:lnL w="7000">
-                      <a:solidFill>
-                        <a:srgbClr val="BFBFBF"/>
-                      </a:solidFill>
-                    </a:lnL>
-                    <a:lnR w="7000">
-                      <a:solidFill>
-                        <a:srgbClr val="BFBFBF"/>
-                      </a:solidFill>
-                    </a:lnR>
-                    <a:lnT w="7000">
-                      <a:solidFill>
-                        <a:srgbClr val="BFBFBF"/>
-                      </a:solidFill>
-                    </a:lnT>
-                    <a:lnB w="7000">
-                      <a:solidFill>
-                        <a:srgbClr val="BFBFBF"/>
-                      </a:solidFill>
-                    </a:lnB>
-                  </a:tcPr>
-                </a:tc>
-                <a:tc>
-                  <a:txBody>
-                    <a:bodyPr wrap="square" lIns="0" rIns="0" tIns="0" bIns="0">
-                      <a:noAutofit/>
-                    </a:bodyPr>
-                    <a:lstStyle/>
-                    <a:p>
-                      <a:pPr algn="l">
-                        <a:lnSpc>
-                          <a:spcPct val="112000"/>
-                        </a:lnSpc>
-                        <a:spcAft>
-                          <a:spcPts val="0"/>
-                        </a:spcAft>
-                        <a:buNone/>
-                      </a:pPr>
-                      <a:r>
-                        <a:rPr sz="2000" b="0" lang="ja-JP">
-                          <a:solidFill>
-                            <a:srgbClr val="111111"/>
-                          </a:solidFill>
-                          <a:latin typeface="游ゴシック"/>
-                          <a:ea typeface="游ゴシック"/>
-                        </a:rPr>
-                        <a:t>以前 inning1t で学習した Compact ActionFormer</a:t>
-                      </a:r>
-                    </a:p>
-                  </a:txBody>
-                  <a:tcPr marL="118872" marR="91440" marT="64008" marB="36576" anchor="ctr">
-                    <a:solidFill>
-                      <a:srgbClr val="FFFFFF"/>
-                    </a:solidFill>
-                    <a:lnL w="7000">
-                      <a:solidFill>
-                        <a:srgbClr val="BFBFBF"/>
-                      </a:solidFill>
-                    </a:lnL>
-                    <a:lnR w="7000">
-                      <a:solidFill>
-                        <a:srgbClr val="BFBFBF"/>
-                      </a:solidFill>
-                    </a:lnR>
-                    <a:lnT w="7000">
-                      <a:solidFill>
-                        <a:srgbClr val="BFBFBF"/>
-                      </a:solidFill>
-                    </a:lnT>
-                    <a:lnB w="7000">
-                      <a:solidFill>
-                        <a:srgbClr val="BFBFBF"/>
-                      </a:solidFill>
-                    </a:lnB>
-                  </a:tcPr>
-                </a:tc>
-              </a:tr>
-              <a:tr h="484632">
-                <a:tc>
-                  <a:txBody>
-                    <a:bodyPr wrap="square" lIns="0" rIns="0" tIns="0" bIns="0">
-                      <a:noAutofit/>
-                    </a:bodyPr>
-                    <a:lstStyle/>
-                    <a:p>
-                      <a:pPr algn="l">
-                        <a:lnSpc>
-                          <a:spcPct val="112000"/>
-                        </a:lnSpc>
-                        <a:spcAft>
-                          <a:spcPts val="0"/>
-                        </a:spcAft>
-                        <a:buNone/>
-                      </a:pPr>
-                      <a:r>
-                        <a:rPr sz="2000" b="0" lang="ja-JP">
-                          <a:solidFill>
-                            <a:srgbClr val="111111"/>
-                          </a:solidFill>
-                          <a:latin typeface="游ゴシック"/>
-                          <a:ea typeface="游ゴシック"/>
-                        </a:rPr>
-                        <a:t>Soft-NMS</a:t>
-                      </a:r>
-                    </a:p>
-                  </a:txBody>
-                  <a:tcPr marL="118872" marR="91440" marT="64008" marB="36576" anchor="ctr">
-                    <a:solidFill>
-                      <a:srgbClr val="FFFFFF"/>
-                    </a:solidFill>
-                    <a:lnL w="7000">
-                      <a:solidFill>
-                        <a:srgbClr val="BFBFBF"/>
-                      </a:solidFill>
-                    </a:lnL>
-                    <a:lnR w="7000">
-                      <a:solidFill>
-                        <a:srgbClr val="BFBFBF"/>
-                      </a:solidFill>
-                    </a:lnR>
-                    <a:lnT w="7000">
-                      <a:solidFill>
-                        <a:srgbClr val="BFBFBF"/>
-                      </a:solidFill>
-                    </a:lnT>
-                    <a:lnB w="7000">
-                      <a:solidFill>
-                        <a:srgbClr val="BFBFBF"/>
-                      </a:solidFill>
-                    </a:lnB>
-                  </a:tcPr>
-                </a:tc>
-                <a:tc>
-                  <a:txBody>
-                    <a:bodyPr wrap="square" lIns="0" rIns="0" tIns="0" bIns="0">
-                      <a:noAutofit/>
-                    </a:bodyPr>
-                    <a:lstStyle/>
-                    <a:p>
-                      <a:pPr algn="l">
-                        <a:lnSpc>
-                          <a:spcPct val="112000"/>
-                        </a:lnSpc>
-                        <a:spcAft>
-                          <a:spcPts val="0"/>
-                        </a:spcAft>
-                        <a:buNone/>
-                      </a:pPr>
-                      <a:r>
-                        <a:rPr sz="2000" b="0" lang="ja-JP">
-                          <a:solidFill>
-                            <a:srgbClr val="111111"/>
-                          </a:solidFill>
-                          <a:latin typeface="游ゴシック"/>
-                          <a:ea typeface="游ゴシック"/>
-                        </a:rPr>
-                        <a:t>σ＝0.5 ／ 処理後のスコア0.15以上を保持</a:t>
-                      </a:r>
-                    </a:p>
-                  </a:txBody>
-                  <a:tcPr marL="118872" marR="91440" marT="64008" marB="36576" anchor="ctr">
-                    <a:solidFill>
-                      <a:srgbClr val="FFFFFF"/>
-                    </a:solidFill>
-                    <a:lnL w="7000">
-                      <a:solidFill>
-                        <a:srgbClr val="BFBFBF"/>
-                      </a:solidFill>
-                    </a:lnL>
-                    <a:lnR w="7000">
-                      <a:solidFill>
-                        <a:srgbClr val="BFBFBF"/>
-                      </a:solidFill>
-                    </a:lnR>
-                    <a:lnT w="7000">
-                      <a:solidFill>
-                        <a:srgbClr val="BFBFBF"/>
-                      </a:solidFill>
-                    </a:lnT>
-                    <a:lnB w="7000">
-                      <a:solidFill>
-                        <a:srgbClr val="BFBFBF"/>
-                      </a:solidFill>
-                    </a:lnB>
-                  </a:tcPr>
-                </a:tc>
-              </a:tr>
-              <a:tr h="484632">
-                <a:tc>
-                  <a:txBody>
-                    <a:bodyPr wrap="square" lIns="0" rIns="0" tIns="0" bIns="0">
-                      <a:noAutofit/>
-                    </a:bodyPr>
-                    <a:lstStyle/>
-                    <a:p>
-                      <a:pPr algn="l">
-                        <a:lnSpc>
-                          <a:spcPct val="112000"/>
-                        </a:lnSpc>
-                        <a:spcAft>
-                          <a:spcPts val="0"/>
-                        </a:spcAft>
-                        <a:buNone/>
-                      </a:pPr>
-                      <a:r>
-                        <a:rPr sz="2000" b="0" lang="ja-JP">
-                          <a:solidFill>
-                            <a:srgbClr val="111111"/>
-                          </a:solidFill>
-                          <a:latin typeface="游ゴシック"/>
-                          <a:ea typeface="游ゴシック"/>
-                        </a:rPr>
-                        <a:t>表示用の候補群</a:t>
-                      </a:r>
-                    </a:p>
-                  </a:txBody>
-                  <a:tcPr marL="118872" marR="91440" marT="64008" marB="36576" anchor="ctr">
-                    <a:solidFill>
-                      <a:srgbClr val="FFFFFF"/>
-                    </a:solidFill>
-                    <a:lnL w="7000">
-                      <a:solidFill>
-                        <a:srgbClr val="BFBFBF"/>
-                      </a:solidFill>
-                    </a:lnL>
-                    <a:lnR w="7000">
-                      <a:solidFill>
-                        <a:srgbClr val="BFBFBF"/>
-                      </a:solidFill>
-                    </a:lnR>
-                    <a:lnT w="7000">
-                      <a:solidFill>
-                        <a:srgbClr val="BFBFBF"/>
-                      </a:solidFill>
-                    </a:lnT>
-                    <a:lnB w="7000">
-                      <a:solidFill>
-                        <a:srgbClr val="BFBFBF"/>
-                      </a:solidFill>
-                    </a:lnB>
-                  </a:tcPr>
-                </a:tc>
-                <a:tc>
-                  <a:txBody>
-                    <a:bodyPr wrap="square" lIns="0" rIns="0" tIns="0" bIns="0">
-                      <a:noAutofit/>
-                    </a:bodyPr>
-                    <a:lstStyle/>
-                    <a:p>
-                      <a:pPr algn="l">
-                        <a:lnSpc>
-                          <a:spcPct val="112000"/>
-                        </a:lnSpc>
-                        <a:spcAft>
-                          <a:spcPts val="0"/>
-                        </a:spcAft>
-                        <a:buNone/>
-                      </a:pPr>
-                      <a:r>
-                        <a:rPr sz="2000" b="0" lang="ja-JP">
-                          <a:solidFill>
-                            <a:srgbClr val="111111"/>
-                          </a:solidFill>
-                          <a:latin typeface="游ゴシック"/>
-                          <a:ea typeface="游ゴシック"/>
-                        </a:rPr>
-                        <a:t>最高スコア候補との時間的IoU 0.25以上で整理</a:t>
-                      </a:r>
-                    </a:p>
-                  </a:txBody>
-                  <a:tcPr marL="118872" marR="91440" marT="64008" marB="36576" anchor="ctr">
-                    <a:solidFill>
-                      <a:srgbClr val="FFFFFF"/>
-                    </a:solidFill>
-                    <a:lnL w="7000">
-                      <a:solidFill>
-                        <a:srgbClr val="BFBFBF"/>
-                      </a:solidFill>
-                    </a:lnL>
-                    <a:lnR w="7000">
-                      <a:solidFill>
-                        <a:srgbClr val="BFBFBF"/>
-                      </a:solidFill>
-                    </a:lnR>
-                    <a:lnT w="7000">
-                      <a:solidFill>
-                        <a:srgbClr val="BFBFBF"/>
-                      </a:solidFill>
-                    </a:lnT>
-                    <a:lnB w="7000">
-                      <a:solidFill>
-                        <a:srgbClr val="BFBFBF"/>
-                      </a:solidFill>
-                    </a:lnB>
-                  </a:tcPr>
-                </a:tc>
-              </a:tr>
-              <a:tr h="484632">
-                <a:tc>
-                  <a:txBody>
-                    <a:bodyPr wrap="square" lIns="0" rIns="0" tIns="0" bIns="0">
-                      <a:noAutofit/>
-                    </a:bodyPr>
-                    <a:lstStyle/>
-                    <a:p>
-                      <a:pPr algn="l">
-                        <a:lnSpc>
-                          <a:spcPct val="112000"/>
-                        </a:lnSpc>
-                        <a:spcAft>
-                          <a:spcPts val="0"/>
-                        </a:spcAft>
-                        <a:buNone/>
-                      </a:pPr>
-                      <a:r>
-                        <a:rPr sz="2000" b="0" lang="ja-JP">
-                          <a:solidFill>
-                            <a:srgbClr val="111111"/>
-                          </a:solidFill>
-                          <a:latin typeface="游ゴシック"/>
-                          <a:ea typeface="游ゴシック"/>
-                        </a:rPr>
-                        <a:t>カウントの安定</a:t>
-                      </a:r>
-                    </a:p>
-                  </a:txBody>
-                  <a:tcPr marL="118872" marR="91440" marT="64008" marB="36576" anchor="ctr">
-                    <a:solidFill>
-                      <a:srgbClr val="FFFFFF"/>
-                    </a:solidFill>
-                    <a:lnL w="7000">
-                      <a:solidFill>
-                        <a:srgbClr val="BFBFBF"/>
-                      </a:solidFill>
-                    </a:lnL>
-                    <a:lnR w="7000">
-                      <a:solidFill>
-                        <a:srgbClr val="BFBFBF"/>
-                      </a:solidFill>
-                    </a:lnR>
-                    <a:lnT w="7000">
-                      <a:solidFill>
-                        <a:srgbClr val="BFBFBF"/>
-                      </a:solidFill>
-                    </a:lnT>
-                    <a:lnB w="7000">
-                      <a:solidFill>
-                        <a:srgbClr val="BFBFBF"/>
-                      </a:solidFill>
-                    </a:lnB>
-                  </a:tcPr>
-                </a:tc>
-                <a:tc>
-                  <a:txBody>
-                    <a:bodyPr wrap="square" lIns="0" rIns="0" tIns="0" bIns="0">
-                      <a:noAutofit/>
-                    </a:bodyPr>
-                    <a:lstStyle/>
-                    <a:p>
-                      <a:pPr algn="l">
-                        <a:lnSpc>
-                          <a:spcPct val="112000"/>
-                        </a:lnSpc>
-                        <a:spcAft>
-                          <a:spcPts val="0"/>
-                        </a:spcAft>
-                        <a:buNone/>
-                      </a:pPr>
-                      <a:r>
-                        <a:rPr sz="2000" b="0" lang="ja-JP">
-                          <a:solidFill>
-                            <a:srgbClr val="111111"/>
-                          </a:solidFill>
-                          <a:latin typeface="游ゴシック"/>
-                          <a:ea typeface="游ゴシック"/>
-                        </a:rPr>
-                        <a:t>同じB/S/Oが連続2観測以上</a:t>
-                      </a:r>
-                    </a:p>
-                  </a:txBody>
-                  <a:tcPr marL="118872" marR="91440" marT="64008" marB="36576" anchor="ctr">
-                    <a:solidFill>
-                      <a:srgbClr val="FFFFFF"/>
-                    </a:solidFill>
-                    <a:lnL w="7000">
-                      <a:solidFill>
-                        <a:srgbClr val="BFBFBF"/>
-                      </a:solidFill>
-                    </a:lnL>
-                    <a:lnR w="7000">
-                      <a:solidFill>
-                        <a:srgbClr val="BFBFBF"/>
-                      </a:solidFill>
-                    </a:lnR>
-                    <a:lnT w="7000">
-                      <a:solidFill>
-                        <a:srgbClr val="BFBFBF"/>
-                      </a:solidFill>
-                    </a:lnT>
-                    <a:lnB w="7000">
-                      <a:solidFill>
-                        <a:srgbClr val="BFBFBF"/>
-                      </a:solidFill>
-                    </a:lnB>
-                  </a:tcPr>
-                </a:tc>
-              </a:tr>
-              <a:tr h="484632">
-                <a:tc>
-                  <a:txBody>
-                    <a:bodyPr wrap="square" lIns="0" rIns="0" tIns="0" bIns="0">
-                      <a:noAutofit/>
-                    </a:bodyPr>
-                    <a:lstStyle/>
-                    <a:p>
-                      <a:pPr algn="l">
-                        <a:lnSpc>
-                          <a:spcPct val="112000"/>
-                        </a:lnSpc>
-                        <a:spcAft>
-                          <a:spcPts val="0"/>
-                        </a:spcAft>
-                        <a:buNone/>
-                      </a:pPr>
-                      <a:r>
-                        <a:rPr sz="2000" b="0" lang="ja-JP">
-                          <a:solidFill>
-                            <a:srgbClr val="111111"/>
-                          </a:solidFill>
-                          <a:latin typeface="游ゴシック"/>
-                          <a:ea typeface="游ゴシック"/>
-                        </a:rPr>
-                        <a:t>数値計算</a:t>
-                      </a:r>
-                    </a:p>
-                  </a:txBody>
-                  <a:tcPr marL="118872" marR="91440" marT="64008" marB="36576" anchor="ctr">
-                    <a:solidFill>
-                      <a:srgbClr val="FFFFFF"/>
-                    </a:solidFill>
-                    <a:lnL w="7000">
-                      <a:solidFill>
-                        <a:srgbClr val="BFBFBF"/>
-                      </a:solidFill>
-                    </a:lnL>
-                    <a:lnR w="7000">
-                      <a:solidFill>
-                        <a:srgbClr val="BFBFBF"/>
-                      </a:solidFill>
-                    </a:lnR>
-                    <a:lnT w="7000">
-                      <a:solidFill>
-                        <a:srgbClr val="BFBFBF"/>
-                      </a:solidFill>
-                    </a:lnT>
-                    <a:lnB w="7000">
-                      <a:solidFill>
-                        <a:srgbClr val="BFBFBF"/>
-                      </a:solidFill>
-                    </a:lnB>
-                  </a:tcPr>
-                </a:tc>
-                <a:tc>
-                  <a:txBody>
-                    <a:bodyPr wrap="square" lIns="0" rIns="0" tIns="0" bIns="0">
-                      <a:noAutofit/>
-                    </a:bodyPr>
-                    <a:lstStyle/>
-                    <a:p>
-                      <a:pPr algn="l">
-                        <a:lnSpc>
-                          <a:spcPct val="112000"/>
-                        </a:lnSpc>
-                        <a:spcAft>
-                          <a:spcPts val="0"/>
-                        </a:spcAft>
-                        <a:buNone/>
-                      </a:pPr>
-                      <a:r>
-                        <a:rPr sz="2000" b="0" lang="ja-JP">
-                          <a:solidFill>
-                            <a:srgbClr val="111111"/>
-                          </a:solidFill>
-                          <a:latin typeface="游ゴシック"/>
-                          <a:ea typeface="游ゴシック"/>
-                        </a:rPr>
-                        <a:t>CPU ／ エンコーダーBF16・区間検出器FP32</a:t>
-                      </a:r>
-                    </a:p>
-                  </a:txBody>
-                  <a:tcPr marL="118872" marR="91440" marT="64008" marB="36576" anchor="ctr">
-                    <a:solidFill>
-                      <a:srgbClr val="FFFFFF"/>
-                    </a:solidFill>
-                    <a:lnL w="7000">
-                      <a:solidFill>
-                        <a:srgbClr val="BFBFBF"/>
-                      </a:solidFill>
-                    </a:lnL>
-                    <a:lnR w="7000">
-                      <a:solidFill>
-                        <a:srgbClr val="BFBFBF"/>
-                      </a:solidFill>
-                    </a:lnR>
-                    <a:lnT w="7000">
-                      <a:solidFill>
-                        <a:srgbClr val="BFBFBF"/>
-                      </a:solidFill>
-                    </a:lnT>
-                    <a:lnB w="7000">
-                      <a:solidFill>
-                        <a:srgbClr val="BFBFBF"/>
-                      </a:solidFill>
-                    </a:lnB>
-                  </a:tcPr>
-                </a:tc>
-              </a:tr>
-            </a:tbl>
-          </a:graphicData>
-        </a:graphic>
-      </p:graphicFrame>
-      <p:sp>
-        <p:nvSpPr>
-          <p:cNvPr id="5" name="TextBox 4"/>
-          <p:cNvSpPr txBox="1"/>
-          <p:nvPr/>
-        </p:nvSpPr>
-        <p:spPr>
-          <a:xfrm>
-            <a:off x="838504" y="6318504"/>
-            <a:ext cx="10515600" cy="365760"/>
-          </a:xfrm>
-          <a:prstGeom prst="rect">
-            <a:avLst/>
-          </a:prstGeom>
-          <a:noFill/>
-        </p:spPr>
-        <p:txBody>
-          <a:bodyPr wrap="square" lIns="0" rIns="0" tIns="0" bIns="0">
-            <a:noAutofit/>
-          </a:bodyPr>
-          <a:lstStyle/>
-          <a:p>
-            <a:pPr algn="l">
-              <a:lnSpc>
-                <a:spcPct val="112000"/>
-              </a:lnSpc>
-              <a:spcAft>
-                <a:spcPts val="1000"/>
-              </a:spcAft>
-              <a:buNone/>
-            </a:pPr>
-            <a:r>
-              <a:rPr sz="2000" b="0" lang="ja-JP">
-                <a:solidFill>
-                  <a:srgbClr val="111111"/>
-                </a:solidFill>
-                <a:latin typeface="游ゴシック"/>
-                <a:ea typeface="游ゴシック"/>
-              </a:rPr>
-              <a:t>B/S/O取得：541観測。取得できない時刻は、0で補っていない。</a:t>
+              <a:t>今回の正解注釈による、投球検出・イベント判定の評価は未実施。</a:t>
             </a:r>
           </a:p>
         </p:txBody>
@@ -7620,7 +8418,7 @@
                 <a:latin typeface="游ゴシック Light"/>
                 <a:ea typeface="游ゴシック Light"/>
               </a:rPr>
-              <a:t>今週したこと</a:t>
+              <a:t>これまでの研究と今週の位置付け</a:t>
             </a:r>
           </a:p>
         </p:txBody>
@@ -7669,264 +8467,17 @@
           </a:p>
         </p:txBody>
       </p:sp>
-      <p:sp>
-        <p:nvSpPr>
-          <p:cNvPr id="4" name="TextBox 3"/>
-          <p:cNvSpPr txBox="1"/>
-          <p:nvPr/>
-        </p:nvSpPr>
-        <p:spPr>
-          <a:xfrm>
-            <a:off x="838504" y="1828800"/>
-            <a:ext cx="10515600" cy="4297680"/>
-          </a:xfrm>
-          <a:prstGeom prst="rect">
-            <a:avLst/>
-          </a:prstGeom>
-          <a:noFill/>
-        </p:spPr>
-        <p:txBody>
-          <a:bodyPr wrap="square" lIns="0" rIns="0" tIns="0" bIns="0">
-            <a:noAutofit/>
-          </a:bodyPr>
-          <a:lstStyle/>
-          <a:p>
-            <a:pPr algn="l">
-              <a:lnSpc>
-                <a:spcPct val="112000"/>
-              </a:lnSpc>
-              <a:spcAft>
-                <a:spcPts val="2400"/>
-              </a:spcAft>
-              <a:buNone/>
-            </a:pPr>
-            <a:r>
-              <a:rPr sz="2800" b="0" lang="ja-JP">
-                <a:solidFill>
-                  <a:srgbClr val="111111"/>
-                </a:solidFill>
-                <a:latin typeface="游ゴシック"/>
-                <a:ea typeface="游ゴシック"/>
-              </a:rPr>
-              <a:t>• YOLO・PaddleOCR・VideoMAEの認識結果を統合した</a:t>
-            </a:r>
-          </a:p>
-          <a:p>
-            <a:pPr algn="l">
-              <a:lnSpc>
-                <a:spcPct val="112000"/>
-              </a:lnSpc>
-              <a:spcAft>
-                <a:spcPts val="2400"/>
-              </a:spcAft>
-              <a:buNone/>
-            </a:pPr>
-            <a:r>
-              <a:rPr sz="2800" b="0" lang="ja-JP">
-                <a:solidFill>
-                  <a:srgbClr val="111111"/>
-                </a:solidFill>
-                <a:latin typeface="游ゴシック"/>
-                <a:ea typeface="游ゴシック"/>
-              </a:rPr>
-              <a:t>• 5回ウラの動画全体に適用し、投球前後の表示を照合した</a:t>
-            </a:r>
-          </a:p>
-          <a:p>
-            <a:pPr algn="l">
-              <a:lnSpc>
-                <a:spcPct val="112000"/>
-              </a:lnSpc>
-              <a:spcAft>
-                <a:spcPts val="2400"/>
-              </a:spcAft>
-              <a:buNone/>
-            </a:pPr>
-            <a:r>
-              <a:rPr sz="2800" b="0" lang="ja-JP">
-                <a:solidFill>
-                  <a:srgbClr val="111111"/>
-                </a:solidFill>
-                <a:latin typeface="游ゴシック"/>
-                <a:ea typeface="游ゴシック"/>
-              </a:rPr>
-              <a:t>• 確認画像・時系列グラフ・CSVを保存できる形にした</a:t>
-            </a:r>
-          </a:p>
-        </p:txBody>
-      </p:sp>
-    </p:spTree>
-  </p:cSld>
-  <p:clrMapOvr>
-    <a:masterClrMapping/>
-  </p:clrMapOvr>
-</p:sld>
-</file>
-
-<file path=ppt/slides/slide3.xml><?xml version="1.0" encoding="utf-8"?>
-<p:sld xmlns:a="http://schemas.openxmlformats.org/drawingml/2006/main" xmlns:p="http://schemas.openxmlformats.org/presentationml/2006/main" xmlns:r="http://schemas.openxmlformats.org/officeDocument/2006/relationships">
-  <p:cSld>
-    <p:spTree>
-      <p:nvGrpSpPr>
-        <p:cNvPr id="1" name=""/>
-        <p:cNvGrpSpPr/>
-        <p:nvPr/>
-      </p:nvGrpSpPr>
-      <p:grpSpPr/>
-      <p:sp>
-        <p:nvSpPr>
-          <p:cNvPr id="2" name="Title 1"/>
-          <p:cNvSpPr>
-            <a:spLocks noGrp="1"/>
-          </p:cNvSpPr>
-          <p:nvPr>
-            <p:ph type="title"/>
-          </p:nvPr>
-        </p:nvSpPr>
-        <p:spPr>
-          <a:xfrm>
-            <a:off x="838504" y="364845"/>
-            <a:ext cx="10515600" cy="1325880"/>
-          </a:xfrm>
-        </p:spPr>
-        <p:txBody>
-          <a:bodyPr wrap="square" lIns="0" rIns="0" tIns="0" bIns="0">
-            <a:noAutofit/>
-          </a:bodyPr>
-          <a:lstStyle/>
-          <a:p>
-            <a:pPr algn="l">
-              <a:lnSpc>
-                <a:spcPct val="112000"/>
-              </a:lnSpc>
-              <a:spcAft>
-                <a:spcPts val="0"/>
-              </a:spcAft>
-              <a:buNone/>
-            </a:pPr>
-            <a:r>
-              <a:rPr sz="4400" b="0" lang="ja-JP">
-                <a:solidFill>
-                  <a:srgbClr val="111111"/>
-                </a:solidFill>
-                <a:latin typeface="游ゴシック Light"/>
-                <a:ea typeface="游ゴシック Light"/>
-              </a:rPr>
-              <a:t>目的と使用データ</a:t>
-            </a:r>
-          </a:p>
-        </p:txBody>
-      </p:sp>
-      <p:sp>
-        <p:nvSpPr>
-          <p:cNvPr id="3" name="TextBox 2"/>
-          <p:cNvSpPr txBox="1"/>
-          <p:nvPr/>
-        </p:nvSpPr>
-        <p:spPr>
-          <a:xfrm>
-            <a:off x="10881360" y="6510528"/>
-            <a:ext cx="457200" cy="201168"/>
-          </a:xfrm>
-          <a:prstGeom prst="rect">
-            <a:avLst/>
-          </a:prstGeom>
-          <a:noFill/>
-        </p:spPr>
-        <p:txBody>
-          <a:bodyPr wrap="square" lIns="0" rIns="0" tIns="0" bIns="0">
-            <a:noAutofit/>
-          </a:bodyPr>
-          <a:lstStyle/>
-          <a:p>
-            <a:pPr algn="r">
-              <a:lnSpc>
-                <a:spcPct val="112000"/>
-              </a:lnSpc>
-              <a:spcAft>
-                <a:spcPts val="0"/>
-              </a:spcAft>
-              <a:buNone/>
-            </a:pPr>
-            <a:r>
-              <a:rPr sz="1200" b="0" lang="ja-JP">
-                <a:solidFill>
-                  <a:srgbClr val="555555"/>
-                </a:solidFill>
-                <a:latin typeface="游ゴシック"/>
-                <a:ea typeface="游ゴシック"/>
-              </a:rPr>
-              <a:t>3</a:t>
-            </a:r>
-          </a:p>
-        </p:txBody>
-      </p:sp>
-      <p:sp>
-        <p:nvSpPr>
-          <p:cNvPr id="4" name="TextBox 3"/>
-          <p:cNvSpPr txBox="1"/>
-          <p:nvPr/>
-        </p:nvSpPr>
-        <p:spPr>
-          <a:xfrm>
-            <a:off x="838504" y="1819656"/>
-            <a:ext cx="10515600" cy="868680"/>
-          </a:xfrm>
-          <a:prstGeom prst="rect">
-            <a:avLst/>
-          </a:prstGeom>
-          <a:noFill/>
-        </p:spPr>
-        <p:txBody>
-          <a:bodyPr wrap="square" lIns="0" rIns="0" tIns="0" bIns="0">
-            <a:noAutofit/>
-          </a:bodyPr>
-          <a:lstStyle/>
-          <a:p>
-            <a:pPr algn="l">
-              <a:lnSpc>
-                <a:spcPct val="112000"/>
-              </a:lnSpc>
-              <a:spcAft>
-                <a:spcPts val="0"/>
-              </a:spcAft>
-              <a:buNone/>
-            </a:pPr>
-            <a:r>
-              <a:rPr sz="2800" b="0" lang="ja-JP">
-                <a:solidFill>
-                  <a:srgbClr val="111111"/>
-                </a:solidFill>
-                <a:latin typeface="游ゴシック"/>
-                <a:ea typeface="游ゴシック"/>
-              </a:rPr>
-              <a:t>目的：投球の時刻と表示の変化を対応付け、</a:t>
-            </a:r>
-            <a:br/>
-            <a:r>
-              <a:rPr sz="2800" b="0" lang="ja-JP">
-                <a:solidFill>
-                  <a:srgbClr val="111111"/>
-                </a:solidFill>
-                <a:latin typeface="游ゴシック"/>
-                <a:ea typeface="游ゴシック"/>
-              </a:rPr>
-              <a:t>　　　野球イベントの判定につなげる</a:t>
-            </a:r>
-          </a:p>
-        </p:txBody>
-      </p:sp>
       <p:graphicFrame>
         <p:nvGraphicFramePr>
-          <p:cNvPr id="5" name="Table 4"/>
+          <p:cNvPr id="4" name="Table 3"/>
           <p:cNvGraphicFramePr>
             <a:graphicFrameLocks noGrp="1"/>
           </p:cNvGraphicFramePr>
           <p:nvPr/>
         </p:nvGraphicFramePr>
         <p:xfrm>
-          <a:off x="838504" y="2944368"/>
-          <a:ext cx="10515600" cy="2560320"/>
+          <a:off x="838504" y="1856231"/>
+          <a:ext cx="10515600" cy="2962656"/>
         </p:xfrm>
         <a:graphic>
           <a:graphicData uri="http://schemas.openxmlformats.org/drawingml/2006/table">
@@ -7935,10 +8486,11 @@
                 <a:tableStyleId>{5C22544A-7EE6-4342-B048-85BDC9FD1C3A}</a:tableStyleId>
               </a:tblPr>
               <a:tblGrid>
-                <a:gridCol w="2926080"/>
-                <a:gridCol w="7589520"/>
+                <a:gridCol w="1828800"/>
+                <a:gridCol w="3657600"/>
+                <a:gridCol w="5029200"/>
               </a:tblGrid>
-              <a:tr h="512064">
+              <a:tr h="740664">
                 <a:tc>
                   <a:txBody>
                     <a:bodyPr wrap="square" lIns="0" rIns="0" tIns="0" bIns="0">
@@ -7963,7 +8515,7 @@
                           <a:latin typeface="游ゴシック"/>
                           <a:ea typeface="游ゴシック"/>
                         </a:rPr>
-                        <a:t>項目</a:t>
+                        <a:t>時期</a:t>
                       </a:r>
                     </a:p>
                   </a:txBody>
@@ -8017,7 +8569,7 @@
                           <a:latin typeface="游ゴシック"/>
                           <a:ea typeface="游ゴシック"/>
                         </a:rPr>
-                        <a:t>今回の条件</a:t>
+                        <a:t>取り組んだ処理</a:t>
                       </a:r>
                     </a:p>
                   </a:txBody>
@@ -8047,8 +8599,62 @@
                     </a:lnB>
                   </a:tcPr>
                 </a:tc>
+                <a:tc>
+                  <a:txBody>
+                    <a:bodyPr wrap="square" lIns="0" rIns="0" tIns="0" bIns="0">
+                      <a:noAutofit/>
+                    </a:bodyPr>
+                    <a:lstStyle/>
+                    <a:p>
+                      <a:pPr algn="l">
+                        <a:lnSpc>
+                          <a:spcPct val="112000"/>
+                        </a:lnSpc>
+                        <a:spcAft>
+                          <a:spcPts val="0"/>
+                        </a:spcAft>
+                        <a:buNone/>
+                      </a:pPr>
+                      <a:r>
+                        <a:rPr sz="2400" b="1" lang="ja-JP">
+                          <a:solidFill>
+                            <a:srgbClr val="111111"/>
+                          </a:solidFill>
+                          <a:latin typeface="游ゴシック"/>
+                          <a:ea typeface="游ゴシック"/>
+                        </a:rPr>
+                        <a:t>確認してきたこと</a:t>
+                      </a:r>
+                    </a:p>
+                  </a:txBody>
+                  <a:tcPr marL="118872" marR="91440" marT="64008" marB="36576" anchor="ctr">
+                    <a:solidFill>
+                      <a:srgbClr val="EEEEEE"/>
+                    </a:solidFill>
+                    <a:lnL w="7000">
+                      <a:solidFill>
+                        <a:srgbClr val="BFBFBF"/>
+                      </a:solidFill>
+                    </a:lnL>
+                    <a:lnR w="7000">
+                      <a:solidFill>
+                        <a:srgbClr val="BFBFBF"/>
+                      </a:solidFill>
+                    </a:lnR>
+                    <a:lnT w="7000">
+                      <a:solidFill>
+                        <a:srgbClr val="BFBFBF"/>
+                      </a:solidFill>
+                    </a:lnT>
+                    <a:lnB w="7000">
+                      <a:solidFill>
+                        <a:srgbClr val="BFBFBF"/>
+                      </a:solidFill>
+                    </a:lnB>
+                  </a:tcPr>
+                </a:tc>
               </a:tr>
-              <a:tr h="512064">
+              <a:tr h="740664">
                 <a:tc>
                   <a:txBody>
                     <a:bodyPr wrap="square" lIns="0" rIns="0" tIns="0" bIns="0">
@@ -8073,7 +8679,7 @@
                           <a:latin typeface="游ゴシック"/>
                           <a:ea typeface="游ゴシック"/>
                         </a:rPr>
-                        <a:t>対象</a:t>
+                        <a:t>5〜9月</a:t>
                       </a:r>
                     </a:p>
                   </a:txBody>
@@ -8127,63 +8733,7 @@
                           <a:latin typeface="游ゴシック"/>
                           <a:ea typeface="游ゴシック"/>
                         </a:rPr>
-                        <a:t>5ura.mp4（5回ウラの動画全体）</a:t>
-                      </a:r>
-                    </a:p>
-                  </a:txBody>
-                  <a:tcPr marL="118872" marR="91440" marT="64008" marB="36576" anchor="ctr">
-                    <a:solidFill>
-                      <a:srgbClr val="FFFFFF"/>
-                    </a:solidFill>
-                    <a:lnL w="7000">
-                      <a:solidFill>
-                        <a:srgbClr val="BFBFBF"/>
-                      </a:solidFill>
-                    </a:lnL>
-                    <a:lnR w="7000">
-                      <a:solidFill>
-                        <a:srgbClr val="BFBFBF"/>
-                      </a:solidFill>
-                    </a:lnR>
-                    <a:lnT w="7000">
-                      <a:solidFill>
-                        <a:srgbClr val="BFBFBF"/>
-                      </a:solidFill>
-                    </a:lnT>
-                    <a:lnB w="7000">
-                      <a:solidFill>
-                        <a:srgbClr val="BFBFBF"/>
-                      </a:solidFill>
-                    </a:lnB>
-                  </a:tcPr>
-                </a:tc>
-              </a:tr>
-              <a:tr h="512064">
-                <a:tc>
-                  <a:txBody>
-                    <a:bodyPr wrap="square" lIns="0" rIns="0" tIns="0" bIns="0">
-                      <a:noAutofit/>
-                    </a:bodyPr>
-                    <a:lstStyle/>
-                    <a:p>
-                      <a:pPr algn="l">
-                        <a:lnSpc>
-                          <a:spcPct val="112000"/>
-                        </a:lnSpc>
-                        <a:spcAft>
-                          <a:spcPts val="0"/>
-                        </a:spcAft>
-                        <a:buNone/>
-                      </a:pPr>
-                      <a:r>
-                        <a:rPr sz="2400" b="0" lang="ja-JP">
-                          <a:solidFill>
-                            <a:srgbClr val="111111"/>
-                          </a:solidFill>
-                          <a:latin typeface="游ゴシック"/>
-                          <a:ea typeface="游ゴシック"/>
-                        </a:rPr>
-                        <a:t>長さ</a:t>
+                        <a:t>YOLO ＋ PaddleOCR</a:t>
                       </a:r>
                     </a:p>
                   </a:txBody>
@@ -8237,7 +8787,7 @@
                           <a:latin typeface="游ゴシック"/>
                           <a:ea typeface="游ゴシック"/>
                         </a:rPr>
-                        <a:t>530.2秒（約8分50秒）</a:t>
+                        <a:t>表示の認識とCSV化</a:t>
                       </a:r>
                     </a:p>
                   </a:txBody>
@@ -8268,7 +8818,7 @@
                   </a:tcPr>
                 </a:tc>
               </a:tr>
-              <a:tr h="512064">
+              <a:tr h="740664">
                 <a:tc>
                   <a:txBody>
                     <a:bodyPr wrap="square" lIns="0" rIns="0" tIns="0" bIns="0">
@@ -8293,7 +8843,7 @@
                           <a:latin typeface="游ゴシック"/>
                           <a:ea typeface="游ゴシック"/>
                         </a:rPr>
-                        <a:t>映像</a:t>
+                        <a:t>10月</a:t>
                       </a:r>
                     </a:p>
                   </a:txBody>
@@ -8347,63 +8897,7 @@
                           <a:latin typeface="游ゴシック"/>
                           <a:ea typeface="游ゴシック"/>
                         </a:rPr>
-                        <a:t>30 fps ／ 15,906フレーム ／ 1920×1080</a:t>
-                      </a:r>
-                    </a:p>
-                  </a:txBody>
-                  <a:tcPr marL="118872" marR="91440" marT="64008" marB="36576" anchor="ctr">
-                    <a:solidFill>
-                      <a:srgbClr val="FFFFFF"/>
-                    </a:solidFill>
-                    <a:lnL w="7000">
-                      <a:solidFill>
-                        <a:srgbClr val="BFBFBF"/>
-                      </a:solidFill>
-                    </a:lnL>
-                    <a:lnR w="7000">
-                      <a:solidFill>
-                        <a:srgbClr val="BFBFBF"/>
-                      </a:solidFill>
-                    </a:lnR>
-                    <a:lnT w="7000">
-                      <a:solidFill>
-                        <a:srgbClr val="BFBFBF"/>
-                      </a:solidFill>
-                    </a:lnT>
-                    <a:lnB w="7000">
-                      <a:solidFill>
-                        <a:srgbClr val="BFBFBF"/>
-                      </a:solidFill>
-                    </a:lnB>
-                  </a:tcPr>
-                </a:tc>
-              </a:tr>
-              <a:tr h="512064">
-                <a:tc>
-                  <a:txBody>
-                    <a:bodyPr wrap="square" lIns="0" rIns="0" tIns="0" bIns="0">
-                      <a:noAutofit/>
-                    </a:bodyPr>
-                    <a:lstStyle/>
-                    <a:p>
-                      <a:pPr algn="l">
-                        <a:lnSpc>
-                          <a:spcPct val="112000"/>
-                        </a:lnSpc>
-                        <a:spcAft>
-                          <a:spcPts val="0"/>
-                        </a:spcAft>
-                        <a:buNone/>
-                      </a:pPr>
-                      <a:r>
-                        <a:rPr sz="2400" b="0" lang="ja-JP">
-                          <a:solidFill>
-                            <a:srgbClr val="111111"/>
-                          </a:solidFill>
-                          <a:latin typeface="游ゴシック"/>
-                          <a:ea typeface="游ゴシック"/>
-                        </a:rPr>
-                        <a:t>学習・評価</a:t>
+                        <a:t>VideoMAE ＋ 区間検出</a:t>
                       </a:r>
                     </a:p>
                   </a:txBody>
@@ -8457,7 +8951,7 @@
                           <a:latin typeface="游ゴシック"/>
                           <a:ea typeface="游ゴシック"/>
                         </a:rPr>
-                        <a:t>既存モデルを使用 ／ 今回の正解注釈は未作成</a:t>
+                        <a:t>短編10動画24球の投球区間</a:t>
                       </a:r>
                     </a:p>
                   </a:txBody>
@@ -8488,20 +8982,184 @@
                   </a:tcPr>
                 </a:tc>
               </a:tr>
+              <a:tr h="740664">
+                <a:tc>
+                  <a:txBody>
+                    <a:bodyPr wrap="square" lIns="0" rIns="0" tIns="0" bIns="0">
+                      <a:noAutofit/>
+                    </a:bodyPr>
+                    <a:lstStyle/>
+                    <a:p>
+                      <a:pPr algn="l">
+                        <a:lnSpc>
+                          <a:spcPct val="112000"/>
+                        </a:lnSpc>
+                        <a:spcAft>
+                          <a:spcPts val="0"/>
+                        </a:spcAft>
+                        <a:buNone/>
+                      </a:pPr>
+                      <a:r>
+                        <a:rPr sz="2400" b="0" lang="ja-JP">
+                          <a:solidFill>
+                            <a:srgbClr val="111111"/>
+                          </a:solidFill>
+                          <a:latin typeface="游ゴシック"/>
+                          <a:ea typeface="游ゴシック"/>
+                        </a:rPr>
+                        <a:t>今週</a:t>
+                      </a:r>
+                    </a:p>
+                  </a:txBody>
+                  <a:tcPr marL="118872" marR="91440" marT="64008" marB="36576" anchor="ctr">
+                    <a:solidFill>
+                      <a:srgbClr val="FFF4D8"/>
+                    </a:solidFill>
+                    <a:lnL w="7000">
+                      <a:solidFill>
+                        <a:srgbClr val="BFBFBF"/>
+                      </a:solidFill>
+                    </a:lnL>
+                    <a:lnR w="7000">
+                      <a:solidFill>
+                        <a:srgbClr val="BFBFBF"/>
+                      </a:solidFill>
+                    </a:lnR>
+                    <a:lnT w="7000">
+                      <a:solidFill>
+                        <a:srgbClr val="BFBFBF"/>
+                      </a:solidFill>
+                    </a:lnT>
+                    <a:lnB w="7000">
+                      <a:solidFill>
+                        <a:srgbClr val="BFBFBF"/>
+                      </a:solidFill>
+                    </a:lnB>
+                  </a:tcPr>
+                </a:tc>
+                <a:tc>
+                  <a:txBody>
+                    <a:bodyPr wrap="square" lIns="0" rIns="0" tIns="0" bIns="0">
+                      <a:noAutofit/>
+                    </a:bodyPr>
+                    <a:lstStyle/>
+                    <a:p>
+                      <a:pPr algn="l">
+                        <a:lnSpc>
+                          <a:spcPct val="112000"/>
+                        </a:lnSpc>
+                        <a:spcAft>
+                          <a:spcPts val="0"/>
+                        </a:spcAft>
+                        <a:buNone/>
+                      </a:pPr>
+                      <a:r>
+                        <a:rPr sz="2400" b="0" lang="ja-JP">
+                          <a:solidFill>
+                            <a:srgbClr val="111111"/>
+                          </a:solidFill>
+                          <a:latin typeface="游ゴシック"/>
+                          <a:ea typeface="游ゴシック"/>
+                        </a:rPr>
+                        <a:t>全処理を統合適用</a:t>
+                      </a:r>
+                    </a:p>
+                  </a:txBody>
+                  <a:tcPr marL="118872" marR="91440" marT="64008" marB="36576" anchor="ctr">
+                    <a:solidFill>
+                      <a:srgbClr val="FFF4D8"/>
+                    </a:solidFill>
+                    <a:lnL w="7000">
+                      <a:solidFill>
+                        <a:srgbClr val="BFBFBF"/>
+                      </a:solidFill>
+                    </a:lnL>
+                    <a:lnR w="7000">
+                      <a:solidFill>
+                        <a:srgbClr val="BFBFBF"/>
+                      </a:solidFill>
+                    </a:lnR>
+                    <a:lnT w="7000">
+                      <a:solidFill>
+                        <a:srgbClr val="BFBFBF"/>
+                      </a:solidFill>
+                    </a:lnT>
+                    <a:lnB w="7000">
+                      <a:solidFill>
+                        <a:srgbClr val="BFBFBF"/>
+                      </a:solidFill>
+                    </a:lnB>
+                  </a:tcPr>
+                </a:tc>
+                <a:tc>
+                  <a:txBody>
+                    <a:bodyPr wrap="square" lIns="0" rIns="0" tIns="0" bIns="0">
+                      <a:noAutofit/>
+                    </a:bodyPr>
+                    <a:lstStyle/>
+                    <a:p>
+                      <a:pPr algn="l">
+                        <a:lnSpc>
+                          <a:spcPct val="112000"/>
+                        </a:lnSpc>
+                        <a:spcAft>
+                          <a:spcPts val="0"/>
+                        </a:spcAft>
+                        <a:buNone/>
+                      </a:pPr>
+                      <a:r>
+                        <a:rPr sz="2400" b="0" lang="ja-JP">
+                          <a:solidFill>
+                            <a:srgbClr val="111111"/>
+                          </a:solidFill>
+                          <a:latin typeface="游ゴシック"/>
+                          <a:ea typeface="游ゴシック"/>
+                        </a:rPr>
+                        <a:t>投球と各状況の対応付け</a:t>
+                      </a:r>
+                    </a:p>
+                  </a:txBody>
+                  <a:tcPr marL="118872" marR="91440" marT="64008" marB="36576" anchor="ctr">
+                    <a:solidFill>
+                      <a:srgbClr val="FFF4D8"/>
+                    </a:solidFill>
+                    <a:lnL w="7000">
+                      <a:solidFill>
+                        <a:srgbClr val="BFBFBF"/>
+                      </a:solidFill>
+                    </a:lnL>
+                    <a:lnR w="7000">
+                      <a:solidFill>
+                        <a:srgbClr val="BFBFBF"/>
+                      </a:solidFill>
+                    </a:lnR>
+                    <a:lnT w="7000">
+                      <a:solidFill>
+                        <a:srgbClr val="BFBFBF"/>
+                      </a:solidFill>
+                    </a:lnT>
+                    <a:lnB w="7000">
+                      <a:solidFill>
+                        <a:srgbClr val="BFBFBF"/>
+                      </a:solidFill>
+                    </a:lnB>
+                  </a:tcPr>
+                </a:tc>
+              </a:tr>
             </a:tbl>
           </a:graphicData>
         </a:graphic>
       </p:graphicFrame>
       <p:sp>
         <p:nvSpPr>
-          <p:cNvPr id="6" name="TextBox 5"/>
+          <p:cNvPr id="5" name="TextBox 4"/>
           <p:cNvSpPr txBox="1"/>
           <p:nvPr/>
         </p:nvSpPr>
         <p:spPr>
           <a:xfrm>
-            <a:off x="838504" y="5870448"/>
-            <a:ext cx="10515600" cy="347472"/>
+            <a:off x="838504" y="5148072"/>
+            <a:ext cx="10515600" cy="1143000"/>
           </a:xfrm>
           <a:prstGeom prst="rect">
             <a:avLst/>
@@ -8519,19 +9177,40 @@
                 <a:spcPct val="112000"/>
               </a:lnSpc>
               <a:spcAft>
-                <a:spcPts val="1000"/>
+                <a:spcPts val="1400"/>
               </a:spcAft>
               <a:buNone/>
             </a:pPr>
             <a:r>
-              <a:rPr sz="2300" b="0" lang="ja-JP">
+              <a:rPr sz="2600" b="0" lang="ja-JP">
                 <a:solidFill>
                   <a:srgbClr val="111111"/>
                 </a:solidFill>
                 <a:latin typeface="游ゴシック"/>
                 <a:ea typeface="游ゴシック"/>
               </a:rPr>
-              <a:t>追加学習は行わず、同じ動画への適用と結果の照合を確認した。</a:t>
+              <a:t>• 対象は5回ウラ全体（530.2秒）</a:t>
+            </a:r>
+          </a:p>
+          <a:p>
+            <a:pPr algn="l">
+              <a:lnSpc>
+                <a:spcPct val="112000"/>
+              </a:lnSpc>
+              <a:spcAft>
+                <a:spcPts val="1400"/>
+              </a:spcAft>
+              <a:buNone/>
+            </a:pPr>
+            <a:r>
+              <a:rPr sz="2600" b="0" lang="ja-JP">
+                <a:solidFill>
+                  <a:srgbClr val="111111"/>
+                </a:solidFill>
+                <a:latin typeface="游ゴシック"/>
+                <a:ea typeface="游ゴシック"/>
+              </a:rPr>
+              <a:t>• 各手法の確認から、投球と状況の対応付けの確認へ</a:t>
             </a:r>
           </a:p>
         </p:txBody>
@@ -8544,7 +9223,7 @@
 </p:sld>
 </file>
 
-<file path=ppt/slides/slide4.xml><?xml version="1.0" encoding="utf-8"?>
+<file path=ppt/slides/slide3.xml><?xml version="1.0" encoding="utf-8"?>
 <p:sld xmlns:a="http://schemas.openxmlformats.org/drawingml/2006/main" xmlns:p="http://schemas.openxmlformats.org/presentationml/2006/main" xmlns:r="http://schemas.openxmlformats.org/officeDocument/2006/relationships">
   <p:cSld>
     <p:spTree>
@@ -8593,7 +9272,7 @@
                 <a:latin typeface="游ゴシック Light"/>
                 <a:ea typeface="游ゴシック Light"/>
               </a:rPr>
-              <a:t>3つの処理を同じ時刻で照合</a:t>
+              <a:t>今週まとめて適用した内容</a:t>
             </a:r>
           </a:p>
         </p:txBody>
@@ -8637,60 +9316,39 @@
                 <a:latin typeface="游ゴシック"/>
                 <a:ea typeface="游ゴシック"/>
               </a:rPr>
-              <a:t>4</a:t>
+              <a:t>3</a:t>
             </a:r>
           </a:p>
         </p:txBody>
       </p:sp>
       <p:sp>
         <p:nvSpPr>
-          <p:cNvPr id="4" name="Rectangle 3"/>
-          <p:cNvSpPr/>
+          <p:cNvPr id="4" name="TextBox 3"/>
+          <p:cNvSpPr txBox="1"/>
           <p:nvPr/>
         </p:nvSpPr>
         <p:spPr>
           <a:xfrm>
-            <a:off x="868680" y="1828800"/>
-            <a:ext cx="10469880" cy="502920"/>
+            <a:off x="838504" y="1810512"/>
+            <a:ext cx="10515600" cy="411480"/>
           </a:xfrm>
           <a:prstGeom prst="rect">
             <a:avLst/>
           </a:prstGeom>
-          <a:solidFill>
-            <a:srgbClr val="FFFFFF"/>
-          </a:solidFill>
-          <a:ln w="12700">
-            <a:solidFill>
-              <a:srgbClr val="777777"/>
-            </a:solidFill>
-          </a:ln>
+          <a:noFill/>
         </p:spPr>
-        <p:style>
-          <a:lnRef idx="1">
-            <a:schemeClr val="accent1"/>
-          </a:lnRef>
-          <a:fillRef idx="3">
-            <a:schemeClr val="accent1"/>
-          </a:fillRef>
-          <a:effectRef idx="2">
-            <a:schemeClr val="accent1"/>
-          </a:effectRef>
-          <a:fontRef idx="minor">
-            <a:schemeClr val="lt1"/>
-          </a:fontRef>
-        </p:style>
         <p:txBody>
-          <a:bodyPr rtlCol="0" anchor="ctr" wrap="square" tIns="0" bIns="0">
+          <a:bodyPr wrap="square" lIns="0" rIns="0" tIns="0" bIns="0">
             <a:noAutofit/>
           </a:bodyPr>
           <a:lstStyle/>
           <a:p>
-            <a:pPr algn="ctr">
+            <a:pPr algn="l">
               <a:lnSpc>
                 <a:spcPct val="112000"/>
               </a:lnSpc>
               <a:spcAft>
-                <a:spcPts val="0"/>
+                <a:spcPts val="1000"/>
               </a:spcAft>
               <a:buNone/>
             </a:pPr>
@@ -8702,93 +9360,21 @@
                 <a:latin typeface="游ゴシック"/>
                 <a:ea typeface="游ゴシック"/>
               </a:rPr>
-              <a:t>入力：同じ試合映像 5ura.mp4</a:t>
+              <a:t>入力：5ura.mp4全体 ／ 30 fps ／ 追加学習なし</a:t>
             </a:r>
           </a:p>
         </p:txBody>
       </p:sp>
-      <p:cxnSp>
-        <p:nvCxnSpPr>
-          <p:cNvPr id="5" name="Connector 4"/>
-          <p:cNvCxnSpPr/>
+      <p:sp>
+        <p:nvSpPr>
+          <p:cNvPr id="5" name="Rectangle 4"/>
+          <p:cNvSpPr/>
           <p:nvPr/>
-        </p:nvCxnSpPr>
+        </p:nvSpPr>
         <p:spPr>
           <a:xfrm>
-            <a:off x="2468880" y="2331720"/>
-            <a:ext cx="0" cy="457200"/>
-          </a:xfrm>
-          <a:prstGeom prst="line">
-            <a:avLst/>
-          </a:prstGeom>
-          <a:ln w="20320">
-            <a:solidFill>
-              <a:srgbClr val="555555"/>
-            </a:solidFill>
-            <a:tailEnd type="triangle"/>
-          </a:ln>
-        </p:spPr>
-        <p:style>
-          <a:lnRef idx="2">
-            <a:schemeClr val="accent1"/>
-          </a:lnRef>
-          <a:fillRef idx="0">
-            <a:schemeClr val="accent1"/>
-          </a:fillRef>
-          <a:effectRef idx="1">
-            <a:schemeClr val="accent1"/>
-          </a:effectRef>
-          <a:fontRef idx="minor">
-            <a:schemeClr val="tx1"/>
-          </a:fontRef>
-        </p:style>
-      </p:cxnSp>
-      <p:cxnSp>
-        <p:nvCxnSpPr>
-          <p:cNvPr id="6" name="Connector 5"/>
-          <p:cNvCxnSpPr/>
-          <p:nvPr/>
-        </p:nvCxnSpPr>
-        <p:spPr>
-          <a:xfrm>
-            <a:off x="9646920" y="2331720"/>
-            <a:ext cx="0" cy="457200"/>
-          </a:xfrm>
-          <a:prstGeom prst="line">
-            <a:avLst/>
-          </a:prstGeom>
-          <a:ln w="20320">
-            <a:solidFill>
-              <a:srgbClr val="555555"/>
-            </a:solidFill>
-            <a:tailEnd type="triangle"/>
-          </a:ln>
-        </p:spPr>
-        <p:style>
-          <a:lnRef idx="2">
-            <a:schemeClr val="accent1"/>
-          </a:lnRef>
-          <a:fillRef idx="0">
-            <a:schemeClr val="accent1"/>
-          </a:fillRef>
-          <a:effectRef idx="1">
-            <a:schemeClr val="accent1"/>
-          </a:effectRef>
-          <a:fontRef idx="minor">
-            <a:schemeClr val="tx1"/>
-          </a:fontRef>
-        </p:style>
-      </p:cxnSp>
-      <p:sp>
-        <p:nvSpPr>
-          <p:cNvPr id="7" name="Rectangle 6"/>
-          <p:cNvSpPr/>
-          <p:nvPr/>
-        </p:nvSpPr>
-        <p:spPr>
-          <a:xfrm>
-            <a:off x="868680" y="2788920"/>
-            <a:ext cx="3200400" cy="1371600"/>
+            <a:off x="868680" y="2697480"/>
+            <a:ext cx="3200400" cy="1234440"/>
           </a:xfrm>
           <a:prstGeom prst="rect">
             <a:avLst/>
@@ -8832,50 +9418,39 @@
               <a:buNone/>
             </a:pPr>
             <a:r>
-              <a:rPr sz="2400" b="0" lang="ja-JP">
+              <a:rPr sz="2500" b="0" lang="ja-JP">
                 <a:solidFill>
                   <a:srgbClr val="111111"/>
                 </a:solidFill>
                 <a:latin typeface="游ゴシック"/>
                 <a:ea typeface="游ゴシック"/>
               </a:rPr>
-              <a:t>YOLO（2段階）</a:t>
+              <a:t>YOLO</a:t>
             </a:r>
             <a:br/>
             <a:r>
-              <a:rPr sz="2400" b="0" lang="ja-JP">
+              <a:rPr sz="2500" b="0" lang="ja-JP">
                 <a:solidFill>
                   <a:srgbClr val="111111"/>
                 </a:solidFill>
                 <a:latin typeface="游ゴシック"/>
                 <a:ea typeface="游ゴシック"/>
               </a:rPr>
-              <a:t>表示位置</a:t>
-            </a:r>
-            <a:br/>
-            <a:r>
-              <a:rPr sz="2400" b="0" lang="ja-JP">
-                <a:solidFill>
-                  <a:srgbClr val="111111"/>
-                </a:solidFill>
-                <a:latin typeface="游ゴシック"/>
-                <a:ea typeface="游ゴシック"/>
-              </a:rPr>
-              <a:t>B/S/O・走者</a:t>
+              <a:t>B/S/O・各塁の走者</a:t>
             </a:r>
           </a:p>
         </p:txBody>
       </p:sp>
       <p:sp>
         <p:nvSpPr>
-          <p:cNvPr id="8" name="Rectangle 7"/>
+          <p:cNvPr id="6" name="Rectangle 5"/>
           <p:cNvSpPr/>
           <p:nvPr/>
         </p:nvSpPr>
         <p:spPr>
           <a:xfrm>
-            <a:off x="4434840" y="2788920"/>
-            <a:ext cx="3154680" cy="1371600"/>
+            <a:off x="4434840" y="2697480"/>
+            <a:ext cx="3154680" cy="1234440"/>
           </a:xfrm>
           <a:prstGeom prst="rect">
             <a:avLst/>
@@ -8926,7 +9501,7 @@
                 <a:latin typeface="游ゴシック"/>
                 <a:ea typeface="游ゴシック"/>
               </a:rPr>
-              <a:t>PaddleOCR v6</a:t>
+              <a:t>PaddleOCR</a:t>
             </a:r>
             <a:br/>
             <a:r>
@@ -8937,21 +9512,21 @@
                 <a:latin typeface="游ゴシック"/>
                 <a:ea typeface="游ゴシック"/>
               </a:rPr>
-              <a:t>イニング・得点</a:t>
+              <a:t>回・表裏・両チーム得点</a:t>
             </a:r>
           </a:p>
         </p:txBody>
       </p:sp>
       <p:sp>
         <p:nvSpPr>
-          <p:cNvPr id="9" name="Rectangle 8"/>
+          <p:cNvPr id="7" name="Rectangle 6"/>
           <p:cNvSpPr/>
           <p:nvPr/>
         </p:nvSpPr>
         <p:spPr>
           <a:xfrm>
-            <a:off x="8001000" y="2788920"/>
-            <a:ext cx="3337560" cy="1371600"/>
+            <a:off x="8001000" y="2697480"/>
+            <a:ext cx="3337560" cy="1234440"/>
           </a:xfrm>
           <a:prstGeom prst="rect">
             <a:avLst/>
@@ -8995,49 +9570,49 @@
               <a:buNone/>
             </a:pPr>
             <a:r>
-              <a:rPr sz="2000" b="0" lang="ja-JP">
+              <a:rPr sz="2100" b="0" lang="ja-JP">
                 <a:solidFill>
                   <a:srgbClr val="111111"/>
                 </a:solidFill>
                 <a:latin typeface="游ゴシック"/>
                 <a:ea typeface="游ゴシック"/>
               </a:rPr>
-              <a:t>VideoMAE</a:t>
+              <a:t>VideoMAE ＋</a:t>
             </a:r>
             <a:br/>
             <a:r>
-              <a:rPr sz="2000" b="0" lang="ja-JP">
+              <a:rPr sz="2100" b="0" lang="ja-JP">
                 <a:solidFill>
                   <a:srgbClr val="111111"/>
                 </a:solidFill>
                 <a:latin typeface="游ゴシック"/>
                 <a:ea typeface="游ゴシック"/>
               </a:rPr>
-              <a:t>＋Compact ActionFormer</a:t>
+              <a:t>Compact ActionFormer</a:t>
             </a:r>
             <a:br/>
             <a:r>
-              <a:rPr sz="2000" b="0" lang="ja-JP">
+              <a:rPr sz="2100" b="0" lang="ja-JP">
                 <a:solidFill>
                   <a:srgbClr val="111111"/>
                 </a:solidFill>
                 <a:latin typeface="游ゴシック"/>
                 <a:ea typeface="游ゴシック"/>
               </a:rPr>
-              <a:t>投球開始・終了の候補</a:t>
+              <a:t>投球区間の候補</a:t>
             </a:r>
           </a:p>
         </p:txBody>
       </p:sp>
       <p:cxnSp>
         <p:nvCxnSpPr>
-          <p:cNvPr id="10" name="Connector 9"/>
+          <p:cNvPr id="8" name="Connector 7"/>
           <p:cNvCxnSpPr/>
           <p:nvPr/>
         </p:nvCxnSpPr>
         <p:spPr>
           <a:xfrm>
-            <a:off x="4069080" y="3383280"/>
+            <a:off x="4069080" y="3291840"/>
             <a:ext cx="365760" cy="0"/>
           </a:xfrm>
           <a:prstGeom prst="line">
@@ -9067,14 +9642,84 @@
       </p:cxnSp>
       <p:cxnSp>
         <p:nvCxnSpPr>
+          <p:cNvPr id="9" name="Connector 8"/>
+          <p:cNvCxnSpPr/>
+          <p:nvPr/>
+        </p:nvCxnSpPr>
+        <p:spPr>
+          <a:xfrm>
+            <a:off x="2468880" y="3931920"/>
+            <a:ext cx="0" cy="347472"/>
+          </a:xfrm>
+          <a:prstGeom prst="line">
+            <a:avLst/>
+          </a:prstGeom>
+          <a:ln w="20320">
+            <a:solidFill>
+              <a:srgbClr val="555555"/>
+            </a:solidFill>
+          </a:ln>
+        </p:spPr>
+        <p:style>
+          <a:lnRef idx="2">
+            <a:schemeClr val="accent1"/>
+          </a:lnRef>
+          <a:fillRef idx="0">
+            <a:schemeClr val="accent1"/>
+          </a:fillRef>
+          <a:effectRef idx="1">
+            <a:schemeClr val="accent1"/>
+          </a:effectRef>
+          <a:fontRef idx="minor">
+            <a:schemeClr val="tx1"/>
+          </a:fontRef>
+        </p:style>
+      </p:cxnSp>
+      <p:cxnSp>
+        <p:nvCxnSpPr>
+          <p:cNvPr id="10" name="Connector 9"/>
+          <p:cNvCxnSpPr/>
+          <p:nvPr/>
+        </p:nvCxnSpPr>
+        <p:spPr>
+          <a:xfrm>
+            <a:off x="6012180" y="3931920"/>
+            <a:ext cx="0" cy="347472"/>
+          </a:xfrm>
+          <a:prstGeom prst="line">
+            <a:avLst/>
+          </a:prstGeom>
+          <a:ln w="20320">
+            <a:solidFill>
+              <a:srgbClr val="555555"/>
+            </a:solidFill>
+          </a:ln>
+        </p:spPr>
+        <p:style>
+          <a:lnRef idx="2">
+            <a:schemeClr val="accent1"/>
+          </a:lnRef>
+          <a:fillRef idx="0">
+            <a:schemeClr val="accent1"/>
+          </a:fillRef>
+          <a:effectRef idx="1">
+            <a:schemeClr val="accent1"/>
+          </a:effectRef>
+          <a:fontRef idx="minor">
+            <a:schemeClr val="tx1"/>
+          </a:fontRef>
+        </p:style>
+      </p:cxnSp>
+      <p:cxnSp>
+        <p:nvCxnSpPr>
           <p:cNvPr id="11" name="Connector 10"/>
           <p:cNvCxnSpPr/>
           <p:nvPr/>
         </p:nvCxnSpPr>
         <p:spPr>
           <a:xfrm>
-            <a:off x="2468880" y="4160520"/>
-            <a:ext cx="0" cy="228600"/>
+            <a:off x="9669780" y="3931920"/>
+            <a:ext cx="0" cy="347472"/>
           </a:xfrm>
           <a:prstGeom prst="line">
             <a:avLst/>
@@ -9108,8 +9753,8 @@
         </p:nvCxnSpPr>
         <p:spPr>
           <a:xfrm>
-            <a:off x="6012180" y="4160520"/>
-            <a:ext cx="0" cy="228600"/>
+            <a:off x="2468880" y="4279392"/>
+            <a:ext cx="7200900" cy="0"/>
           </a:xfrm>
           <a:prstGeom prst="line">
             <a:avLst/>
@@ -9143,78 +9788,8 @@
         </p:nvCxnSpPr>
         <p:spPr>
           <a:xfrm>
-            <a:off x="9669780" y="4160520"/>
-            <a:ext cx="0" cy="228600"/>
-          </a:xfrm>
-          <a:prstGeom prst="line">
-            <a:avLst/>
-          </a:prstGeom>
-          <a:ln w="20320">
-            <a:solidFill>
-              <a:srgbClr val="555555"/>
-            </a:solidFill>
-          </a:ln>
-        </p:spPr>
-        <p:style>
-          <a:lnRef idx="2">
-            <a:schemeClr val="accent1"/>
-          </a:lnRef>
-          <a:fillRef idx="0">
-            <a:schemeClr val="accent1"/>
-          </a:fillRef>
-          <a:effectRef idx="1">
-            <a:schemeClr val="accent1"/>
-          </a:effectRef>
-          <a:fontRef idx="minor">
-            <a:schemeClr val="tx1"/>
-          </a:fontRef>
-        </p:style>
-      </p:cxnSp>
-      <p:cxnSp>
-        <p:nvCxnSpPr>
-          <p:cNvPr id="14" name="Connector 13"/>
-          <p:cNvCxnSpPr/>
-          <p:nvPr/>
-        </p:nvCxnSpPr>
-        <p:spPr>
-          <a:xfrm>
-            <a:off x="2468880" y="4389120"/>
-            <a:ext cx="7200900" cy="0"/>
-          </a:xfrm>
-          <a:prstGeom prst="line">
-            <a:avLst/>
-          </a:prstGeom>
-          <a:ln w="20320">
-            <a:solidFill>
-              <a:srgbClr val="555555"/>
-            </a:solidFill>
-          </a:ln>
-        </p:spPr>
-        <p:style>
-          <a:lnRef idx="2">
-            <a:schemeClr val="accent1"/>
-          </a:lnRef>
-          <a:fillRef idx="0">
-            <a:schemeClr val="accent1"/>
-          </a:fillRef>
-          <a:effectRef idx="1">
-            <a:schemeClr val="accent1"/>
-          </a:effectRef>
-          <a:fontRef idx="minor">
-            <a:schemeClr val="tx1"/>
-          </a:fontRef>
-        </p:style>
-      </p:cxnSp>
-      <p:cxnSp>
-        <p:nvCxnSpPr>
-          <p:cNvPr id="15" name="Connector 14"/>
-          <p:cNvCxnSpPr/>
-          <p:nvPr/>
-        </p:nvCxnSpPr>
-        <p:spPr>
-          <a:xfrm>
-            <a:off x="6012180" y="4389120"/>
-            <a:ext cx="0" cy="228600"/>
+            <a:off x="6012180" y="4279392"/>
+            <a:ext cx="0" cy="274320"/>
           </a:xfrm>
           <a:prstGeom prst="line">
             <a:avLst/>
@@ -9243,14 +9818,14 @@
       </p:cxnSp>
       <p:sp>
         <p:nvSpPr>
-          <p:cNvPr id="16" name="Rectangle 15"/>
+          <p:cNvPr id="14" name="Rectangle 13"/>
           <p:cNvSpPr/>
           <p:nvPr/>
         </p:nvSpPr>
         <p:spPr>
           <a:xfrm>
-            <a:off x="868680" y="4617720"/>
-            <a:ext cx="10469880" cy="713232"/>
+            <a:off x="868680" y="4553712"/>
+            <a:ext cx="10469880" cy="777240"/>
           </a:xfrm>
           <a:prstGeom prst="rect">
             <a:avLst/>
@@ -9301,21 +9876,21 @@
                 <a:latin typeface="游ゴシック"/>
                 <a:ea typeface="游ゴシック"/>
               </a:rPr>
-              <a:t>同じ時刻の投球候補と、前後のカウント・得点を照合</a:t>
+              <a:t>1候補ごとに、投球区間と前後の全項目を対応付ける</a:t>
             </a:r>
           </a:p>
         </p:txBody>
       </p:sp>
       <p:sp>
         <p:nvSpPr>
-          <p:cNvPr id="17" name="TextBox 16"/>
+          <p:cNvPr id="15" name="TextBox 14"/>
           <p:cNvSpPr txBox="1"/>
           <p:nvPr/>
         </p:nvSpPr>
         <p:spPr>
           <a:xfrm>
-            <a:off x="868680" y="5623560"/>
-            <a:ext cx="10469880" cy="822960"/>
+            <a:off x="868680" y="5605272"/>
+            <a:ext cx="10469880" cy="777240"/>
           </a:xfrm>
           <a:prstGeom prst="rect">
             <a:avLst/>
@@ -9340,23 +9915,23 @@
             <a:r>
               <a:rPr sz="2500" b="0" lang="ja-JP">
                 <a:solidFill>
-                  <a:srgbClr val="B02121"/>
+                  <a:srgbClr val="111111"/>
                 </a:solidFill>
                 <a:latin typeface="游ゴシック"/>
                 <a:ea typeface="游ゴシック"/>
               </a:rPr>
-              <a:t>2ストライク後のカウント不変 → 確認対象</a:t>
+              <a:t>B/S/Oが連続2観測で同じなら「安定」として採用</a:t>
             </a:r>
             <a:br/>
             <a:r>
               <a:rPr sz="2500" b="0" lang="ja-JP">
                 <a:solidFill>
-                  <a:srgbClr val="B02121"/>
+                  <a:srgbClr val="111111"/>
                 </a:solidFill>
                 <a:latin typeface="游ゴシック"/>
                 <a:ea typeface="游ゴシック"/>
               </a:rPr>
-              <a:t>ファウルの確定には、投球後の映像や表示も必要</a:t>
+              <a:t>現行ルールは、投球後の最初の安定状態を使う</a:t>
             </a:r>
           </a:p>
         </p:txBody>
@@ -9369,7 +9944,7 @@
 </p:sld>
 </file>
 
-<file path=ppt/slides/slide5.xml><?xml version="1.0" encoding="utf-8"?>
+<file path=ppt/slides/slide4.xml><?xml version="1.0" encoding="utf-8"?>
 <p:sld xmlns:a="http://schemas.openxmlformats.org/drawingml/2006/main" xmlns:p="http://schemas.openxmlformats.org/presentationml/2006/main" xmlns:r="http://schemas.openxmlformats.org/officeDocument/2006/relationships">
   <p:cSld>
     <p:spTree>
@@ -9418,7 +9993,7 @@
                 <a:latin typeface="游ゴシック Light"/>
                 <a:ea typeface="游ゴシック Light"/>
               </a:rPr>
-              <a:t>動画全体に適用した結果</a:t>
+              <a:t>全処理を動画全体に適用した結果</a:t>
             </a:r>
           </a:p>
         </p:txBody>
@@ -9462,7 +10037,7 @@
                 <a:latin typeface="游ゴシック"/>
                 <a:ea typeface="游ゴシック"/>
               </a:rPr>
-              <a:t>5</a:t>
+              <a:t>4</a:t>
             </a:r>
           </a:p>
         </p:txBody>
@@ -9475,8 +10050,8 @@
         </p:nvSpPr>
         <p:spPr>
           <a:xfrm>
-            <a:off x="838504" y="1819656"/>
-            <a:ext cx="10515600" cy="457200"/>
+            <a:off x="838504" y="1810512"/>
+            <a:ext cx="10515600" cy="411480"/>
           </a:xfrm>
           <a:prstGeom prst="rect">
             <a:avLst/>
@@ -9499,21 +10074,21 @@
               <a:buNone/>
             </a:pPr>
             <a:r>
-              <a:rPr sz="2800" b="0" lang="ja-JP">
+              <a:rPr sz="2600" b="0" lang="ja-JP">
                 <a:solidFill>
                   <a:srgbClr val="111111"/>
                 </a:solidFill>
                 <a:latin typeface="游ゴシック"/>
                 <a:ea typeface="游ゴシック"/>
               </a:rPr>
-              <a:t>投球候補：65区間　→　重複を整理：34候補群</a:t>
+              <a:t>65区間 → 34候補群 ／ 各手法の認識値を同じ時刻で表示</a:t>
             </a:r>
           </a:p>
         </p:txBody>
       </p:sp>
       <p:pic>
         <p:nvPicPr>
-          <p:cNvPr id="5" name="Picture 4" descr="integrated_timeline_ja"/>
+          <p:cNvPr id="5" name="Picture 4" descr="integrated_all_fields"/>
           <p:cNvPicPr>
             <a:picLocks noChangeAspect="1"/>
           </p:cNvPicPr>
@@ -9543,7 +10118,7 @@
 </p:sld>
 </file>
 
-<file path=ppt/slides/slide6.xml><?xml version="1.0" encoding="utf-8"?>
+<file path=ppt/slides/slide5.xml><?xml version="1.0" encoding="utf-8"?>
 <p:sld xmlns:a="http://schemas.openxmlformats.org/drawingml/2006/main" xmlns:p="http://schemas.openxmlformats.org/presentationml/2006/main" xmlns:r="http://schemas.openxmlformats.org/officeDocument/2006/relationships">
   <p:cSld>
     <p:spTree>
@@ -9592,7 +10167,7 @@
                 <a:latin typeface="游ゴシック Light"/>
                 <a:ea typeface="游ゴシック Light"/>
               </a:rPr>
-              <a:t>投球前後の表示を照合した結果</a:t>
+              <a:t>前後の全項目が揃ったのは9候補群</a:t>
             </a:r>
           </a:p>
         </p:txBody>
@@ -9636,7 +10211,7 @@
                 <a:latin typeface="游ゴシック"/>
                 <a:ea typeface="游ゴシック"/>
               </a:rPr>
-              <a:t>6</a:t>
+              <a:t>5</a:t>
             </a:r>
           </a:p>
         </p:txBody>
@@ -9651,7 +10226,7 @@
         </p:nvGraphicFramePr>
         <p:xfrm>
           <a:off x="838504" y="1920240"/>
-          <a:ext cx="10515600" cy="3584448"/>
+          <a:ext cx="10515600" cy="3154680"/>
         </p:xfrm>
         <a:graphic>
           <a:graphicData uri="http://schemas.openxmlformats.org/drawingml/2006/table">
@@ -9660,10 +10235,10 @@
                 <a:tableStyleId>{5C22544A-7EE6-4342-B048-85BDC9FD1C3A}</a:tableStyleId>
               </a:tblPr>
               <a:tblGrid>
-                <a:gridCol w="8001000"/>
-                <a:gridCol w="2514600"/>
+                <a:gridCol w="8046720"/>
+                <a:gridCol w="2468880"/>
               </a:tblGrid>
-              <a:tr h="512064">
+              <a:tr h="630936">
                 <a:tc>
                   <a:txBody>
                     <a:bodyPr wrap="square" lIns="0" rIns="0" tIns="0" bIns="0">
@@ -9688,7 +10263,7 @@
                           <a:latin typeface="游ゴシック"/>
                           <a:ea typeface="游ゴシック"/>
                         </a:rPr>
-                        <a:t>照合できた変化・状態</a:t>
+                        <a:t>前後の認識値の取得状況</a:t>
                       </a:r>
                     </a:p>
                   </a:txBody>
@@ -9773,7 +10348,7 @@
                   </a:tcPr>
                 </a:tc>
               </a:tr>
-              <a:tr h="512064">
+              <a:tr h="630936">
                 <a:tc>
                   <a:txBody>
                     <a:bodyPr wrap="square" lIns="0" rIns="0" tIns="0" bIns="0">
@@ -9798,13 +10373,13 @@
                           <a:latin typeface="游ゴシック"/>
                           <a:ea typeface="游ゴシック"/>
                         </a:rPr>
-                        <a:t>ストライク表示が増加</a:t>
+                        <a:t>B/S/O・走者・回・表裏・両チーム得点が揃う</a:t>
                       </a:r>
                     </a:p>
                   </a:txBody>
                   <a:tcPr marL="118872" marR="91440" marT="64008" marB="36576" anchor="ctr">
                     <a:solidFill>
-                      <a:srgbClr val="FFFFFF"/>
+                      <a:srgbClr val="FFF4D8"/>
                     </a:solidFill>
                     <a:lnL w="7000">
                       <a:solidFill>
@@ -9852,13 +10427,13 @@
                           <a:latin typeface="游ゴシック"/>
                           <a:ea typeface="游ゴシック"/>
                         </a:rPr>
-                        <a:t>3</a:t>
+                        <a:t>9</a:t>
                       </a:r>
                     </a:p>
                   </a:txBody>
                   <a:tcPr marL="118872" marR="91440" marT="64008" marB="36576" anchor="ctr">
                     <a:solidFill>
-                      <a:srgbClr val="FFFFFF"/>
+                      <a:srgbClr val="FFF4D8"/>
                     </a:solidFill>
                     <a:lnL w="7000">
                       <a:solidFill>
@@ -9883,7 +10458,7 @@
                   </a:tcPr>
                 </a:tc>
               </a:tr>
-              <a:tr h="512064">
+              <a:tr h="630936">
                 <a:tc>
                   <a:txBody>
                     <a:bodyPr wrap="square" lIns="0" rIns="0" tIns="0" bIns="0">
@@ -9908,233 +10483,13 @@
                           <a:latin typeface="游ゴシック"/>
                           <a:ea typeface="游ゴシック"/>
                         </a:rPr>
-                        <a:t>ボール表示が増加</a:t>
+                        <a:t>B/S/Oは揃うが、OCRの項目が一部不足</a:t>
                       </a:r>
                     </a:p>
                   </a:txBody>
                   <a:tcPr marL="118872" marR="91440" marT="64008" marB="36576" anchor="ctr">
                     <a:solidFill>
                       <a:srgbClr val="FFFFFF"/>
-                    </a:solidFill>
-                    <a:lnL w="7000">
-                      <a:solidFill>
-                        <a:srgbClr val="BFBFBF"/>
-                      </a:solidFill>
-                    </a:lnL>
-                    <a:lnR w="7000">
-                      <a:solidFill>
-                        <a:srgbClr val="BFBFBF"/>
-                      </a:solidFill>
-                    </a:lnR>
-                    <a:lnT w="7000">
-                      <a:solidFill>
-                        <a:srgbClr val="BFBFBF"/>
-                      </a:solidFill>
-                    </a:lnT>
-                    <a:lnB w="7000">
-                      <a:solidFill>
-                        <a:srgbClr val="BFBFBF"/>
-                      </a:solidFill>
-                    </a:lnB>
-                  </a:tcPr>
-                </a:tc>
-                <a:tc>
-                  <a:txBody>
-                    <a:bodyPr wrap="square" lIns="0" rIns="0" tIns="0" bIns="0">
-                      <a:noAutofit/>
-                    </a:bodyPr>
-                    <a:lstStyle/>
-                    <a:p>
-                      <a:pPr algn="l">
-                        <a:lnSpc>
-                          <a:spcPct val="112000"/>
-                        </a:lnSpc>
-                        <a:spcAft>
-                          <a:spcPts val="0"/>
-                        </a:spcAft>
-                        <a:buNone/>
-                      </a:pPr>
-                      <a:r>
-                        <a:rPr sz="2500" b="0" lang="ja-JP">
-                          <a:solidFill>
-                            <a:srgbClr val="111111"/>
-                          </a:solidFill>
-                          <a:latin typeface="游ゴシック"/>
-                          <a:ea typeface="游ゴシック"/>
-                        </a:rPr>
-                        <a:t>1</a:t>
-                      </a:r>
-                    </a:p>
-                  </a:txBody>
-                  <a:tcPr marL="118872" marR="91440" marT="64008" marB="36576" anchor="ctr">
-                    <a:solidFill>
-                      <a:srgbClr val="FFFFFF"/>
-                    </a:solidFill>
-                    <a:lnL w="7000">
-                      <a:solidFill>
-                        <a:srgbClr val="BFBFBF"/>
-                      </a:solidFill>
-                    </a:lnL>
-                    <a:lnR w="7000">
-                      <a:solidFill>
-                        <a:srgbClr val="BFBFBF"/>
-                      </a:solidFill>
-                    </a:lnR>
-                    <a:lnT w="7000">
-                      <a:solidFill>
-                        <a:srgbClr val="BFBFBF"/>
-                      </a:solidFill>
-                    </a:lnT>
-                    <a:lnB w="7000">
-                      <a:solidFill>
-                        <a:srgbClr val="BFBFBF"/>
-                      </a:solidFill>
-                    </a:lnB>
-                  </a:tcPr>
-                </a:tc>
-              </a:tr>
-              <a:tr h="512064">
-                <a:tc>
-                  <a:txBody>
-                    <a:bodyPr wrap="square" lIns="0" rIns="0" tIns="0" bIns="0">
-                      <a:noAutofit/>
-                    </a:bodyPr>
-                    <a:lstStyle/>
-                    <a:p>
-                      <a:pPr algn="l">
-                        <a:lnSpc>
-                          <a:spcPct val="112000"/>
-                        </a:lnSpc>
-                        <a:spcAft>
-                          <a:spcPts val="0"/>
-                        </a:spcAft>
-                        <a:buNone/>
-                      </a:pPr>
-                      <a:r>
-                        <a:rPr sz="2500" b="0" lang="ja-JP">
-                          <a:solidFill>
-                            <a:srgbClr val="111111"/>
-                          </a:solidFill>
-                          <a:latin typeface="游ゴシック"/>
-                          <a:ea typeface="游ゴシック"/>
-                        </a:rPr>
-                        <a:t>2ストライク未満でカウント不変</a:t>
-                      </a:r>
-                    </a:p>
-                  </a:txBody>
-                  <a:tcPr marL="118872" marR="91440" marT="64008" marB="36576" anchor="ctr">
-                    <a:solidFill>
-                      <a:srgbClr val="FFFFFF"/>
-                    </a:solidFill>
-                    <a:lnL w="7000">
-                      <a:solidFill>
-                        <a:srgbClr val="BFBFBF"/>
-                      </a:solidFill>
-                    </a:lnL>
-                    <a:lnR w="7000">
-                      <a:solidFill>
-                        <a:srgbClr val="BFBFBF"/>
-                      </a:solidFill>
-                    </a:lnR>
-                    <a:lnT w="7000">
-                      <a:solidFill>
-                        <a:srgbClr val="BFBFBF"/>
-                      </a:solidFill>
-                    </a:lnT>
-                    <a:lnB w="7000">
-                      <a:solidFill>
-                        <a:srgbClr val="BFBFBF"/>
-                      </a:solidFill>
-                    </a:lnB>
-                  </a:tcPr>
-                </a:tc>
-                <a:tc>
-                  <a:txBody>
-                    <a:bodyPr wrap="square" lIns="0" rIns="0" tIns="0" bIns="0">
-                      <a:noAutofit/>
-                    </a:bodyPr>
-                    <a:lstStyle/>
-                    <a:p>
-                      <a:pPr algn="l">
-                        <a:lnSpc>
-                          <a:spcPct val="112000"/>
-                        </a:lnSpc>
-                        <a:spcAft>
-                          <a:spcPts val="0"/>
-                        </a:spcAft>
-                        <a:buNone/>
-                      </a:pPr>
-                      <a:r>
-                        <a:rPr sz="2500" b="0" lang="ja-JP">
-                          <a:solidFill>
-                            <a:srgbClr val="111111"/>
-                          </a:solidFill>
-                          <a:latin typeface="游ゴシック"/>
-                          <a:ea typeface="游ゴシック"/>
-                        </a:rPr>
-                        <a:t>5</a:t>
-                      </a:r>
-                    </a:p>
-                  </a:txBody>
-                  <a:tcPr marL="118872" marR="91440" marT="64008" marB="36576" anchor="ctr">
-                    <a:solidFill>
-                      <a:srgbClr val="FFFFFF"/>
-                    </a:solidFill>
-                    <a:lnL w="7000">
-                      <a:solidFill>
-                        <a:srgbClr val="BFBFBF"/>
-                      </a:solidFill>
-                    </a:lnL>
-                    <a:lnR w="7000">
-                      <a:solidFill>
-                        <a:srgbClr val="BFBFBF"/>
-                      </a:solidFill>
-                    </a:lnR>
-                    <a:lnT w="7000">
-                      <a:solidFill>
-                        <a:srgbClr val="BFBFBF"/>
-                      </a:solidFill>
-                    </a:lnT>
-                    <a:lnB w="7000">
-                      <a:solidFill>
-                        <a:srgbClr val="BFBFBF"/>
-                      </a:solidFill>
-                    </a:lnB>
-                  </a:tcPr>
-                </a:tc>
-              </a:tr>
-              <a:tr h="512064">
-                <a:tc>
-                  <a:txBody>
-                    <a:bodyPr wrap="square" lIns="0" rIns="0" tIns="0" bIns="0">
-                      <a:noAutofit/>
-                    </a:bodyPr>
-                    <a:lstStyle/>
-                    <a:p>
-                      <a:pPr algn="l">
-                        <a:lnSpc>
-                          <a:spcPct val="112000"/>
-                        </a:lnSpc>
-                        <a:spcAft>
-                          <a:spcPts val="0"/>
-                        </a:spcAft>
-                        <a:buNone/>
-                      </a:pPr>
-                      <a:r>
-                        <a:rPr sz="2500" b="0" lang="ja-JP">
-                          <a:solidFill>
-                            <a:srgbClr val="111111"/>
-                          </a:solidFill>
-                          <a:latin typeface="游ゴシック"/>
-                          <a:ea typeface="游ゴシック"/>
-                        </a:rPr>
-                        <a:t>2ストライクでカウント不変（要確認）</a:t>
-                      </a:r>
-                    </a:p>
-                  </a:txBody>
-                  <a:tcPr marL="118872" marR="91440" marT="64008" marB="36576" anchor="ctr">
-                    <a:solidFill>
-                      <a:srgbClr val="FFF4D8"/>
                     </a:solidFill>
                     <a:lnL w="7000">
                       <a:solidFill>
@@ -10188,7 +10543,7 @@
                   </a:txBody>
                   <a:tcPr marL="118872" marR="91440" marT="64008" marB="36576" anchor="ctr">
                     <a:solidFill>
-                      <a:srgbClr val="FFF4D8"/>
+                      <a:srgbClr val="FFFFFF"/>
                     </a:solidFill>
                     <a:lnL w="7000">
                       <a:solidFill>
@@ -10213,7 +10568,7 @@
                   </a:tcPr>
                 </a:tc>
               </a:tr>
-              <a:tr h="512064">
+              <a:tr h="630936">
                 <a:tc>
                   <a:txBody>
                     <a:bodyPr wrap="square" lIns="0" rIns="0" tIns="0" bIns="0">
@@ -10238,7 +10593,7 @@
                           <a:latin typeface="游ゴシック"/>
                           <a:ea typeface="游ゴシック"/>
                         </a:rPr>
-                        <a:t>前後の表示不足で保留</a:t>
+                        <a:t>前後どちらかのB/S/Oが不足</a:t>
                       </a:r>
                     </a:p>
                   </a:txBody>
@@ -10323,7 +10678,7 @@
                   </a:tcPr>
                 </a:tc>
               </a:tr>
-              <a:tr h="512064">
+              <a:tr h="630936">
                 <a:tc>
                   <a:txBody>
                     <a:bodyPr wrap="square" lIns="0" rIns="0" tIns="0" bIns="0">
@@ -10445,8 +10800,8 @@
         </p:nvSpPr>
         <p:spPr>
           <a:xfrm>
-            <a:off x="838504" y="5760720"/>
-            <a:ext cx="10515600" cy="731520"/>
+            <a:off x="838504" y="5449824"/>
+            <a:ext cx="10515600" cy="1005840"/>
           </a:xfrm>
           <a:prstGeom prst="rect">
             <a:avLst/>
@@ -10476,7 +10831,7 @@
                 <a:latin typeface="游ゴシック"/>
                 <a:ea typeface="游ゴシック"/>
               </a:rPr>
-              <a:t>候補群数は実際の投球数ではない。</a:t>
+              <a:t>前後のB/S/Oを照合できたのは11候補群。</a:t>
             </a:r>
             <a:br/>
             <a:r>
@@ -10487,11 +10842,196 @@
                 <a:latin typeface="游ゴシック"/>
                 <a:ea typeface="游ゴシック"/>
               </a:rPr>
-              <a:t>表示変化の整理であり、ファウルの判定精度は未評価。</a:t>
+              <a:t>全項目の取得は、イベント判定の成功や正解率とは異なる。</a:t>
             </a:r>
           </a:p>
         </p:txBody>
       </p:sp>
+    </p:spTree>
+  </p:cSld>
+  <p:clrMapOvr>
+    <a:masterClrMapping/>
+  </p:clrMapOvr>
+</p:sld>
+</file>
+
+<file path=ppt/slides/slide6.xml><?xml version="1.0" encoding="utf-8"?>
+<p:sld xmlns:a="http://schemas.openxmlformats.org/drawingml/2006/main" xmlns:p="http://schemas.openxmlformats.org/presentationml/2006/main" xmlns:r="http://schemas.openxmlformats.org/officeDocument/2006/relationships">
+  <p:cSld>
+    <p:spTree>
+      <p:nvGrpSpPr>
+        <p:cNvPr id="1" name=""/>
+        <p:cNvGrpSpPr/>
+        <p:nvPr/>
+      </p:nvGrpSpPr>
+      <p:grpSpPr/>
+      <p:sp>
+        <p:nvSpPr>
+          <p:cNvPr id="2" name="Title 1"/>
+          <p:cNvSpPr>
+            <a:spLocks noGrp="1"/>
+          </p:cNvSpPr>
+          <p:nvPr>
+            <p:ph type="title"/>
+          </p:nvPr>
+        </p:nvSpPr>
+        <p:spPr>
+          <a:xfrm>
+            <a:off x="838504" y="364845"/>
+            <a:ext cx="10515600" cy="1325880"/>
+          </a:xfrm>
+        </p:spPr>
+        <p:txBody>
+          <a:bodyPr wrap="square" lIns="0" rIns="0" tIns="0" bIns="0">
+            <a:noAutofit/>
+          </a:bodyPr>
+          <a:lstStyle/>
+          <a:p>
+            <a:pPr algn="l">
+              <a:lnSpc>
+                <a:spcPct val="112000"/>
+              </a:lnSpc>
+              <a:spcAft>
+                <a:spcPts val="0"/>
+              </a:spcAft>
+              <a:buNone/>
+            </a:pPr>
+            <a:r>
+              <a:rPr sz="4400" b="0" lang="ja-JP">
+                <a:solidFill>
+                  <a:srgbClr val="111111"/>
+                </a:solidFill>
+                <a:latin typeface="游ゴシック Light"/>
+                <a:ea typeface="游ゴシック Light"/>
+              </a:rPr>
+              <a:t>投球にカウントと走者・得点を付与</a:t>
+            </a:r>
+          </a:p>
+        </p:txBody>
+      </p:sp>
+      <p:sp>
+        <p:nvSpPr>
+          <p:cNvPr id="3" name="TextBox 2"/>
+          <p:cNvSpPr txBox="1"/>
+          <p:nvPr/>
+        </p:nvSpPr>
+        <p:spPr>
+          <a:xfrm>
+            <a:off x="10881360" y="6510528"/>
+            <a:ext cx="457200" cy="201168"/>
+          </a:xfrm>
+          <a:prstGeom prst="rect">
+            <a:avLst/>
+          </a:prstGeom>
+          <a:noFill/>
+        </p:spPr>
+        <p:txBody>
+          <a:bodyPr wrap="square" lIns="0" rIns="0" tIns="0" bIns="0">
+            <a:noAutofit/>
+          </a:bodyPr>
+          <a:lstStyle/>
+          <a:p>
+            <a:pPr algn="r">
+              <a:lnSpc>
+                <a:spcPct val="112000"/>
+              </a:lnSpc>
+              <a:spcAft>
+                <a:spcPts val="0"/>
+              </a:spcAft>
+              <a:buNone/>
+            </a:pPr>
+            <a:r>
+              <a:rPr sz="1200" b="0" lang="ja-JP">
+                <a:solidFill>
+                  <a:srgbClr val="555555"/>
+                </a:solidFill>
+                <a:latin typeface="游ゴシック"/>
+                <a:ea typeface="游ゴシック"/>
+              </a:rPr>
+              <a:t>6</a:t>
+            </a:r>
+          </a:p>
+        </p:txBody>
+      </p:sp>
+      <p:sp>
+        <p:nvSpPr>
+          <p:cNvPr id="4" name="TextBox 3"/>
+          <p:cNvSpPr txBox="1"/>
+          <p:nvPr/>
+        </p:nvSpPr>
+        <p:spPr>
+          <a:xfrm>
+            <a:off x="838504" y="1810512"/>
+            <a:ext cx="10515600" cy="749808"/>
+          </a:xfrm>
+          <a:prstGeom prst="rect">
+            <a:avLst/>
+          </a:prstGeom>
+          <a:noFill/>
+        </p:spPr>
+        <p:txBody>
+          <a:bodyPr wrap="square" lIns="0" rIns="0" tIns="0" bIns="0">
+            <a:noAutofit/>
+          </a:bodyPr>
+          <a:lstStyle/>
+          <a:p>
+            <a:pPr algn="l">
+              <a:lnSpc>
+                <a:spcPct val="112000"/>
+              </a:lnSpc>
+              <a:spcAft>
+                <a:spcPts val="0"/>
+              </a:spcAft>
+              <a:buNone/>
+            </a:pPr>
+            <a:r>
+              <a:rPr sz="2500" b="0" lang="ja-JP">
+                <a:solidFill>
+                  <a:srgbClr val="111111"/>
+                </a:solidFill>
+                <a:latin typeface="游ゴシック"/>
+                <a:ea typeface="游ゴシック"/>
+              </a:rPr>
+              <a:t>候補22：293.11–294.85秒</a:t>
+            </a:r>
+            <a:br/>
+            <a:r>
+              <a:rPr sz="2500" b="0" lang="ja-JP">
+                <a:solidFill>
+                  <a:srgbClr val="111111"/>
+                </a:solidFill>
+                <a:latin typeface="游ゴシック"/>
+                <a:ea typeface="游ゴシック"/>
+              </a:rPr>
+              <a:t>5回ウラ ／ 0–0 ／ 一塁走者あり ／ 2アウト</a:t>
+            </a:r>
+          </a:p>
+        </p:txBody>
+      </p:sp>
+      <p:pic>
+        <p:nvPicPr>
+          <p:cNvPr id="5" name="Picture 4" descr="joint_case22"/>
+          <p:cNvPicPr>
+            <a:picLocks noChangeAspect="1"/>
+          </p:cNvPicPr>
+          <p:nvPr/>
+        </p:nvPicPr>
+        <p:blipFill>
+          <a:blip r:embed="rId2"/>
+          <a:stretch>
+            <a:fillRect/>
+          </a:stretch>
+        </p:blipFill>
+        <p:spPr>
+          <a:xfrm>
+            <a:off x="838504" y="2633472"/>
+            <a:ext cx="10515600" cy="3724275"/>
+          </a:xfrm>
+          <a:prstGeom prst="rect">
+            <a:avLst/>
+          </a:prstGeom>
+        </p:spPr>
+      </p:pic>
     </p:spTree>
   </p:cSld>
   <p:clrMapOvr>
@@ -10549,7 +11089,7 @@
                 <a:latin typeface="游ゴシック Light"/>
                 <a:ea typeface="游ゴシック Light"/>
               </a:rPr>
-              <a:t>2ストライク後にカウント不変の例</a:t>
+              <a:t>得点・走者の異なる状況も記録</a:t>
             </a:r>
           </a:p>
         </p:txBody>
@@ -10606,8 +11146,8 @@
         </p:nvSpPr>
         <p:spPr>
           <a:xfrm>
-            <a:off x="838504" y="1819656"/>
-            <a:ext cx="10515600" cy="438912"/>
+            <a:off x="838504" y="1810512"/>
+            <a:ext cx="4983480" cy="384048"/>
           </a:xfrm>
           <a:prstGeom prst="rect">
             <a:avLst/>
@@ -10620,7 +11160,7 @@
           </a:bodyPr>
           <a:lstStyle/>
           <a:p>
-            <a:pPr algn="l">
+            <a:pPr algn="ctr">
               <a:lnSpc>
                 <a:spcPct val="112000"/>
               </a:lnSpc>
@@ -10630,21 +11170,65 @@
               <a:buNone/>
             </a:pPr>
             <a:r>
-              <a:rPr sz="2600" b="0" lang="ja-JP">
+              <a:rPr sz="2400" b="0" lang="ja-JP">
                 <a:solidFill>
                   <a:srgbClr val="111111"/>
                 </a:solidFill>
                 <a:latin typeface="游ゴシック"/>
                 <a:ea typeface="游ゴシック"/>
               </a:rPr>
-              <a:t>候補8：113.41–115.02秒 ／ 投球検出スコア 0.966</a:t>
+              <a:t>候補26：366.49–368.30秒</a:t>
+            </a:r>
+          </a:p>
+        </p:txBody>
+      </p:sp>
+      <p:sp>
+        <p:nvSpPr>
+          <p:cNvPr id="5" name="TextBox 4"/>
+          <p:cNvSpPr txBox="1"/>
+          <p:nvPr/>
+        </p:nvSpPr>
+        <p:spPr>
+          <a:xfrm>
+            <a:off x="838504" y="2286000"/>
+            <a:ext cx="4983480" cy="365760"/>
+          </a:xfrm>
+          <a:prstGeom prst="rect">
+            <a:avLst/>
+          </a:prstGeom>
+          <a:noFill/>
+        </p:spPr>
+        <p:txBody>
+          <a:bodyPr wrap="square" lIns="0" rIns="0" tIns="0" bIns="0">
+            <a:noAutofit/>
+          </a:bodyPr>
+          <a:lstStyle/>
+          <a:p>
+            <a:pPr algn="ctr">
+              <a:lnSpc>
+                <a:spcPct val="112000"/>
+              </a:lnSpc>
+              <a:spcAft>
+                <a:spcPts val="1000"/>
+              </a:spcAft>
+              <a:buNone/>
+            </a:pPr>
+            <a:r>
+              <a:rPr sz="2200" b="0" lang="ja-JP">
+                <a:solidFill>
+                  <a:srgbClr val="111111"/>
+                </a:solidFill>
+                <a:latin typeface="游ゴシック"/>
+                <a:ea typeface="游ゴシック"/>
+              </a:rPr>
+              <a:t>367.0秒（区間内の表示）</a:t>
             </a:r>
           </a:p>
         </p:txBody>
       </p:sp>
       <p:pic>
         <p:nvPicPr>
-          <p:cNvPr id="5" name="Picture 4" descr="candidate_008_contact"/>
+          <p:cNvPr id="6" name="Picture 5" descr="context_367"/>
           <p:cNvPicPr>
             <a:picLocks noChangeAspect="1"/>
           </p:cNvPicPr>
@@ -10658,8 +11242,8 @@
         </p:blipFill>
         <p:spPr>
           <a:xfrm>
-            <a:off x="838504" y="2423160"/>
-            <a:ext cx="10515600" cy="3724275"/>
+            <a:off x="838504" y="2788920"/>
+            <a:ext cx="4983480" cy="2167418"/>
           </a:xfrm>
           <a:prstGeom prst="rect">
             <a:avLst/>
@@ -10668,14 +11252,14 @@
       </p:pic>
       <p:sp>
         <p:nvSpPr>
-          <p:cNvPr id="6" name="TextBox 5"/>
+          <p:cNvPr id="7" name="TextBox 6"/>
           <p:cNvSpPr txBox="1"/>
           <p:nvPr/>
         </p:nvSpPr>
         <p:spPr>
           <a:xfrm>
-            <a:off x="838504" y="6245352"/>
-            <a:ext cx="10515600" cy="292608"/>
+            <a:off x="838504" y="5166360"/>
+            <a:ext cx="4983480" cy="777240"/>
           </a:xfrm>
           <a:prstGeom prst="rect">
             <a:avLst/>
@@ -10693,6 +11277,228 @@
                 <a:spcPct val="112000"/>
               </a:lnSpc>
               <a:spcAft>
+                <a:spcPts val="0"/>
+              </a:spcAft>
+              <a:buNone/>
+            </a:pPr>
+            <a:r>
+              <a:rPr sz="2400" b="0" lang="ja-JP">
+                <a:solidFill>
+                  <a:srgbClr val="111111"/>
+                </a:solidFill>
+                <a:latin typeface="游ゴシック"/>
+                <a:ea typeface="游ゴシック"/>
+              </a:rPr>
+              <a:t>5回ウラ ／ 0–0</a:t>
+            </a:r>
+            <a:br/>
+            <a:r>
+              <a:rPr sz="2400" b="0" lang="ja-JP">
+                <a:solidFill>
+                  <a:srgbClr val="111111"/>
+                </a:solidFill>
+                <a:latin typeface="游ゴシック"/>
+                <a:ea typeface="游ゴシック"/>
+              </a:rPr>
+              <a:t>B3 S2 O2 ／ 二塁走者あり</a:t>
+            </a:r>
+          </a:p>
+        </p:txBody>
+      </p:sp>
+      <p:sp>
+        <p:nvSpPr>
+          <p:cNvPr id="8" name="TextBox 7"/>
+          <p:cNvSpPr txBox="1"/>
+          <p:nvPr/>
+        </p:nvSpPr>
+        <p:spPr>
+          <a:xfrm>
+            <a:off x="6370624" y="1810512"/>
+            <a:ext cx="4983480" cy="384048"/>
+          </a:xfrm>
+          <a:prstGeom prst="rect">
+            <a:avLst/>
+          </a:prstGeom>
+          <a:noFill/>
+        </p:spPr>
+        <p:txBody>
+          <a:bodyPr wrap="square" lIns="0" rIns="0" tIns="0" bIns="0">
+            <a:noAutofit/>
+          </a:bodyPr>
+          <a:lstStyle/>
+          <a:p>
+            <a:pPr algn="ctr">
+              <a:lnSpc>
+                <a:spcPct val="112000"/>
+              </a:lnSpc>
+              <a:spcAft>
+                <a:spcPts val="1000"/>
+              </a:spcAft>
+              <a:buNone/>
+            </a:pPr>
+            <a:r>
+              <a:rPr sz="2400" b="0" lang="ja-JP">
+                <a:solidFill>
+                  <a:srgbClr val="111111"/>
+                </a:solidFill>
+                <a:latin typeface="游ゴシック"/>
+                <a:ea typeface="游ゴシック"/>
+              </a:rPr>
+              <a:t>候補31：434.51–436.22秒</a:t>
+            </a:r>
+          </a:p>
+        </p:txBody>
+      </p:sp>
+      <p:sp>
+        <p:nvSpPr>
+          <p:cNvPr id="9" name="TextBox 8"/>
+          <p:cNvSpPr txBox="1"/>
+          <p:nvPr/>
+        </p:nvSpPr>
+        <p:spPr>
+          <a:xfrm>
+            <a:off x="6370624" y="2286000"/>
+            <a:ext cx="4983480" cy="365760"/>
+          </a:xfrm>
+          <a:prstGeom prst="rect">
+            <a:avLst/>
+          </a:prstGeom>
+          <a:noFill/>
+        </p:spPr>
+        <p:txBody>
+          <a:bodyPr wrap="square" lIns="0" rIns="0" tIns="0" bIns="0">
+            <a:noAutofit/>
+          </a:bodyPr>
+          <a:lstStyle/>
+          <a:p>
+            <a:pPr algn="ctr">
+              <a:lnSpc>
+                <a:spcPct val="112000"/>
+              </a:lnSpc>
+              <a:spcAft>
+                <a:spcPts val="1000"/>
+              </a:spcAft>
+              <a:buNone/>
+            </a:pPr>
+            <a:r>
+              <a:rPr sz="2200" b="0" lang="ja-JP">
+                <a:solidFill>
+                  <a:srgbClr val="111111"/>
+                </a:solidFill>
+                <a:latin typeface="游ゴシック"/>
+                <a:ea typeface="游ゴシック"/>
+              </a:rPr>
+              <a:t>436.5秒（区間直後の表示）</a:t>
+            </a:r>
+          </a:p>
+        </p:txBody>
+      </p:sp>
+      <p:pic>
+        <p:nvPicPr>
+          <p:cNvPr id="10" name="Picture 9" descr="context_436_5"/>
+          <p:cNvPicPr>
+            <a:picLocks noChangeAspect="1"/>
+          </p:cNvPicPr>
+          <p:nvPr/>
+        </p:nvPicPr>
+        <p:blipFill>
+          <a:blip r:embed="rId3"/>
+          <a:stretch>
+            <a:fillRect/>
+          </a:stretch>
+        </p:blipFill>
+        <p:spPr>
+          <a:xfrm>
+            <a:off x="6370624" y="2788920"/>
+            <a:ext cx="4983480" cy="2203015"/>
+          </a:xfrm>
+          <a:prstGeom prst="rect">
+            <a:avLst/>
+          </a:prstGeom>
+        </p:spPr>
+      </p:pic>
+      <p:sp>
+        <p:nvSpPr>
+          <p:cNvPr id="11" name="TextBox 10"/>
+          <p:cNvSpPr txBox="1"/>
+          <p:nvPr/>
+        </p:nvSpPr>
+        <p:spPr>
+          <a:xfrm>
+            <a:off x="6370624" y="5166360"/>
+            <a:ext cx="4983480" cy="777240"/>
+          </a:xfrm>
+          <a:prstGeom prst="rect">
+            <a:avLst/>
+          </a:prstGeom>
+          <a:noFill/>
+        </p:spPr>
+        <p:txBody>
+          <a:bodyPr wrap="square" lIns="0" rIns="0" tIns="0" bIns="0">
+            <a:noAutofit/>
+          </a:bodyPr>
+          <a:lstStyle/>
+          <a:p>
+            <a:pPr algn="l">
+              <a:lnSpc>
+                <a:spcPct val="112000"/>
+              </a:lnSpc>
+              <a:spcAft>
+                <a:spcPts val="0"/>
+              </a:spcAft>
+              <a:buNone/>
+            </a:pPr>
+            <a:r>
+              <a:rPr sz="2400" b="0" lang="ja-JP">
+                <a:solidFill>
+                  <a:srgbClr val="111111"/>
+                </a:solidFill>
+                <a:latin typeface="游ゴシック"/>
+                <a:ea typeface="游ゴシック"/>
+              </a:rPr>
+              <a:t>5回ウラ ／ 0–1</a:t>
+            </a:r>
+            <a:br/>
+            <a:r>
+              <a:rPr sz="2400" b="0" lang="ja-JP">
+                <a:solidFill>
+                  <a:srgbClr val="111111"/>
+                </a:solidFill>
+                <a:latin typeface="游ゴシック"/>
+                <a:ea typeface="游ゴシック"/>
+              </a:rPr>
+              <a:t>B0 S0 O2 ／ 一塁走者あり</a:t>
+            </a:r>
+          </a:p>
+        </p:txBody>
+      </p:sp>
+      <p:sp>
+        <p:nvSpPr>
+          <p:cNvPr id="12" name="TextBox 11"/>
+          <p:cNvSpPr txBox="1"/>
+          <p:nvPr/>
+        </p:nvSpPr>
+        <p:spPr>
+          <a:xfrm>
+            <a:off x="838504" y="6190488"/>
+            <a:ext cx="10515600" cy="356616"/>
+          </a:xfrm>
+          <a:prstGeom prst="rect">
+            <a:avLst/>
+          </a:prstGeom>
+          <a:noFill/>
+        </p:spPr>
+        <p:txBody>
+          <a:bodyPr wrap="square" lIns="0" rIns="0" tIns="0" bIns="0">
+            <a:noAutofit/>
+          </a:bodyPr>
+          <a:lstStyle/>
+          <a:p>
+            <a:pPr algn="l">
+              <a:lnSpc>
+                <a:spcPct val="112000"/>
+              </a:lnSpc>
+              <a:spcAft>
                 <a:spcPts val="1000"/>
               </a:spcAft>
               <a:buNone/>
@@ -10705,7 +11511,7 @@
                 <a:latin typeface="游ゴシック"/>
                 <a:ea typeface="游ゴシック"/>
               </a:rPr>
-              <a:t>同じ条件は候補11にも出現。2候補群ともファウルは未確定。</a:t>
+              <a:t>状況を投球付近に付与。得点に至った投球や、得点時刻は未確定。</a:t>
             </a:r>
           </a:p>
         </p:txBody>
@@ -10767,7 +11573,7 @@
                 <a:latin typeface="游ゴシック Light"/>
                 <a:ea typeface="游ゴシック Light"/>
               </a:rPr>
-              <a:t>カウント不変だけでは確定できない</a:t>
+              <a:t>2ストライク後の条件を投球に適用</a:t>
             </a:r>
           </a:p>
         </p:txBody>
@@ -10816,40 +11622,16 @@
           </a:p>
         </p:txBody>
       </p:sp>
-      <p:pic>
-        <p:nvPicPr>
-          <p:cNvPr id="4" name="Picture 3" descr="candidate_011_after158"/>
-          <p:cNvPicPr>
-            <a:picLocks noChangeAspect="1"/>
-          </p:cNvPicPr>
+      <p:sp>
+        <p:nvSpPr>
+          <p:cNvPr id="4" name="TextBox 3"/>
+          <p:cNvSpPr txBox="1"/>
           <p:nvPr/>
-        </p:nvPicPr>
-        <p:blipFill>
-          <a:blip r:embed="rId2"/>
-          <a:stretch>
-            <a:fillRect/>
-          </a:stretch>
-        </p:blipFill>
+        </p:nvSpPr>
         <p:spPr>
           <a:xfrm>
-            <a:off x="838504" y="1901952"/>
-            <a:ext cx="7132320" cy="4011930"/>
-          </a:xfrm>
-          <a:prstGeom prst="rect">
-            <a:avLst/>
-          </a:prstGeom>
-        </p:spPr>
-      </p:pic>
-      <p:sp>
-        <p:nvSpPr>
-          <p:cNvPr id="5" name="TextBox 4"/>
-          <p:cNvSpPr txBox="1"/>
-          <p:nvPr/>
-        </p:nvSpPr>
-        <p:spPr>
-          <a:xfrm>
-            <a:off x="8229600" y="1901952"/>
-            <a:ext cx="3063240" cy="1965960"/>
+            <a:off x="838504" y="1810512"/>
+            <a:ext cx="10515600" cy="777240"/>
           </a:xfrm>
           <a:prstGeom prst="rect">
             <a:avLst/>
@@ -10879,7 +11661,7 @@
                 <a:latin typeface="游ゴシック"/>
                 <a:ea typeface="游ゴシック"/>
               </a:rPr>
-              <a:t>候補11の直後</a:t>
+              <a:t>9月に考えた「2ストライク後の不変」という条件を、</a:t>
             </a:r>
             <a:br/>
             <a:r>
@@ -10890,78 +11672,866 @@
                 <a:latin typeface="游ゴシック"/>
                 <a:ea typeface="游ゴシック"/>
               </a:rPr>
-              <a:t>158.0秒の映像</a:t>
-            </a:r>
-            <a:br/>
-            <a:r>
-              <a:rPr sz="2600" b="0" lang="ja-JP">
-                <a:solidFill>
-                  <a:srgbClr val="111111"/>
-                </a:solidFill>
-                <a:latin typeface="游ゴシック"/>
-                <a:ea typeface="游ゴシック"/>
-              </a:rPr>
-              <a:t/>
-            </a:r>
-            <a:br/>
-            <a:r>
-              <a:rPr sz="2600" b="0" lang="ja-JP">
-                <a:solidFill>
-                  <a:srgbClr val="111111"/>
-                </a:solidFill>
-                <a:latin typeface="游ゴシック"/>
-                <a:ea typeface="游ゴシック"/>
-              </a:rPr>
-              <a:t>取得値は</a:t>
-            </a:r>
-            <a:br/>
-            <a:r>
-              <a:rPr sz="2600" b="0" lang="ja-JP">
-                <a:solidFill>
-                  <a:srgbClr val="111111"/>
-                </a:solidFill>
-                <a:latin typeface="游ゴシック"/>
-                <a:ea typeface="游ゴシック"/>
-              </a:rPr>
-              <a:t>B0 / S2 / O1</a:t>
+              <a:t>検出した投球区間の前後に適用した。</a:t>
             </a:r>
           </a:p>
         </p:txBody>
       </p:sp>
-      <p:pic>
-        <p:nvPicPr>
-          <p:cNvPr id="6" name="Picture 5" descr="candidate_011_board"/>
-          <p:cNvPicPr>
-            <a:picLocks noChangeAspect="1"/>
-          </p:cNvPicPr>
+      <p:graphicFrame>
+        <p:nvGraphicFramePr>
+          <p:cNvPr id="5" name="Table 4"/>
+          <p:cNvGraphicFramePr>
+            <a:graphicFrameLocks noGrp="1"/>
+          </p:cNvGraphicFramePr>
           <p:nvPr/>
-        </p:nvPicPr>
-        <p:blipFill>
-          <a:blip r:embed="rId3"/>
-          <a:stretch>
-            <a:fillRect/>
-          </a:stretch>
-        </p:blipFill>
+        </p:nvGraphicFramePr>
+        <p:xfrm>
+          <a:off x="838504" y="2834640"/>
+          <a:ext cx="10515600" cy="2002536"/>
+        </p:xfrm>
+        <a:graphic>
+          <a:graphicData uri="http://schemas.openxmlformats.org/drawingml/2006/table">
+            <a:tbl>
+              <a:tblPr firstRow="1" bandRow="1">
+                <a:tableStyleId>{5C22544A-7EE6-4342-B048-85BDC9FD1C3A}</a:tableStyleId>
+              </a:tblPr>
+              <a:tblGrid>
+                <a:gridCol w="1188720"/>
+                <a:gridCol w="3108960"/>
+                <a:gridCol w="2286000"/>
+                <a:gridCol w="2286000"/>
+                <a:gridCol w="1645920"/>
+              </a:tblGrid>
+              <a:tr h="667512">
+                <a:tc>
+                  <a:txBody>
+                    <a:bodyPr wrap="square" lIns="0" rIns="0" tIns="0" bIns="0">
+                      <a:noAutofit/>
+                    </a:bodyPr>
+                    <a:lstStyle/>
+                    <a:p>
+                      <a:pPr algn="l">
+                        <a:lnSpc>
+                          <a:spcPct val="112000"/>
+                        </a:lnSpc>
+                        <a:spcAft>
+                          <a:spcPts val="0"/>
+                        </a:spcAft>
+                        <a:buNone/>
+                      </a:pPr>
+                      <a:r>
+                        <a:rPr sz="2300" b="1" lang="ja-JP">
+                          <a:solidFill>
+                            <a:srgbClr val="111111"/>
+                          </a:solidFill>
+                          <a:latin typeface="游ゴシック"/>
+                          <a:ea typeface="游ゴシック"/>
+                        </a:rPr>
+                        <a:t>候補群</a:t>
+                      </a:r>
+                    </a:p>
+                  </a:txBody>
+                  <a:tcPr marL="118872" marR="91440" marT="64008" marB="36576" anchor="ctr">
+                    <a:solidFill>
+                      <a:srgbClr val="EEEEEE"/>
+                    </a:solidFill>
+                    <a:lnL w="7000">
+                      <a:solidFill>
+                        <a:srgbClr val="BFBFBF"/>
+                      </a:solidFill>
+                    </a:lnL>
+                    <a:lnR w="7000">
+                      <a:solidFill>
+                        <a:srgbClr val="BFBFBF"/>
+                      </a:solidFill>
+                    </a:lnR>
+                    <a:lnT w="7000">
+                      <a:solidFill>
+                        <a:srgbClr val="BFBFBF"/>
+                      </a:solidFill>
+                    </a:lnT>
+                    <a:lnB w="7000">
+                      <a:solidFill>
+                        <a:srgbClr val="BFBFBF"/>
+                      </a:solidFill>
+                    </a:lnB>
+                  </a:tcPr>
+                </a:tc>
+                <a:tc>
+                  <a:txBody>
+                    <a:bodyPr wrap="square" lIns="0" rIns="0" tIns="0" bIns="0">
+                      <a:noAutofit/>
+                    </a:bodyPr>
+                    <a:lstStyle/>
+                    <a:p>
+                      <a:pPr algn="l">
+                        <a:lnSpc>
+                          <a:spcPct val="112000"/>
+                        </a:lnSpc>
+                        <a:spcAft>
+                          <a:spcPts val="0"/>
+                        </a:spcAft>
+                        <a:buNone/>
+                      </a:pPr>
+                      <a:r>
+                        <a:rPr sz="2300" b="1" lang="ja-JP">
+                          <a:solidFill>
+                            <a:srgbClr val="111111"/>
+                          </a:solidFill>
+                          <a:latin typeface="游ゴシック"/>
+                          <a:ea typeface="游ゴシック"/>
+                        </a:rPr>
+                        <a:t>投球候補［秒］</a:t>
+                      </a:r>
+                    </a:p>
+                  </a:txBody>
+                  <a:tcPr marL="118872" marR="91440" marT="64008" marB="36576" anchor="ctr">
+                    <a:solidFill>
+                      <a:srgbClr val="EEEEEE"/>
+                    </a:solidFill>
+                    <a:lnL w="7000">
+                      <a:solidFill>
+                        <a:srgbClr val="BFBFBF"/>
+                      </a:solidFill>
+                    </a:lnL>
+                    <a:lnR w="7000">
+                      <a:solidFill>
+                        <a:srgbClr val="BFBFBF"/>
+                      </a:solidFill>
+                    </a:lnR>
+                    <a:lnT w="7000">
+                      <a:solidFill>
+                        <a:srgbClr val="BFBFBF"/>
+                      </a:solidFill>
+                    </a:lnT>
+                    <a:lnB w="7000">
+                      <a:solidFill>
+                        <a:srgbClr val="BFBFBF"/>
+                      </a:solidFill>
+                    </a:lnB>
+                  </a:tcPr>
+                </a:tc>
+                <a:tc>
+                  <a:txBody>
+                    <a:bodyPr wrap="square" lIns="0" rIns="0" tIns="0" bIns="0">
+                      <a:noAutofit/>
+                    </a:bodyPr>
+                    <a:lstStyle/>
+                    <a:p>
+                      <a:pPr algn="l">
+                        <a:lnSpc>
+                          <a:spcPct val="112000"/>
+                        </a:lnSpc>
+                        <a:spcAft>
+                          <a:spcPts val="0"/>
+                        </a:spcAft>
+                        <a:buNone/>
+                      </a:pPr>
+                      <a:r>
+                        <a:rPr sz="2300" b="1" lang="ja-JP">
+                          <a:solidFill>
+                            <a:srgbClr val="111111"/>
+                          </a:solidFill>
+                          <a:latin typeface="游ゴシック"/>
+                          <a:ea typeface="游ゴシック"/>
+                        </a:rPr>
+                        <a:t>前 B/S/O</a:t>
+                      </a:r>
+                    </a:p>
+                  </a:txBody>
+                  <a:tcPr marL="118872" marR="91440" marT="64008" marB="36576" anchor="ctr">
+                    <a:solidFill>
+                      <a:srgbClr val="EEEEEE"/>
+                    </a:solidFill>
+                    <a:lnL w="7000">
+                      <a:solidFill>
+                        <a:srgbClr val="BFBFBF"/>
+                      </a:solidFill>
+                    </a:lnL>
+                    <a:lnR w="7000">
+                      <a:solidFill>
+                        <a:srgbClr val="BFBFBF"/>
+                      </a:solidFill>
+                    </a:lnR>
+                    <a:lnT w="7000">
+                      <a:solidFill>
+                        <a:srgbClr val="BFBFBF"/>
+                      </a:solidFill>
+                    </a:lnT>
+                    <a:lnB w="7000">
+                      <a:solidFill>
+                        <a:srgbClr val="BFBFBF"/>
+                      </a:solidFill>
+                    </a:lnB>
+                  </a:tcPr>
+                </a:tc>
+                <a:tc>
+                  <a:txBody>
+                    <a:bodyPr wrap="square" lIns="0" rIns="0" tIns="0" bIns="0">
+                      <a:noAutofit/>
+                    </a:bodyPr>
+                    <a:lstStyle/>
+                    <a:p>
+                      <a:pPr algn="l">
+                        <a:lnSpc>
+                          <a:spcPct val="112000"/>
+                        </a:lnSpc>
+                        <a:spcAft>
+                          <a:spcPts val="0"/>
+                        </a:spcAft>
+                        <a:buNone/>
+                      </a:pPr>
+                      <a:r>
+                        <a:rPr sz="2300" b="1" lang="ja-JP">
+                          <a:solidFill>
+                            <a:srgbClr val="111111"/>
+                          </a:solidFill>
+                          <a:latin typeface="游ゴシック"/>
+                          <a:ea typeface="游ゴシック"/>
+                        </a:rPr>
+                        <a:t>直後 B/S/O</a:t>
+                      </a:r>
+                    </a:p>
+                  </a:txBody>
+                  <a:tcPr marL="118872" marR="91440" marT="64008" marB="36576" anchor="ctr">
+                    <a:solidFill>
+                      <a:srgbClr val="EEEEEE"/>
+                    </a:solidFill>
+                    <a:lnL w="7000">
+                      <a:solidFill>
+                        <a:srgbClr val="BFBFBF"/>
+                      </a:solidFill>
+                    </a:lnL>
+                    <a:lnR w="7000">
+                      <a:solidFill>
+                        <a:srgbClr val="BFBFBF"/>
+                      </a:solidFill>
+                    </a:lnR>
+                    <a:lnT w="7000">
+                      <a:solidFill>
+                        <a:srgbClr val="BFBFBF"/>
+                      </a:solidFill>
+                    </a:lnT>
+                    <a:lnB w="7000">
+                      <a:solidFill>
+                        <a:srgbClr val="BFBFBF"/>
+                      </a:solidFill>
+                    </a:lnB>
+                  </a:tcPr>
+                </a:tc>
+                <a:tc>
+                  <a:txBody>
+                    <a:bodyPr wrap="square" lIns="0" rIns="0" tIns="0" bIns="0">
+                      <a:noAutofit/>
+                    </a:bodyPr>
+                    <a:lstStyle/>
+                    <a:p>
+                      <a:pPr algn="l">
+                        <a:lnSpc>
+                          <a:spcPct val="112000"/>
+                        </a:lnSpc>
+                        <a:spcAft>
+                          <a:spcPts val="0"/>
+                        </a:spcAft>
+                        <a:buNone/>
+                      </a:pPr>
+                      <a:r>
+                        <a:rPr sz="2300" b="1" lang="ja-JP">
+                          <a:solidFill>
+                            <a:srgbClr val="111111"/>
+                          </a:solidFill>
+                          <a:latin typeface="游ゴシック"/>
+                          <a:ea typeface="游ゴシック"/>
+                        </a:rPr>
+                        <a:t>スコア</a:t>
+                      </a:r>
+                    </a:p>
+                  </a:txBody>
+                  <a:tcPr marL="118872" marR="91440" marT="64008" marB="36576" anchor="ctr">
+                    <a:solidFill>
+                      <a:srgbClr val="EEEEEE"/>
+                    </a:solidFill>
+                    <a:lnL w="7000">
+                      <a:solidFill>
+                        <a:srgbClr val="BFBFBF"/>
+                      </a:solidFill>
+                    </a:lnL>
+                    <a:lnR w="7000">
+                      <a:solidFill>
+                        <a:srgbClr val="BFBFBF"/>
+                      </a:solidFill>
+                    </a:lnR>
+                    <a:lnT w="7000">
+                      <a:solidFill>
+                        <a:srgbClr val="BFBFBF"/>
+                      </a:solidFill>
+                    </a:lnT>
+                    <a:lnB w="7000">
+                      <a:solidFill>
+                        <a:srgbClr val="BFBFBF"/>
+                      </a:solidFill>
+                    </a:lnB>
+                  </a:tcPr>
+                </a:tc>
+              </a:tr>
+              <a:tr h="667512">
+                <a:tc>
+                  <a:txBody>
+                    <a:bodyPr wrap="square" lIns="0" rIns="0" tIns="0" bIns="0">
+                      <a:noAutofit/>
+                    </a:bodyPr>
+                    <a:lstStyle/>
+                    <a:p>
+                      <a:pPr algn="l">
+                        <a:lnSpc>
+                          <a:spcPct val="112000"/>
+                        </a:lnSpc>
+                        <a:spcAft>
+                          <a:spcPts val="0"/>
+                        </a:spcAft>
+                        <a:buNone/>
+                      </a:pPr>
+                      <a:r>
+                        <a:rPr sz="2300" b="0" lang="ja-JP">
+                          <a:solidFill>
+                            <a:srgbClr val="111111"/>
+                          </a:solidFill>
+                          <a:latin typeface="游ゴシック"/>
+                          <a:ea typeface="游ゴシック"/>
+                        </a:rPr>
+                        <a:t>8</a:t>
+                      </a:r>
+                    </a:p>
+                  </a:txBody>
+                  <a:tcPr marL="118872" marR="91440" marT="64008" marB="36576" anchor="ctr">
+                    <a:solidFill>
+                      <a:srgbClr val="FFFFFF"/>
+                    </a:solidFill>
+                    <a:lnL w="7000">
+                      <a:solidFill>
+                        <a:srgbClr val="BFBFBF"/>
+                      </a:solidFill>
+                    </a:lnL>
+                    <a:lnR w="7000">
+                      <a:solidFill>
+                        <a:srgbClr val="BFBFBF"/>
+                      </a:solidFill>
+                    </a:lnR>
+                    <a:lnT w="7000">
+                      <a:solidFill>
+                        <a:srgbClr val="BFBFBF"/>
+                      </a:solidFill>
+                    </a:lnT>
+                    <a:lnB w="7000">
+                      <a:solidFill>
+                        <a:srgbClr val="BFBFBF"/>
+                      </a:solidFill>
+                    </a:lnB>
+                  </a:tcPr>
+                </a:tc>
+                <a:tc>
+                  <a:txBody>
+                    <a:bodyPr wrap="square" lIns="0" rIns="0" tIns="0" bIns="0">
+                      <a:noAutofit/>
+                    </a:bodyPr>
+                    <a:lstStyle/>
+                    <a:p>
+                      <a:pPr algn="l">
+                        <a:lnSpc>
+                          <a:spcPct val="112000"/>
+                        </a:lnSpc>
+                        <a:spcAft>
+                          <a:spcPts val="0"/>
+                        </a:spcAft>
+                        <a:buNone/>
+                      </a:pPr>
+                      <a:r>
+                        <a:rPr sz="2300" b="0" lang="ja-JP">
+                          <a:solidFill>
+                            <a:srgbClr val="111111"/>
+                          </a:solidFill>
+                          <a:latin typeface="游ゴシック"/>
+                          <a:ea typeface="游ゴシック"/>
+                        </a:rPr>
+                        <a:t>113.41–115.02</a:t>
+                      </a:r>
+                    </a:p>
+                  </a:txBody>
+                  <a:tcPr marL="118872" marR="91440" marT="64008" marB="36576" anchor="ctr">
+                    <a:solidFill>
+                      <a:srgbClr val="FFFFFF"/>
+                    </a:solidFill>
+                    <a:lnL w="7000">
+                      <a:solidFill>
+                        <a:srgbClr val="BFBFBF"/>
+                      </a:solidFill>
+                    </a:lnL>
+                    <a:lnR w="7000">
+                      <a:solidFill>
+                        <a:srgbClr val="BFBFBF"/>
+                      </a:solidFill>
+                    </a:lnR>
+                    <a:lnT w="7000">
+                      <a:solidFill>
+                        <a:srgbClr val="BFBFBF"/>
+                      </a:solidFill>
+                    </a:lnT>
+                    <a:lnB w="7000">
+                      <a:solidFill>
+                        <a:srgbClr val="BFBFBF"/>
+                      </a:solidFill>
+                    </a:lnB>
+                  </a:tcPr>
+                </a:tc>
+                <a:tc>
+                  <a:txBody>
+                    <a:bodyPr wrap="square" lIns="0" rIns="0" tIns="0" bIns="0">
+                      <a:noAutofit/>
+                    </a:bodyPr>
+                    <a:lstStyle/>
+                    <a:p>
+                      <a:pPr algn="l">
+                        <a:lnSpc>
+                          <a:spcPct val="112000"/>
+                        </a:lnSpc>
+                        <a:spcAft>
+                          <a:spcPts val="0"/>
+                        </a:spcAft>
+                        <a:buNone/>
+                      </a:pPr>
+                      <a:r>
+                        <a:rPr sz="2300" b="0" lang="ja-JP">
+                          <a:solidFill>
+                            <a:srgbClr val="111111"/>
+                          </a:solidFill>
+                          <a:latin typeface="游ゴシック"/>
+                          <a:ea typeface="游ゴシック"/>
+                        </a:rPr>
+                        <a:t>0 / 2 / 1</a:t>
+                      </a:r>
+                    </a:p>
+                  </a:txBody>
+                  <a:tcPr marL="118872" marR="91440" marT="64008" marB="36576" anchor="ctr">
+                    <a:solidFill>
+                      <a:srgbClr val="FFFFFF"/>
+                    </a:solidFill>
+                    <a:lnL w="7000">
+                      <a:solidFill>
+                        <a:srgbClr val="BFBFBF"/>
+                      </a:solidFill>
+                    </a:lnL>
+                    <a:lnR w="7000">
+                      <a:solidFill>
+                        <a:srgbClr val="BFBFBF"/>
+                      </a:solidFill>
+                    </a:lnR>
+                    <a:lnT w="7000">
+                      <a:solidFill>
+                        <a:srgbClr val="BFBFBF"/>
+                      </a:solidFill>
+                    </a:lnT>
+                    <a:lnB w="7000">
+                      <a:solidFill>
+                        <a:srgbClr val="BFBFBF"/>
+                      </a:solidFill>
+                    </a:lnB>
+                  </a:tcPr>
+                </a:tc>
+                <a:tc>
+                  <a:txBody>
+                    <a:bodyPr wrap="square" lIns="0" rIns="0" tIns="0" bIns="0">
+                      <a:noAutofit/>
+                    </a:bodyPr>
+                    <a:lstStyle/>
+                    <a:p>
+                      <a:pPr algn="l">
+                        <a:lnSpc>
+                          <a:spcPct val="112000"/>
+                        </a:lnSpc>
+                        <a:spcAft>
+                          <a:spcPts val="0"/>
+                        </a:spcAft>
+                        <a:buNone/>
+                      </a:pPr>
+                      <a:r>
+                        <a:rPr sz="2300" b="0" lang="ja-JP">
+                          <a:solidFill>
+                            <a:srgbClr val="111111"/>
+                          </a:solidFill>
+                          <a:latin typeface="游ゴシック"/>
+                          <a:ea typeface="游ゴシック"/>
+                        </a:rPr>
+                        <a:t>0 / 2 / 1</a:t>
+                      </a:r>
+                    </a:p>
+                  </a:txBody>
+                  <a:tcPr marL="118872" marR="91440" marT="64008" marB="36576" anchor="ctr">
+                    <a:solidFill>
+                      <a:srgbClr val="FFFFFF"/>
+                    </a:solidFill>
+                    <a:lnL w="7000">
+                      <a:solidFill>
+                        <a:srgbClr val="BFBFBF"/>
+                      </a:solidFill>
+                    </a:lnL>
+                    <a:lnR w="7000">
+                      <a:solidFill>
+                        <a:srgbClr val="BFBFBF"/>
+                      </a:solidFill>
+                    </a:lnR>
+                    <a:lnT w="7000">
+                      <a:solidFill>
+                        <a:srgbClr val="BFBFBF"/>
+                      </a:solidFill>
+                    </a:lnT>
+                    <a:lnB w="7000">
+                      <a:solidFill>
+                        <a:srgbClr val="BFBFBF"/>
+                      </a:solidFill>
+                    </a:lnB>
+                  </a:tcPr>
+                </a:tc>
+                <a:tc>
+                  <a:txBody>
+                    <a:bodyPr wrap="square" lIns="0" rIns="0" tIns="0" bIns="0">
+                      <a:noAutofit/>
+                    </a:bodyPr>
+                    <a:lstStyle/>
+                    <a:p>
+                      <a:pPr algn="l">
+                        <a:lnSpc>
+                          <a:spcPct val="112000"/>
+                        </a:lnSpc>
+                        <a:spcAft>
+                          <a:spcPts val="0"/>
+                        </a:spcAft>
+                        <a:buNone/>
+                      </a:pPr>
+                      <a:r>
+                        <a:rPr sz="2300" b="0" lang="ja-JP">
+                          <a:solidFill>
+                            <a:srgbClr val="111111"/>
+                          </a:solidFill>
+                          <a:latin typeface="游ゴシック"/>
+                          <a:ea typeface="游ゴシック"/>
+                        </a:rPr>
+                        <a:t>0.966</a:t>
+                      </a:r>
+                    </a:p>
+                  </a:txBody>
+                  <a:tcPr marL="118872" marR="91440" marT="64008" marB="36576" anchor="ctr">
+                    <a:solidFill>
+                      <a:srgbClr val="FFFFFF"/>
+                    </a:solidFill>
+                    <a:lnL w="7000">
+                      <a:solidFill>
+                        <a:srgbClr val="BFBFBF"/>
+                      </a:solidFill>
+                    </a:lnL>
+                    <a:lnR w="7000">
+                      <a:solidFill>
+                        <a:srgbClr val="BFBFBF"/>
+                      </a:solidFill>
+                    </a:lnR>
+                    <a:lnT w="7000">
+                      <a:solidFill>
+                        <a:srgbClr val="BFBFBF"/>
+                      </a:solidFill>
+                    </a:lnT>
+                    <a:lnB w="7000">
+                      <a:solidFill>
+                        <a:srgbClr val="BFBFBF"/>
+                      </a:solidFill>
+                    </a:lnB>
+                  </a:tcPr>
+                </a:tc>
+              </a:tr>
+              <a:tr h="667512">
+                <a:tc>
+                  <a:txBody>
+                    <a:bodyPr wrap="square" lIns="0" rIns="0" tIns="0" bIns="0">
+                      <a:noAutofit/>
+                    </a:bodyPr>
+                    <a:lstStyle/>
+                    <a:p>
+                      <a:pPr algn="l">
+                        <a:lnSpc>
+                          <a:spcPct val="112000"/>
+                        </a:lnSpc>
+                        <a:spcAft>
+                          <a:spcPts val="0"/>
+                        </a:spcAft>
+                        <a:buNone/>
+                      </a:pPr>
+                      <a:r>
+                        <a:rPr sz="2300" b="0" lang="ja-JP">
+                          <a:solidFill>
+                            <a:srgbClr val="111111"/>
+                          </a:solidFill>
+                          <a:latin typeface="游ゴシック"/>
+                          <a:ea typeface="游ゴシック"/>
+                        </a:rPr>
+                        <a:t>11</a:t>
+                      </a:r>
+                    </a:p>
+                  </a:txBody>
+                  <a:tcPr marL="118872" marR="91440" marT="64008" marB="36576" anchor="ctr">
+                    <a:solidFill>
+                      <a:srgbClr val="FFF4D8"/>
+                    </a:solidFill>
+                    <a:lnL w="7000">
+                      <a:solidFill>
+                        <a:srgbClr val="BFBFBF"/>
+                      </a:solidFill>
+                    </a:lnL>
+                    <a:lnR w="7000">
+                      <a:solidFill>
+                        <a:srgbClr val="BFBFBF"/>
+                      </a:solidFill>
+                    </a:lnR>
+                    <a:lnT w="7000">
+                      <a:solidFill>
+                        <a:srgbClr val="BFBFBF"/>
+                      </a:solidFill>
+                    </a:lnT>
+                    <a:lnB w="7000">
+                      <a:solidFill>
+                        <a:srgbClr val="BFBFBF"/>
+                      </a:solidFill>
+                    </a:lnB>
+                  </a:tcPr>
+                </a:tc>
+                <a:tc>
+                  <a:txBody>
+                    <a:bodyPr wrap="square" lIns="0" rIns="0" tIns="0" bIns="0">
+                      <a:noAutofit/>
+                    </a:bodyPr>
+                    <a:lstStyle/>
+                    <a:p>
+                      <a:pPr algn="l">
+                        <a:lnSpc>
+                          <a:spcPct val="112000"/>
+                        </a:lnSpc>
+                        <a:spcAft>
+                          <a:spcPts val="0"/>
+                        </a:spcAft>
+                        <a:buNone/>
+                      </a:pPr>
+                      <a:r>
+                        <a:rPr sz="2300" b="0" lang="ja-JP">
+                          <a:solidFill>
+                            <a:srgbClr val="111111"/>
+                          </a:solidFill>
+                          <a:latin typeface="游ゴシック"/>
+                          <a:ea typeface="游ゴシック"/>
+                        </a:rPr>
+                        <a:t>155.31–157.27</a:t>
+                      </a:r>
+                    </a:p>
+                  </a:txBody>
+                  <a:tcPr marL="118872" marR="91440" marT="64008" marB="36576" anchor="ctr">
+                    <a:solidFill>
+                      <a:srgbClr val="FFF4D8"/>
+                    </a:solidFill>
+                    <a:lnL w="7000">
+                      <a:solidFill>
+                        <a:srgbClr val="BFBFBF"/>
+                      </a:solidFill>
+                    </a:lnL>
+                    <a:lnR w="7000">
+                      <a:solidFill>
+                        <a:srgbClr val="BFBFBF"/>
+                      </a:solidFill>
+                    </a:lnR>
+                    <a:lnT w="7000">
+                      <a:solidFill>
+                        <a:srgbClr val="BFBFBF"/>
+                      </a:solidFill>
+                    </a:lnT>
+                    <a:lnB w="7000">
+                      <a:solidFill>
+                        <a:srgbClr val="BFBFBF"/>
+                      </a:solidFill>
+                    </a:lnB>
+                  </a:tcPr>
+                </a:tc>
+                <a:tc>
+                  <a:txBody>
+                    <a:bodyPr wrap="square" lIns="0" rIns="0" tIns="0" bIns="0">
+                      <a:noAutofit/>
+                    </a:bodyPr>
+                    <a:lstStyle/>
+                    <a:p>
+                      <a:pPr algn="l">
+                        <a:lnSpc>
+                          <a:spcPct val="112000"/>
+                        </a:lnSpc>
+                        <a:spcAft>
+                          <a:spcPts val="0"/>
+                        </a:spcAft>
+                        <a:buNone/>
+                      </a:pPr>
+                      <a:r>
+                        <a:rPr sz="2300" b="0" lang="ja-JP">
+                          <a:solidFill>
+                            <a:srgbClr val="111111"/>
+                          </a:solidFill>
+                          <a:latin typeface="游ゴシック"/>
+                          <a:ea typeface="游ゴシック"/>
+                        </a:rPr>
+                        <a:t>0 / 2 / 1</a:t>
+                      </a:r>
+                    </a:p>
+                  </a:txBody>
+                  <a:tcPr marL="118872" marR="91440" marT="64008" marB="36576" anchor="ctr">
+                    <a:solidFill>
+                      <a:srgbClr val="FFF4D8"/>
+                    </a:solidFill>
+                    <a:lnL w="7000">
+                      <a:solidFill>
+                        <a:srgbClr val="BFBFBF"/>
+                      </a:solidFill>
+                    </a:lnL>
+                    <a:lnR w="7000">
+                      <a:solidFill>
+                        <a:srgbClr val="BFBFBF"/>
+                      </a:solidFill>
+                    </a:lnR>
+                    <a:lnT w="7000">
+                      <a:solidFill>
+                        <a:srgbClr val="BFBFBF"/>
+                      </a:solidFill>
+                    </a:lnT>
+                    <a:lnB w="7000">
+                      <a:solidFill>
+                        <a:srgbClr val="BFBFBF"/>
+                      </a:solidFill>
+                    </a:lnB>
+                  </a:tcPr>
+                </a:tc>
+                <a:tc>
+                  <a:txBody>
+                    <a:bodyPr wrap="square" lIns="0" rIns="0" tIns="0" bIns="0">
+                      <a:noAutofit/>
+                    </a:bodyPr>
+                    <a:lstStyle/>
+                    <a:p>
+                      <a:pPr algn="l">
+                        <a:lnSpc>
+                          <a:spcPct val="112000"/>
+                        </a:lnSpc>
+                        <a:spcAft>
+                          <a:spcPts val="0"/>
+                        </a:spcAft>
+                        <a:buNone/>
+                      </a:pPr>
+                      <a:r>
+                        <a:rPr sz="2300" b="0" lang="ja-JP">
+                          <a:solidFill>
+                            <a:srgbClr val="111111"/>
+                          </a:solidFill>
+                          <a:latin typeface="游ゴシック"/>
+                          <a:ea typeface="游ゴシック"/>
+                        </a:rPr>
+                        <a:t>0 / 2 / 1</a:t>
+                      </a:r>
+                    </a:p>
+                  </a:txBody>
+                  <a:tcPr marL="118872" marR="91440" marT="64008" marB="36576" anchor="ctr">
+                    <a:solidFill>
+                      <a:srgbClr val="FFF4D8"/>
+                    </a:solidFill>
+                    <a:lnL w="7000">
+                      <a:solidFill>
+                        <a:srgbClr val="BFBFBF"/>
+                      </a:solidFill>
+                    </a:lnL>
+                    <a:lnR w="7000">
+                      <a:solidFill>
+                        <a:srgbClr val="BFBFBF"/>
+                      </a:solidFill>
+                    </a:lnR>
+                    <a:lnT w="7000">
+                      <a:solidFill>
+                        <a:srgbClr val="BFBFBF"/>
+                      </a:solidFill>
+                    </a:lnT>
+                    <a:lnB w="7000">
+                      <a:solidFill>
+                        <a:srgbClr val="BFBFBF"/>
+                      </a:solidFill>
+                    </a:lnB>
+                  </a:tcPr>
+                </a:tc>
+                <a:tc>
+                  <a:txBody>
+                    <a:bodyPr wrap="square" lIns="0" rIns="0" tIns="0" bIns="0">
+                      <a:noAutofit/>
+                    </a:bodyPr>
+                    <a:lstStyle/>
+                    <a:p>
+                      <a:pPr algn="l">
+                        <a:lnSpc>
+                          <a:spcPct val="112000"/>
+                        </a:lnSpc>
+                        <a:spcAft>
+                          <a:spcPts val="0"/>
+                        </a:spcAft>
+                        <a:buNone/>
+                      </a:pPr>
+                      <a:r>
+                        <a:rPr sz="2300" b="0" lang="ja-JP">
+                          <a:solidFill>
+                            <a:srgbClr val="111111"/>
+                          </a:solidFill>
+                          <a:latin typeface="游ゴシック"/>
+                          <a:ea typeface="游ゴシック"/>
+                        </a:rPr>
+                        <a:t>0.969</a:t>
+                      </a:r>
+                    </a:p>
+                  </a:txBody>
+                  <a:tcPr marL="118872" marR="91440" marT="64008" marB="36576" anchor="ctr">
+                    <a:solidFill>
+                      <a:srgbClr val="FFF4D8"/>
+                    </a:solidFill>
+                    <a:lnL w="7000">
+                      <a:solidFill>
+                        <a:srgbClr val="BFBFBF"/>
+                      </a:solidFill>
+                    </a:lnL>
+                    <a:lnR w="7000">
+                      <a:solidFill>
+                        <a:srgbClr val="BFBFBF"/>
+                      </a:solidFill>
+                    </a:lnR>
+                    <a:lnT w="7000">
+                      <a:solidFill>
+                        <a:srgbClr val="BFBFBF"/>
+                      </a:solidFill>
+                    </a:lnT>
+                    <a:lnB w="7000">
+                      <a:solidFill>
+                        <a:srgbClr val="BFBFBF"/>
+                      </a:solidFill>
+                    </a:lnB>
+                  </a:tcPr>
+                </a:tc>
+              </a:tr>
+            </a:tbl>
+          </a:graphicData>
+        </a:graphic>
+      </p:graphicFrame>
+      <p:sp>
+        <p:nvSpPr>
+          <p:cNvPr id="6" name="TextBox 5"/>
+          <p:cNvSpPr txBox="1"/>
+          <p:nvPr/>
+        </p:nvSpPr>
         <p:spPr>
           <a:xfrm>
-            <a:off x="8229600" y="4251960"/>
-            <a:ext cx="3063240" cy="1346853"/>
-          </a:xfrm>
-          <a:prstGeom prst="rect">
-            <a:avLst/>
-          </a:prstGeom>
-        </p:spPr>
-      </p:pic>
-      <p:sp>
-        <p:nvSpPr>
-          <p:cNvPr id="7" name="TextBox 6"/>
-          <p:cNvSpPr txBox="1"/>
-          <p:nvPr/>
-        </p:nvSpPr>
-        <p:spPr>
-          <a:xfrm>
-            <a:off x="8229600" y="5705856"/>
-            <a:ext cx="3063240" cy="320040"/>
+            <a:off x="838504" y="5148072"/>
+            <a:ext cx="10515600" cy="1115568"/>
           </a:xfrm>
           <a:prstGeom prst="rect">
             <a:avLst/>
@@ -10979,63 +12549,30 @@
                 <a:spcPct val="112000"/>
               </a:lnSpc>
               <a:spcAft>
-                <a:spcPts val="1000"/>
+                <a:spcPts val="0"/>
               </a:spcAft>
               <a:buNone/>
             </a:pPr>
             <a:r>
-              <a:rPr sz="2000" b="0" lang="ja-JP">
-                <a:solidFill>
-                  <a:srgbClr val="111111"/>
-                </a:solidFill>
-                <a:latin typeface="游ゴシック"/>
-                <a:ea typeface="游ゴシック"/>
-              </a:rPr>
-              <a:t>表示は投球前と同じ</a:t>
-            </a:r>
-          </a:p>
-        </p:txBody>
-      </p:sp>
-      <p:sp>
-        <p:nvSpPr>
-          <p:cNvPr id="8" name="TextBox 7"/>
-          <p:cNvSpPr txBox="1"/>
-          <p:nvPr/>
-        </p:nvSpPr>
-        <p:spPr>
-          <a:xfrm>
-            <a:off x="838504" y="6199632"/>
-            <a:ext cx="10515600" cy="320040"/>
-          </a:xfrm>
-          <a:prstGeom prst="rect">
-            <a:avLst/>
-          </a:prstGeom>
-          <a:noFill/>
-        </p:spPr>
-        <p:txBody>
-          <a:bodyPr wrap="square" lIns="0" rIns="0" tIns="0" bIns="0">
-            <a:noAutofit/>
-          </a:bodyPr>
-          <a:lstStyle/>
-          <a:p>
-            <a:pPr algn="l">
-              <a:lnSpc>
-                <a:spcPct val="112000"/>
-              </a:lnSpc>
-              <a:spcAft>
-                <a:spcPts val="1000"/>
-              </a:spcAft>
-              <a:buNone/>
-            </a:pPr>
-            <a:r>
-              <a:rPr sz="2300" b="0" lang="ja-JP">
+              <a:rPr sz="2500" b="0" lang="ja-JP">
                 <a:solidFill>
                   <a:srgbClr val="B02121"/>
                 </a:solidFill>
                 <a:latin typeface="游ゴシック"/>
                 <a:ea typeface="游ゴシック"/>
               </a:rPr>
-              <a:t>打者が走り出す場面を含む。表示更新の遅れも考えられる。</a:t>
+              <a:t>元の自動照合では、2候補群を「カウント不変」と整理。</a:t>
+            </a:r>
+            <a:br/>
+            <a:r>
+              <a:rPr sz="2500" b="0" lang="ja-JP">
+                <a:solidFill>
+                  <a:srgbClr val="B02121"/>
+                </a:solidFill>
+                <a:latin typeface="游ゴシック"/>
+                <a:ea typeface="游ゴシック"/>
+              </a:rPr>
+              <a:t>ファウルを2件正しく判定できたという意味ではない。</a:t>
             </a:r>
           </a:p>
         </p:txBody>
@@ -11097,7 +12634,7 @@
                 <a:latin typeface="游ゴシック Light"/>
                 <a:ea typeface="游ゴシック Light"/>
               </a:rPr>
-              <a:t>得点表示を読み取った例</a:t>
+              <a:t>表示の採用時刻で照合結果が変わる</a:t>
             </a:r>
           </a:p>
         </p:txBody>
@@ -11154,8 +12691,8 @@
         </p:nvSpPr>
         <p:spPr>
           <a:xfrm>
-            <a:off x="838504" y="1883664"/>
-            <a:ext cx="4983480" cy="457200"/>
+            <a:off x="838504" y="1810512"/>
+            <a:ext cx="10515600" cy="411480"/>
           </a:xfrm>
           <a:prstGeom prst="rect">
             <a:avLst/>
@@ -11168,7 +12705,7 @@
           </a:bodyPr>
           <a:lstStyle/>
           <a:p>
-            <a:pPr algn="ctr">
+            <a:pPr algn="l">
               <a:lnSpc>
                 <a:spcPct val="112000"/>
               </a:lnSpc>
@@ -11178,65 +12715,21 @@
               <a:buNone/>
             </a:pPr>
             <a:r>
-              <a:rPr sz="3200" b="0" lang="ja-JP">
+              <a:rPr sz="2600" b="0" lang="ja-JP">
                 <a:solidFill>
                   <a:srgbClr val="111111"/>
                 </a:solidFill>
                 <a:latin typeface="游ゴシック"/>
                 <a:ea typeface="游ゴシック"/>
               </a:rPr>
-              <a:t>367.0秒：0–0</a:t>
-            </a:r>
-          </a:p>
-        </p:txBody>
-      </p:sp>
-      <p:sp>
-        <p:nvSpPr>
-          <p:cNvPr id="5" name="TextBox 4"/>
-          <p:cNvSpPr txBox="1"/>
-          <p:nvPr/>
-        </p:nvSpPr>
-        <p:spPr>
-          <a:xfrm>
-            <a:off x="6370624" y="1883664"/>
-            <a:ext cx="4983480" cy="457200"/>
-          </a:xfrm>
-          <a:prstGeom prst="rect">
-            <a:avLst/>
-          </a:prstGeom>
-          <a:noFill/>
-        </p:spPr>
-        <p:txBody>
-          <a:bodyPr wrap="square" lIns="0" rIns="0" tIns="0" bIns="0">
-            <a:noAutofit/>
-          </a:bodyPr>
-          <a:lstStyle/>
-          <a:p>
-            <a:pPr algn="ctr">
-              <a:lnSpc>
-                <a:spcPct val="112000"/>
-              </a:lnSpc>
-              <a:spcAft>
-                <a:spcPts val="1000"/>
-              </a:spcAft>
-              <a:buNone/>
-            </a:pPr>
-            <a:r>
-              <a:rPr sz="3200" b="0" lang="ja-JP">
-                <a:solidFill>
-                  <a:srgbClr val="111111"/>
-                </a:solidFill>
-                <a:latin typeface="游ゴシック"/>
-                <a:ea typeface="游ゴシック"/>
-              </a:rPr>
-              <a:t>434.5秒：0–1</a:t>
+              <a:t>候補11：155.31–157.27秒 ／ 後の取得値も確認</a:t>
             </a:r>
           </a:p>
         </p:txBody>
       </p:sp>
       <p:pic>
         <p:nvPicPr>
-          <p:cNvPr id="6" name="Picture 5" descr="score_367"/>
+          <p:cNvPr id="5" name="Picture 4" descr="lag_case11"/>
           <p:cNvPicPr>
             <a:picLocks noChangeAspect="1"/>
           </p:cNvPicPr>
@@ -11250,48 +12743,24 @@
         </p:blipFill>
         <p:spPr>
           <a:xfrm>
-            <a:off x="838504" y="2615184"/>
-            <a:ext cx="4983480" cy="2167418"/>
+            <a:off x="838504" y="2386584"/>
+            <a:ext cx="10515600" cy="3724275"/>
           </a:xfrm>
           <a:prstGeom prst="rect">
             <a:avLst/>
           </a:prstGeom>
         </p:spPr>
       </p:pic>
-      <p:pic>
-        <p:nvPicPr>
-          <p:cNvPr id="7" name="Picture 6" descr="score_434_5"/>
-          <p:cNvPicPr>
-            <a:picLocks noChangeAspect="1"/>
-          </p:cNvPicPr>
+      <p:sp>
+        <p:nvSpPr>
+          <p:cNvPr id="6" name="TextBox 5"/>
+          <p:cNvSpPr txBox="1"/>
           <p:nvPr/>
-        </p:nvPicPr>
-        <p:blipFill>
-          <a:blip r:embed="rId3"/>
-          <a:stretch>
-            <a:fillRect/>
-          </a:stretch>
-        </p:blipFill>
+        </p:nvSpPr>
         <p:spPr>
           <a:xfrm>
-            <a:off x="6370624" y="2615184"/>
-            <a:ext cx="4983480" cy="2203015"/>
-          </a:xfrm>
-          <a:prstGeom prst="rect">
-            <a:avLst/>
-          </a:prstGeom>
-        </p:spPr>
-      </p:pic>
-      <p:sp>
-        <p:nvSpPr>
-          <p:cNvPr id="8" name="TextBox 7"/>
-          <p:cNvSpPr txBox="1"/>
-          <p:nvPr/>
-        </p:nvSpPr>
-        <p:spPr>
-          <a:xfrm>
-            <a:off x="5852160" y="3383280"/>
-            <a:ext cx="411480" cy="640080"/>
+            <a:off x="838504" y="6254496"/>
+            <a:ext cx="10515600" cy="292608"/>
           </a:xfrm>
           <a:prstGeom prst="rect">
             <a:avLst/>
@@ -11304,50 +12773,6 @@
           </a:bodyPr>
           <a:lstStyle/>
           <a:p>
-            <a:pPr algn="ctr">
-              <a:lnSpc>
-                <a:spcPct val="112000"/>
-              </a:lnSpc>
-              <a:spcAft>
-                <a:spcPts val="1000"/>
-              </a:spcAft>
-              <a:buNone/>
-            </a:pPr>
-            <a:r>
-              <a:rPr sz="3600" b="0" lang="ja-JP">
-                <a:solidFill>
-                  <a:srgbClr val="111111"/>
-                </a:solidFill>
-                <a:latin typeface="游ゴシック"/>
-                <a:ea typeface="游ゴシック"/>
-              </a:rPr>
-              <a:t>→</a:t>
-            </a:r>
-          </a:p>
-        </p:txBody>
-      </p:sp>
-      <p:sp>
-        <p:nvSpPr>
-          <p:cNvPr id="9" name="TextBox 8"/>
-          <p:cNvSpPr txBox="1"/>
-          <p:nvPr/>
-        </p:nvSpPr>
-        <p:spPr>
-          <a:xfrm>
-            <a:off x="838504" y="5257800"/>
-            <a:ext cx="10515600" cy="1005840"/>
-          </a:xfrm>
-          <a:prstGeom prst="rect">
-            <a:avLst/>
-          </a:prstGeom>
-          <a:noFill/>
-        </p:spPr>
-        <p:txBody>
-          <a:bodyPr wrap="square" lIns="0" rIns="0" tIns="0" bIns="0">
-            <a:noAutofit/>
-          </a:bodyPr>
-          <a:lstStyle/>
-          <a:p>
             <a:pPr algn="l">
               <a:lnSpc>
                 <a:spcPct val="112000"/>
@@ -11358,35 +12783,14 @@
               <a:buNone/>
             </a:pPr>
             <a:r>
-              <a:rPr sz="2600" b="0" lang="ja-JP">
+              <a:rPr sz="2100" b="0" lang="ja-JP">
                 <a:solidFill>
-                  <a:srgbClr val="111111"/>
+                  <a:srgbClr val="B02121"/>
                 </a:solidFill>
                 <a:latin typeface="游ゴシック"/>
                 <a:ea typeface="游ゴシック"/>
               </a:rPr>
-              <a:t>• 取得できた得点表示は、0–0から0–1に変化した</a:t>
-            </a:r>
-          </a:p>
-          <a:p>
-            <a:pPr algn="l">
-              <a:lnSpc>
-                <a:spcPct val="112000"/>
-              </a:lnSpc>
-              <a:spcAft>
-                <a:spcPts val="1000"/>
-              </a:spcAft>
-              <a:buNone/>
-            </a:pPr>
-            <a:r>
-              <a:rPr sz="2600" b="0" lang="ja-JP">
-                <a:solidFill>
-                  <a:srgbClr val="111111"/>
-                </a:solidFill>
-                <a:latin typeface="游ゴシック"/>
-                <a:ea typeface="游ゴシック"/>
-              </a:rPr>
-              <a:t>• 欠測区間があるため、得点した時刻は未特定</a:t>
+              <a:t>158.0秒：B0 → 161.5秒：B1　直後の表示だけでは不変となる。</a:t>
             </a:r>
           </a:p>
         </p:txBody>

--- a/presentations/20261030/M棚橋261030.pptx
+++ b/presentations/20261030/M棚橋261030.pptx
@@ -712,7 +712,7 @@
           <a:lstStyle/>
           <a:p>
             <a:r>
-              <a:t>今週は、これまでに実装してきたスコアボード認識と投球区間の検出を、5回裏の同じ動画全体に適用しました。今回は、全部を適用してどのような状況を投球に対応付けられたかと、そこで残った課題を報告します。</a:t>
+              <a:t>今週は、これまでの認識処理を、5回裏の動画全体にまとめて適用しました。今回の結果から、投球に試合状況を付けて記録できたことと、投球の結果を判断するには表示を確認する時刻が重要だということを報告します。</a:t>
             </a:r>
           </a:p>
         </p:txBody>
@@ -798,7 +798,7 @@
           <a:lstStyle/>
           <a:p>
             <a:r>
-              <a:t>今週新たに確認した点は、投球区間に、カウント、走者、回、得点をまとめて付与できたことです。前後の全項目が揃ったのは9候補群でした。また、表示変化の時刻だけではなく、それに対応する投球候補まで示せるようになりました。一方、前後の表示が不足する23候補群があり、取得できても採用する時刻によって不変という整理が変わる例がありました。各認識処理の結果を並べるだけでなく、どの時点の表示を投球に対応付けるかが、イベント判定に必要だと分かりました。</a:t>
+              <a:t>全体の適用結果です。投球区間の候補は65区間で、重なりを表示上まとめると34候補群でした。34は実際の投球数を確定した値ではありません。上から、投球区間候補、B/S/O、走者、得点を同じ時刻で並べています。走者欄の黄色はあり、灰色はなしと認識した時刻で、白は未取得です。このように、投球だけでなく、その付近の試合状況も同じ時系列で追える形にしました。読み取れない場所は、0や走者なしで埋めていません。</a:t>
             </a:r>
           </a:p>
         </p:txBody>
@@ -868,7 +868,7 @@
           <a:lstStyle/>
           <a:p>
             <a:r>
-              <a:t>次は5回裏全体に、実際の投球区間と、ファウルなどの結果の正解注釈を付けます。そのうえで、表示の更新や再表示を待つ方法と、前後の採用値の決め方を検討します。投球区間の見逃しや誤検出の評価と、その投球へ正しい状況や結果を対応付けたかの評価は分けて行います。今回の動画を使った調整の後には、別の動画でも確認します。今週は、全部を適用した結果を取得する段階から、投球と状況の対応付けを評価するための具体的な課題まで整理しました。</a:t>
+              <a:t>34候補群のうち、前後のB/S/Oを照合できたものは11候補群でした。そのうち9候補群では、B/S/Oに加えて、回と表裏、両チームの得点、各塁の走者の認識値も前後で揃いました。残りの2候補群は、OCRの項目が一部取得できていません。前後のB/S/Oが不足したものは23候補群でした。これは、全処理を適用したときに必要な項目が揃った数であり、9候補群で正しくイベントを判定できたという意味ではありません。</a:t>
             </a:r>
           </a:p>
         </p:txBody>
@@ -1078,7 +1078,7 @@
           <a:lstStyle/>
           <a:p>
             <a:r>
-              <a:t>これまでは、YOLOでカウントと走者を検出し、PaddleOCRでイニングと得点を認識してきました。9月には、表示の変化を使ったイベントの推定とCSVへの出力も行っています。その後、VideoMAEの特徴量とCompact ActionFormerを使い、投球区間を確認してきました。今週は、これらの処理を5回裏全体にまとめて適用し、投球候補と、カウント、走者、回、得点を同じ動画の時刻で対応付けました。投球と各状況を一緒に照合した結果が、今回の報告の中心です。</a:t>
+              <a:t>今回、まずいえるのは、検出した投球場面に、カウントや走者、回、得点をまとめて付けて記録できたことです。一方、投球直後のカウントが変わらなくても、それだけでファウルとは判断できませんでした。また、投球の候補が見つかっても、その前後の表示が不足すると、結果を判断できない場面がありました。今回は、この3点を具体的な場面で説明します。</a:t>
             </a:r>
           </a:p>
         </p:txBody>
@@ -1148,7 +1148,7 @@
           <a:lstStyle/>
           <a:p>
             <a:r>
-              <a:t>対象は5ura.mp4の全体、530.2秒です。既存の学習済みモデルを使い、今回の動画での追加学習はしていません。YOLOでB/S/Oと走者、PaddleOCRで回と得点を読み、VideoMAEとCompact ActionFormerで投球区間の候補を出しました。投球候補の前後で同じB/S/Oが連続して得られる範囲を探し、状況を対応付けました。現行の照合では、投球後に最初に得られた安定状態を使っています。この表示の採用時刻が、後で説明する課題につながりました。</a:t>
+              <a:t>一つ目は、どんな状況の投球かを記録できたことです。この場面では、投球と予測した区間に、5回裏、同点、一塁走者あり、2アウトという情報を付けられました。投球前は2ボール0ストライクで、投球後に取得した表示は2ボール1ストライクでした。これにより、この状況で投球があり、その後にストライク表示が増えたという流れを、一つの記録として確認できています。YOLOによるカウントと走者、OCRによる回と得点、VideoMAEによる投球区間を組み合わせたことで、投球の時間と試合状況を結び付けられました。</a:t>
             </a:r>
           </a:p>
         </p:txBody>
@@ -1218,7 +1218,7 @@
           <a:lstStyle/>
           <a:p>
             <a:r>
-              <a:t>全体の適用結果です。投球区間の候補は65区間で、重なりを表示上まとめると34候補群でした。34は実際の投球数を確定した値ではありません。上から、投球区間候補、B/S/O、走者、得点を同じ時刻で並べています。走者欄の黄色はあり、灰色はなしと認識した時刻で、白は未取得です。このように、投球だけでなく、その付近の試合状況も同じ時系列で追える形にしました。読み取れない場所は、0や走者なしで埋めていません。</a:t>
+              <a:t>二つ目は、投球直後の表示だけでは結果を決められないことです。この場面では、投球前と直後の158.0秒は、どちらも0ボール2ストライク1アウトでした。ここだけ見ると、2ストライク後にカウントが変わらないため、ファウルの確認対象になります。しかし、161.5秒の表示は1ボール2ストライク1アウトでした。少し後まで確認すると、ボールが増えた状態を取得しています。この例から、直後に変化がないことを、そのまま最終的な結果として扱わない必要があると分かりました。</a:t>
             </a:r>
           </a:p>
         </p:txBody>
@@ -1288,7 +1288,7 @@
           <a:lstStyle/>
           <a:p>
             <a:r>
-              <a:t>34候補群のうち、前後のB/S/Oを照合できたものは11候補群でした。そのうち9候補群では、B/S/Oに加えて、回と表裏、両チームの得点、各塁の走者の認識値も前後で揃いました。残りの2候補群は、OCRの項目が一部取得できていません。前後のB/S/Oが不足したものは23候補群でした。これは、全処理を適用したときに必要な項目が揃った数であり、9候補群で正しくイベントを判定できたという意味ではありません。</a:t>
+              <a:t>現在の処理は、同じカウントが連続2回得られると、安定した値として採用しています。ただ、先ほどの場面では、158.0秒と158.5秒に同じ値が続いていましたが、その後の161.5秒には値が変わっていました。同じ表示が続いたことと、その表示が今回の投球後の状態に更新されていることは、別の確認が必要です。次の改善では、連続して同じ値が得られたかに加えて、今回の投球後の表示として採用してよいかを検討する必要があります。</a:t>
             </a:r>
           </a:p>
         </p:txBody>
@@ -1358,7 +1358,7 @@
           <a:lstStyle/>
           <a:p>
             <a:r>
-              <a:t>全項目を対応付けた例です。293.11秒から294.85秒に投球候補があり、その前後は5回裏、0対0、一塁走者あり、2アウトという状況でした。投球前の291.5秒では2ボール0ストライク、投球後に表示を取得した297.5秒では2ボール1ストライクです。回、得点、走者が変わらず、ストライク表示が増えたことを、この投球候補に対応付けられました。投球区間だけを出す場合や、表示の変化だけを見る場合よりも、どの状況の投球で表示が変わったかまで記録できています。</a:t>
+              <a:t>三つ目は、投球を検出できても、表示が欠けると結果を判断できないことです。この場面では、367.0秒の投球付近にカウントと走者の表示がありますが、370.0秒には守備側へカメラが切り替わり、スコアボードが映っていません。そのため、投球後にどのように状況が変わったかを、表示だけでは比較できません。表示が消える問題自体は以前からありましたが、今回、投球検出と組み合わせても前後の情報が不足する場面が残りました。このような場面は、誤った結果を決めず、保留にする必要があります。</a:t>
             </a:r>
           </a:p>
         </p:txBody>
@@ -1428,7 +1428,7 @@
           <a:lstStyle/>
           <a:p>
             <a:r>
-              <a:t>別の例では、候補26の区間内にある367.0秒で、5回裏、0対0、3ボール2ストライク2アウト、二塁走者ありという値を取得しました。一方、候補31の直後の436.5秒では、5回裏、0対1、0ボール0ストライク2アウト、一塁走者ありでした。得点だけでなく、投球候補と、その付近のカウントや走者を一緒に記録できています。ただし、間の表示が不足しているため、候補26が得点につながった投球だった、あるいは何秒で得点した、という対応までは確定していません。</a:t>
+              <a:t>得点についても、何が分かり、何がまだ分からないかを分ける必要があります。367.0秒には0対0、436.5秒には0対1という表示を取得し、それぞれの付近の投球候補にカウントや走者も付けて記録できました。ただし、その間の表示に欠けた部分があるため、どの投球で得点したかまでは特定していません。得点が変わったことを記録する段階から、得点につながった投球やプレーを特定するには、途中の映像や表示も対応付ける必要があります。</a:t>
             </a:r>
           </a:p>
         </p:txBody>
@@ -1498,7 +1498,7 @@
           <a:lstStyle/>
           <a:p>
             <a:r>
-              <a:t>9月に考えた、2ストライクで投球の前後の状況が変わらない場面という条件を、今回は検出した投球区間の前後に適用しました。現行の最初の安定状態を使う照合では、113.41秒から115.02秒と、155.31秒から157.27秒の2候補群が、B/S/O不変として残りました。どちらも0ボール2ストライク1アウトです。ただし、これは自動処理が確認対象として残した数で、ファウルを2件正しく検出できたという意味ではありません。</a:t>
+              <a:t>今回のまとめです。投球区間と表示認識を組み合わせることで、検出した投球に、そのときの試合状況を付けて記録できました。その一方で、投球の結果を決めるには、表示が取得できることに加え、その表示を確認する時刻が重要だと分かりました。特に、カウント不変という条件は、ファウルとして確定する条件にはまだなっていません。今週は、情報を一緒に記録するところまで進み、正しいイベント判定へつなげるために必要な確認を具体化できました。</a:t>
             </a:r>
           </a:p>
         </p:txBody>
@@ -1568,7 +1568,7 @@
           <a:lstStyle/>
           <a:p>
             <a:r>
-              <a:t>候補11について、投球後の表示を続けて確認しました。投球前の154.5秒と、直後の158.0秒は、どちらも0ボール2ストライク1アウトです。しかし、その後の161.5秒では、1ボール2ストライク1アウトを取得しています。元の照合は、158.0秒から158.5秒の最初の安定状態を採用したため、不変と整理されていました。同じ認識記録でも、その後の値を確認すると、ボールが増えた状態になります。このため、直後の古い表示で判定していないかを確認する必要があります。認識値の違いを示したもので、実際の投球結果の正解判定は別に必要です。</a:t>
+              <a:t>来週は、まず実際の投球区間と結果を目視で記録し、正解を用意します。次に、投球直後の古い表示を採用していないかを確認し、表示の再出現や、投球後の映像を使う方法を検討します。ファウルではカウントが変わらないため、単に値が変わるまで待つ方法にはしません。そのうえで、投球を正しく見つけられたかと、その結果を正しく判断できたかを分けて評価し、別の動画でも確認します。</a:t>
             </a:r>
           </a:p>
         </p:txBody>
@@ -5271,7 +5271,7 @@
                 <a:latin typeface="游ゴシック Light"/>
                 <a:ea typeface="游ゴシック Light"/>
               </a:rPr>
-              <a:t>全処理の適用で分かったこと</a:t>
+              <a:t>補足：全体の認識結果</a:t>
             </a:r>
           </a:p>
         </p:txBody>
@@ -5328,8 +5328,8 @@
         </p:nvSpPr>
         <p:spPr>
           <a:xfrm>
-            <a:off x="838504" y="1819656"/>
-            <a:ext cx="10515600" cy="4526280"/>
+            <a:off x="838504" y="1810512"/>
+            <a:ext cx="10515600" cy="411480"/>
           </a:xfrm>
           <a:prstGeom prst="rect">
             <a:avLst/>
@@ -5347,98 +5347,47 @@
                 <a:spcPct val="112000"/>
               </a:lnSpc>
               <a:spcAft>
-                <a:spcPts val="1900"/>
+                <a:spcPts val="1000"/>
               </a:spcAft>
               <a:buNone/>
             </a:pPr>
             <a:r>
-              <a:rPr sz="2700" b="0" lang="ja-JP">
+              <a:rPr sz="2600" b="0" lang="ja-JP">
                 <a:solidFill>
                   <a:srgbClr val="111111"/>
                 </a:solidFill>
                 <a:latin typeface="游ゴシック"/>
                 <a:ea typeface="游ゴシック"/>
               </a:rPr>
-              <a:t>• 投球候補に、B/S/O・走者・回・得点を対応付けられた</a:t>
-            </a:r>
-            <a:br/>
-            <a:r>
-              <a:rPr sz="2700" b="0" lang="ja-JP">
-                <a:solidFill>
-                  <a:srgbClr val="111111"/>
-                </a:solidFill>
-                <a:latin typeface="游ゴシック"/>
-                <a:ea typeface="游ゴシック"/>
-              </a:rPr>
-              <a:t>　前後の全項目が揃ったものは9候補群</a:t>
-            </a:r>
-          </a:p>
-          <a:p>
-            <a:pPr algn="l">
-              <a:lnSpc>
-                <a:spcPct val="112000"/>
-              </a:lnSpc>
-              <a:spcAft>
-                <a:spcPts val="1900"/>
-              </a:spcAft>
-              <a:buNone/>
-            </a:pPr>
-            <a:r>
-              <a:rPr sz="2700" b="0" lang="ja-JP">
-                <a:solidFill>
-                  <a:srgbClr val="111111"/>
-                </a:solidFill>
-                <a:latin typeface="游ゴシック"/>
-                <a:ea typeface="游ゴシック"/>
-              </a:rPr>
-              <a:t>• 表示変化を投球候補に対応付けられた</a:t>
-            </a:r>
-            <a:br/>
-            <a:r>
-              <a:rPr sz="2700" b="0" lang="ja-JP">
-                <a:solidFill>
-                  <a:srgbClr val="111111"/>
-                </a:solidFill>
-                <a:latin typeface="游ゴシック"/>
-                <a:ea typeface="游ゴシック"/>
-              </a:rPr>
-              <a:t>　現行の整理：ストライク表示増加3群、ボール表示増加1群</a:t>
-            </a:r>
-          </a:p>
-          <a:p>
-            <a:pPr algn="l">
-              <a:lnSpc>
-                <a:spcPct val="112000"/>
-              </a:lnSpc>
-              <a:spcAft>
-                <a:spcPts val="1900"/>
-              </a:spcAft>
-              <a:buNone/>
-            </a:pPr>
-            <a:r>
-              <a:rPr sz="2700" b="0" lang="ja-JP">
-                <a:solidFill>
-                  <a:srgbClr val="111111"/>
-                </a:solidFill>
-                <a:latin typeface="游ゴシック"/>
-                <a:ea typeface="游ゴシック"/>
-              </a:rPr>
-              <a:t>• 表示の取得不足と、採用時刻による違いを確認した</a:t>
-            </a:r>
-            <a:br/>
-            <a:r>
-              <a:rPr sz="2700" b="0" lang="ja-JP">
-                <a:solidFill>
-                  <a:srgbClr val="111111"/>
-                </a:solidFill>
-                <a:latin typeface="游ゴシック"/>
-                <a:ea typeface="游ゴシック"/>
-              </a:rPr>
-              <a:t>　投球と表示をどう対応付けるかが、次の検討課題</a:t>
-            </a:r>
-          </a:p>
-        </p:txBody>
-      </p:sp>
+              <a:t>65区間 → 34候補群 ／ 各手法の認識値を同じ時刻で表示</a:t>
+            </a:r>
+          </a:p>
+        </p:txBody>
+      </p:sp>
+      <p:pic>
+        <p:nvPicPr>
+          <p:cNvPr id="5" name="Picture 4" descr="integrated_all_fields"/>
+          <p:cNvPicPr>
+            <a:picLocks noChangeAspect="1"/>
+          </p:cNvPicPr>
+          <p:nvPr/>
+        </p:nvPicPr>
+        <p:blipFill>
+          <a:blip r:embed="rId2"/>
+          <a:stretch>
+            <a:fillRect/>
+          </a:stretch>
+        </p:blipFill>
+        <p:spPr>
+          <a:xfrm>
+            <a:off x="838504" y="2221992"/>
+            <a:ext cx="10515600" cy="4206240"/>
+          </a:xfrm>
+          <a:prstGeom prst="rect">
+            <a:avLst/>
+          </a:prstGeom>
+        </p:spPr>
+      </p:pic>
     </p:spTree>
   </p:cSld>
   <p:clrMapOvr>
@@ -5496,7 +5445,7 @@
                 <a:latin typeface="游ゴシック Light"/>
                 <a:ea typeface="游ゴシック Light"/>
               </a:rPr>
-              <a:t>来週すること</a:t>
+              <a:t>補足：必要な情報が揃った数</a:t>
             </a:r>
           </a:p>
         </p:txBody>
@@ -5545,16 +5494,592 @@
           </a:p>
         </p:txBody>
       </p:sp>
-      <p:sp>
-        <p:nvSpPr>
-          <p:cNvPr id="4" name="TextBox 3"/>
+      <p:graphicFrame>
+        <p:nvGraphicFramePr>
+          <p:cNvPr id="4" name="Table 3"/>
+          <p:cNvGraphicFramePr>
+            <a:graphicFrameLocks noGrp="1"/>
+          </p:cNvGraphicFramePr>
+          <p:nvPr/>
+        </p:nvGraphicFramePr>
+        <p:xfrm>
+          <a:off x="838504" y="1920240"/>
+          <a:ext cx="10515600" cy="3154680"/>
+        </p:xfrm>
+        <a:graphic>
+          <a:graphicData uri="http://schemas.openxmlformats.org/drawingml/2006/table">
+            <a:tbl>
+              <a:tblPr firstRow="1" bandRow="1">
+                <a:tableStyleId>{5C22544A-7EE6-4342-B048-85BDC9FD1C3A}</a:tableStyleId>
+              </a:tblPr>
+              <a:tblGrid>
+                <a:gridCol w="8046720"/>
+                <a:gridCol w="2468880"/>
+              </a:tblGrid>
+              <a:tr h="630936">
+                <a:tc>
+                  <a:txBody>
+                    <a:bodyPr wrap="square" lIns="0" rIns="0" tIns="0" bIns="0">
+                      <a:noAutofit/>
+                    </a:bodyPr>
+                    <a:lstStyle/>
+                    <a:p>
+                      <a:pPr algn="l">
+                        <a:lnSpc>
+                          <a:spcPct val="112000"/>
+                        </a:lnSpc>
+                        <a:spcAft>
+                          <a:spcPts val="0"/>
+                        </a:spcAft>
+                        <a:buNone/>
+                      </a:pPr>
+                      <a:r>
+                        <a:rPr sz="2500" b="1" lang="ja-JP">
+                          <a:solidFill>
+                            <a:srgbClr val="111111"/>
+                          </a:solidFill>
+                          <a:latin typeface="游ゴシック"/>
+                          <a:ea typeface="游ゴシック"/>
+                        </a:rPr>
+                        <a:t>前後の認識値の取得状況</a:t>
+                      </a:r>
+                    </a:p>
+                  </a:txBody>
+                  <a:tcPr marL="118872" marR="91440" marT="64008" marB="36576" anchor="ctr">
+                    <a:solidFill>
+                      <a:srgbClr val="EEEEEE"/>
+                    </a:solidFill>
+                    <a:lnL w="7000">
+                      <a:solidFill>
+                        <a:srgbClr val="BFBFBF"/>
+                      </a:solidFill>
+                    </a:lnL>
+                    <a:lnR w="7000">
+                      <a:solidFill>
+                        <a:srgbClr val="BFBFBF"/>
+                      </a:solidFill>
+                    </a:lnR>
+                    <a:lnT w="7000">
+                      <a:solidFill>
+                        <a:srgbClr val="BFBFBF"/>
+                      </a:solidFill>
+                    </a:lnT>
+                    <a:lnB w="7000">
+                      <a:solidFill>
+                        <a:srgbClr val="BFBFBF"/>
+                      </a:solidFill>
+                    </a:lnB>
+                  </a:tcPr>
+                </a:tc>
+                <a:tc>
+                  <a:txBody>
+                    <a:bodyPr wrap="square" lIns="0" rIns="0" tIns="0" bIns="0">
+                      <a:noAutofit/>
+                    </a:bodyPr>
+                    <a:lstStyle/>
+                    <a:p>
+                      <a:pPr algn="l">
+                        <a:lnSpc>
+                          <a:spcPct val="112000"/>
+                        </a:lnSpc>
+                        <a:spcAft>
+                          <a:spcPts val="0"/>
+                        </a:spcAft>
+                        <a:buNone/>
+                      </a:pPr>
+                      <a:r>
+                        <a:rPr sz="2500" b="1" lang="ja-JP">
+                          <a:solidFill>
+                            <a:srgbClr val="111111"/>
+                          </a:solidFill>
+                          <a:latin typeface="游ゴシック"/>
+                          <a:ea typeface="游ゴシック"/>
+                        </a:rPr>
+                        <a:t>候補群数</a:t>
+                      </a:r>
+                    </a:p>
+                  </a:txBody>
+                  <a:tcPr marL="118872" marR="91440" marT="64008" marB="36576" anchor="ctr">
+                    <a:solidFill>
+                      <a:srgbClr val="EEEEEE"/>
+                    </a:solidFill>
+                    <a:lnL w="7000">
+                      <a:solidFill>
+                        <a:srgbClr val="BFBFBF"/>
+                      </a:solidFill>
+                    </a:lnL>
+                    <a:lnR w="7000">
+                      <a:solidFill>
+                        <a:srgbClr val="BFBFBF"/>
+                      </a:solidFill>
+                    </a:lnR>
+                    <a:lnT w="7000">
+                      <a:solidFill>
+                        <a:srgbClr val="BFBFBF"/>
+                      </a:solidFill>
+                    </a:lnT>
+                    <a:lnB w="7000">
+                      <a:solidFill>
+                        <a:srgbClr val="BFBFBF"/>
+                      </a:solidFill>
+                    </a:lnB>
+                  </a:tcPr>
+                </a:tc>
+              </a:tr>
+              <a:tr h="630936">
+                <a:tc>
+                  <a:txBody>
+                    <a:bodyPr wrap="square" lIns="0" rIns="0" tIns="0" bIns="0">
+                      <a:noAutofit/>
+                    </a:bodyPr>
+                    <a:lstStyle/>
+                    <a:p>
+                      <a:pPr algn="l">
+                        <a:lnSpc>
+                          <a:spcPct val="112000"/>
+                        </a:lnSpc>
+                        <a:spcAft>
+                          <a:spcPts val="0"/>
+                        </a:spcAft>
+                        <a:buNone/>
+                      </a:pPr>
+                      <a:r>
+                        <a:rPr sz="2500" b="0" lang="ja-JP">
+                          <a:solidFill>
+                            <a:srgbClr val="111111"/>
+                          </a:solidFill>
+                          <a:latin typeface="游ゴシック"/>
+                          <a:ea typeface="游ゴシック"/>
+                        </a:rPr>
+                        <a:t>B/S/O・走者・回・表裏・両チーム得点が揃う</a:t>
+                      </a:r>
+                    </a:p>
+                  </a:txBody>
+                  <a:tcPr marL="118872" marR="91440" marT="64008" marB="36576" anchor="ctr">
+                    <a:solidFill>
+                      <a:srgbClr val="FFF4D8"/>
+                    </a:solidFill>
+                    <a:lnL w="7000">
+                      <a:solidFill>
+                        <a:srgbClr val="BFBFBF"/>
+                      </a:solidFill>
+                    </a:lnL>
+                    <a:lnR w="7000">
+                      <a:solidFill>
+                        <a:srgbClr val="BFBFBF"/>
+                      </a:solidFill>
+                    </a:lnR>
+                    <a:lnT w="7000">
+                      <a:solidFill>
+                        <a:srgbClr val="BFBFBF"/>
+                      </a:solidFill>
+                    </a:lnT>
+                    <a:lnB w="7000">
+                      <a:solidFill>
+                        <a:srgbClr val="BFBFBF"/>
+                      </a:solidFill>
+                    </a:lnB>
+                  </a:tcPr>
+                </a:tc>
+                <a:tc>
+                  <a:txBody>
+                    <a:bodyPr wrap="square" lIns="0" rIns="0" tIns="0" bIns="0">
+                      <a:noAutofit/>
+                    </a:bodyPr>
+                    <a:lstStyle/>
+                    <a:p>
+                      <a:pPr algn="l">
+                        <a:lnSpc>
+                          <a:spcPct val="112000"/>
+                        </a:lnSpc>
+                        <a:spcAft>
+                          <a:spcPts val="0"/>
+                        </a:spcAft>
+                        <a:buNone/>
+                      </a:pPr>
+                      <a:r>
+                        <a:rPr sz="2500" b="0" lang="ja-JP">
+                          <a:solidFill>
+                            <a:srgbClr val="111111"/>
+                          </a:solidFill>
+                          <a:latin typeface="游ゴシック"/>
+                          <a:ea typeface="游ゴシック"/>
+                        </a:rPr>
+                        <a:t>9</a:t>
+                      </a:r>
+                    </a:p>
+                  </a:txBody>
+                  <a:tcPr marL="118872" marR="91440" marT="64008" marB="36576" anchor="ctr">
+                    <a:solidFill>
+                      <a:srgbClr val="FFF4D8"/>
+                    </a:solidFill>
+                    <a:lnL w="7000">
+                      <a:solidFill>
+                        <a:srgbClr val="BFBFBF"/>
+                      </a:solidFill>
+                    </a:lnL>
+                    <a:lnR w="7000">
+                      <a:solidFill>
+                        <a:srgbClr val="BFBFBF"/>
+                      </a:solidFill>
+                    </a:lnR>
+                    <a:lnT w="7000">
+                      <a:solidFill>
+                        <a:srgbClr val="BFBFBF"/>
+                      </a:solidFill>
+                    </a:lnT>
+                    <a:lnB w="7000">
+                      <a:solidFill>
+                        <a:srgbClr val="BFBFBF"/>
+                      </a:solidFill>
+                    </a:lnB>
+                  </a:tcPr>
+                </a:tc>
+              </a:tr>
+              <a:tr h="630936">
+                <a:tc>
+                  <a:txBody>
+                    <a:bodyPr wrap="square" lIns="0" rIns="0" tIns="0" bIns="0">
+                      <a:noAutofit/>
+                    </a:bodyPr>
+                    <a:lstStyle/>
+                    <a:p>
+                      <a:pPr algn="l">
+                        <a:lnSpc>
+                          <a:spcPct val="112000"/>
+                        </a:lnSpc>
+                        <a:spcAft>
+                          <a:spcPts val="0"/>
+                        </a:spcAft>
+                        <a:buNone/>
+                      </a:pPr>
+                      <a:r>
+                        <a:rPr sz="2500" b="0" lang="ja-JP">
+                          <a:solidFill>
+                            <a:srgbClr val="111111"/>
+                          </a:solidFill>
+                          <a:latin typeface="游ゴシック"/>
+                          <a:ea typeface="游ゴシック"/>
+                        </a:rPr>
+                        <a:t>B/S/Oは揃うが、OCRの項目が一部不足</a:t>
+                      </a:r>
+                    </a:p>
+                  </a:txBody>
+                  <a:tcPr marL="118872" marR="91440" marT="64008" marB="36576" anchor="ctr">
+                    <a:solidFill>
+                      <a:srgbClr val="FFFFFF"/>
+                    </a:solidFill>
+                    <a:lnL w="7000">
+                      <a:solidFill>
+                        <a:srgbClr val="BFBFBF"/>
+                      </a:solidFill>
+                    </a:lnL>
+                    <a:lnR w="7000">
+                      <a:solidFill>
+                        <a:srgbClr val="BFBFBF"/>
+                      </a:solidFill>
+                    </a:lnR>
+                    <a:lnT w="7000">
+                      <a:solidFill>
+                        <a:srgbClr val="BFBFBF"/>
+                      </a:solidFill>
+                    </a:lnT>
+                    <a:lnB w="7000">
+                      <a:solidFill>
+                        <a:srgbClr val="BFBFBF"/>
+                      </a:solidFill>
+                    </a:lnB>
+                  </a:tcPr>
+                </a:tc>
+                <a:tc>
+                  <a:txBody>
+                    <a:bodyPr wrap="square" lIns="0" rIns="0" tIns="0" bIns="0">
+                      <a:noAutofit/>
+                    </a:bodyPr>
+                    <a:lstStyle/>
+                    <a:p>
+                      <a:pPr algn="l">
+                        <a:lnSpc>
+                          <a:spcPct val="112000"/>
+                        </a:lnSpc>
+                        <a:spcAft>
+                          <a:spcPts val="0"/>
+                        </a:spcAft>
+                        <a:buNone/>
+                      </a:pPr>
+                      <a:r>
+                        <a:rPr sz="2500" b="0" lang="ja-JP">
+                          <a:solidFill>
+                            <a:srgbClr val="111111"/>
+                          </a:solidFill>
+                          <a:latin typeface="游ゴシック"/>
+                          <a:ea typeface="游ゴシック"/>
+                        </a:rPr>
+                        <a:t>2</a:t>
+                      </a:r>
+                    </a:p>
+                  </a:txBody>
+                  <a:tcPr marL="118872" marR="91440" marT="64008" marB="36576" anchor="ctr">
+                    <a:solidFill>
+                      <a:srgbClr val="FFFFFF"/>
+                    </a:solidFill>
+                    <a:lnL w="7000">
+                      <a:solidFill>
+                        <a:srgbClr val="BFBFBF"/>
+                      </a:solidFill>
+                    </a:lnL>
+                    <a:lnR w="7000">
+                      <a:solidFill>
+                        <a:srgbClr val="BFBFBF"/>
+                      </a:solidFill>
+                    </a:lnR>
+                    <a:lnT w="7000">
+                      <a:solidFill>
+                        <a:srgbClr val="BFBFBF"/>
+                      </a:solidFill>
+                    </a:lnT>
+                    <a:lnB w="7000">
+                      <a:solidFill>
+                        <a:srgbClr val="BFBFBF"/>
+                      </a:solidFill>
+                    </a:lnB>
+                  </a:tcPr>
+                </a:tc>
+              </a:tr>
+              <a:tr h="630936">
+                <a:tc>
+                  <a:txBody>
+                    <a:bodyPr wrap="square" lIns="0" rIns="0" tIns="0" bIns="0">
+                      <a:noAutofit/>
+                    </a:bodyPr>
+                    <a:lstStyle/>
+                    <a:p>
+                      <a:pPr algn="l">
+                        <a:lnSpc>
+                          <a:spcPct val="112000"/>
+                        </a:lnSpc>
+                        <a:spcAft>
+                          <a:spcPts val="0"/>
+                        </a:spcAft>
+                        <a:buNone/>
+                      </a:pPr>
+                      <a:r>
+                        <a:rPr sz="2500" b="0" lang="ja-JP">
+                          <a:solidFill>
+                            <a:srgbClr val="111111"/>
+                          </a:solidFill>
+                          <a:latin typeface="游ゴシック"/>
+                          <a:ea typeface="游ゴシック"/>
+                        </a:rPr>
+                        <a:t>前後どちらかのB/S/Oが不足</a:t>
+                      </a:r>
+                    </a:p>
+                  </a:txBody>
+                  <a:tcPr marL="118872" marR="91440" marT="64008" marB="36576" anchor="ctr">
+                    <a:solidFill>
+                      <a:srgbClr val="FFFFFF"/>
+                    </a:solidFill>
+                    <a:lnL w="7000">
+                      <a:solidFill>
+                        <a:srgbClr val="BFBFBF"/>
+                      </a:solidFill>
+                    </a:lnL>
+                    <a:lnR w="7000">
+                      <a:solidFill>
+                        <a:srgbClr val="BFBFBF"/>
+                      </a:solidFill>
+                    </a:lnR>
+                    <a:lnT w="7000">
+                      <a:solidFill>
+                        <a:srgbClr val="BFBFBF"/>
+                      </a:solidFill>
+                    </a:lnT>
+                    <a:lnB w="7000">
+                      <a:solidFill>
+                        <a:srgbClr val="BFBFBF"/>
+                      </a:solidFill>
+                    </a:lnB>
+                  </a:tcPr>
+                </a:tc>
+                <a:tc>
+                  <a:txBody>
+                    <a:bodyPr wrap="square" lIns="0" rIns="0" tIns="0" bIns="0">
+                      <a:noAutofit/>
+                    </a:bodyPr>
+                    <a:lstStyle/>
+                    <a:p>
+                      <a:pPr algn="l">
+                        <a:lnSpc>
+                          <a:spcPct val="112000"/>
+                        </a:lnSpc>
+                        <a:spcAft>
+                          <a:spcPts val="0"/>
+                        </a:spcAft>
+                        <a:buNone/>
+                      </a:pPr>
+                      <a:r>
+                        <a:rPr sz="2500" b="0" lang="ja-JP">
+                          <a:solidFill>
+                            <a:srgbClr val="111111"/>
+                          </a:solidFill>
+                          <a:latin typeface="游ゴシック"/>
+                          <a:ea typeface="游ゴシック"/>
+                        </a:rPr>
+                        <a:t>23</a:t>
+                      </a:r>
+                    </a:p>
+                  </a:txBody>
+                  <a:tcPr marL="118872" marR="91440" marT="64008" marB="36576" anchor="ctr">
+                    <a:solidFill>
+                      <a:srgbClr val="FFFFFF"/>
+                    </a:solidFill>
+                    <a:lnL w="7000">
+                      <a:solidFill>
+                        <a:srgbClr val="BFBFBF"/>
+                      </a:solidFill>
+                    </a:lnL>
+                    <a:lnR w="7000">
+                      <a:solidFill>
+                        <a:srgbClr val="BFBFBF"/>
+                      </a:solidFill>
+                    </a:lnR>
+                    <a:lnT w="7000">
+                      <a:solidFill>
+                        <a:srgbClr val="BFBFBF"/>
+                      </a:solidFill>
+                    </a:lnT>
+                    <a:lnB w="7000">
+                      <a:solidFill>
+                        <a:srgbClr val="BFBFBF"/>
+                      </a:solidFill>
+                    </a:lnB>
+                  </a:tcPr>
+                </a:tc>
+              </a:tr>
+              <a:tr h="630936">
+                <a:tc>
+                  <a:txBody>
+                    <a:bodyPr wrap="square" lIns="0" rIns="0" tIns="0" bIns="0">
+                      <a:noAutofit/>
+                    </a:bodyPr>
+                    <a:lstStyle/>
+                    <a:p>
+                      <a:pPr algn="l">
+                        <a:lnSpc>
+                          <a:spcPct val="112000"/>
+                        </a:lnSpc>
+                        <a:spcAft>
+                          <a:spcPts val="0"/>
+                        </a:spcAft>
+                        <a:buNone/>
+                      </a:pPr>
+                      <a:r>
+                        <a:rPr sz="2500" b="0" lang="ja-JP">
+                          <a:solidFill>
+                            <a:srgbClr val="111111"/>
+                          </a:solidFill>
+                          <a:latin typeface="游ゴシック"/>
+                          <a:ea typeface="游ゴシック"/>
+                        </a:rPr>
+                        <a:t>合計</a:t>
+                      </a:r>
+                    </a:p>
+                  </a:txBody>
+                  <a:tcPr marL="118872" marR="91440" marT="64008" marB="36576" anchor="ctr">
+                    <a:solidFill>
+                      <a:srgbClr val="FFFFFF"/>
+                    </a:solidFill>
+                    <a:lnL w="7000">
+                      <a:solidFill>
+                        <a:srgbClr val="BFBFBF"/>
+                      </a:solidFill>
+                    </a:lnL>
+                    <a:lnR w="7000">
+                      <a:solidFill>
+                        <a:srgbClr val="BFBFBF"/>
+                      </a:solidFill>
+                    </a:lnR>
+                    <a:lnT w="7000">
+                      <a:solidFill>
+                        <a:srgbClr val="BFBFBF"/>
+                      </a:solidFill>
+                    </a:lnT>
+                    <a:lnB w="7000">
+                      <a:solidFill>
+                        <a:srgbClr val="BFBFBF"/>
+                      </a:solidFill>
+                    </a:lnB>
+                  </a:tcPr>
+                </a:tc>
+                <a:tc>
+                  <a:txBody>
+                    <a:bodyPr wrap="square" lIns="0" rIns="0" tIns="0" bIns="0">
+                      <a:noAutofit/>
+                    </a:bodyPr>
+                    <a:lstStyle/>
+                    <a:p>
+                      <a:pPr algn="l">
+                        <a:lnSpc>
+                          <a:spcPct val="112000"/>
+                        </a:lnSpc>
+                        <a:spcAft>
+                          <a:spcPts val="0"/>
+                        </a:spcAft>
+                        <a:buNone/>
+                      </a:pPr>
+                      <a:r>
+                        <a:rPr sz="2500" b="0" lang="ja-JP">
+                          <a:solidFill>
+                            <a:srgbClr val="111111"/>
+                          </a:solidFill>
+                          <a:latin typeface="游ゴシック"/>
+                          <a:ea typeface="游ゴシック"/>
+                        </a:rPr>
+                        <a:t>34</a:t>
+                      </a:r>
+                    </a:p>
+                  </a:txBody>
+                  <a:tcPr marL="118872" marR="91440" marT="64008" marB="36576" anchor="ctr">
+                    <a:solidFill>
+                      <a:srgbClr val="FFFFFF"/>
+                    </a:solidFill>
+                    <a:lnL w="7000">
+                      <a:solidFill>
+                        <a:srgbClr val="BFBFBF"/>
+                      </a:solidFill>
+                    </a:lnL>
+                    <a:lnR w="7000">
+                      <a:solidFill>
+                        <a:srgbClr val="BFBFBF"/>
+                      </a:solidFill>
+                    </a:lnR>
+                    <a:lnT w="7000">
+                      <a:solidFill>
+                        <a:srgbClr val="BFBFBF"/>
+                      </a:solidFill>
+                    </a:lnT>
+                    <a:lnB w="7000">
+                      <a:solidFill>
+                        <a:srgbClr val="BFBFBF"/>
+                      </a:solidFill>
+                    </a:lnB>
+                  </a:tcPr>
+                </a:tc>
+              </a:tr>
+            </a:tbl>
+          </a:graphicData>
+        </a:graphic>
+      </p:graphicFrame>
+      <p:sp>
+        <p:nvSpPr>
+          <p:cNvPr id="5" name="TextBox 4"/>
           <p:cNvSpPr txBox="1"/>
           <p:nvPr/>
         </p:nvSpPr>
         <p:spPr>
           <a:xfrm>
-            <a:off x="838504" y="1819656"/>
-            <a:ext cx="10515600" cy="4389120"/>
+            <a:off x="838504" y="5449824"/>
+            <a:ext cx="10515600" cy="1005840"/>
           </a:xfrm>
           <a:prstGeom prst="rect">
             <a:avLst/>
@@ -5572,82 +6097,30 @@
                 <a:spcPct val="112000"/>
               </a:lnSpc>
               <a:spcAft>
-                <a:spcPts val="2200"/>
+                <a:spcPts val="0"/>
               </a:spcAft>
               <a:buNone/>
             </a:pPr>
             <a:r>
-              <a:rPr sz="2800" b="0" lang="ja-JP">
+              <a:rPr sz="2500" b="0" lang="ja-JP">
                 <a:solidFill>
-                  <a:srgbClr val="111111"/>
+                  <a:srgbClr val="B02121"/>
                 </a:solidFill>
                 <a:latin typeface="游ゴシック"/>
                 <a:ea typeface="游ゴシック"/>
               </a:rPr>
-              <a:t>• 5回ウラ全体に、投球区間と結果の正解注釈を付ける</a:t>
-            </a:r>
-          </a:p>
-          <a:p>
-            <a:pPr algn="l">
-              <a:lnSpc>
-                <a:spcPct val="112000"/>
-              </a:lnSpc>
-              <a:spcAft>
-                <a:spcPts val="2200"/>
-              </a:spcAft>
-              <a:buNone/>
-            </a:pPr>
-            <a:r>
-              <a:rPr sz="2800" b="0" lang="ja-JP">
+              <a:t>前後のB/S/Oを照合できたのは11候補群。</a:t>
+            </a:r>
+            <a:br/>
+            <a:r>
+              <a:rPr sz="2500" b="0" lang="ja-JP">
                 <a:solidFill>
-                  <a:srgbClr val="111111"/>
+                  <a:srgbClr val="B02121"/>
                 </a:solidFill>
                 <a:latin typeface="游ゴシック"/>
                 <a:ea typeface="游ゴシック"/>
               </a:rPr>
-              <a:t>• 表示の更新・再表示を確認し、前後の採用値を決める</a:t>
-            </a:r>
-          </a:p>
-          <a:p>
-            <a:pPr algn="l">
-              <a:lnSpc>
-                <a:spcPct val="112000"/>
-              </a:lnSpc>
-              <a:spcAft>
-                <a:spcPts val="2200"/>
-              </a:spcAft>
-              <a:buNone/>
-            </a:pPr>
-            <a:r>
-              <a:rPr sz="2800" b="0" lang="ja-JP">
-                <a:solidFill>
-                  <a:srgbClr val="111111"/>
-                </a:solidFill>
-                <a:latin typeface="游ゴシック"/>
-                <a:ea typeface="游ゴシック"/>
-              </a:rPr>
-              <a:t>• 投球検出と、状況・結果の対応付けを分けて評価する</a:t>
-            </a:r>
-          </a:p>
-          <a:p>
-            <a:pPr algn="l">
-              <a:lnSpc>
-                <a:spcPct val="112000"/>
-              </a:lnSpc>
-              <a:spcAft>
-                <a:spcPts val="2200"/>
-              </a:spcAft>
-              <a:buNone/>
-            </a:pPr>
-            <a:r>
-              <a:rPr sz="2800" b="0" lang="ja-JP">
-                <a:solidFill>
-                  <a:srgbClr val="111111"/>
-                </a:solidFill>
-                <a:latin typeface="游ゴシック"/>
-                <a:ea typeface="游ゴシック"/>
-              </a:rPr>
-              <a:t>• 今回の動画で検討した後、別動画でも確認する</a:t>
+              <a:t>全項目の取得は、イベント判定の成功や正解率とは異なる。</a:t>
             </a:r>
           </a:p>
         </p:txBody>
@@ -5709,7 +6182,7 @@
                 <a:latin typeface="游ゴシック Light"/>
                 <a:ea typeface="游ゴシック Light"/>
               </a:rPr>
-              <a:t>補足：他の照合例と結果の内訳</a:t>
+              <a:t>補足：照合例と結果の内訳</a:t>
             </a:r>
           </a:p>
         </p:txBody>
@@ -7574,7 +8047,7 @@
                 <a:latin typeface="游ゴシック Light"/>
                 <a:ea typeface="游ゴシック Light"/>
               </a:rPr>
-              <a:t>補足：従来の精度評価との違い</a:t>
+              <a:t>補足：従来の評価との違い</a:t>
             </a:r>
           </a:p>
         </p:txBody>
@@ -8418,7 +8891,7 @@
                 <a:latin typeface="游ゴシック Light"/>
                 <a:ea typeface="游ゴシック Light"/>
               </a:rPr>
-              <a:t>これまでの研究と今週の位置付け</a:t>
+              <a:t>今週の結果からいえること</a:t>
             </a:r>
           </a:p>
         </p:txBody>
@@ -8467,699 +8940,16 @@
           </a:p>
         </p:txBody>
       </p:sp>
-      <p:graphicFrame>
-        <p:nvGraphicFramePr>
-          <p:cNvPr id="4" name="Table 3"/>
-          <p:cNvGraphicFramePr>
-            <a:graphicFrameLocks noGrp="1"/>
-          </p:cNvGraphicFramePr>
-          <p:nvPr/>
-        </p:nvGraphicFramePr>
-        <p:xfrm>
-          <a:off x="838504" y="1856231"/>
-          <a:ext cx="10515600" cy="2962656"/>
-        </p:xfrm>
-        <a:graphic>
-          <a:graphicData uri="http://schemas.openxmlformats.org/drawingml/2006/table">
-            <a:tbl>
-              <a:tblPr firstRow="1" bandRow="1">
-                <a:tableStyleId>{5C22544A-7EE6-4342-B048-85BDC9FD1C3A}</a:tableStyleId>
-              </a:tblPr>
-              <a:tblGrid>
-                <a:gridCol w="1828800"/>
-                <a:gridCol w="3657600"/>
-                <a:gridCol w="5029200"/>
-              </a:tblGrid>
-              <a:tr h="740664">
-                <a:tc>
-                  <a:txBody>
-                    <a:bodyPr wrap="square" lIns="0" rIns="0" tIns="0" bIns="0">
-                      <a:noAutofit/>
-                    </a:bodyPr>
-                    <a:lstStyle/>
-                    <a:p>
-                      <a:pPr algn="l">
-                        <a:lnSpc>
-                          <a:spcPct val="112000"/>
-                        </a:lnSpc>
-                        <a:spcAft>
-                          <a:spcPts val="0"/>
-                        </a:spcAft>
-                        <a:buNone/>
-                      </a:pPr>
-                      <a:r>
-                        <a:rPr sz="2400" b="1" lang="ja-JP">
-                          <a:solidFill>
-                            <a:srgbClr val="111111"/>
-                          </a:solidFill>
-                          <a:latin typeface="游ゴシック"/>
-                          <a:ea typeface="游ゴシック"/>
-                        </a:rPr>
-                        <a:t>時期</a:t>
-                      </a:r>
-                    </a:p>
-                  </a:txBody>
-                  <a:tcPr marL="118872" marR="91440" marT="64008" marB="36576" anchor="ctr">
-                    <a:solidFill>
-                      <a:srgbClr val="EEEEEE"/>
-                    </a:solidFill>
-                    <a:lnL w="7000">
-                      <a:solidFill>
-                        <a:srgbClr val="BFBFBF"/>
-                      </a:solidFill>
-                    </a:lnL>
-                    <a:lnR w="7000">
-                      <a:solidFill>
-                        <a:srgbClr val="BFBFBF"/>
-                      </a:solidFill>
-                    </a:lnR>
-                    <a:lnT w="7000">
-                      <a:solidFill>
-                        <a:srgbClr val="BFBFBF"/>
-                      </a:solidFill>
-                    </a:lnT>
-                    <a:lnB w="7000">
-                      <a:solidFill>
-                        <a:srgbClr val="BFBFBF"/>
-                      </a:solidFill>
-                    </a:lnB>
-                  </a:tcPr>
-                </a:tc>
-                <a:tc>
-                  <a:txBody>
-                    <a:bodyPr wrap="square" lIns="0" rIns="0" tIns="0" bIns="0">
-                      <a:noAutofit/>
-                    </a:bodyPr>
-                    <a:lstStyle/>
-                    <a:p>
-                      <a:pPr algn="l">
-                        <a:lnSpc>
-                          <a:spcPct val="112000"/>
-                        </a:lnSpc>
-                        <a:spcAft>
-                          <a:spcPts val="0"/>
-                        </a:spcAft>
-                        <a:buNone/>
-                      </a:pPr>
-                      <a:r>
-                        <a:rPr sz="2400" b="1" lang="ja-JP">
-                          <a:solidFill>
-                            <a:srgbClr val="111111"/>
-                          </a:solidFill>
-                          <a:latin typeface="游ゴシック"/>
-                          <a:ea typeface="游ゴシック"/>
-                        </a:rPr>
-                        <a:t>取り組んだ処理</a:t>
-                      </a:r>
-                    </a:p>
-                  </a:txBody>
-                  <a:tcPr marL="118872" marR="91440" marT="64008" marB="36576" anchor="ctr">
-                    <a:solidFill>
-                      <a:srgbClr val="EEEEEE"/>
-                    </a:solidFill>
-                    <a:lnL w="7000">
-                      <a:solidFill>
-                        <a:srgbClr val="BFBFBF"/>
-                      </a:solidFill>
-                    </a:lnL>
-                    <a:lnR w="7000">
-                      <a:solidFill>
-                        <a:srgbClr val="BFBFBF"/>
-                      </a:solidFill>
-                    </a:lnR>
-                    <a:lnT w="7000">
-                      <a:solidFill>
-                        <a:srgbClr val="BFBFBF"/>
-                      </a:solidFill>
-                    </a:lnT>
-                    <a:lnB w="7000">
-                      <a:solidFill>
-                        <a:srgbClr val="BFBFBF"/>
-                      </a:solidFill>
-                    </a:lnB>
-                  </a:tcPr>
-                </a:tc>
-                <a:tc>
-                  <a:txBody>
-                    <a:bodyPr wrap="square" lIns="0" rIns="0" tIns="0" bIns="0">
-                      <a:noAutofit/>
-                    </a:bodyPr>
-                    <a:lstStyle/>
-                    <a:p>
-                      <a:pPr algn="l">
-                        <a:lnSpc>
-                          <a:spcPct val="112000"/>
-                        </a:lnSpc>
-                        <a:spcAft>
-                          <a:spcPts val="0"/>
-                        </a:spcAft>
-                        <a:buNone/>
-                      </a:pPr>
-                      <a:r>
-                        <a:rPr sz="2400" b="1" lang="ja-JP">
-                          <a:solidFill>
-                            <a:srgbClr val="111111"/>
-                          </a:solidFill>
-                          <a:latin typeface="游ゴシック"/>
-                          <a:ea typeface="游ゴシック"/>
-                        </a:rPr>
-                        <a:t>確認してきたこと</a:t>
-                      </a:r>
-                    </a:p>
-                  </a:txBody>
-                  <a:tcPr marL="118872" marR="91440" marT="64008" marB="36576" anchor="ctr">
-                    <a:solidFill>
-                      <a:srgbClr val="EEEEEE"/>
-                    </a:solidFill>
-                    <a:lnL w="7000">
-                      <a:solidFill>
-                        <a:srgbClr val="BFBFBF"/>
-                      </a:solidFill>
-                    </a:lnL>
-                    <a:lnR w="7000">
-                      <a:solidFill>
-                        <a:srgbClr val="BFBFBF"/>
-                      </a:solidFill>
-                    </a:lnR>
-                    <a:lnT w="7000">
-                      <a:solidFill>
-                        <a:srgbClr val="BFBFBF"/>
-                      </a:solidFill>
-                    </a:lnT>
-                    <a:lnB w="7000">
-                      <a:solidFill>
-                        <a:srgbClr val="BFBFBF"/>
-                      </a:solidFill>
-                    </a:lnB>
-                  </a:tcPr>
-                </a:tc>
-              </a:tr>
-              <a:tr h="740664">
-                <a:tc>
-                  <a:txBody>
-                    <a:bodyPr wrap="square" lIns="0" rIns="0" tIns="0" bIns="0">
-                      <a:noAutofit/>
-                    </a:bodyPr>
-                    <a:lstStyle/>
-                    <a:p>
-                      <a:pPr algn="l">
-                        <a:lnSpc>
-                          <a:spcPct val="112000"/>
-                        </a:lnSpc>
-                        <a:spcAft>
-                          <a:spcPts val="0"/>
-                        </a:spcAft>
-                        <a:buNone/>
-                      </a:pPr>
-                      <a:r>
-                        <a:rPr sz="2400" b="0" lang="ja-JP">
-                          <a:solidFill>
-                            <a:srgbClr val="111111"/>
-                          </a:solidFill>
-                          <a:latin typeface="游ゴシック"/>
-                          <a:ea typeface="游ゴシック"/>
-                        </a:rPr>
-                        <a:t>5〜9月</a:t>
-                      </a:r>
-                    </a:p>
-                  </a:txBody>
-                  <a:tcPr marL="118872" marR="91440" marT="64008" marB="36576" anchor="ctr">
-                    <a:solidFill>
-                      <a:srgbClr val="FFFFFF"/>
-                    </a:solidFill>
-                    <a:lnL w="7000">
-                      <a:solidFill>
-                        <a:srgbClr val="BFBFBF"/>
-                      </a:solidFill>
-                    </a:lnL>
-                    <a:lnR w="7000">
-                      <a:solidFill>
-                        <a:srgbClr val="BFBFBF"/>
-                      </a:solidFill>
-                    </a:lnR>
-                    <a:lnT w="7000">
-                      <a:solidFill>
-                        <a:srgbClr val="BFBFBF"/>
-                      </a:solidFill>
-                    </a:lnT>
-                    <a:lnB w="7000">
-                      <a:solidFill>
-                        <a:srgbClr val="BFBFBF"/>
-                      </a:solidFill>
-                    </a:lnB>
-                  </a:tcPr>
-                </a:tc>
-                <a:tc>
-                  <a:txBody>
-                    <a:bodyPr wrap="square" lIns="0" rIns="0" tIns="0" bIns="0">
-                      <a:noAutofit/>
-                    </a:bodyPr>
-                    <a:lstStyle/>
-                    <a:p>
-                      <a:pPr algn="l">
-                        <a:lnSpc>
-                          <a:spcPct val="112000"/>
-                        </a:lnSpc>
-                        <a:spcAft>
-                          <a:spcPts val="0"/>
-                        </a:spcAft>
-                        <a:buNone/>
-                      </a:pPr>
-                      <a:r>
-                        <a:rPr sz="2400" b="0" lang="ja-JP">
-                          <a:solidFill>
-                            <a:srgbClr val="111111"/>
-                          </a:solidFill>
-                          <a:latin typeface="游ゴシック"/>
-                          <a:ea typeface="游ゴシック"/>
-                        </a:rPr>
-                        <a:t>YOLO ＋ PaddleOCR</a:t>
-                      </a:r>
-                    </a:p>
-                  </a:txBody>
-                  <a:tcPr marL="118872" marR="91440" marT="64008" marB="36576" anchor="ctr">
-                    <a:solidFill>
-                      <a:srgbClr val="FFFFFF"/>
-                    </a:solidFill>
-                    <a:lnL w="7000">
-                      <a:solidFill>
-                        <a:srgbClr val="BFBFBF"/>
-                      </a:solidFill>
-                    </a:lnL>
-                    <a:lnR w="7000">
-                      <a:solidFill>
-                        <a:srgbClr val="BFBFBF"/>
-                      </a:solidFill>
-                    </a:lnR>
-                    <a:lnT w="7000">
-                      <a:solidFill>
-                        <a:srgbClr val="BFBFBF"/>
-                      </a:solidFill>
-                    </a:lnT>
-                    <a:lnB w="7000">
-                      <a:solidFill>
-                        <a:srgbClr val="BFBFBF"/>
-                      </a:solidFill>
-                    </a:lnB>
-                  </a:tcPr>
-                </a:tc>
-                <a:tc>
-                  <a:txBody>
-                    <a:bodyPr wrap="square" lIns="0" rIns="0" tIns="0" bIns="0">
-                      <a:noAutofit/>
-                    </a:bodyPr>
-                    <a:lstStyle/>
-                    <a:p>
-                      <a:pPr algn="l">
-                        <a:lnSpc>
-                          <a:spcPct val="112000"/>
-                        </a:lnSpc>
-                        <a:spcAft>
-                          <a:spcPts val="0"/>
-                        </a:spcAft>
-                        <a:buNone/>
-                      </a:pPr>
-                      <a:r>
-                        <a:rPr sz="2400" b="0" lang="ja-JP">
-                          <a:solidFill>
-                            <a:srgbClr val="111111"/>
-                          </a:solidFill>
-                          <a:latin typeface="游ゴシック"/>
-                          <a:ea typeface="游ゴシック"/>
-                        </a:rPr>
-                        <a:t>表示の認識とCSV化</a:t>
-                      </a:r>
-                    </a:p>
-                  </a:txBody>
-                  <a:tcPr marL="118872" marR="91440" marT="64008" marB="36576" anchor="ctr">
-                    <a:solidFill>
-                      <a:srgbClr val="FFFFFF"/>
-                    </a:solidFill>
-                    <a:lnL w="7000">
-                      <a:solidFill>
-                        <a:srgbClr val="BFBFBF"/>
-                      </a:solidFill>
-                    </a:lnL>
-                    <a:lnR w="7000">
-                      <a:solidFill>
-                        <a:srgbClr val="BFBFBF"/>
-                      </a:solidFill>
-                    </a:lnR>
-                    <a:lnT w="7000">
-                      <a:solidFill>
-                        <a:srgbClr val="BFBFBF"/>
-                      </a:solidFill>
-                    </a:lnT>
-                    <a:lnB w="7000">
-                      <a:solidFill>
-                        <a:srgbClr val="BFBFBF"/>
-                      </a:solidFill>
-                    </a:lnB>
-                  </a:tcPr>
-                </a:tc>
-              </a:tr>
-              <a:tr h="740664">
-                <a:tc>
-                  <a:txBody>
-                    <a:bodyPr wrap="square" lIns="0" rIns="0" tIns="0" bIns="0">
-                      <a:noAutofit/>
-                    </a:bodyPr>
-                    <a:lstStyle/>
-                    <a:p>
-                      <a:pPr algn="l">
-                        <a:lnSpc>
-                          <a:spcPct val="112000"/>
-                        </a:lnSpc>
-                        <a:spcAft>
-                          <a:spcPts val="0"/>
-                        </a:spcAft>
-                        <a:buNone/>
-                      </a:pPr>
-                      <a:r>
-                        <a:rPr sz="2400" b="0" lang="ja-JP">
-                          <a:solidFill>
-                            <a:srgbClr val="111111"/>
-                          </a:solidFill>
-                          <a:latin typeface="游ゴシック"/>
-                          <a:ea typeface="游ゴシック"/>
-                        </a:rPr>
-                        <a:t>10月</a:t>
-                      </a:r>
-                    </a:p>
-                  </a:txBody>
-                  <a:tcPr marL="118872" marR="91440" marT="64008" marB="36576" anchor="ctr">
-                    <a:solidFill>
-                      <a:srgbClr val="FFFFFF"/>
-                    </a:solidFill>
-                    <a:lnL w="7000">
-                      <a:solidFill>
-                        <a:srgbClr val="BFBFBF"/>
-                      </a:solidFill>
-                    </a:lnL>
-                    <a:lnR w="7000">
-                      <a:solidFill>
-                        <a:srgbClr val="BFBFBF"/>
-                      </a:solidFill>
-                    </a:lnR>
-                    <a:lnT w="7000">
-                      <a:solidFill>
-                        <a:srgbClr val="BFBFBF"/>
-                      </a:solidFill>
-                    </a:lnT>
-                    <a:lnB w="7000">
-                      <a:solidFill>
-                        <a:srgbClr val="BFBFBF"/>
-                      </a:solidFill>
-                    </a:lnB>
-                  </a:tcPr>
-                </a:tc>
-                <a:tc>
-                  <a:txBody>
-                    <a:bodyPr wrap="square" lIns="0" rIns="0" tIns="0" bIns="0">
-                      <a:noAutofit/>
-                    </a:bodyPr>
-                    <a:lstStyle/>
-                    <a:p>
-                      <a:pPr algn="l">
-                        <a:lnSpc>
-                          <a:spcPct val="112000"/>
-                        </a:lnSpc>
-                        <a:spcAft>
-                          <a:spcPts val="0"/>
-                        </a:spcAft>
-                        <a:buNone/>
-                      </a:pPr>
-                      <a:r>
-                        <a:rPr sz="2400" b="0" lang="ja-JP">
-                          <a:solidFill>
-                            <a:srgbClr val="111111"/>
-                          </a:solidFill>
-                          <a:latin typeface="游ゴシック"/>
-                          <a:ea typeface="游ゴシック"/>
-                        </a:rPr>
-                        <a:t>VideoMAE ＋ 区間検出</a:t>
-                      </a:r>
-                    </a:p>
-                  </a:txBody>
-                  <a:tcPr marL="118872" marR="91440" marT="64008" marB="36576" anchor="ctr">
-                    <a:solidFill>
-                      <a:srgbClr val="FFFFFF"/>
-                    </a:solidFill>
-                    <a:lnL w="7000">
-                      <a:solidFill>
-                        <a:srgbClr val="BFBFBF"/>
-                      </a:solidFill>
-                    </a:lnL>
-                    <a:lnR w="7000">
-                      <a:solidFill>
-                        <a:srgbClr val="BFBFBF"/>
-                      </a:solidFill>
-                    </a:lnR>
-                    <a:lnT w="7000">
-                      <a:solidFill>
-                        <a:srgbClr val="BFBFBF"/>
-                      </a:solidFill>
-                    </a:lnT>
-                    <a:lnB w="7000">
-                      <a:solidFill>
-                        <a:srgbClr val="BFBFBF"/>
-                      </a:solidFill>
-                    </a:lnB>
-                  </a:tcPr>
-                </a:tc>
-                <a:tc>
-                  <a:txBody>
-                    <a:bodyPr wrap="square" lIns="0" rIns="0" tIns="0" bIns="0">
-                      <a:noAutofit/>
-                    </a:bodyPr>
-                    <a:lstStyle/>
-                    <a:p>
-                      <a:pPr algn="l">
-                        <a:lnSpc>
-                          <a:spcPct val="112000"/>
-                        </a:lnSpc>
-                        <a:spcAft>
-                          <a:spcPts val="0"/>
-                        </a:spcAft>
-                        <a:buNone/>
-                      </a:pPr>
-                      <a:r>
-                        <a:rPr sz="2400" b="0" lang="ja-JP">
-                          <a:solidFill>
-                            <a:srgbClr val="111111"/>
-                          </a:solidFill>
-                          <a:latin typeface="游ゴシック"/>
-                          <a:ea typeface="游ゴシック"/>
-                        </a:rPr>
-                        <a:t>短編10動画24球の投球区間</a:t>
-                      </a:r>
-                    </a:p>
-                  </a:txBody>
-                  <a:tcPr marL="118872" marR="91440" marT="64008" marB="36576" anchor="ctr">
-                    <a:solidFill>
-                      <a:srgbClr val="FFFFFF"/>
-                    </a:solidFill>
-                    <a:lnL w="7000">
-                      <a:solidFill>
-                        <a:srgbClr val="BFBFBF"/>
-                      </a:solidFill>
-                    </a:lnL>
-                    <a:lnR w="7000">
-                      <a:solidFill>
-                        <a:srgbClr val="BFBFBF"/>
-                      </a:solidFill>
-                    </a:lnR>
-                    <a:lnT w="7000">
-                      <a:solidFill>
-                        <a:srgbClr val="BFBFBF"/>
-                      </a:solidFill>
-                    </a:lnT>
-                    <a:lnB w="7000">
-                      <a:solidFill>
-                        <a:srgbClr val="BFBFBF"/>
-                      </a:solidFill>
-                    </a:lnB>
-                  </a:tcPr>
-                </a:tc>
-              </a:tr>
-              <a:tr h="740664">
-                <a:tc>
-                  <a:txBody>
-                    <a:bodyPr wrap="square" lIns="0" rIns="0" tIns="0" bIns="0">
-                      <a:noAutofit/>
-                    </a:bodyPr>
-                    <a:lstStyle/>
-                    <a:p>
-                      <a:pPr algn="l">
-                        <a:lnSpc>
-                          <a:spcPct val="112000"/>
-                        </a:lnSpc>
-                        <a:spcAft>
-                          <a:spcPts val="0"/>
-                        </a:spcAft>
-                        <a:buNone/>
-                      </a:pPr>
-                      <a:r>
-                        <a:rPr sz="2400" b="0" lang="ja-JP">
-                          <a:solidFill>
-                            <a:srgbClr val="111111"/>
-                          </a:solidFill>
-                          <a:latin typeface="游ゴシック"/>
-                          <a:ea typeface="游ゴシック"/>
-                        </a:rPr>
-                        <a:t>今週</a:t>
-                      </a:r>
-                    </a:p>
-                  </a:txBody>
-                  <a:tcPr marL="118872" marR="91440" marT="64008" marB="36576" anchor="ctr">
-                    <a:solidFill>
-                      <a:srgbClr val="FFF4D8"/>
-                    </a:solidFill>
-                    <a:lnL w="7000">
-                      <a:solidFill>
-                        <a:srgbClr val="BFBFBF"/>
-                      </a:solidFill>
-                    </a:lnL>
-                    <a:lnR w="7000">
-                      <a:solidFill>
-                        <a:srgbClr val="BFBFBF"/>
-                      </a:solidFill>
-                    </a:lnR>
-                    <a:lnT w="7000">
-                      <a:solidFill>
-                        <a:srgbClr val="BFBFBF"/>
-                      </a:solidFill>
-                    </a:lnT>
-                    <a:lnB w="7000">
-                      <a:solidFill>
-                        <a:srgbClr val="BFBFBF"/>
-                      </a:solidFill>
-                    </a:lnB>
-                  </a:tcPr>
-                </a:tc>
-                <a:tc>
-                  <a:txBody>
-                    <a:bodyPr wrap="square" lIns="0" rIns="0" tIns="0" bIns="0">
-                      <a:noAutofit/>
-                    </a:bodyPr>
-                    <a:lstStyle/>
-                    <a:p>
-                      <a:pPr algn="l">
-                        <a:lnSpc>
-                          <a:spcPct val="112000"/>
-                        </a:lnSpc>
-                        <a:spcAft>
-                          <a:spcPts val="0"/>
-                        </a:spcAft>
-                        <a:buNone/>
-                      </a:pPr>
-                      <a:r>
-                        <a:rPr sz="2400" b="0" lang="ja-JP">
-                          <a:solidFill>
-                            <a:srgbClr val="111111"/>
-                          </a:solidFill>
-                          <a:latin typeface="游ゴシック"/>
-                          <a:ea typeface="游ゴシック"/>
-                        </a:rPr>
-                        <a:t>全処理を統合適用</a:t>
-                      </a:r>
-                    </a:p>
-                  </a:txBody>
-                  <a:tcPr marL="118872" marR="91440" marT="64008" marB="36576" anchor="ctr">
-                    <a:solidFill>
-                      <a:srgbClr val="FFF4D8"/>
-                    </a:solidFill>
-                    <a:lnL w="7000">
-                      <a:solidFill>
-                        <a:srgbClr val="BFBFBF"/>
-                      </a:solidFill>
-                    </a:lnL>
-                    <a:lnR w="7000">
-                      <a:solidFill>
-                        <a:srgbClr val="BFBFBF"/>
-                      </a:solidFill>
-                    </a:lnR>
-                    <a:lnT w="7000">
-                      <a:solidFill>
-                        <a:srgbClr val="BFBFBF"/>
-                      </a:solidFill>
-                    </a:lnT>
-                    <a:lnB w="7000">
-                      <a:solidFill>
-                        <a:srgbClr val="BFBFBF"/>
-                      </a:solidFill>
-                    </a:lnB>
-                  </a:tcPr>
-                </a:tc>
-                <a:tc>
-                  <a:txBody>
-                    <a:bodyPr wrap="square" lIns="0" rIns="0" tIns="0" bIns="0">
-                      <a:noAutofit/>
-                    </a:bodyPr>
-                    <a:lstStyle/>
-                    <a:p>
-                      <a:pPr algn="l">
-                        <a:lnSpc>
-                          <a:spcPct val="112000"/>
-                        </a:lnSpc>
-                        <a:spcAft>
-                          <a:spcPts val="0"/>
-                        </a:spcAft>
-                        <a:buNone/>
-                      </a:pPr>
-                      <a:r>
-                        <a:rPr sz="2400" b="0" lang="ja-JP">
-                          <a:solidFill>
-                            <a:srgbClr val="111111"/>
-                          </a:solidFill>
-                          <a:latin typeface="游ゴシック"/>
-                          <a:ea typeface="游ゴシック"/>
-                        </a:rPr>
-                        <a:t>投球と各状況の対応付け</a:t>
-                      </a:r>
-                    </a:p>
-                  </a:txBody>
-                  <a:tcPr marL="118872" marR="91440" marT="64008" marB="36576" anchor="ctr">
-                    <a:solidFill>
-                      <a:srgbClr val="FFF4D8"/>
-                    </a:solidFill>
-                    <a:lnL w="7000">
-                      <a:solidFill>
-                        <a:srgbClr val="BFBFBF"/>
-                      </a:solidFill>
-                    </a:lnL>
-                    <a:lnR w="7000">
-                      <a:solidFill>
-                        <a:srgbClr val="BFBFBF"/>
-                      </a:solidFill>
-                    </a:lnR>
-                    <a:lnT w="7000">
-                      <a:solidFill>
-                        <a:srgbClr val="BFBFBF"/>
-                      </a:solidFill>
-                    </a:lnT>
-                    <a:lnB w="7000">
-                      <a:solidFill>
-                        <a:srgbClr val="BFBFBF"/>
-                      </a:solidFill>
-                    </a:lnB>
-                  </a:tcPr>
-                </a:tc>
-              </a:tr>
-            </a:tbl>
-          </a:graphicData>
-        </a:graphic>
-      </p:graphicFrame>
-      <p:sp>
-        <p:nvSpPr>
-          <p:cNvPr id="5" name="TextBox 4"/>
+      <p:sp>
+        <p:nvSpPr>
+          <p:cNvPr id="4" name="TextBox 3"/>
           <p:cNvSpPr txBox="1"/>
           <p:nvPr/>
         </p:nvSpPr>
         <p:spPr>
           <a:xfrm>
-            <a:off x="838504" y="5148072"/>
-            <a:ext cx="10515600" cy="1143000"/>
+            <a:off x="838504" y="1819656"/>
+            <a:ext cx="10515600" cy="4389120"/>
           </a:xfrm>
           <a:prstGeom prst="rect">
             <a:avLst/>
@@ -9177,19 +8967,19 @@
                 <a:spcPct val="112000"/>
               </a:lnSpc>
               <a:spcAft>
-                <a:spcPts val="1400"/>
+                <a:spcPts val="2800"/>
               </a:spcAft>
               <a:buNone/>
             </a:pPr>
             <a:r>
-              <a:rPr sz="2600" b="0" lang="ja-JP">
+              <a:rPr sz="2900" b="0" lang="ja-JP">
                 <a:solidFill>
                   <a:srgbClr val="111111"/>
                 </a:solidFill>
                 <a:latin typeface="游ゴシック"/>
                 <a:ea typeface="游ゴシック"/>
               </a:rPr>
-              <a:t>• 対象は5回ウラ全体（530.2秒）</a:t>
+              <a:t>• 投球ごとに、そのときの試合状況を記録できた</a:t>
             </a:r>
           </a:p>
           <a:p>
@@ -9198,19 +8988,40 @@
                 <a:spcPct val="112000"/>
               </a:lnSpc>
               <a:spcAft>
-                <a:spcPts val="1400"/>
+                <a:spcPts val="2800"/>
               </a:spcAft>
               <a:buNone/>
             </a:pPr>
             <a:r>
-              <a:rPr sz="2600" b="0" lang="ja-JP">
+              <a:rPr sz="2900" b="0" lang="ja-JP">
                 <a:solidFill>
                   <a:srgbClr val="111111"/>
                 </a:solidFill>
                 <a:latin typeface="游ゴシック"/>
                 <a:ea typeface="游ゴシック"/>
               </a:rPr>
-              <a:t>• 各手法の確認から、投球と状況の対応付けの確認へ</a:t>
+              <a:t>• 投球直後の表示だけでは、結果を決められない</a:t>
+            </a:r>
+          </a:p>
+          <a:p>
+            <a:pPr algn="l">
+              <a:lnSpc>
+                <a:spcPct val="112000"/>
+              </a:lnSpc>
+              <a:spcAft>
+                <a:spcPts val="2800"/>
+              </a:spcAft>
+              <a:buNone/>
+            </a:pPr>
+            <a:r>
+              <a:rPr sz="2900" b="0" lang="ja-JP">
+                <a:solidFill>
+                  <a:srgbClr val="111111"/>
+                </a:solidFill>
+                <a:latin typeface="游ゴシック"/>
+                <a:ea typeface="游ゴシック"/>
+              </a:rPr>
+              <a:t>• 前後の表示が不足する場面は、結果を保留する必要がある</a:t>
             </a:r>
           </a:p>
         </p:txBody>
@@ -9272,7 +9083,7 @@
                 <a:latin typeface="游ゴシック Light"/>
                 <a:ea typeface="游ゴシック Light"/>
               </a:rPr>
-              <a:t>今週まとめて適用した内容</a:t>
+              <a:t>どんな状況の投球か記録できた</a:t>
             </a:r>
           </a:p>
         </p:txBody>
@@ -9330,7 +9141,7 @@
         <p:spPr>
           <a:xfrm>
             <a:off x="838504" y="1810512"/>
-            <a:ext cx="10515600" cy="411480"/>
+            <a:ext cx="10515600" cy="749808"/>
           </a:xfrm>
           <a:prstGeom prst="rect">
             <a:avLst/>
@@ -9344,71 +9155,6 @@
           <a:lstStyle/>
           <a:p>
             <a:pPr algn="l">
-              <a:lnSpc>
-                <a:spcPct val="112000"/>
-              </a:lnSpc>
-              <a:spcAft>
-                <a:spcPts val="1000"/>
-              </a:spcAft>
-              <a:buNone/>
-            </a:pPr>
-            <a:r>
-              <a:rPr sz="2600" b="0" lang="ja-JP">
-                <a:solidFill>
-                  <a:srgbClr val="111111"/>
-                </a:solidFill>
-                <a:latin typeface="游ゴシック"/>
-                <a:ea typeface="游ゴシック"/>
-              </a:rPr>
-              <a:t>入力：5ura.mp4全体 ／ 30 fps ／ 追加学習なし</a:t>
-            </a:r>
-          </a:p>
-        </p:txBody>
-      </p:sp>
-      <p:sp>
-        <p:nvSpPr>
-          <p:cNvPr id="5" name="Rectangle 4"/>
-          <p:cNvSpPr/>
-          <p:nvPr/>
-        </p:nvSpPr>
-        <p:spPr>
-          <a:xfrm>
-            <a:off x="868680" y="2697480"/>
-            <a:ext cx="3200400" cy="1234440"/>
-          </a:xfrm>
-          <a:prstGeom prst="rect">
-            <a:avLst/>
-          </a:prstGeom>
-          <a:solidFill>
-            <a:srgbClr val="F5F5F5"/>
-          </a:solidFill>
-          <a:ln w="12700">
-            <a:solidFill>
-              <a:srgbClr val="777777"/>
-            </a:solidFill>
-          </a:ln>
-        </p:spPr>
-        <p:style>
-          <a:lnRef idx="1">
-            <a:schemeClr val="accent1"/>
-          </a:lnRef>
-          <a:fillRef idx="3">
-            <a:schemeClr val="accent1"/>
-          </a:fillRef>
-          <a:effectRef idx="2">
-            <a:schemeClr val="accent1"/>
-          </a:effectRef>
-          <a:fontRef idx="minor">
-            <a:schemeClr val="lt1"/>
-          </a:fontRef>
-        </p:style>
-        <p:txBody>
-          <a:bodyPr rtlCol="0" anchor="ctr" wrap="square" tIns="0" bIns="0">
-            <a:noAutofit/>
-          </a:bodyPr>
-          <a:lstStyle/>
-          <a:p>
-            <a:pPr algn="ctr">
               <a:lnSpc>
                 <a:spcPct val="112000"/>
               </a:lnSpc>
@@ -9425,7 +9171,7 @@
                 <a:latin typeface="游ゴシック"/>
                 <a:ea typeface="游ゴシック"/>
               </a:rPr>
-              <a:t>YOLO</a:t>
+              <a:t>5回ウラ・同点・一塁走者あり・2アウトでの投球</a:t>
             </a:r>
             <a:br/>
             <a:r>
@@ -9436,1574 +9182,7 @@
                 <a:latin typeface="游ゴシック"/>
                 <a:ea typeface="游ゴシック"/>
               </a:rPr>
-              <a:t>B/S/O・各塁の走者</a:t>
-            </a:r>
-          </a:p>
-        </p:txBody>
-      </p:sp>
-      <p:sp>
-        <p:nvSpPr>
-          <p:cNvPr id="6" name="Rectangle 5"/>
-          <p:cNvSpPr/>
-          <p:nvPr/>
-        </p:nvSpPr>
-        <p:spPr>
-          <a:xfrm>
-            <a:off x="4434840" y="2697480"/>
-            <a:ext cx="3154680" cy="1234440"/>
-          </a:xfrm>
-          <a:prstGeom prst="rect">
-            <a:avLst/>
-          </a:prstGeom>
-          <a:solidFill>
-            <a:srgbClr val="F5F5F5"/>
-          </a:solidFill>
-          <a:ln w="12700">
-            <a:solidFill>
-              <a:srgbClr val="777777"/>
-            </a:solidFill>
-          </a:ln>
-        </p:spPr>
-        <p:style>
-          <a:lnRef idx="1">
-            <a:schemeClr val="accent1"/>
-          </a:lnRef>
-          <a:fillRef idx="3">
-            <a:schemeClr val="accent1"/>
-          </a:fillRef>
-          <a:effectRef idx="2">
-            <a:schemeClr val="accent1"/>
-          </a:effectRef>
-          <a:fontRef idx="minor">
-            <a:schemeClr val="lt1"/>
-          </a:fontRef>
-        </p:style>
-        <p:txBody>
-          <a:bodyPr rtlCol="0" anchor="ctr" wrap="square" tIns="0" bIns="0">
-            <a:noAutofit/>
-          </a:bodyPr>
-          <a:lstStyle/>
-          <a:p>
-            <a:pPr algn="ctr">
-              <a:lnSpc>
-                <a:spcPct val="112000"/>
-              </a:lnSpc>
-              <a:spcAft>
-                <a:spcPts val="0"/>
-              </a:spcAft>
-              <a:buNone/>
-            </a:pPr>
-            <a:r>
-              <a:rPr sz="2400" b="0" lang="ja-JP">
-                <a:solidFill>
-                  <a:srgbClr val="111111"/>
-                </a:solidFill>
-                <a:latin typeface="游ゴシック"/>
-                <a:ea typeface="游ゴシック"/>
-              </a:rPr>
-              <a:t>PaddleOCR</a:t>
-            </a:r>
-            <a:br/>
-            <a:r>
-              <a:rPr sz="2400" b="0" lang="ja-JP">
-                <a:solidFill>
-                  <a:srgbClr val="111111"/>
-                </a:solidFill>
-                <a:latin typeface="游ゴシック"/>
-                <a:ea typeface="游ゴシック"/>
-              </a:rPr>
-              <a:t>回・表裏・両チーム得点</a:t>
-            </a:r>
-          </a:p>
-        </p:txBody>
-      </p:sp>
-      <p:sp>
-        <p:nvSpPr>
-          <p:cNvPr id="7" name="Rectangle 6"/>
-          <p:cNvSpPr/>
-          <p:nvPr/>
-        </p:nvSpPr>
-        <p:spPr>
-          <a:xfrm>
-            <a:off x="8001000" y="2697480"/>
-            <a:ext cx="3337560" cy="1234440"/>
-          </a:xfrm>
-          <a:prstGeom prst="rect">
-            <a:avLst/>
-          </a:prstGeom>
-          <a:solidFill>
-            <a:srgbClr val="F5F5F5"/>
-          </a:solidFill>
-          <a:ln w="12700">
-            <a:solidFill>
-              <a:srgbClr val="777777"/>
-            </a:solidFill>
-          </a:ln>
-        </p:spPr>
-        <p:style>
-          <a:lnRef idx="1">
-            <a:schemeClr val="accent1"/>
-          </a:lnRef>
-          <a:fillRef idx="3">
-            <a:schemeClr val="accent1"/>
-          </a:fillRef>
-          <a:effectRef idx="2">
-            <a:schemeClr val="accent1"/>
-          </a:effectRef>
-          <a:fontRef idx="minor">
-            <a:schemeClr val="lt1"/>
-          </a:fontRef>
-        </p:style>
-        <p:txBody>
-          <a:bodyPr rtlCol="0" anchor="ctr" wrap="square" tIns="0" bIns="0">
-            <a:noAutofit/>
-          </a:bodyPr>
-          <a:lstStyle/>
-          <a:p>
-            <a:pPr algn="ctr">
-              <a:lnSpc>
-                <a:spcPct val="112000"/>
-              </a:lnSpc>
-              <a:spcAft>
-                <a:spcPts val="0"/>
-              </a:spcAft>
-              <a:buNone/>
-            </a:pPr>
-            <a:r>
-              <a:rPr sz="2100" b="0" lang="ja-JP">
-                <a:solidFill>
-                  <a:srgbClr val="111111"/>
-                </a:solidFill>
-                <a:latin typeface="游ゴシック"/>
-                <a:ea typeface="游ゴシック"/>
-              </a:rPr>
-              <a:t>VideoMAE ＋</a:t>
-            </a:r>
-            <a:br/>
-            <a:r>
-              <a:rPr sz="2100" b="0" lang="ja-JP">
-                <a:solidFill>
-                  <a:srgbClr val="111111"/>
-                </a:solidFill>
-                <a:latin typeface="游ゴシック"/>
-                <a:ea typeface="游ゴシック"/>
-              </a:rPr>
-              <a:t>Compact ActionFormer</a:t>
-            </a:r>
-            <a:br/>
-            <a:r>
-              <a:rPr sz="2100" b="0" lang="ja-JP">
-                <a:solidFill>
-                  <a:srgbClr val="111111"/>
-                </a:solidFill>
-                <a:latin typeface="游ゴシック"/>
-                <a:ea typeface="游ゴシック"/>
-              </a:rPr>
-              <a:t>投球区間の候補</a:t>
-            </a:r>
-          </a:p>
-        </p:txBody>
-      </p:sp>
-      <p:cxnSp>
-        <p:nvCxnSpPr>
-          <p:cNvPr id="8" name="Connector 7"/>
-          <p:cNvCxnSpPr/>
-          <p:nvPr/>
-        </p:nvCxnSpPr>
-        <p:spPr>
-          <a:xfrm>
-            <a:off x="4069080" y="3291840"/>
-            <a:ext cx="365760" cy="0"/>
-          </a:xfrm>
-          <a:prstGeom prst="line">
-            <a:avLst/>
-          </a:prstGeom>
-          <a:ln w="20320">
-            <a:solidFill>
-              <a:srgbClr val="555555"/>
-            </a:solidFill>
-            <a:tailEnd type="triangle"/>
-          </a:ln>
-        </p:spPr>
-        <p:style>
-          <a:lnRef idx="2">
-            <a:schemeClr val="accent1"/>
-          </a:lnRef>
-          <a:fillRef idx="0">
-            <a:schemeClr val="accent1"/>
-          </a:fillRef>
-          <a:effectRef idx="1">
-            <a:schemeClr val="accent1"/>
-          </a:effectRef>
-          <a:fontRef idx="minor">
-            <a:schemeClr val="tx1"/>
-          </a:fontRef>
-        </p:style>
-      </p:cxnSp>
-      <p:cxnSp>
-        <p:nvCxnSpPr>
-          <p:cNvPr id="9" name="Connector 8"/>
-          <p:cNvCxnSpPr/>
-          <p:nvPr/>
-        </p:nvCxnSpPr>
-        <p:spPr>
-          <a:xfrm>
-            <a:off x="2468880" y="3931920"/>
-            <a:ext cx="0" cy="347472"/>
-          </a:xfrm>
-          <a:prstGeom prst="line">
-            <a:avLst/>
-          </a:prstGeom>
-          <a:ln w="20320">
-            <a:solidFill>
-              <a:srgbClr val="555555"/>
-            </a:solidFill>
-          </a:ln>
-        </p:spPr>
-        <p:style>
-          <a:lnRef idx="2">
-            <a:schemeClr val="accent1"/>
-          </a:lnRef>
-          <a:fillRef idx="0">
-            <a:schemeClr val="accent1"/>
-          </a:fillRef>
-          <a:effectRef idx="1">
-            <a:schemeClr val="accent1"/>
-          </a:effectRef>
-          <a:fontRef idx="minor">
-            <a:schemeClr val="tx1"/>
-          </a:fontRef>
-        </p:style>
-      </p:cxnSp>
-      <p:cxnSp>
-        <p:nvCxnSpPr>
-          <p:cNvPr id="10" name="Connector 9"/>
-          <p:cNvCxnSpPr/>
-          <p:nvPr/>
-        </p:nvCxnSpPr>
-        <p:spPr>
-          <a:xfrm>
-            <a:off x="6012180" y="3931920"/>
-            <a:ext cx="0" cy="347472"/>
-          </a:xfrm>
-          <a:prstGeom prst="line">
-            <a:avLst/>
-          </a:prstGeom>
-          <a:ln w="20320">
-            <a:solidFill>
-              <a:srgbClr val="555555"/>
-            </a:solidFill>
-          </a:ln>
-        </p:spPr>
-        <p:style>
-          <a:lnRef idx="2">
-            <a:schemeClr val="accent1"/>
-          </a:lnRef>
-          <a:fillRef idx="0">
-            <a:schemeClr val="accent1"/>
-          </a:fillRef>
-          <a:effectRef idx="1">
-            <a:schemeClr val="accent1"/>
-          </a:effectRef>
-          <a:fontRef idx="minor">
-            <a:schemeClr val="tx1"/>
-          </a:fontRef>
-        </p:style>
-      </p:cxnSp>
-      <p:cxnSp>
-        <p:nvCxnSpPr>
-          <p:cNvPr id="11" name="Connector 10"/>
-          <p:cNvCxnSpPr/>
-          <p:nvPr/>
-        </p:nvCxnSpPr>
-        <p:spPr>
-          <a:xfrm>
-            <a:off x="9669780" y="3931920"/>
-            <a:ext cx="0" cy="347472"/>
-          </a:xfrm>
-          <a:prstGeom prst="line">
-            <a:avLst/>
-          </a:prstGeom>
-          <a:ln w="20320">
-            <a:solidFill>
-              <a:srgbClr val="555555"/>
-            </a:solidFill>
-          </a:ln>
-        </p:spPr>
-        <p:style>
-          <a:lnRef idx="2">
-            <a:schemeClr val="accent1"/>
-          </a:lnRef>
-          <a:fillRef idx="0">
-            <a:schemeClr val="accent1"/>
-          </a:fillRef>
-          <a:effectRef idx="1">
-            <a:schemeClr val="accent1"/>
-          </a:effectRef>
-          <a:fontRef idx="minor">
-            <a:schemeClr val="tx1"/>
-          </a:fontRef>
-        </p:style>
-      </p:cxnSp>
-      <p:cxnSp>
-        <p:nvCxnSpPr>
-          <p:cNvPr id="12" name="Connector 11"/>
-          <p:cNvCxnSpPr/>
-          <p:nvPr/>
-        </p:nvCxnSpPr>
-        <p:spPr>
-          <a:xfrm>
-            <a:off x="2468880" y="4279392"/>
-            <a:ext cx="7200900" cy="0"/>
-          </a:xfrm>
-          <a:prstGeom prst="line">
-            <a:avLst/>
-          </a:prstGeom>
-          <a:ln w="20320">
-            <a:solidFill>
-              <a:srgbClr val="555555"/>
-            </a:solidFill>
-          </a:ln>
-        </p:spPr>
-        <p:style>
-          <a:lnRef idx="2">
-            <a:schemeClr val="accent1"/>
-          </a:lnRef>
-          <a:fillRef idx="0">
-            <a:schemeClr val="accent1"/>
-          </a:fillRef>
-          <a:effectRef idx="1">
-            <a:schemeClr val="accent1"/>
-          </a:effectRef>
-          <a:fontRef idx="minor">
-            <a:schemeClr val="tx1"/>
-          </a:fontRef>
-        </p:style>
-      </p:cxnSp>
-      <p:cxnSp>
-        <p:nvCxnSpPr>
-          <p:cNvPr id="13" name="Connector 12"/>
-          <p:cNvCxnSpPr/>
-          <p:nvPr/>
-        </p:nvCxnSpPr>
-        <p:spPr>
-          <a:xfrm>
-            <a:off x="6012180" y="4279392"/>
-            <a:ext cx="0" cy="274320"/>
-          </a:xfrm>
-          <a:prstGeom prst="line">
-            <a:avLst/>
-          </a:prstGeom>
-          <a:ln w="20320">
-            <a:solidFill>
-              <a:srgbClr val="555555"/>
-            </a:solidFill>
-            <a:tailEnd type="triangle"/>
-          </a:ln>
-        </p:spPr>
-        <p:style>
-          <a:lnRef idx="2">
-            <a:schemeClr val="accent1"/>
-          </a:lnRef>
-          <a:fillRef idx="0">
-            <a:schemeClr val="accent1"/>
-          </a:fillRef>
-          <a:effectRef idx="1">
-            <a:schemeClr val="accent1"/>
-          </a:effectRef>
-          <a:fontRef idx="minor">
-            <a:schemeClr val="tx1"/>
-          </a:fontRef>
-        </p:style>
-      </p:cxnSp>
-      <p:sp>
-        <p:nvSpPr>
-          <p:cNvPr id="14" name="Rectangle 13"/>
-          <p:cNvSpPr/>
-          <p:nvPr/>
-        </p:nvSpPr>
-        <p:spPr>
-          <a:xfrm>
-            <a:off x="868680" y="4553712"/>
-            <a:ext cx="10469880" cy="777240"/>
-          </a:xfrm>
-          <a:prstGeom prst="rect">
-            <a:avLst/>
-          </a:prstGeom>
-          <a:solidFill>
-            <a:srgbClr val="FFFFFF"/>
-          </a:solidFill>
-          <a:ln w="12700">
-            <a:solidFill>
-              <a:srgbClr val="777777"/>
-            </a:solidFill>
-          </a:ln>
-        </p:spPr>
-        <p:style>
-          <a:lnRef idx="1">
-            <a:schemeClr val="accent1"/>
-          </a:lnRef>
-          <a:fillRef idx="3">
-            <a:schemeClr val="accent1"/>
-          </a:fillRef>
-          <a:effectRef idx="2">
-            <a:schemeClr val="accent1"/>
-          </a:effectRef>
-          <a:fontRef idx="minor">
-            <a:schemeClr val="lt1"/>
-          </a:fontRef>
-        </p:style>
-        <p:txBody>
-          <a:bodyPr rtlCol="0" anchor="ctr" wrap="square" tIns="0" bIns="0">
-            <a:noAutofit/>
-          </a:bodyPr>
-          <a:lstStyle/>
-          <a:p>
-            <a:pPr algn="ctr">
-              <a:lnSpc>
-                <a:spcPct val="112000"/>
-              </a:lnSpc>
-              <a:spcAft>
-                <a:spcPts val="0"/>
-              </a:spcAft>
-              <a:buNone/>
-            </a:pPr>
-            <a:r>
-              <a:rPr sz="2600" b="0" lang="ja-JP">
-                <a:solidFill>
-                  <a:srgbClr val="111111"/>
-                </a:solidFill>
-                <a:latin typeface="游ゴシック"/>
-                <a:ea typeface="游ゴシック"/>
-              </a:rPr>
-              <a:t>1候補ごとに、投球区間と前後の全項目を対応付ける</a:t>
-            </a:r>
-          </a:p>
-        </p:txBody>
-      </p:sp>
-      <p:sp>
-        <p:nvSpPr>
-          <p:cNvPr id="15" name="TextBox 14"/>
-          <p:cNvSpPr txBox="1"/>
-          <p:nvPr/>
-        </p:nvSpPr>
-        <p:spPr>
-          <a:xfrm>
-            <a:off x="868680" y="5605272"/>
-            <a:ext cx="10469880" cy="777240"/>
-          </a:xfrm>
-          <a:prstGeom prst="rect">
-            <a:avLst/>
-          </a:prstGeom>
-          <a:noFill/>
-        </p:spPr>
-        <p:txBody>
-          <a:bodyPr wrap="square" lIns="0" rIns="0" tIns="0" bIns="0">
-            <a:noAutofit/>
-          </a:bodyPr>
-          <a:lstStyle/>
-          <a:p>
-            <a:pPr algn="l">
-              <a:lnSpc>
-                <a:spcPct val="112000"/>
-              </a:lnSpc>
-              <a:spcAft>
-                <a:spcPts val="0"/>
-              </a:spcAft>
-              <a:buNone/>
-            </a:pPr>
-            <a:r>
-              <a:rPr sz="2500" b="0" lang="ja-JP">
-                <a:solidFill>
-                  <a:srgbClr val="111111"/>
-                </a:solidFill>
-                <a:latin typeface="游ゴシック"/>
-                <a:ea typeface="游ゴシック"/>
-              </a:rPr>
-              <a:t>B/S/Oが連続2観測で同じなら「安定」として採用</a:t>
-            </a:r>
-            <a:br/>
-            <a:r>
-              <a:rPr sz="2500" b="0" lang="ja-JP">
-                <a:solidFill>
-                  <a:srgbClr val="111111"/>
-                </a:solidFill>
-                <a:latin typeface="游ゴシック"/>
-                <a:ea typeface="游ゴシック"/>
-              </a:rPr>
-              <a:t>現行ルールは、投球後の最初の安定状態を使う</a:t>
-            </a:r>
-          </a:p>
-        </p:txBody>
-      </p:sp>
-    </p:spTree>
-  </p:cSld>
-  <p:clrMapOvr>
-    <a:masterClrMapping/>
-  </p:clrMapOvr>
-</p:sld>
-</file>
-
-<file path=ppt/slides/slide4.xml><?xml version="1.0" encoding="utf-8"?>
-<p:sld xmlns:a="http://schemas.openxmlformats.org/drawingml/2006/main" xmlns:p="http://schemas.openxmlformats.org/presentationml/2006/main" xmlns:r="http://schemas.openxmlformats.org/officeDocument/2006/relationships">
-  <p:cSld>
-    <p:spTree>
-      <p:nvGrpSpPr>
-        <p:cNvPr id="1" name=""/>
-        <p:cNvGrpSpPr/>
-        <p:nvPr/>
-      </p:nvGrpSpPr>
-      <p:grpSpPr/>
-      <p:sp>
-        <p:nvSpPr>
-          <p:cNvPr id="2" name="Title 1"/>
-          <p:cNvSpPr>
-            <a:spLocks noGrp="1"/>
-          </p:cNvSpPr>
-          <p:nvPr>
-            <p:ph type="title"/>
-          </p:nvPr>
-        </p:nvSpPr>
-        <p:spPr>
-          <a:xfrm>
-            <a:off x="838504" y="364845"/>
-            <a:ext cx="10515600" cy="1325880"/>
-          </a:xfrm>
-        </p:spPr>
-        <p:txBody>
-          <a:bodyPr wrap="square" lIns="0" rIns="0" tIns="0" bIns="0">
-            <a:noAutofit/>
-          </a:bodyPr>
-          <a:lstStyle/>
-          <a:p>
-            <a:pPr algn="l">
-              <a:lnSpc>
-                <a:spcPct val="112000"/>
-              </a:lnSpc>
-              <a:spcAft>
-                <a:spcPts val="0"/>
-              </a:spcAft>
-              <a:buNone/>
-            </a:pPr>
-            <a:r>
-              <a:rPr sz="4400" b="0" lang="ja-JP">
-                <a:solidFill>
-                  <a:srgbClr val="111111"/>
-                </a:solidFill>
-                <a:latin typeface="游ゴシック Light"/>
-                <a:ea typeface="游ゴシック Light"/>
-              </a:rPr>
-              <a:t>全処理を動画全体に適用した結果</a:t>
-            </a:r>
-          </a:p>
-        </p:txBody>
-      </p:sp>
-      <p:sp>
-        <p:nvSpPr>
-          <p:cNvPr id="3" name="TextBox 2"/>
-          <p:cNvSpPr txBox="1"/>
-          <p:nvPr/>
-        </p:nvSpPr>
-        <p:spPr>
-          <a:xfrm>
-            <a:off x="10881360" y="6510528"/>
-            <a:ext cx="457200" cy="201168"/>
-          </a:xfrm>
-          <a:prstGeom prst="rect">
-            <a:avLst/>
-          </a:prstGeom>
-          <a:noFill/>
-        </p:spPr>
-        <p:txBody>
-          <a:bodyPr wrap="square" lIns="0" rIns="0" tIns="0" bIns="0">
-            <a:noAutofit/>
-          </a:bodyPr>
-          <a:lstStyle/>
-          <a:p>
-            <a:pPr algn="r">
-              <a:lnSpc>
-                <a:spcPct val="112000"/>
-              </a:lnSpc>
-              <a:spcAft>
-                <a:spcPts val="0"/>
-              </a:spcAft>
-              <a:buNone/>
-            </a:pPr>
-            <a:r>
-              <a:rPr sz="1200" b="0" lang="ja-JP">
-                <a:solidFill>
-                  <a:srgbClr val="555555"/>
-                </a:solidFill>
-                <a:latin typeface="游ゴシック"/>
-                <a:ea typeface="游ゴシック"/>
-              </a:rPr>
-              <a:t>4</a:t>
-            </a:r>
-          </a:p>
-        </p:txBody>
-      </p:sp>
-      <p:sp>
-        <p:nvSpPr>
-          <p:cNvPr id="4" name="TextBox 3"/>
-          <p:cNvSpPr txBox="1"/>
-          <p:nvPr/>
-        </p:nvSpPr>
-        <p:spPr>
-          <a:xfrm>
-            <a:off x="838504" y="1810512"/>
-            <a:ext cx="10515600" cy="411480"/>
-          </a:xfrm>
-          <a:prstGeom prst="rect">
-            <a:avLst/>
-          </a:prstGeom>
-          <a:noFill/>
-        </p:spPr>
-        <p:txBody>
-          <a:bodyPr wrap="square" lIns="0" rIns="0" tIns="0" bIns="0">
-            <a:noAutofit/>
-          </a:bodyPr>
-          <a:lstStyle/>
-          <a:p>
-            <a:pPr algn="l">
-              <a:lnSpc>
-                <a:spcPct val="112000"/>
-              </a:lnSpc>
-              <a:spcAft>
-                <a:spcPts val="1000"/>
-              </a:spcAft>
-              <a:buNone/>
-            </a:pPr>
-            <a:r>
-              <a:rPr sz="2600" b="0" lang="ja-JP">
-                <a:solidFill>
-                  <a:srgbClr val="111111"/>
-                </a:solidFill>
-                <a:latin typeface="游ゴシック"/>
-                <a:ea typeface="游ゴシック"/>
-              </a:rPr>
-              <a:t>65区間 → 34候補群 ／ 各手法の認識値を同じ時刻で表示</a:t>
-            </a:r>
-          </a:p>
-        </p:txBody>
-      </p:sp>
-      <p:pic>
-        <p:nvPicPr>
-          <p:cNvPr id="5" name="Picture 4" descr="integrated_all_fields"/>
-          <p:cNvPicPr>
-            <a:picLocks noChangeAspect="1"/>
-          </p:cNvPicPr>
-          <p:nvPr/>
-        </p:nvPicPr>
-        <p:blipFill>
-          <a:blip r:embed="rId2"/>
-          <a:stretch>
-            <a:fillRect/>
-          </a:stretch>
-        </p:blipFill>
-        <p:spPr>
-          <a:xfrm>
-            <a:off x="838504" y="2221992"/>
-            <a:ext cx="10515600" cy="4206240"/>
-          </a:xfrm>
-          <a:prstGeom prst="rect">
-            <a:avLst/>
-          </a:prstGeom>
-        </p:spPr>
-      </p:pic>
-    </p:spTree>
-  </p:cSld>
-  <p:clrMapOvr>
-    <a:masterClrMapping/>
-  </p:clrMapOvr>
-</p:sld>
-</file>
-
-<file path=ppt/slides/slide5.xml><?xml version="1.0" encoding="utf-8"?>
-<p:sld xmlns:a="http://schemas.openxmlformats.org/drawingml/2006/main" xmlns:p="http://schemas.openxmlformats.org/presentationml/2006/main" xmlns:r="http://schemas.openxmlformats.org/officeDocument/2006/relationships">
-  <p:cSld>
-    <p:spTree>
-      <p:nvGrpSpPr>
-        <p:cNvPr id="1" name=""/>
-        <p:cNvGrpSpPr/>
-        <p:nvPr/>
-      </p:nvGrpSpPr>
-      <p:grpSpPr/>
-      <p:sp>
-        <p:nvSpPr>
-          <p:cNvPr id="2" name="Title 1"/>
-          <p:cNvSpPr>
-            <a:spLocks noGrp="1"/>
-          </p:cNvSpPr>
-          <p:nvPr>
-            <p:ph type="title"/>
-          </p:nvPr>
-        </p:nvSpPr>
-        <p:spPr>
-          <a:xfrm>
-            <a:off x="838504" y="364845"/>
-            <a:ext cx="10515600" cy="1325880"/>
-          </a:xfrm>
-        </p:spPr>
-        <p:txBody>
-          <a:bodyPr wrap="square" lIns="0" rIns="0" tIns="0" bIns="0">
-            <a:noAutofit/>
-          </a:bodyPr>
-          <a:lstStyle/>
-          <a:p>
-            <a:pPr algn="l">
-              <a:lnSpc>
-                <a:spcPct val="112000"/>
-              </a:lnSpc>
-              <a:spcAft>
-                <a:spcPts val="0"/>
-              </a:spcAft>
-              <a:buNone/>
-            </a:pPr>
-            <a:r>
-              <a:rPr sz="4400" b="0" lang="ja-JP">
-                <a:solidFill>
-                  <a:srgbClr val="111111"/>
-                </a:solidFill>
-                <a:latin typeface="游ゴシック Light"/>
-                <a:ea typeface="游ゴシック Light"/>
-              </a:rPr>
-              <a:t>前後の全項目が揃ったのは9候補群</a:t>
-            </a:r>
-          </a:p>
-        </p:txBody>
-      </p:sp>
-      <p:sp>
-        <p:nvSpPr>
-          <p:cNvPr id="3" name="TextBox 2"/>
-          <p:cNvSpPr txBox="1"/>
-          <p:nvPr/>
-        </p:nvSpPr>
-        <p:spPr>
-          <a:xfrm>
-            <a:off x="10881360" y="6510528"/>
-            <a:ext cx="457200" cy="201168"/>
-          </a:xfrm>
-          <a:prstGeom prst="rect">
-            <a:avLst/>
-          </a:prstGeom>
-          <a:noFill/>
-        </p:spPr>
-        <p:txBody>
-          <a:bodyPr wrap="square" lIns="0" rIns="0" tIns="0" bIns="0">
-            <a:noAutofit/>
-          </a:bodyPr>
-          <a:lstStyle/>
-          <a:p>
-            <a:pPr algn="r">
-              <a:lnSpc>
-                <a:spcPct val="112000"/>
-              </a:lnSpc>
-              <a:spcAft>
-                <a:spcPts val="0"/>
-              </a:spcAft>
-              <a:buNone/>
-            </a:pPr>
-            <a:r>
-              <a:rPr sz="1200" b="0" lang="ja-JP">
-                <a:solidFill>
-                  <a:srgbClr val="555555"/>
-                </a:solidFill>
-                <a:latin typeface="游ゴシック"/>
-                <a:ea typeface="游ゴシック"/>
-              </a:rPr>
-              <a:t>5</a:t>
-            </a:r>
-          </a:p>
-        </p:txBody>
-      </p:sp>
-      <p:graphicFrame>
-        <p:nvGraphicFramePr>
-          <p:cNvPr id="4" name="Table 3"/>
-          <p:cNvGraphicFramePr>
-            <a:graphicFrameLocks noGrp="1"/>
-          </p:cNvGraphicFramePr>
-          <p:nvPr/>
-        </p:nvGraphicFramePr>
-        <p:xfrm>
-          <a:off x="838504" y="1920240"/>
-          <a:ext cx="10515600" cy="3154680"/>
-        </p:xfrm>
-        <a:graphic>
-          <a:graphicData uri="http://schemas.openxmlformats.org/drawingml/2006/table">
-            <a:tbl>
-              <a:tblPr firstRow="1" bandRow="1">
-                <a:tableStyleId>{5C22544A-7EE6-4342-B048-85BDC9FD1C3A}</a:tableStyleId>
-              </a:tblPr>
-              <a:tblGrid>
-                <a:gridCol w="8046720"/>
-                <a:gridCol w="2468880"/>
-              </a:tblGrid>
-              <a:tr h="630936">
-                <a:tc>
-                  <a:txBody>
-                    <a:bodyPr wrap="square" lIns="0" rIns="0" tIns="0" bIns="0">
-                      <a:noAutofit/>
-                    </a:bodyPr>
-                    <a:lstStyle/>
-                    <a:p>
-                      <a:pPr algn="l">
-                        <a:lnSpc>
-                          <a:spcPct val="112000"/>
-                        </a:lnSpc>
-                        <a:spcAft>
-                          <a:spcPts val="0"/>
-                        </a:spcAft>
-                        <a:buNone/>
-                      </a:pPr>
-                      <a:r>
-                        <a:rPr sz="2500" b="1" lang="ja-JP">
-                          <a:solidFill>
-                            <a:srgbClr val="111111"/>
-                          </a:solidFill>
-                          <a:latin typeface="游ゴシック"/>
-                          <a:ea typeface="游ゴシック"/>
-                        </a:rPr>
-                        <a:t>前後の認識値の取得状況</a:t>
-                      </a:r>
-                    </a:p>
-                  </a:txBody>
-                  <a:tcPr marL="118872" marR="91440" marT="64008" marB="36576" anchor="ctr">
-                    <a:solidFill>
-                      <a:srgbClr val="EEEEEE"/>
-                    </a:solidFill>
-                    <a:lnL w="7000">
-                      <a:solidFill>
-                        <a:srgbClr val="BFBFBF"/>
-                      </a:solidFill>
-                    </a:lnL>
-                    <a:lnR w="7000">
-                      <a:solidFill>
-                        <a:srgbClr val="BFBFBF"/>
-                      </a:solidFill>
-                    </a:lnR>
-                    <a:lnT w="7000">
-                      <a:solidFill>
-                        <a:srgbClr val="BFBFBF"/>
-                      </a:solidFill>
-                    </a:lnT>
-                    <a:lnB w="7000">
-                      <a:solidFill>
-                        <a:srgbClr val="BFBFBF"/>
-                      </a:solidFill>
-                    </a:lnB>
-                  </a:tcPr>
-                </a:tc>
-                <a:tc>
-                  <a:txBody>
-                    <a:bodyPr wrap="square" lIns="0" rIns="0" tIns="0" bIns="0">
-                      <a:noAutofit/>
-                    </a:bodyPr>
-                    <a:lstStyle/>
-                    <a:p>
-                      <a:pPr algn="l">
-                        <a:lnSpc>
-                          <a:spcPct val="112000"/>
-                        </a:lnSpc>
-                        <a:spcAft>
-                          <a:spcPts val="0"/>
-                        </a:spcAft>
-                        <a:buNone/>
-                      </a:pPr>
-                      <a:r>
-                        <a:rPr sz="2500" b="1" lang="ja-JP">
-                          <a:solidFill>
-                            <a:srgbClr val="111111"/>
-                          </a:solidFill>
-                          <a:latin typeface="游ゴシック"/>
-                          <a:ea typeface="游ゴシック"/>
-                        </a:rPr>
-                        <a:t>候補群数</a:t>
-                      </a:r>
-                    </a:p>
-                  </a:txBody>
-                  <a:tcPr marL="118872" marR="91440" marT="64008" marB="36576" anchor="ctr">
-                    <a:solidFill>
-                      <a:srgbClr val="EEEEEE"/>
-                    </a:solidFill>
-                    <a:lnL w="7000">
-                      <a:solidFill>
-                        <a:srgbClr val="BFBFBF"/>
-                      </a:solidFill>
-                    </a:lnL>
-                    <a:lnR w="7000">
-                      <a:solidFill>
-                        <a:srgbClr val="BFBFBF"/>
-                      </a:solidFill>
-                    </a:lnR>
-                    <a:lnT w="7000">
-                      <a:solidFill>
-                        <a:srgbClr val="BFBFBF"/>
-                      </a:solidFill>
-                    </a:lnT>
-                    <a:lnB w="7000">
-                      <a:solidFill>
-                        <a:srgbClr val="BFBFBF"/>
-                      </a:solidFill>
-                    </a:lnB>
-                  </a:tcPr>
-                </a:tc>
-              </a:tr>
-              <a:tr h="630936">
-                <a:tc>
-                  <a:txBody>
-                    <a:bodyPr wrap="square" lIns="0" rIns="0" tIns="0" bIns="0">
-                      <a:noAutofit/>
-                    </a:bodyPr>
-                    <a:lstStyle/>
-                    <a:p>
-                      <a:pPr algn="l">
-                        <a:lnSpc>
-                          <a:spcPct val="112000"/>
-                        </a:lnSpc>
-                        <a:spcAft>
-                          <a:spcPts val="0"/>
-                        </a:spcAft>
-                        <a:buNone/>
-                      </a:pPr>
-                      <a:r>
-                        <a:rPr sz="2500" b="0" lang="ja-JP">
-                          <a:solidFill>
-                            <a:srgbClr val="111111"/>
-                          </a:solidFill>
-                          <a:latin typeface="游ゴシック"/>
-                          <a:ea typeface="游ゴシック"/>
-                        </a:rPr>
-                        <a:t>B/S/O・走者・回・表裏・両チーム得点が揃う</a:t>
-                      </a:r>
-                    </a:p>
-                  </a:txBody>
-                  <a:tcPr marL="118872" marR="91440" marT="64008" marB="36576" anchor="ctr">
-                    <a:solidFill>
-                      <a:srgbClr val="FFF4D8"/>
-                    </a:solidFill>
-                    <a:lnL w="7000">
-                      <a:solidFill>
-                        <a:srgbClr val="BFBFBF"/>
-                      </a:solidFill>
-                    </a:lnL>
-                    <a:lnR w="7000">
-                      <a:solidFill>
-                        <a:srgbClr val="BFBFBF"/>
-                      </a:solidFill>
-                    </a:lnR>
-                    <a:lnT w="7000">
-                      <a:solidFill>
-                        <a:srgbClr val="BFBFBF"/>
-                      </a:solidFill>
-                    </a:lnT>
-                    <a:lnB w="7000">
-                      <a:solidFill>
-                        <a:srgbClr val="BFBFBF"/>
-                      </a:solidFill>
-                    </a:lnB>
-                  </a:tcPr>
-                </a:tc>
-                <a:tc>
-                  <a:txBody>
-                    <a:bodyPr wrap="square" lIns="0" rIns="0" tIns="0" bIns="0">
-                      <a:noAutofit/>
-                    </a:bodyPr>
-                    <a:lstStyle/>
-                    <a:p>
-                      <a:pPr algn="l">
-                        <a:lnSpc>
-                          <a:spcPct val="112000"/>
-                        </a:lnSpc>
-                        <a:spcAft>
-                          <a:spcPts val="0"/>
-                        </a:spcAft>
-                        <a:buNone/>
-                      </a:pPr>
-                      <a:r>
-                        <a:rPr sz="2500" b="0" lang="ja-JP">
-                          <a:solidFill>
-                            <a:srgbClr val="111111"/>
-                          </a:solidFill>
-                          <a:latin typeface="游ゴシック"/>
-                          <a:ea typeface="游ゴシック"/>
-                        </a:rPr>
-                        <a:t>9</a:t>
-                      </a:r>
-                    </a:p>
-                  </a:txBody>
-                  <a:tcPr marL="118872" marR="91440" marT="64008" marB="36576" anchor="ctr">
-                    <a:solidFill>
-                      <a:srgbClr val="FFF4D8"/>
-                    </a:solidFill>
-                    <a:lnL w="7000">
-                      <a:solidFill>
-                        <a:srgbClr val="BFBFBF"/>
-                      </a:solidFill>
-                    </a:lnL>
-                    <a:lnR w="7000">
-                      <a:solidFill>
-                        <a:srgbClr val="BFBFBF"/>
-                      </a:solidFill>
-                    </a:lnR>
-                    <a:lnT w="7000">
-                      <a:solidFill>
-                        <a:srgbClr val="BFBFBF"/>
-                      </a:solidFill>
-                    </a:lnT>
-                    <a:lnB w="7000">
-                      <a:solidFill>
-                        <a:srgbClr val="BFBFBF"/>
-                      </a:solidFill>
-                    </a:lnB>
-                  </a:tcPr>
-                </a:tc>
-              </a:tr>
-              <a:tr h="630936">
-                <a:tc>
-                  <a:txBody>
-                    <a:bodyPr wrap="square" lIns="0" rIns="0" tIns="0" bIns="0">
-                      <a:noAutofit/>
-                    </a:bodyPr>
-                    <a:lstStyle/>
-                    <a:p>
-                      <a:pPr algn="l">
-                        <a:lnSpc>
-                          <a:spcPct val="112000"/>
-                        </a:lnSpc>
-                        <a:spcAft>
-                          <a:spcPts val="0"/>
-                        </a:spcAft>
-                        <a:buNone/>
-                      </a:pPr>
-                      <a:r>
-                        <a:rPr sz="2500" b="0" lang="ja-JP">
-                          <a:solidFill>
-                            <a:srgbClr val="111111"/>
-                          </a:solidFill>
-                          <a:latin typeface="游ゴシック"/>
-                          <a:ea typeface="游ゴシック"/>
-                        </a:rPr>
-                        <a:t>B/S/Oは揃うが、OCRの項目が一部不足</a:t>
-                      </a:r>
-                    </a:p>
-                  </a:txBody>
-                  <a:tcPr marL="118872" marR="91440" marT="64008" marB="36576" anchor="ctr">
-                    <a:solidFill>
-                      <a:srgbClr val="FFFFFF"/>
-                    </a:solidFill>
-                    <a:lnL w="7000">
-                      <a:solidFill>
-                        <a:srgbClr val="BFBFBF"/>
-                      </a:solidFill>
-                    </a:lnL>
-                    <a:lnR w="7000">
-                      <a:solidFill>
-                        <a:srgbClr val="BFBFBF"/>
-                      </a:solidFill>
-                    </a:lnR>
-                    <a:lnT w="7000">
-                      <a:solidFill>
-                        <a:srgbClr val="BFBFBF"/>
-                      </a:solidFill>
-                    </a:lnT>
-                    <a:lnB w="7000">
-                      <a:solidFill>
-                        <a:srgbClr val="BFBFBF"/>
-                      </a:solidFill>
-                    </a:lnB>
-                  </a:tcPr>
-                </a:tc>
-                <a:tc>
-                  <a:txBody>
-                    <a:bodyPr wrap="square" lIns="0" rIns="0" tIns="0" bIns="0">
-                      <a:noAutofit/>
-                    </a:bodyPr>
-                    <a:lstStyle/>
-                    <a:p>
-                      <a:pPr algn="l">
-                        <a:lnSpc>
-                          <a:spcPct val="112000"/>
-                        </a:lnSpc>
-                        <a:spcAft>
-                          <a:spcPts val="0"/>
-                        </a:spcAft>
-                        <a:buNone/>
-                      </a:pPr>
-                      <a:r>
-                        <a:rPr sz="2500" b="0" lang="ja-JP">
-                          <a:solidFill>
-                            <a:srgbClr val="111111"/>
-                          </a:solidFill>
-                          <a:latin typeface="游ゴシック"/>
-                          <a:ea typeface="游ゴシック"/>
-                        </a:rPr>
-                        <a:t>2</a:t>
-                      </a:r>
-                    </a:p>
-                  </a:txBody>
-                  <a:tcPr marL="118872" marR="91440" marT="64008" marB="36576" anchor="ctr">
-                    <a:solidFill>
-                      <a:srgbClr val="FFFFFF"/>
-                    </a:solidFill>
-                    <a:lnL w="7000">
-                      <a:solidFill>
-                        <a:srgbClr val="BFBFBF"/>
-                      </a:solidFill>
-                    </a:lnL>
-                    <a:lnR w="7000">
-                      <a:solidFill>
-                        <a:srgbClr val="BFBFBF"/>
-                      </a:solidFill>
-                    </a:lnR>
-                    <a:lnT w="7000">
-                      <a:solidFill>
-                        <a:srgbClr val="BFBFBF"/>
-                      </a:solidFill>
-                    </a:lnT>
-                    <a:lnB w="7000">
-                      <a:solidFill>
-                        <a:srgbClr val="BFBFBF"/>
-                      </a:solidFill>
-                    </a:lnB>
-                  </a:tcPr>
-                </a:tc>
-              </a:tr>
-              <a:tr h="630936">
-                <a:tc>
-                  <a:txBody>
-                    <a:bodyPr wrap="square" lIns="0" rIns="0" tIns="0" bIns="0">
-                      <a:noAutofit/>
-                    </a:bodyPr>
-                    <a:lstStyle/>
-                    <a:p>
-                      <a:pPr algn="l">
-                        <a:lnSpc>
-                          <a:spcPct val="112000"/>
-                        </a:lnSpc>
-                        <a:spcAft>
-                          <a:spcPts val="0"/>
-                        </a:spcAft>
-                        <a:buNone/>
-                      </a:pPr>
-                      <a:r>
-                        <a:rPr sz="2500" b="0" lang="ja-JP">
-                          <a:solidFill>
-                            <a:srgbClr val="111111"/>
-                          </a:solidFill>
-                          <a:latin typeface="游ゴシック"/>
-                          <a:ea typeface="游ゴシック"/>
-                        </a:rPr>
-                        <a:t>前後どちらかのB/S/Oが不足</a:t>
-                      </a:r>
-                    </a:p>
-                  </a:txBody>
-                  <a:tcPr marL="118872" marR="91440" marT="64008" marB="36576" anchor="ctr">
-                    <a:solidFill>
-                      <a:srgbClr val="FFFFFF"/>
-                    </a:solidFill>
-                    <a:lnL w="7000">
-                      <a:solidFill>
-                        <a:srgbClr val="BFBFBF"/>
-                      </a:solidFill>
-                    </a:lnL>
-                    <a:lnR w="7000">
-                      <a:solidFill>
-                        <a:srgbClr val="BFBFBF"/>
-                      </a:solidFill>
-                    </a:lnR>
-                    <a:lnT w="7000">
-                      <a:solidFill>
-                        <a:srgbClr val="BFBFBF"/>
-                      </a:solidFill>
-                    </a:lnT>
-                    <a:lnB w="7000">
-                      <a:solidFill>
-                        <a:srgbClr val="BFBFBF"/>
-                      </a:solidFill>
-                    </a:lnB>
-                  </a:tcPr>
-                </a:tc>
-                <a:tc>
-                  <a:txBody>
-                    <a:bodyPr wrap="square" lIns="0" rIns="0" tIns="0" bIns="0">
-                      <a:noAutofit/>
-                    </a:bodyPr>
-                    <a:lstStyle/>
-                    <a:p>
-                      <a:pPr algn="l">
-                        <a:lnSpc>
-                          <a:spcPct val="112000"/>
-                        </a:lnSpc>
-                        <a:spcAft>
-                          <a:spcPts val="0"/>
-                        </a:spcAft>
-                        <a:buNone/>
-                      </a:pPr>
-                      <a:r>
-                        <a:rPr sz="2500" b="0" lang="ja-JP">
-                          <a:solidFill>
-                            <a:srgbClr val="111111"/>
-                          </a:solidFill>
-                          <a:latin typeface="游ゴシック"/>
-                          <a:ea typeface="游ゴシック"/>
-                        </a:rPr>
-                        <a:t>23</a:t>
-                      </a:r>
-                    </a:p>
-                  </a:txBody>
-                  <a:tcPr marL="118872" marR="91440" marT="64008" marB="36576" anchor="ctr">
-                    <a:solidFill>
-                      <a:srgbClr val="FFFFFF"/>
-                    </a:solidFill>
-                    <a:lnL w="7000">
-                      <a:solidFill>
-                        <a:srgbClr val="BFBFBF"/>
-                      </a:solidFill>
-                    </a:lnL>
-                    <a:lnR w="7000">
-                      <a:solidFill>
-                        <a:srgbClr val="BFBFBF"/>
-                      </a:solidFill>
-                    </a:lnR>
-                    <a:lnT w="7000">
-                      <a:solidFill>
-                        <a:srgbClr val="BFBFBF"/>
-                      </a:solidFill>
-                    </a:lnT>
-                    <a:lnB w="7000">
-                      <a:solidFill>
-                        <a:srgbClr val="BFBFBF"/>
-                      </a:solidFill>
-                    </a:lnB>
-                  </a:tcPr>
-                </a:tc>
-              </a:tr>
-              <a:tr h="630936">
-                <a:tc>
-                  <a:txBody>
-                    <a:bodyPr wrap="square" lIns="0" rIns="0" tIns="0" bIns="0">
-                      <a:noAutofit/>
-                    </a:bodyPr>
-                    <a:lstStyle/>
-                    <a:p>
-                      <a:pPr algn="l">
-                        <a:lnSpc>
-                          <a:spcPct val="112000"/>
-                        </a:lnSpc>
-                        <a:spcAft>
-                          <a:spcPts val="0"/>
-                        </a:spcAft>
-                        <a:buNone/>
-                      </a:pPr>
-                      <a:r>
-                        <a:rPr sz="2500" b="0" lang="ja-JP">
-                          <a:solidFill>
-                            <a:srgbClr val="111111"/>
-                          </a:solidFill>
-                          <a:latin typeface="游ゴシック"/>
-                          <a:ea typeface="游ゴシック"/>
-                        </a:rPr>
-                        <a:t>合計</a:t>
-                      </a:r>
-                    </a:p>
-                  </a:txBody>
-                  <a:tcPr marL="118872" marR="91440" marT="64008" marB="36576" anchor="ctr">
-                    <a:solidFill>
-                      <a:srgbClr val="FFFFFF"/>
-                    </a:solidFill>
-                    <a:lnL w="7000">
-                      <a:solidFill>
-                        <a:srgbClr val="BFBFBF"/>
-                      </a:solidFill>
-                    </a:lnL>
-                    <a:lnR w="7000">
-                      <a:solidFill>
-                        <a:srgbClr val="BFBFBF"/>
-                      </a:solidFill>
-                    </a:lnR>
-                    <a:lnT w="7000">
-                      <a:solidFill>
-                        <a:srgbClr val="BFBFBF"/>
-                      </a:solidFill>
-                    </a:lnT>
-                    <a:lnB w="7000">
-                      <a:solidFill>
-                        <a:srgbClr val="BFBFBF"/>
-                      </a:solidFill>
-                    </a:lnB>
-                  </a:tcPr>
-                </a:tc>
-                <a:tc>
-                  <a:txBody>
-                    <a:bodyPr wrap="square" lIns="0" rIns="0" tIns="0" bIns="0">
-                      <a:noAutofit/>
-                    </a:bodyPr>
-                    <a:lstStyle/>
-                    <a:p>
-                      <a:pPr algn="l">
-                        <a:lnSpc>
-                          <a:spcPct val="112000"/>
-                        </a:lnSpc>
-                        <a:spcAft>
-                          <a:spcPts val="0"/>
-                        </a:spcAft>
-                        <a:buNone/>
-                      </a:pPr>
-                      <a:r>
-                        <a:rPr sz="2500" b="0" lang="ja-JP">
-                          <a:solidFill>
-                            <a:srgbClr val="111111"/>
-                          </a:solidFill>
-                          <a:latin typeface="游ゴシック"/>
-                          <a:ea typeface="游ゴシック"/>
-                        </a:rPr>
-                        <a:t>34</a:t>
-                      </a:r>
-                    </a:p>
-                  </a:txBody>
-                  <a:tcPr marL="118872" marR="91440" marT="64008" marB="36576" anchor="ctr">
-                    <a:solidFill>
-                      <a:srgbClr val="FFFFFF"/>
-                    </a:solidFill>
-                    <a:lnL w="7000">
-                      <a:solidFill>
-                        <a:srgbClr val="BFBFBF"/>
-                      </a:solidFill>
-                    </a:lnL>
-                    <a:lnR w="7000">
-                      <a:solidFill>
-                        <a:srgbClr val="BFBFBF"/>
-                      </a:solidFill>
-                    </a:lnR>
-                    <a:lnT w="7000">
-                      <a:solidFill>
-                        <a:srgbClr val="BFBFBF"/>
-                      </a:solidFill>
-                    </a:lnT>
-                    <a:lnB w="7000">
-                      <a:solidFill>
-                        <a:srgbClr val="BFBFBF"/>
-                      </a:solidFill>
-                    </a:lnB>
-                  </a:tcPr>
-                </a:tc>
-              </a:tr>
-            </a:tbl>
-          </a:graphicData>
-        </a:graphic>
-      </p:graphicFrame>
-      <p:sp>
-        <p:nvSpPr>
-          <p:cNvPr id="5" name="TextBox 4"/>
-          <p:cNvSpPr txBox="1"/>
-          <p:nvPr/>
-        </p:nvSpPr>
-        <p:spPr>
-          <a:xfrm>
-            <a:off x="838504" y="5449824"/>
-            <a:ext cx="10515600" cy="1005840"/>
-          </a:xfrm>
-          <a:prstGeom prst="rect">
-            <a:avLst/>
-          </a:prstGeom>
-          <a:noFill/>
-        </p:spPr>
-        <p:txBody>
-          <a:bodyPr wrap="square" lIns="0" rIns="0" tIns="0" bIns="0">
-            <a:noAutofit/>
-          </a:bodyPr>
-          <a:lstStyle/>
-          <a:p>
-            <a:pPr algn="l">
-              <a:lnSpc>
-                <a:spcPct val="112000"/>
-              </a:lnSpc>
-              <a:spcAft>
-                <a:spcPts val="0"/>
-              </a:spcAft>
-              <a:buNone/>
-            </a:pPr>
-            <a:r>
-              <a:rPr sz="2500" b="0" lang="ja-JP">
-                <a:solidFill>
-                  <a:srgbClr val="B02121"/>
-                </a:solidFill>
-                <a:latin typeface="游ゴシック"/>
-                <a:ea typeface="游ゴシック"/>
-              </a:rPr>
-              <a:t>前後のB/S/Oを照合できたのは11候補群。</a:t>
-            </a:r>
-            <a:br/>
-            <a:r>
-              <a:rPr sz="2500" b="0" lang="ja-JP">
-                <a:solidFill>
-                  <a:srgbClr val="B02121"/>
-                </a:solidFill>
-                <a:latin typeface="游ゴシック"/>
-                <a:ea typeface="游ゴシック"/>
-              </a:rPr>
-              <a:t>全項目の取得は、イベント判定の成功や正解率とは異なる。</a:t>
-            </a:r>
-          </a:p>
-        </p:txBody>
-      </p:sp>
-    </p:spTree>
-  </p:cSld>
-  <p:clrMapOvr>
-    <a:masterClrMapping/>
-  </p:clrMapOvr>
-</p:sld>
-</file>
-
-<file path=ppt/slides/slide6.xml><?xml version="1.0" encoding="utf-8"?>
-<p:sld xmlns:a="http://schemas.openxmlformats.org/drawingml/2006/main" xmlns:p="http://schemas.openxmlformats.org/presentationml/2006/main" xmlns:r="http://schemas.openxmlformats.org/officeDocument/2006/relationships">
-  <p:cSld>
-    <p:spTree>
-      <p:nvGrpSpPr>
-        <p:cNvPr id="1" name=""/>
-        <p:cNvGrpSpPr/>
-        <p:nvPr/>
-      </p:nvGrpSpPr>
-      <p:grpSpPr/>
-      <p:sp>
-        <p:nvSpPr>
-          <p:cNvPr id="2" name="Title 1"/>
-          <p:cNvSpPr>
-            <a:spLocks noGrp="1"/>
-          </p:cNvSpPr>
-          <p:nvPr>
-            <p:ph type="title"/>
-          </p:nvPr>
-        </p:nvSpPr>
-        <p:spPr>
-          <a:xfrm>
-            <a:off x="838504" y="364845"/>
-            <a:ext cx="10515600" cy="1325880"/>
-          </a:xfrm>
-        </p:spPr>
-        <p:txBody>
-          <a:bodyPr wrap="square" lIns="0" rIns="0" tIns="0" bIns="0">
-            <a:noAutofit/>
-          </a:bodyPr>
-          <a:lstStyle/>
-          <a:p>
-            <a:pPr algn="l">
-              <a:lnSpc>
-                <a:spcPct val="112000"/>
-              </a:lnSpc>
-              <a:spcAft>
-                <a:spcPts val="0"/>
-              </a:spcAft>
-              <a:buNone/>
-            </a:pPr>
-            <a:r>
-              <a:rPr sz="4400" b="0" lang="ja-JP">
-                <a:solidFill>
-                  <a:srgbClr val="111111"/>
-                </a:solidFill>
-                <a:latin typeface="游ゴシック Light"/>
-                <a:ea typeface="游ゴシック Light"/>
-              </a:rPr>
-              <a:t>投球にカウントと走者・得点を付与</a:t>
-            </a:r>
-          </a:p>
-        </p:txBody>
-      </p:sp>
-      <p:sp>
-        <p:nvSpPr>
-          <p:cNvPr id="3" name="TextBox 2"/>
-          <p:cNvSpPr txBox="1"/>
-          <p:nvPr/>
-        </p:nvSpPr>
-        <p:spPr>
-          <a:xfrm>
-            <a:off x="10881360" y="6510528"/>
-            <a:ext cx="457200" cy="201168"/>
-          </a:xfrm>
-          <a:prstGeom prst="rect">
-            <a:avLst/>
-          </a:prstGeom>
-          <a:noFill/>
-        </p:spPr>
-        <p:txBody>
-          <a:bodyPr wrap="square" lIns="0" rIns="0" tIns="0" bIns="0">
-            <a:noAutofit/>
-          </a:bodyPr>
-          <a:lstStyle/>
-          <a:p>
-            <a:pPr algn="r">
-              <a:lnSpc>
-                <a:spcPct val="112000"/>
-              </a:lnSpc>
-              <a:spcAft>
-                <a:spcPts val="0"/>
-              </a:spcAft>
-              <a:buNone/>
-            </a:pPr>
-            <a:r>
-              <a:rPr sz="1200" b="0" lang="ja-JP">
-                <a:solidFill>
-                  <a:srgbClr val="555555"/>
-                </a:solidFill>
-                <a:latin typeface="游ゴシック"/>
-                <a:ea typeface="游ゴシック"/>
-              </a:rPr>
-              <a:t>6</a:t>
-            </a:r>
-          </a:p>
-        </p:txBody>
-      </p:sp>
-      <p:sp>
-        <p:nvSpPr>
-          <p:cNvPr id="4" name="TextBox 3"/>
-          <p:cNvSpPr txBox="1"/>
-          <p:nvPr/>
-        </p:nvSpPr>
-        <p:spPr>
-          <a:xfrm>
-            <a:off x="838504" y="1810512"/>
-            <a:ext cx="10515600" cy="749808"/>
-          </a:xfrm>
-          <a:prstGeom prst="rect">
-            <a:avLst/>
-          </a:prstGeom>
-          <a:noFill/>
-        </p:spPr>
-        <p:txBody>
-          <a:bodyPr wrap="square" lIns="0" rIns="0" tIns="0" bIns="0">
-            <a:noAutofit/>
-          </a:bodyPr>
-          <a:lstStyle/>
-          <a:p>
-            <a:pPr algn="l">
-              <a:lnSpc>
-                <a:spcPct val="112000"/>
-              </a:lnSpc>
-              <a:spcAft>
-                <a:spcPts val="0"/>
-              </a:spcAft>
-              <a:buNone/>
-            </a:pPr>
-            <a:r>
-              <a:rPr sz="2500" b="0" lang="ja-JP">
-                <a:solidFill>
-                  <a:srgbClr val="111111"/>
-                </a:solidFill>
-                <a:latin typeface="游ゴシック"/>
-                <a:ea typeface="游ゴシック"/>
-              </a:rPr>
-              <a:t>候補22：293.11–294.85秒</a:t>
-            </a:r>
-            <a:br/>
-            <a:r>
-              <a:rPr sz="2500" b="0" lang="ja-JP">
-                <a:solidFill>
-                  <a:srgbClr val="111111"/>
-                </a:solidFill>
-                <a:latin typeface="游ゴシック"/>
-                <a:ea typeface="游ゴシック"/>
-              </a:rPr>
-              <a:t>5回ウラ ／ 0–0 ／ 一塁走者あり ／ 2アウト</a:t>
+              <a:t>投球の後に、ストライク表示が0から1に増えた。</a:t>
             </a:r>
           </a:p>
         </p:txBody>
@@ -11040,6 +9219,966 @@
 </p:sld>
 </file>
 
+<file path=ppt/slides/slide4.xml><?xml version="1.0" encoding="utf-8"?>
+<p:sld xmlns:a="http://schemas.openxmlformats.org/drawingml/2006/main" xmlns:p="http://schemas.openxmlformats.org/presentationml/2006/main" xmlns:r="http://schemas.openxmlformats.org/officeDocument/2006/relationships">
+  <p:cSld>
+    <p:spTree>
+      <p:nvGrpSpPr>
+        <p:cNvPr id="1" name=""/>
+        <p:cNvGrpSpPr/>
+        <p:nvPr/>
+      </p:nvGrpSpPr>
+      <p:grpSpPr/>
+      <p:sp>
+        <p:nvSpPr>
+          <p:cNvPr id="2" name="Title 1"/>
+          <p:cNvSpPr>
+            <a:spLocks noGrp="1"/>
+          </p:cNvSpPr>
+          <p:nvPr>
+            <p:ph type="title"/>
+          </p:nvPr>
+        </p:nvSpPr>
+        <p:spPr>
+          <a:xfrm>
+            <a:off x="838504" y="364845"/>
+            <a:ext cx="10515600" cy="1325880"/>
+          </a:xfrm>
+        </p:spPr>
+        <p:txBody>
+          <a:bodyPr wrap="square" lIns="0" rIns="0" tIns="0" bIns="0">
+            <a:noAutofit/>
+          </a:bodyPr>
+          <a:lstStyle/>
+          <a:p>
+            <a:pPr algn="l">
+              <a:lnSpc>
+                <a:spcPct val="112000"/>
+              </a:lnSpc>
+              <a:spcAft>
+                <a:spcPts val="0"/>
+              </a:spcAft>
+              <a:buNone/>
+            </a:pPr>
+            <a:r>
+              <a:rPr sz="4400" b="0" lang="ja-JP">
+                <a:solidFill>
+                  <a:srgbClr val="111111"/>
+                </a:solidFill>
+                <a:latin typeface="游ゴシック Light"/>
+                <a:ea typeface="游ゴシック Light"/>
+              </a:rPr>
+              <a:t>投球直後の表示だけでは決められない</a:t>
+            </a:r>
+          </a:p>
+        </p:txBody>
+      </p:sp>
+      <p:sp>
+        <p:nvSpPr>
+          <p:cNvPr id="3" name="TextBox 2"/>
+          <p:cNvSpPr txBox="1"/>
+          <p:nvPr/>
+        </p:nvSpPr>
+        <p:spPr>
+          <a:xfrm>
+            <a:off x="10881360" y="6510528"/>
+            <a:ext cx="457200" cy="201168"/>
+          </a:xfrm>
+          <a:prstGeom prst="rect">
+            <a:avLst/>
+          </a:prstGeom>
+          <a:noFill/>
+        </p:spPr>
+        <p:txBody>
+          <a:bodyPr wrap="square" lIns="0" rIns="0" tIns="0" bIns="0">
+            <a:noAutofit/>
+          </a:bodyPr>
+          <a:lstStyle/>
+          <a:p>
+            <a:pPr algn="r">
+              <a:lnSpc>
+                <a:spcPct val="112000"/>
+              </a:lnSpc>
+              <a:spcAft>
+                <a:spcPts val="0"/>
+              </a:spcAft>
+              <a:buNone/>
+            </a:pPr>
+            <a:r>
+              <a:rPr sz="1200" b="0" lang="ja-JP">
+                <a:solidFill>
+                  <a:srgbClr val="555555"/>
+                </a:solidFill>
+                <a:latin typeface="游ゴシック"/>
+                <a:ea typeface="游ゴシック"/>
+              </a:rPr>
+              <a:t>4</a:t>
+            </a:r>
+          </a:p>
+        </p:txBody>
+      </p:sp>
+      <p:sp>
+        <p:nvSpPr>
+          <p:cNvPr id="4" name="TextBox 3"/>
+          <p:cNvSpPr txBox="1"/>
+          <p:nvPr/>
+        </p:nvSpPr>
+        <p:spPr>
+          <a:xfrm>
+            <a:off x="838504" y="1810512"/>
+            <a:ext cx="10515600" cy="411480"/>
+          </a:xfrm>
+          <a:prstGeom prst="rect">
+            <a:avLst/>
+          </a:prstGeom>
+          <a:noFill/>
+        </p:spPr>
+        <p:txBody>
+          <a:bodyPr wrap="square" lIns="0" rIns="0" tIns="0" bIns="0">
+            <a:noAutofit/>
+          </a:bodyPr>
+          <a:lstStyle/>
+          <a:p>
+            <a:pPr algn="l">
+              <a:lnSpc>
+                <a:spcPct val="112000"/>
+              </a:lnSpc>
+              <a:spcAft>
+                <a:spcPts val="1000"/>
+              </a:spcAft>
+              <a:buNone/>
+            </a:pPr>
+            <a:r>
+              <a:rPr sz="2600" b="0" lang="ja-JP">
+                <a:solidFill>
+                  <a:srgbClr val="111111"/>
+                </a:solidFill>
+                <a:latin typeface="游ゴシック"/>
+                <a:ea typeface="游ゴシック"/>
+              </a:rPr>
+              <a:t>直後には変化がなくても、少し後の表示は変わっていた。</a:t>
+            </a:r>
+          </a:p>
+        </p:txBody>
+      </p:sp>
+      <p:pic>
+        <p:nvPicPr>
+          <p:cNvPr id="5" name="Picture 4" descr="lag_case11"/>
+          <p:cNvPicPr>
+            <a:picLocks noChangeAspect="1"/>
+          </p:cNvPicPr>
+          <p:nvPr/>
+        </p:nvPicPr>
+        <p:blipFill>
+          <a:blip r:embed="rId2"/>
+          <a:stretch>
+            <a:fillRect/>
+          </a:stretch>
+        </p:blipFill>
+        <p:spPr>
+          <a:xfrm>
+            <a:off x="838504" y="2386584"/>
+            <a:ext cx="10515600" cy="3724275"/>
+          </a:xfrm>
+          <a:prstGeom prst="rect">
+            <a:avLst/>
+          </a:prstGeom>
+        </p:spPr>
+      </p:pic>
+      <p:sp>
+        <p:nvSpPr>
+          <p:cNvPr id="6" name="TextBox 5"/>
+          <p:cNvSpPr txBox="1"/>
+          <p:nvPr/>
+        </p:nvSpPr>
+        <p:spPr>
+          <a:xfrm>
+            <a:off x="838504" y="6254496"/>
+            <a:ext cx="10515600" cy="292608"/>
+          </a:xfrm>
+          <a:prstGeom prst="rect">
+            <a:avLst/>
+          </a:prstGeom>
+          <a:noFill/>
+        </p:spPr>
+        <p:txBody>
+          <a:bodyPr wrap="square" lIns="0" rIns="0" tIns="0" bIns="0">
+            <a:noAutofit/>
+          </a:bodyPr>
+          <a:lstStyle/>
+          <a:p>
+            <a:pPr algn="l">
+              <a:lnSpc>
+                <a:spcPct val="112000"/>
+              </a:lnSpc>
+              <a:spcAft>
+                <a:spcPts val="1000"/>
+              </a:spcAft>
+              <a:buNone/>
+            </a:pPr>
+            <a:r>
+              <a:rPr sz="2100" b="0" lang="ja-JP">
+                <a:solidFill>
+                  <a:srgbClr val="B02121"/>
+                </a:solidFill>
+                <a:latin typeface="游ゴシック"/>
+                <a:ea typeface="游ゴシック"/>
+              </a:rPr>
+              <a:t>直後だけ見ると「変化なし」。少し後まで見ると「ボール増加」。</a:t>
+            </a:r>
+          </a:p>
+        </p:txBody>
+      </p:sp>
+    </p:spTree>
+  </p:cSld>
+  <p:clrMapOvr>
+    <a:masterClrMapping/>
+  </p:clrMapOvr>
+</p:sld>
+</file>
+
+<file path=ppt/slides/slide5.xml><?xml version="1.0" encoding="utf-8"?>
+<p:sld xmlns:a="http://schemas.openxmlformats.org/drawingml/2006/main" xmlns:p="http://schemas.openxmlformats.org/presentationml/2006/main" xmlns:r="http://schemas.openxmlformats.org/officeDocument/2006/relationships">
+  <p:cSld>
+    <p:spTree>
+      <p:nvGrpSpPr>
+        <p:cNvPr id="1" name=""/>
+        <p:cNvGrpSpPr/>
+        <p:nvPr/>
+      </p:nvGrpSpPr>
+      <p:grpSpPr/>
+      <p:sp>
+        <p:nvSpPr>
+          <p:cNvPr id="2" name="Title 1"/>
+          <p:cNvSpPr>
+            <a:spLocks noGrp="1"/>
+          </p:cNvSpPr>
+          <p:nvPr>
+            <p:ph type="title"/>
+          </p:nvPr>
+        </p:nvSpPr>
+        <p:spPr>
+          <a:xfrm>
+            <a:off x="838504" y="364845"/>
+            <a:ext cx="10515600" cy="1325880"/>
+          </a:xfrm>
+        </p:spPr>
+        <p:txBody>
+          <a:bodyPr wrap="square" lIns="0" rIns="0" tIns="0" bIns="0">
+            <a:noAutofit/>
+          </a:bodyPr>
+          <a:lstStyle/>
+          <a:p>
+            <a:pPr algn="l">
+              <a:lnSpc>
+                <a:spcPct val="112000"/>
+              </a:lnSpc>
+              <a:spcAft>
+                <a:spcPts val="0"/>
+              </a:spcAft>
+              <a:buNone/>
+            </a:pPr>
+            <a:r>
+              <a:rPr sz="4400" b="0" lang="ja-JP">
+                <a:solidFill>
+                  <a:srgbClr val="111111"/>
+                </a:solidFill>
+                <a:latin typeface="游ゴシック Light"/>
+                <a:ea typeface="游ゴシック Light"/>
+              </a:rPr>
+              <a:t>同じ値が続いても、更新前かもしれない</a:t>
+            </a:r>
+          </a:p>
+        </p:txBody>
+      </p:sp>
+      <p:sp>
+        <p:nvSpPr>
+          <p:cNvPr id="3" name="TextBox 2"/>
+          <p:cNvSpPr txBox="1"/>
+          <p:nvPr/>
+        </p:nvSpPr>
+        <p:spPr>
+          <a:xfrm>
+            <a:off x="10881360" y="6510528"/>
+            <a:ext cx="457200" cy="201168"/>
+          </a:xfrm>
+          <a:prstGeom prst="rect">
+            <a:avLst/>
+          </a:prstGeom>
+          <a:noFill/>
+        </p:spPr>
+        <p:txBody>
+          <a:bodyPr wrap="square" lIns="0" rIns="0" tIns="0" bIns="0">
+            <a:noAutofit/>
+          </a:bodyPr>
+          <a:lstStyle/>
+          <a:p>
+            <a:pPr algn="r">
+              <a:lnSpc>
+                <a:spcPct val="112000"/>
+              </a:lnSpc>
+              <a:spcAft>
+                <a:spcPts val="0"/>
+              </a:spcAft>
+              <a:buNone/>
+            </a:pPr>
+            <a:r>
+              <a:rPr sz="1200" b="0" lang="ja-JP">
+                <a:solidFill>
+                  <a:srgbClr val="555555"/>
+                </a:solidFill>
+                <a:latin typeface="游ゴシック"/>
+                <a:ea typeface="游ゴシック"/>
+              </a:rPr>
+              <a:t>5</a:t>
+            </a:r>
+          </a:p>
+        </p:txBody>
+      </p:sp>
+      <p:sp>
+        <p:nvSpPr>
+          <p:cNvPr id="4" name="Rectangle 3"/>
+          <p:cNvSpPr/>
+          <p:nvPr/>
+        </p:nvSpPr>
+        <p:spPr>
+          <a:xfrm>
+            <a:off x="868680" y="2148840"/>
+            <a:ext cx="4754880" cy="1234440"/>
+          </a:xfrm>
+          <a:prstGeom prst="rect">
+            <a:avLst/>
+          </a:prstGeom>
+          <a:solidFill>
+            <a:srgbClr val="F5F5F5"/>
+          </a:solidFill>
+          <a:ln w="12700">
+            <a:solidFill>
+              <a:srgbClr val="777777"/>
+            </a:solidFill>
+          </a:ln>
+        </p:spPr>
+        <p:style>
+          <a:lnRef idx="1">
+            <a:schemeClr val="accent1"/>
+          </a:lnRef>
+          <a:fillRef idx="3">
+            <a:schemeClr val="accent1"/>
+          </a:fillRef>
+          <a:effectRef idx="2">
+            <a:schemeClr val="accent1"/>
+          </a:effectRef>
+          <a:fontRef idx="minor">
+            <a:schemeClr val="lt1"/>
+          </a:fontRef>
+        </p:style>
+        <p:txBody>
+          <a:bodyPr rtlCol="0" anchor="ctr" wrap="square" tIns="0" bIns="0">
+            <a:noAutofit/>
+          </a:bodyPr>
+          <a:lstStyle/>
+          <a:p>
+            <a:pPr algn="ctr">
+              <a:lnSpc>
+                <a:spcPct val="112000"/>
+              </a:lnSpc>
+              <a:spcAft>
+                <a:spcPts val="0"/>
+              </a:spcAft>
+              <a:buNone/>
+            </a:pPr>
+            <a:r>
+              <a:rPr sz="2300" b="0" lang="ja-JP">
+                <a:solidFill>
+                  <a:srgbClr val="111111"/>
+                </a:solidFill>
+                <a:latin typeface="游ゴシック"/>
+                <a:ea typeface="游ゴシック"/>
+              </a:rPr>
+              <a:t>158.0秒・158.5秒</a:t>
+            </a:r>
+            <a:br/>
+            <a:r>
+              <a:rPr sz="2300" b="0" lang="ja-JP">
+                <a:solidFill>
+                  <a:srgbClr val="111111"/>
+                </a:solidFill>
+                <a:latin typeface="游ゴシック"/>
+                <a:ea typeface="游ゴシック"/>
+              </a:rPr>
+              <a:t>どちらも 0ボール・2ストライク</a:t>
+            </a:r>
+          </a:p>
+        </p:txBody>
+      </p:sp>
+      <p:sp>
+        <p:nvSpPr>
+          <p:cNvPr id="5" name="Rectangle 4"/>
+          <p:cNvSpPr/>
+          <p:nvPr/>
+        </p:nvSpPr>
+        <p:spPr>
+          <a:xfrm>
+            <a:off x="6583680" y="2148840"/>
+            <a:ext cx="4754880" cy="1234440"/>
+          </a:xfrm>
+          <a:prstGeom prst="rect">
+            <a:avLst/>
+          </a:prstGeom>
+          <a:solidFill>
+            <a:srgbClr val="F5F5F5"/>
+          </a:solidFill>
+          <a:ln w="12700">
+            <a:solidFill>
+              <a:srgbClr val="777777"/>
+            </a:solidFill>
+          </a:ln>
+        </p:spPr>
+        <p:style>
+          <a:lnRef idx="1">
+            <a:schemeClr val="accent1"/>
+          </a:lnRef>
+          <a:fillRef idx="3">
+            <a:schemeClr val="accent1"/>
+          </a:fillRef>
+          <a:effectRef idx="2">
+            <a:schemeClr val="accent1"/>
+          </a:effectRef>
+          <a:fontRef idx="minor">
+            <a:schemeClr val="lt1"/>
+          </a:fontRef>
+        </p:style>
+        <p:txBody>
+          <a:bodyPr rtlCol="0" anchor="ctr" wrap="square" tIns="0" bIns="0">
+            <a:noAutofit/>
+          </a:bodyPr>
+          <a:lstStyle/>
+          <a:p>
+            <a:pPr algn="ctr">
+              <a:lnSpc>
+                <a:spcPct val="112000"/>
+              </a:lnSpc>
+              <a:spcAft>
+                <a:spcPts val="0"/>
+              </a:spcAft>
+              <a:buNone/>
+            </a:pPr>
+            <a:r>
+              <a:rPr sz="2600" b="0" lang="ja-JP">
+                <a:solidFill>
+                  <a:srgbClr val="111111"/>
+                </a:solidFill>
+                <a:latin typeface="游ゴシック"/>
+                <a:ea typeface="游ゴシック"/>
+              </a:rPr>
+              <a:t>161.5秒</a:t>
+            </a:r>
+            <a:br/>
+            <a:r>
+              <a:rPr sz="2600" b="0" lang="ja-JP">
+                <a:solidFill>
+                  <a:srgbClr val="111111"/>
+                </a:solidFill>
+                <a:latin typeface="游ゴシック"/>
+                <a:ea typeface="游ゴシック"/>
+              </a:rPr>
+              <a:t>1ボール・2ストライク</a:t>
+            </a:r>
+          </a:p>
+        </p:txBody>
+      </p:sp>
+      <p:sp>
+        <p:nvSpPr>
+          <p:cNvPr id="6" name="TextBox 5"/>
+          <p:cNvSpPr txBox="1"/>
+          <p:nvPr/>
+        </p:nvSpPr>
+        <p:spPr>
+          <a:xfrm>
+            <a:off x="5715000" y="2423160"/>
+            <a:ext cx="731520" cy="731520"/>
+          </a:xfrm>
+          <a:prstGeom prst="rect">
+            <a:avLst/>
+          </a:prstGeom>
+          <a:noFill/>
+        </p:spPr>
+        <p:txBody>
+          <a:bodyPr wrap="square" lIns="0" rIns="0" tIns="0" bIns="0">
+            <a:noAutofit/>
+          </a:bodyPr>
+          <a:lstStyle/>
+          <a:p>
+            <a:pPr algn="ctr">
+              <a:lnSpc>
+                <a:spcPct val="112000"/>
+              </a:lnSpc>
+              <a:spcAft>
+                <a:spcPts val="1000"/>
+              </a:spcAft>
+              <a:buNone/>
+            </a:pPr>
+            <a:r>
+              <a:rPr sz="3600" b="0" lang="ja-JP">
+                <a:solidFill>
+                  <a:srgbClr val="111111"/>
+                </a:solidFill>
+                <a:latin typeface="游ゴシック"/>
+                <a:ea typeface="游ゴシック"/>
+              </a:rPr>
+              <a:t>→</a:t>
+            </a:r>
+          </a:p>
+        </p:txBody>
+      </p:sp>
+      <p:sp>
+        <p:nvSpPr>
+          <p:cNvPr id="7" name="TextBox 6"/>
+          <p:cNvSpPr txBox="1"/>
+          <p:nvPr/>
+        </p:nvSpPr>
+        <p:spPr>
+          <a:xfrm>
+            <a:off x="868680" y="3794760"/>
+            <a:ext cx="10469880" cy="914400"/>
+          </a:xfrm>
+          <a:prstGeom prst="rect">
+            <a:avLst/>
+          </a:prstGeom>
+          <a:noFill/>
+        </p:spPr>
+        <p:txBody>
+          <a:bodyPr wrap="square" lIns="0" rIns="0" tIns="0" bIns="0">
+            <a:noAutofit/>
+          </a:bodyPr>
+          <a:lstStyle/>
+          <a:p>
+            <a:pPr algn="l">
+              <a:lnSpc>
+                <a:spcPct val="112000"/>
+              </a:lnSpc>
+              <a:spcAft>
+                <a:spcPts val="0"/>
+              </a:spcAft>
+              <a:buNone/>
+            </a:pPr>
+            <a:r>
+              <a:rPr sz="2800" b="0" lang="ja-JP">
+                <a:solidFill>
+                  <a:srgbClr val="111111"/>
+                </a:solidFill>
+                <a:latin typeface="游ゴシック"/>
+                <a:ea typeface="游ゴシック"/>
+              </a:rPr>
+              <a:t>同じ値が2回続いても、</a:t>
+            </a:r>
+            <a:br/>
+            <a:r>
+              <a:rPr sz="2800" b="0" lang="ja-JP">
+                <a:solidFill>
+                  <a:srgbClr val="111111"/>
+                </a:solidFill>
+                <a:latin typeface="游ゴシック"/>
+                <a:ea typeface="游ゴシック"/>
+              </a:rPr>
+              <a:t>まだ投球前の表示が残っている可能性がある。</a:t>
+            </a:r>
+          </a:p>
+        </p:txBody>
+      </p:sp>
+      <p:sp>
+        <p:nvSpPr>
+          <p:cNvPr id="8" name="TextBox 7"/>
+          <p:cNvSpPr txBox="1"/>
+          <p:nvPr/>
+        </p:nvSpPr>
+        <p:spPr>
+          <a:xfrm>
+            <a:off x="868680" y="5330952"/>
+            <a:ext cx="10469880" cy="1005840"/>
+          </a:xfrm>
+          <a:prstGeom prst="rect">
+            <a:avLst/>
+          </a:prstGeom>
+          <a:noFill/>
+        </p:spPr>
+        <p:txBody>
+          <a:bodyPr wrap="square" lIns="0" rIns="0" tIns="0" bIns="0">
+            <a:noAutofit/>
+          </a:bodyPr>
+          <a:lstStyle/>
+          <a:p>
+            <a:pPr algn="l">
+              <a:lnSpc>
+                <a:spcPct val="112000"/>
+              </a:lnSpc>
+              <a:spcAft>
+                <a:spcPts val="0"/>
+              </a:spcAft>
+              <a:buNone/>
+            </a:pPr>
+            <a:r>
+              <a:rPr sz="2700" b="0" lang="ja-JP">
+                <a:solidFill>
+                  <a:srgbClr val="B02121"/>
+                </a:solidFill>
+                <a:latin typeface="游ゴシック"/>
+                <a:ea typeface="游ゴシック"/>
+              </a:rPr>
+              <a:t>必要なのは、「同じ値が続いたか」に加え、</a:t>
+            </a:r>
+            <a:br/>
+            <a:r>
+              <a:rPr sz="2700" b="0" lang="ja-JP">
+                <a:solidFill>
+                  <a:srgbClr val="B02121"/>
+                </a:solidFill>
+                <a:latin typeface="游ゴシック"/>
+                <a:ea typeface="游ゴシック"/>
+              </a:rPr>
+              <a:t>「今回の投球後の表示として使ってよいか」の確認。</a:t>
+            </a:r>
+          </a:p>
+        </p:txBody>
+      </p:sp>
+    </p:spTree>
+  </p:cSld>
+  <p:clrMapOvr>
+    <a:masterClrMapping/>
+  </p:clrMapOvr>
+</p:sld>
+</file>
+
+<file path=ppt/slides/slide6.xml><?xml version="1.0" encoding="utf-8"?>
+<p:sld xmlns:a="http://schemas.openxmlformats.org/drawingml/2006/main" xmlns:p="http://schemas.openxmlformats.org/presentationml/2006/main" xmlns:r="http://schemas.openxmlformats.org/officeDocument/2006/relationships">
+  <p:cSld>
+    <p:spTree>
+      <p:nvGrpSpPr>
+        <p:cNvPr id="1" name=""/>
+        <p:cNvGrpSpPr/>
+        <p:nvPr/>
+      </p:nvGrpSpPr>
+      <p:grpSpPr/>
+      <p:sp>
+        <p:nvSpPr>
+          <p:cNvPr id="2" name="Title 1"/>
+          <p:cNvSpPr>
+            <a:spLocks noGrp="1"/>
+          </p:cNvSpPr>
+          <p:nvPr>
+            <p:ph type="title"/>
+          </p:nvPr>
+        </p:nvSpPr>
+        <p:spPr>
+          <a:xfrm>
+            <a:off x="838504" y="364845"/>
+            <a:ext cx="10515600" cy="1325880"/>
+          </a:xfrm>
+        </p:spPr>
+        <p:txBody>
+          <a:bodyPr wrap="square" lIns="0" rIns="0" tIns="0" bIns="0">
+            <a:noAutofit/>
+          </a:bodyPr>
+          <a:lstStyle/>
+          <a:p>
+            <a:pPr algn="l">
+              <a:lnSpc>
+                <a:spcPct val="112000"/>
+              </a:lnSpc>
+              <a:spcAft>
+                <a:spcPts val="0"/>
+              </a:spcAft>
+              <a:buNone/>
+            </a:pPr>
+            <a:r>
+              <a:rPr sz="4400" b="0" lang="ja-JP">
+                <a:solidFill>
+                  <a:srgbClr val="111111"/>
+                </a:solidFill>
+                <a:latin typeface="游ゴシック Light"/>
+                <a:ea typeface="游ゴシック Light"/>
+              </a:rPr>
+              <a:t>表示の欠けた場面は結果を保留する</a:t>
+            </a:r>
+          </a:p>
+        </p:txBody>
+      </p:sp>
+      <p:sp>
+        <p:nvSpPr>
+          <p:cNvPr id="3" name="TextBox 2"/>
+          <p:cNvSpPr txBox="1"/>
+          <p:nvPr/>
+        </p:nvSpPr>
+        <p:spPr>
+          <a:xfrm>
+            <a:off x="10881360" y="6510528"/>
+            <a:ext cx="457200" cy="201168"/>
+          </a:xfrm>
+          <a:prstGeom prst="rect">
+            <a:avLst/>
+          </a:prstGeom>
+          <a:noFill/>
+        </p:spPr>
+        <p:txBody>
+          <a:bodyPr wrap="square" lIns="0" rIns="0" tIns="0" bIns="0">
+            <a:noAutofit/>
+          </a:bodyPr>
+          <a:lstStyle/>
+          <a:p>
+            <a:pPr algn="r">
+              <a:lnSpc>
+                <a:spcPct val="112000"/>
+              </a:lnSpc>
+              <a:spcAft>
+                <a:spcPts val="0"/>
+              </a:spcAft>
+              <a:buNone/>
+            </a:pPr>
+            <a:r>
+              <a:rPr sz="1200" b="0" lang="ja-JP">
+                <a:solidFill>
+                  <a:srgbClr val="555555"/>
+                </a:solidFill>
+                <a:latin typeface="游ゴシック"/>
+                <a:ea typeface="游ゴシック"/>
+              </a:rPr>
+              <a:t>6</a:t>
+            </a:r>
+          </a:p>
+        </p:txBody>
+      </p:sp>
+      <p:sp>
+        <p:nvSpPr>
+          <p:cNvPr id="4" name="TextBox 3"/>
+          <p:cNvSpPr txBox="1"/>
+          <p:nvPr/>
+        </p:nvSpPr>
+        <p:spPr>
+          <a:xfrm>
+            <a:off x="838504" y="1819656"/>
+            <a:ext cx="10515600" cy="457200"/>
+          </a:xfrm>
+          <a:prstGeom prst="rect">
+            <a:avLst/>
+          </a:prstGeom>
+          <a:noFill/>
+        </p:spPr>
+        <p:txBody>
+          <a:bodyPr wrap="square" lIns="0" rIns="0" tIns="0" bIns="0">
+            <a:noAutofit/>
+          </a:bodyPr>
+          <a:lstStyle/>
+          <a:p>
+            <a:pPr algn="l">
+              <a:lnSpc>
+                <a:spcPct val="112000"/>
+              </a:lnSpc>
+              <a:spcAft>
+                <a:spcPts val="1000"/>
+              </a:spcAft>
+              <a:buNone/>
+            </a:pPr>
+            <a:r>
+              <a:rPr sz="2600" b="0" lang="ja-JP">
+                <a:solidFill>
+                  <a:srgbClr val="111111"/>
+                </a:solidFill>
+                <a:latin typeface="游ゴシック"/>
+                <a:ea typeface="游ゴシック"/>
+              </a:rPr>
+              <a:t>投球付近に表示があっても、その後に取得できない場面がある。</a:t>
+            </a:r>
+          </a:p>
+        </p:txBody>
+      </p:sp>
+      <p:sp>
+        <p:nvSpPr>
+          <p:cNvPr id="5" name="TextBox 4"/>
+          <p:cNvSpPr txBox="1"/>
+          <p:nvPr/>
+        </p:nvSpPr>
+        <p:spPr>
+          <a:xfrm>
+            <a:off x="838504" y="2468880"/>
+            <a:ext cx="4983480" cy="365760"/>
+          </a:xfrm>
+          <a:prstGeom prst="rect">
+            <a:avLst/>
+          </a:prstGeom>
+          <a:noFill/>
+        </p:spPr>
+        <p:txBody>
+          <a:bodyPr wrap="square" lIns="0" rIns="0" tIns="0" bIns="0">
+            <a:noAutofit/>
+          </a:bodyPr>
+          <a:lstStyle/>
+          <a:p>
+            <a:pPr algn="l">
+              <a:lnSpc>
+                <a:spcPct val="112000"/>
+              </a:lnSpc>
+              <a:spcAft>
+                <a:spcPts val="1000"/>
+              </a:spcAft>
+              <a:buNone/>
+            </a:pPr>
+            <a:r>
+              <a:rPr sz="2300" b="0" lang="ja-JP">
+                <a:solidFill>
+                  <a:srgbClr val="111111"/>
+                </a:solidFill>
+                <a:latin typeface="游ゴシック"/>
+                <a:ea typeface="游ゴシック"/>
+              </a:rPr>
+              <a:t>367.0秒：カウント・走者を取得</a:t>
+            </a:r>
+          </a:p>
+        </p:txBody>
+      </p:sp>
+      <p:sp>
+        <p:nvSpPr>
+          <p:cNvPr id="6" name="TextBox 5"/>
+          <p:cNvSpPr txBox="1"/>
+          <p:nvPr/>
+        </p:nvSpPr>
+        <p:spPr>
+          <a:xfrm>
+            <a:off x="6370624" y="2468880"/>
+            <a:ext cx="4983480" cy="365760"/>
+          </a:xfrm>
+          <a:prstGeom prst="rect">
+            <a:avLst/>
+          </a:prstGeom>
+          <a:noFill/>
+        </p:spPr>
+        <p:txBody>
+          <a:bodyPr wrap="square" lIns="0" rIns="0" tIns="0" bIns="0">
+            <a:noAutofit/>
+          </a:bodyPr>
+          <a:lstStyle/>
+          <a:p>
+            <a:pPr algn="l">
+              <a:lnSpc>
+                <a:spcPct val="112000"/>
+              </a:lnSpc>
+              <a:spcAft>
+                <a:spcPts val="1000"/>
+              </a:spcAft>
+              <a:buNone/>
+            </a:pPr>
+            <a:r>
+              <a:rPr sz="2300" b="0" lang="ja-JP">
+                <a:solidFill>
+                  <a:srgbClr val="111111"/>
+                </a:solidFill>
+                <a:latin typeface="游ゴシック"/>
+                <a:ea typeface="游ゴシック"/>
+              </a:rPr>
+              <a:t>370.0秒：スコアボードなし</a:t>
+            </a:r>
+          </a:p>
+        </p:txBody>
+      </p:sp>
+      <p:pic>
+        <p:nvPicPr>
+          <p:cNvPr id="7" name="Picture 6" descr="pitch_with_board"/>
+          <p:cNvPicPr>
+            <a:picLocks noChangeAspect="1"/>
+          </p:cNvPicPr>
+          <p:nvPr/>
+        </p:nvPicPr>
+        <p:blipFill>
+          <a:blip r:embed="rId2"/>
+          <a:stretch>
+            <a:fillRect/>
+          </a:stretch>
+        </p:blipFill>
+        <p:spPr>
+          <a:xfrm>
+            <a:off x="838504" y="2962656"/>
+            <a:ext cx="4983480" cy="2803208"/>
+          </a:xfrm>
+          <a:prstGeom prst="rect">
+            <a:avLst/>
+          </a:prstGeom>
+        </p:spPr>
+      </p:pic>
+      <p:pic>
+        <p:nvPicPr>
+          <p:cNvPr id="8" name="Picture 7" descr="after_without_board"/>
+          <p:cNvPicPr>
+            <a:picLocks noChangeAspect="1"/>
+          </p:cNvPicPr>
+          <p:nvPr/>
+        </p:nvPicPr>
+        <p:blipFill>
+          <a:blip r:embed="rId3"/>
+          <a:stretch>
+            <a:fillRect/>
+          </a:stretch>
+        </p:blipFill>
+        <p:spPr>
+          <a:xfrm>
+            <a:off x="6370624" y="2962656"/>
+            <a:ext cx="4983480" cy="2803208"/>
+          </a:xfrm>
+          <a:prstGeom prst="rect">
+            <a:avLst/>
+          </a:prstGeom>
+        </p:spPr>
+      </p:pic>
+      <p:sp>
+        <p:nvSpPr>
+          <p:cNvPr id="9" name="TextBox 8"/>
+          <p:cNvSpPr txBox="1"/>
+          <p:nvPr/>
+        </p:nvSpPr>
+        <p:spPr>
+          <a:xfrm>
+            <a:off x="838504" y="5980176"/>
+            <a:ext cx="10515600" cy="502920"/>
+          </a:xfrm>
+          <a:prstGeom prst="rect">
+            <a:avLst/>
+          </a:prstGeom>
+          <a:noFill/>
+        </p:spPr>
+        <p:txBody>
+          <a:bodyPr wrap="square" lIns="0" rIns="0" tIns="0" bIns="0">
+            <a:noAutofit/>
+          </a:bodyPr>
+          <a:lstStyle/>
+          <a:p>
+            <a:pPr algn="l">
+              <a:lnSpc>
+                <a:spcPct val="112000"/>
+              </a:lnSpc>
+              <a:spcAft>
+                <a:spcPts val="1000"/>
+              </a:spcAft>
+              <a:buNone/>
+            </a:pPr>
+            <a:r>
+              <a:rPr sz="2500" b="0" lang="ja-JP">
+                <a:solidFill>
+                  <a:srgbClr val="B02121"/>
+                </a:solidFill>
+                <a:latin typeface="游ゴシック"/>
+                <a:ea typeface="游ゴシック"/>
+              </a:rPr>
+              <a:t>前後を比べられない場面は、投球結果を決めずに保留する。</a:t>
+            </a:r>
+          </a:p>
+        </p:txBody>
+      </p:sp>
+    </p:spTree>
+  </p:cSld>
+  <p:clrMapOvr>
+    <a:masterClrMapping/>
+  </p:clrMapOvr>
+</p:sld>
+</file>
+
 <file path=ppt/slides/slide7.xml><?xml version="1.0" encoding="utf-8"?>
 <p:sld xmlns:a="http://schemas.openxmlformats.org/drawingml/2006/main" xmlns:p="http://schemas.openxmlformats.org/presentationml/2006/main" xmlns:r="http://schemas.openxmlformats.org/officeDocument/2006/relationships">
   <p:cSld>
@@ -11089,7 +10228,7 @@
                 <a:latin typeface="游ゴシック Light"/>
                 <a:ea typeface="游ゴシック Light"/>
               </a:rPr>
-              <a:t>得点・走者の異なる状況も記録</a:t>
+              <a:t>得点した投球の特定には課題が残る</a:t>
             </a:r>
           </a:p>
         </p:txBody>
@@ -11177,7 +10316,7 @@
                 <a:latin typeface="游ゴシック"/>
                 <a:ea typeface="游ゴシック"/>
               </a:rPr>
-              <a:t>候補26：366.49–368.30秒</a:t>
+              <a:t>367.0秒：0–0</a:t>
             </a:r>
           </a:p>
         </p:txBody>
@@ -11221,7 +10360,7 @@
                 <a:latin typeface="游ゴシック"/>
                 <a:ea typeface="游ゴシック"/>
               </a:rPr>
-              <a:t>367.0秒（区間内の表示）</a:t>
+              <a:t>投球候補の区間内の表示</a:t>
             </a:r>
           </a:p>
         </p:txBody>
@@ -11344,7 +10483,7 @@
                 <a:latin typeface="游ゴシック"/>
                 <a:ea typeface="游ゴシック"/>
               </a:rPr>
-              <a:t>候補31：434.51–436.22秒</a:t>
+              <a:t>436.5秒：0–1</a:t>
             </a:r>
           </a:p>
         </p:txBody>
@@ -11388,7 +10527,7 @@
                 <a:latin typeface="游ゴシック"/>
                 <a:ea typeface="游ゴシック"/>
               </a:rPr>
-              <a:t>436.5秒（区間直後の表示）</a:t>
+              <a:t>別の投球候補の直後の表示</a:t>
             </a:r>
           </a:p>
         </p:txBody>
@@ -11511,7 +10650,7 @@
                 <a:latin typeface="游ゴシック"/>
                 <a:ea typeface="游ゴシック"/>
               </a:rPr>
-              <a:t>状況を投球付近に付与。得点に至った投球や、得点時刻は未確定。</a:t>
+              <a:t>得点変化は記録できたが、得点につながった投球はまだ特定できていない。</a:t>
             </a:r>
           </a:p>
         </p:txBody>
@@ -11573,7 +10712,7 @@
                 <a:latin typeface="游ゴシック Light"/>
                 <a:ea typeface="游ゴシック Light"/>
               </a:rPr>
-              <a:t>2ストライク後の条件を投球に適用</a:t>
+              <a:t>今回いえること</a:t>
             </a:r>
           </a:p>
         </p:txBody>
@@ -11630,8 +10769,8 @@
         </p:nvSpPr>
         <p:spPr>
           <a:xfrm>
-            <a:off x="838504" y="1810512"/>
-            <a:ext cx="10515600" cy="777240"/>
+            <a:off x="838504" y="1819656"/>
+            <a:ext cx="10515600" cy="4480560"/>
           </a:xfrm>
           <a:prstGeom prst="rect">
             <a:avLst/>
@@ -11649,930 +10788,61 @@
                 <a:spcPct val="112000"/>
               </a:lnSpc>
               <a:spcAft>
-                <a:spcPts val="0"/>
+                <a:spcPts val="2700"/>
               </a:spcAft>
               <a:buNone/>
             </a:pPr>
             <a:r>
-              <a:rPr sz="2600" b="0" lang="ja-JP">
+              <a:rPr sz="2900" b="0" lang="ja-JP">
                 <a:solidFill>
                   <a:srgbClr val="111111"/>
                 </a:solidFill>
                 <a:latin typeface="游ゴシック"/>
                 <a:ea typeface="游ゴシック"/>
               </a:rPr>
-              <a:t>9月に考えた「2ストライク後の不変」という条件を、</a:t>
-            </a:r>
-            <a:br/>
-            <a:r>
-              <a:rPr sz="2600" b="0" lang="ja-JP">
+              <a:t>• できたこと：投球と試合状況を、一緒に記録すること</a:t>
+            </a:r>
+          </a:p>
+          <a:p>
+            <a:pPr algn="l">
+              <a:lnSpc>
+                <a:spcPct val="112000"/>
+              </a:lnSpc>
+              <a:spcAft>
+                <a:spcPts val="2700"/>
+              </a:spcAft>
+              <a:buNone/>
+            </a:pPr>
+            <a:r>
+              <a:rPr sz="2900" b="0" lang="ja-JP">
                 <a:solidFill>
                   <a:srgbClr val="111111"/>
                 </a:solidFill>
                 <a:latin typeface="游ゴシック"/>
                 <a:ea typeface="游ゴシック"/>
               </a:rPr>
-              <a:t>検出した投球区間の前後に適用した。</a:t>
-            </a:r>
-          </a:p>
-        </p:txBody>
-      </p:sp>
-      <p:graphicFrame>
-        <p:nvGraphicFramePr>
-          <p:cNvPr id="5" name="Table 4"/>
-          <p:cNvGraphicFramePr>
-            <a:graphicFrameLocks noGrp="1"/>
-          </p:cNvGraphicFramePr>
-          <p:nvPr/>
-        </p:nvGraphicFramePr>
-        <p:xfrm>
-          <a:off x="838504" y="2834640"/>
-          <a:ext cx="10515600" cy="2002536"/>
-        </p:xfrm>
-        <a:graphic>
-          <a:graphicData uri="http://schemas.openxmlformats.org/drawingml/2006/table">
-            <a:tbl>
-              <a:tblPr firstRow="1" bandRow="1">
-                <a:tableStyleId>{5C22544A-7EE6-4342-B048-85BDC9FD1C3A}</a:tableStyleId>
-              </a:tblPr>
-              <a:tblGrid>
-                <a:gridCol w="1188720"/>
-                <a:gridCol w="3108960"/>
-                <a:gridCol w="2286000"/>
-                <a:gridCol w="2286000"/>
-                <a:gridCol w="1645920"/>
-              </a:tblGrid>
-              <a:tr h="667512">
-                <a:tc>
-                  <a:txBody>
-                    <a:bodyPr wrap="square" lIns="0" rIns="0" tIns="0" bIns="0">
-                      <a:noAutofit/>
-                    </a:bodyPr>
-                    <a:lstStyle/>
-                    <a:p>
-                      <a:pPr algn="l">
-                        <a:lnSpc>
-                          <a:spcPct val="112000"/>
-                        </a:lnSpc>
-                        <a:spcAft>
-                          <a:spcPts val="0"/>
-                        </a:spcAft>
-                        <a:buNone/>
-                      </a:pPr>
-                      <a:r>
-                        <a:rPr sz="2300" b="1" lang="ja-JP">
-                          <a:solidFill>
-                            <a:srgbClr val="111111"/>
-                          </a:solidFill>
-                          <a:latin typeface="游ゴシック"/>
-                          <a:ea typeface="游ゴシック"/>
-                        </a:rPr>
-                        <a:t>候補群</a:t>
-                      </a:r>
-                    </a:p>
-                  </a:txBody>
-                  <a:tcPr marL="118872" marR="91440" marT="64008" marB="36576" anchor="ctr">
-                    <a:solidFill>
-                      <a:srgbClr val="EEEEEE"/>
-                    </a:solidFill>
-                    <a:lnL w="7000">
-                      <a:solidFill>
-                        <a:srgbClr val="BFBFBF"/>
-                      </a:solidFill>
-                    </a:lnL>
-                    <a:lnR w="7000">
-                      <a:solidFill>
-                        <a:srgbClr val="BFBFBF"/>
-                      </a:solidFill>
-                    </a:lnR>
-                    <a:lnT w="7000">
-                      <a:solidFill>
-                        <a:srgbClr val="BFBFBF"/>
-                      </a:solidFill>
-                    </a:lnT>
-                    <a:lnB w="7000">
-                      <a:solidFill>
-                        <a:srgbClr val="BFBFBF"/>
-                      </a:solidFill>
-                    </a:lnB>
-                  </a:tcPr>
-                </a:tc>
-                <a:tc>
-                  <a:txBody>
-                    <a:bodyPr wrap="square" lIns="0" rIns="0" tIns="0" bIns="0">
-                      <a:noAutofit/>
-                    </a:bodyPr>
-                    <a:lstStyle/>
-                    <a:p>
-                      <a:pPr algn="l">
-                        <a:lnSpc>
-                          <a:spcPct val="112000"/>
-                        </a:lnSpc>
-                        <a:spcAft>
-                          <a:spcPts val="0"/>
-                        </a:spcAft>
-                        <a:buNone/>
-                      </a:pPr>
-                      <a:r>
-                        <a:rPr sz="2300" b="1" lang="ja-JP">
-                          <a:solidFill>
-                            <a:srgbClr val="111111"/>
-                          </a:solidFill>
-                          <a:latin typeface="游ゴシック"/>
-                          <a:ea typeface="游ゴシック"/>
-                        </a:rPr>
-                        <a:t>投球候補［秒］</a:t>
-                      </a:r>
-                    </a:p>
-                  </a:txBody>
-                  <a:tcPr marL="118872" marR="91440" marT="64008" marB="36576" anchor="ctr">
-                    <a:solidFill>
-                      <a:srgbClr val="EEEEEE"/>
-                    </a:solidFill>
-                    <a:lnL w="7000">
-                      <a:solidFill>
-                        <a:srgbClr val="BFBFBF"/>
-                      </a:solidFill>
-                    </a:lnL>
-                    <a:lnR w="7000">
-                      <a:solidFill>
-                        <a:srgbClr val="BFBFBF"/>
-                      </a:solidFill>
-                    </a:lnR>
-                    <a:lnT w="7000">
-                      <a:solidFill>
-                        <a:srgbClr val="BFBFBF"/>
-                      </a:solidFill>
-                    </a:lnT>
-                    <a:lnB w="7000">
-                      <a:solidFill>
-                        <a:srgbClr val="BFBFBF"/>
-                      </a:solidFill>
-                    </a:lnB>
-                  </a:tcPr>
-                </a:tc>
-                <a:tc>
-                  <a:txBody>
-                    <a:bodyPr wrap="square" lIns="0" rIns="0" tIns="0" bIns="0">
-                      <a:noAutofit/>
-                    </a:bodyPr>
-                    <a:lstStyle/>
-                    <a:p>
-                      <a:pPr algn="l">
-                        <a:lnSpc>
-                          <a:spcPct val="112000"/>
-                        </a:lnSpc>
-                        <a:spcAft>
-                          <a:spcPts val="0"/>
-                        </a:spcAft>
-                        <a:buNone/>
-                      </a:pPr>
-                      <a:r>
-                        <a:rPr sz="2300" b="1" lang="ja-JP">
-                          <a:solidFill>
-                            <a:srgbClr val="111111"/>
-                          </a:solidFill>
-                          <a:latin typeface="游ゴシック"/>
-                          <a:ea typeface="游ゴシック"/>
-                        </a:rPr>
-                        <a:t>前 B/S/O</a:t>
-                      </a:r>
-                    </a:p>
-                  </a:txBody>
-                  <a:tcPr marL="118872" marR="91440" marT="64008" marB="36576" anchor="ctr">
-                    <a:solidFill>
-                      <a:srgbClr val="EEEEEE"/>
-                    </a:solidFill>
-                    <a:lnL w="7000">
-                      <a:solidFill>
-                        <a:srgbClr val="BFBFBF"/>
-                      </a:solidFill>
-                    </a:lnL>
-                    <a:lnR w="7000">
-                      <a:solidFill>
-                        <a:srgbClr val="BFBFBF"/>
-                      </a:solidFill>
-                    </a:lnR>
-                    <a:lnT w="7000">
-                      <a:solidFill>
-                        <a:srgbClr val="BFBFBF"/>
-                      </a:solidFill>
-                    </a:lnT>
-                    <a:lnB w="7000">
-                      <a:solidFill>
-                        <a:srgbClr val="BFBFBF"/>
-                      </a:solidFill>
-                    </a:lnB>
-                  </a:tcPr>
-                </a:tc>
-                <a:tc>
-                  <a:txBody>
-                    <a:bodyPr wrap="square" lIns="0" rIns="0" tIns="0" bIns="0">
-                      <a:noAutofit/>
-                    </a:bodyPr>
-                    <a:lstStyle/>
-                    <a:p>
-                      <a:pPr algn="l">
-                        <a:lnSpc>
-                          <a:spcPct val="112000"/>
-                        </a:lnSpc>
-                        <a:spcAft>
-                          <a:spcPts val="0"/>
-                        </a:spcAft>
-                        <a:buNone/>
-                      </a:pPr>
-                      <a:r>
-                        <a:rPr sz="2300" b="1" lang="ja-JP">
-                          <a:solidFill>
-                            <a:srgbClr val="111111"/>
-                          </a:solidFill>
-                          <a:latin typeface="游ゴシック"/>
-                          <a:ea typeface="游ゴシック"/>
-                        </a:rPr>
-                        <a:t>直後 B/S/O</a:t>
-                      </a:r>
-                    </a:p>
-                  </a:txBody>
-                  <a:tcPr marL="118872" marR="91440" marT="64008" marB="36576" anchor="ctr">
-                    <a:solidFill>
-                      <a:srgbClr val="EEEEEE"/>
-                    </a:solidFill>
-                    <a:lnL w="7000">
-                      <a:solidFill>
-                        <a:srgbClr val="BFBFBF"/>
-                      </a:solidFill>
-                    </a:lnL>
-                    <a:lnR w="7000">
-                      <a:solidFill>
-                        <a:srgbClr val="BFBFBF"/>
-                      </a:solidFill>
-                    </a:lnR>
-                    <a:lnT w="7000">
-                      <a:solidFill>
-                        <a:srgbClr val="BFBFBF"/>
-                      </a:solidFill>
-                    </a:lnT>
-                    <a:lnB w="7000">
-                      <a:solidFill>
-                        <a:srgbClr val="BFBFBF"/>
-                      </a:solidFill>
-                    </a:lnB>
-                  </a:tcPr>
-                </a:tc>
-                <a:tc>
-                  <a:txBody>
-                    <a:bodyPr wrap="square" lIns="0" rIns="0" tIns="0" bIns="0">
-                      <a:noAutofit/>
-                    </a:bodyPr>
-                    <a:lstStyle/>
-                    <a:p>
-                      <a:pPr algn="l">
-                        <a:lnSpc>
-                          <a:spcPct val="112000"/>
-                        </a:lnSpc>
-                        <a:spcAft>
-                          <a:spcPts val="0"/>
-                        </a:spcAft>
-                        <a:buNone/>
-                      </a:pPr>
-                      <a:r>
-                        <a:rPr sz="2300" b="1" lang="ja-JP">
-                          <a:solidFill>
-                            <a:srgbClr val="111111"/>
-                          </a:solidFill>
-                          <a:latin typeface="游ゴシック"/>
-                          <a:ea typeface="游ゴシック"/>
-                        </a:rPr>
-                        <a:t>スコア</a:t>
-                      </a:r>
-                    </a:p>
-                  </a:txBody>
-                  <a:tcPr marL="118872" marR="91440" marT="64008" marB="36576" anchor="ctr">
-                    <a:solidFill>
-                      <a:srgbClr val="EEEEEE"/>
-                    </a:solidFill>
-                    <a:lnL w="7000">
-                      <a:solidFill>
-                        <a:srgbClr val="BFBFBF"/>
-                      </a:solidFill>
-                    </a:lnL>
-                    <a:lnR w="7000">
-                      <a:solidFill>
-                        <a:srgbClr val="BFBFBF"/>
-                      </a:solidFill>
-                    </a:lnR>
-                    <a:lnT w="7000">
-                      <a:solidFill>
-                        <a:srgbClr val="BFBFBF"/>
-                      </a:solidFill>
-                    </a:lnT>
-                    <a:lnB w="7000">
-                      <a:solidFill>
-                        <a:srgbClr val="BFBFBF"/>
-                      </a:solidFill>
-                    </a:lnB>
-                  </a:tcPr>
-                </a:tc>
-              </a:tr>
-              <a:tr h="667512">
-                <a:tc>
-                  <a:txBody>
-                    <a:bodyPr wrap="square" lIns="0" rIns="0" tIns="0" bIns="0">
-                      <a:noAutofit/>
-                    </a:bodyPr>
-                    <a:lstStyle/>
-                    <a:p>
-                      <a:pPr algn="l">
-                        <a:lnSpc>
-                          <a:spcPct val="112000"/>
-                        </a:lnSpc>
-                        <a:spcAft>
-                          <a:spcPts val="0"/>
-                        </a:spcAft>
-                        <a:buNone/>
-                      </a:pPr>
-                      <a:r>
-                        <a:rPr sz="2300" b="0" lang="ja-JP">
-                          <a:solidFill>
-                            <a:srgbClr val="111111"/>
-                          </a:solidFill>
-                          <a:latin typeface="游ゴシック"/>
-                          <a:ea typeface="游ゴシック"/>
-                        </a:rPr>
-                        <a:t>8</a:t>
-                      </a:r>
-                    </a:p>
-                  </a:txBody>
-                  <a:tcPr marL="118872" marR="91440" marT="64008" marB="36576" anchor="ctr">
-                    <a:solidFill>
-                      <a:srgbClr val="FFFFFF"/>
-                    </a:solidFill>
-                    <a:lnL w="7000">
-                      <a:solidFill>
-                        <a:srgbClr val="BFBFBF"/>
-                      </a:solidFill>
-                    </a:lnL>
-                    <a:lnR w="7000">
-                      <a:solidFill>
-                        <a:srgbClr val="BFBFBF"/>
-                      </a:solidFill>
-                    </a:lnR>
-                    <a:lnT w="7000">
-                      <a:solidFill>
-                        <a:srgbClr val="BFBFBF"/>
-                      </a:solidFill>
-                    </a:lnT>
-                    <a:lnB w="7000">
-                      <a:solidFill>
-                        <a:srgbClr val="BFBFBF"/>
-                      </a:solidFill>
-                    </a:lnB>
-                  </a:tcPr>
-                </a:tc>
-                <a:tc>
-                  <a:txBody>
-                    <a:bodyPr wrap="square" lIns="0" rIns="0" tIns="0" bIns="0">
-                      <a:noAutofit/>
-                    </a:bodyPr>
-                    <a:lstStyle/>
-                    <a:p>
-                      <a:pPr algn="l">
-                        <a:lnSpc>
-                          <a:spcPct val="112000"/>
-                        </a:lnSpc>
-                        <a:spcAft>
-                          <a:spcPts val="0"/>
-                        </a:spcAft>
-                        <a:buNone/>
-                      </a:pPr>
-                      <a:r>
-                        <a:rPr sz="2300" b="0" lang="ja-JP">
-                          <a:solidFill>
-                            <a:srgbClr val="111111"/>
-                          </a:solidFill>
-                          <a:latin typeface="游ゴシック"/>
-                          <a:ea typeface="游ゴシック"/>
-                        </a:rPr>
-                        <a:t>113.41–115.02</a:t>
-                      </a:r>
-                    </a:p>
-                  </a:txBody>
-                  <a:tcPr marL="118872" marR="91440" marT="64008" marB="36576" anchor="ctr">
-                    <a:solidFill>
-                      <a:srgbClr val="FFFFFF"/>
-                    </a:solidFill>
-                    <a:lnL w="7000">
-                      <a:solidFill>
-                        <a:srgbClr val="BFBFBF"/>
-                      </a:solidFill>
-                    </a:lnL>
-                    <a:lnR w="7000">
-                      <a:solidFill>
-                        <a:srgbClr val="BFBFBF"/>
-                      </a:solidFill>
-                    </a:lnR>
-                    <a:lnT w="7000">
-                      <a:solidFill>
-                        <a:srgbClr val="BFBFBF"/>
-                      </a:solidFill>
-                    </a:lnT>
-                    <a:lnB w="7000">
-                      <a:solidFill>
-                        <a:srgbClr val="BFBFBF"/>
-                      </a:solidFill>
-                    </a:lnB>
-                  </a:tcPr>
-                </a:tc>
-                <a:tc>
-                  <a:txBody>
-                    <a:bodyPr wrap="square" lIns="0" rIns="0" tIns="0" bIns="0">
-                      <a:noAutofit/>
-                    </a:bodyPr>
-                    <a:lstStyle/>
-                    <a:p>
-                      <a:pPr algn="l">
-                        <a:lnSpc>
-                          <a:spcPct val="112000"/>
-                        </a:lnSpc>
-                        <a:spcAft>
-                          <a:spcPts val="0"/>
-                        </a:spcAft>
-                        <a:buNone/>
-                      </a:pPr>
-                      <a:r>
-                        <a:rPr sz="2300" b="0" lang="ja-JP">
-                          <a:solidFill>
-                            <a:srgbClr val="111111"/>
-                          </a:solidFill>
-                          <a:latin typeface="游ゴシック"/>
-                          <a:ea typeface="游ゴシック"/>
-                        </a:rPr>
-                        <a:t>0 / 2 / 1</a:t>
-                      </a:r>
-                    </a:p>
-                  </a:txBody>
-                  <a:tcPr marL="118872" marR="91440" marT="64008" marB="36576" anchor="ctr">
-                    <a:solidFill>
-                      <a:srgbClr val="FFFFFF"/>
-                    </a:solidFill>
-                    <a:lnL w="7000">
-                      <a:solidFill>
-                        <a:srgbClr val="BFBFBF"/>
-                      </a:solidFill>
-                    </a:lnL>
-                    <a:lnR w="7000">
-                      <a:solidFill>
-                        <a:srgbClr val="BFBFBF"/>
-                      </a:solidFill>
-                    </a:lnR>
-                    <a:lnT w="7000">
-                      <a:solidFill>
-                        <a:srgbClr val="BFBFBF"/>
-                      </a:solidFill>
-                    </a:lnT>
-                    <a:lnB w="7000">
-                      <a:solidFill>
-                        <a:srgbClr val="BFBFBF"/>
-                      </a:solidFill>
-                    </a:lnB>
-                  </a:tcPr>
-                </a:tc>
-                <a:tc>
-                  <a:txBody>
-                    <a:bodyPr wrap="square" lIns="0" rIns="0" tIns="0" bIns="0">
-                      <a:noAutofit/>
-                    </a:bodyPr>
-                    <a:lstStyle/>
-                    <a:p>
-                      <a:pPr algn="l">
-                        <a:lnSpc>
-                          <a:spcPct val="112000"/>
-                        </a:lnSpc>
-                        <a:spcAft>
-                          <a:spcPts val="0"/>
-                        </a:spcAft>
-                        <a:buNone/>
-                      </a:pPr>
-                      <a:r>
-                        <a:rPr sz="2300" b="0" lang="ja-JP">
-                          <a:solidFill>
-                            <a:srgbClr val="111111"/>
-                          </a:solidFill>
-                          <a:latin typeface="游ゴシック"/>
-                          <a:ea typeface="游ゴシック"/>
-                        </a:rPr>
-                        <a:t>0 / 2 / 1</a:t>
-                      </a:r>
-                    </a:p>
-                  </a:txBody>
-                  <a:tcPr marL="118872" marR="91440" marT="64008" marB="36576" anchor="ctr">
-                    <a:solidFill>
-                      <a:srgbClr val="FFFFFF"/>
-                    </a:solidFill>
-                    <a:lnL w="7000">
-                      <a:solidFill>
-                        <a:srgbClr val="BFBFBF"/>
-                      </a:solidFill>
-                    </a:lnL>
-                    <a:lnR w="7000">
-                      <a:solidFill>
-                        <a:srgbClr val="BFBFBF"/>
-                      </a:solidFill>
-                    </a:lnR>
-                    <a:lnT w="7000">
-                      <a:solidFill>
-                        <a:srgbClr val="BFBFBF"/>
-                      </a:solidFill>
-                    </a:lnT>
-                    <a:lnB w="7000">
-                      <a:solidFill>
-                        <a:srgbClr val="BFBFBF"/>
-                      </a:solidFill>
-                    </a:lnB>
-                  </a:tcPr>
-                </a:tc>
-                <a:tc>
-                  <a:txBody>
-                    <a:bodyPr wrap="square" lIns="0" rIns="0" tIns="0" bIns="0">
-                      <a:noAutofit/>
-                    </a:bodyPr>
-                    <a:lstStyle/>
-                    <a:p>
-                      <a:pPr algn="l">
-                        <a:lnSpc>
-                          <a:spcPct val="112000"/>
-                        </a:lnSpc>
-                        <a:spcAft>
-                          <a:spcPts val="0"/>
-                        </a:spcAft>
-                        <a:buNone/>
-                      </a:pPr>
-                      <a:r>
-                        <a:rPr sz="2300" b="0" lang="ja-JP">
-                          <a:solidFill>
-                            <a:srgbClr val="111111"/>
-                          </a:solidFill>
-                          <a:latin typeface="游ゴシック"/>
-                          <a:ea typeface="游ゴシック"/>
-                        </a:rPr>
-                        <a:t>0.966</a:t>
-                      </a:r>
-                    </a:p>
-                  </a:txBody>
-                  <a:tcPr marL="118872" marR="91440" marT="64008" marB="36576" anchor="ctr">
-                    <a:solidFill>
-                      <a:srgbClr val="FFFFFF"/>
-                    </a:solidFill>
-                    <a:lnL w="7000">
-                      <a:solidFill>
-                        <a:srgbClr val="BFBFBF"/>
-                      </a:solidFill>
-                    </a:lnL>
-                    <a:lnR w="7000">
-                      <a:solidFill>
-                        <a:srgbClr val="BFBFBF"/>
-                      </a:solidFill>
-                    </a:lnR>
-                    <a:lnT w="7000">
-                      <a:solidFill>
-                        <a:srgbClr val="BFBFBF"/>
-                      </a:solidFill>
-                    </a:lnT>
-                    <a:lnB w="7000">
-                      <a:solidFill>
-                        <a:srgbClr val="BFBFBF"/>
-                      </a:solidFill>
-                    </a:lnB>
-                  </a:tcPr>
-                </a:tc>
-              </a:tr>
-              <a:tr h="667512">
-                <a:tc>
-                  <a:txBody>
-                    <a:bodyPr wrap="square" lIns="0" rIns="0" tIns="0" bIns="0">
-                      <a:noAutofit/>
-                    </a:bodyPr>
-                    <a:lstStyle/>
-                    <a:p>
-                      <a:pPr algn="l">
-                        <a:lnSpc>
-                          <a:spcPct val="112000"/>
-                        </a:lnSpc>
-                        <a:spcAft>
-                          <a:spcPts val="0"/>
-                        </a:spcAft>
-                        <a:buNone/>
-                      </a:pPr>
-                      <a:r>
-                        <a:rPr sz="2300" b="0" lang="ja-JP">
-                          <a:solidFill>
-                            <a:srgbClr val="111111"/>
-                          </a:solidFill>
-                          <a:latin typeface="游ゴシック"/>
-                          <a:ea typeface="游ゴシック"/>
-                        </a:rPr>
-                        <a:t>11</a:t>
-                      </a:r>
-                    </a:p>
-                  </a:txBody>
-                  <a:tcPr marL="118872" marR="91440" marT="64008" marB="36576" anchor="ctr">
-                    <a:solidFill>
-                      <a:srgbClr val="FFF4D8"/>
-                    </a:solidFill>
-                    <a:lnL w="7000">
-                      <a:solidFill>
-                        <a:srgbClr val="BFBFBF"/>
-                      </a:solidFill>
-                    </a:lnL>
-                    <a:lnR w="7000">
-                      <a:solidFill>
-                        <a:srgbClr val="BFBFBF"/>
-                      </a:solidFill>
-                    </a:lnR>
-                    <a:lnT w="7000">
-                      <a:solidFill>
-                        <a:srgbClr val="BFBFBF"/>
-                      </a:solidFill>
-                    </a:lnT>
-                    <a:lnB w="7000">
-                      <a:solidFill>
-                        <a:srgbClr val="BFBFBF"/>
-                      </a:solidFill>
-                    </a:lnB>
-                  </a:tcPr>
-                </a:tc>
-                <a:tc>
-                  <a:txBody>
-                    <a:bodyPr wrap="square" lIns="0" rIns="0" tIns="0" bIns="0">
-                      <a:noAutofit/>
-                    </a:bodyPr>
-                    <a:lstStyle/>
-                    <a:p>
-                      <a:pPr algn="l">
-                        <a:lnSpc>
-                          <a:spcPct val="112000"/>
-                        </a:lnSpc>
-                        <a:spcAft>
-                          <a:spcPts val="0"/>
-                        </a:spcAft>
-                        <a:buNone/>
-                      </a:pPr>
-                      <a:r>
-                        <a:rPr sz="2300" b="0" lang="ja-JP">
-                          <a:solidFill>
-                            <a:srgbClr val="111111"/>
-                          </a:solidFill>
-                          <a:latin typeface="游ゴシック"/>
-                          <a:ea typeface="游ゴシック"/>
-                        </a:rPr>
-                        <a:t>155.31–157.27</a:t>
-                      </a:r>
-                    </a:p>
-                  </a:txBody>
-                  <a:tcPr marL="118872" marR="91440" marT="64008" marB="36576" anchor="ctr">
-                    <a:solidFill>
-                      <a:srgbClr val="FFF4D8"/>
-                    </a:solidFill>
-                    <a:lnL w="7000">
-                      <a:solidFill>
-                        <a:srgbClr val="BFBFBF"/>
-                      </a:solidFill>
-                    </a:lnL>
-                    <a:lnR w="7000">
-                      <a:solidFill>
-                        <a:srgbClr val="BFBFBF"/>
-                      </a:solidFill>
-                    </a:lnR>
-                    <a:lnT w="7000">
-                      <a:solidFill>
-                        <a:srgbClr val="BFBFBF"/>
-                      </a:solidFill>
-                    </a:lnT>
-                    <a:lnB w="7000">
-                      <a:solidFill>
-                        <a:srgbClr val="BFBFBF"/>
-                      </a:solidFill>
-                    </a:lnB>
-                  </a:tcPr>
-                </a:tc>
-                <a:tc>
-                  <a:txBody>
-                    <a:bodyPr wrap="square" lIns="0" rIns="0" tIns="0" bIns="0">
-                      <a:noAutofit/>
-                    </a:bodyPr>
-                    <a:lstStyle/>
-                    <a:p>
-                      <a:pPr algn="l">
-                        <a:lnSpc>
-                          <a:spcPct val="112000"/>
-                        </a:lnSpc>
-                        <a:spcAft>
-                          <a:spcPts val="0"/>
-                        </a:spcAft>
-                        <a:buNone/>
-                      </a:pPr>
-                      <a:r>
-                        <a:rPr sz="2300" b="0" lang="ja-JP">
-                          <a:solidFill>
-                            <a:srgbClr val="111111"/>
-                          </a:solidFill>
-                          <a:latin typeface="游ゴシック"/>
-                          <a:ea typeface="游ゴシック"/>
-                        </a:rPr>
-                        <a:t>0 / 2 / 1</a:t>
-                      </a:r>
-                    </a:p>
-                  </a:txBody>
-                  <a:tcPr marL="118872" marR="91440" marT="64008" marB="36576" anchor="ctr">
-                    <a:solidFill>
-                      <a:srgbClr val="FFF4D8"/>
-                    </a:solidFill>
-                    <a:lnL w="7000">
-                      <a:solidFill>
-                        <a:srgbClr val="BFBFBF"/>
-                      </a:solidFill>
-                    </a:lnL>
-                    <a:lnR w="7000">
-                      <a:solidFill>
-                        <a:srgbClr val="BFBFBF"/>
-                      </a:solidFill>
-                    </a:lnR>
-                    <a:lnT w="7000">
-                      <a:solidFill>
-                        <a:srgbClr val="BFBFBF"/>
-                      </a:solidFill>
-                    </a:lnT>
-                    <a:lnB w="7000">
-                      <a:solidFill>
-                        <a:srgbClr val="BFBFBF"/>
-                      </a:solidFill>
-                    </a:lnB>
-                  </a:tcPr>
-                </a:tc>
-                <a:tc>
-                  <a:txBody>
-                    <a:bodyPr wrap="square" lIns="0" rIns="0" tIns="0" bIns="0">
-                      <a:noAutofit/>
-                    </a:bodyPr>
-                    <a:lstStyle/>
-                    <a:p>
-                      <a:pPr algn="l">
-                        <a:lnSpc>
-                          <a:spcPct val="112000"/>
-                        </a:lnSpc>
-                        <a:spcAft>
-                          <a:spcPts val="0"/>
-                        </a:spcAft>
-                        <a:buNone/>
-                      </a:pPr>
-                      <a:r>
-                        <a:rPr sz="2300" b="0" lang="ja-JP">
-                          <a:solidFill>
-                            <a:srgbClr val="111111"/>
-                          </a:solidFill>
-                          <a:latin typeface="游ゴシック"/>
-                          <a:ea typeface="游ゴシック"/>
-                        </a:rPr>
-                        <a:t>0 / 2 / 1</a:t>
-                      </a:r>
-                    </a:p>
-                  </a:txBody>
-                  <a:tcPr marL="118872" marR="91440" marT="64008" marB="36576" anchor="ctr">
-                    <a:solidFill>
-                      <a:srgbClr val="FFF4D8"/>
-                    </a:solidFill>
-                    <a:lnL w="7000">
-                      <a:solidFill>
-                        <a:srgbClr val="BFBFBF"/>
-                      </a:solidFill>
-                    </a:lnL>
-                    <a:lnR w="7000">
-                      <a:solidFill>
-                        <a:srgbClr val="BFBFBF"/>
-                      </a:solidFill>
-                    </a:lnR>
-                    <a:lnT w="7000">
-                      <a:solidFill>
-                        <a:srgbClr val="BFBFBF"/>
-                      </a:solidFill>
-                    </a:lnT>
-                    <a:lnB w="7000">
-                      <a:solidFill>
-                        <a:srgbClr val="BFBFBF"/>
-                      </a:solidFill>
-                    </a:lnB>
-                  </a:tcPr>
-                </a:tc>
-                <a:tc>
-                  <a:txBody>
-                    <a:bodyPr wrap="square" lIns="0" rIns="0" tIns="0" bIns="0">
-                      <a:noAutofit/>
-                    </a:bodyPr>
-                    <a:lstStyle/>
-                    <a:p>
-                      <a:pPr algn="l">
-                        <a:lnSpc>
-                          <a:spcPct val="112000"/>
-                        </a:lnSpc>
-                        <a:spcAft>
-                          <a:spcPts val="0"/>
-                        </a:spcAft>
-                        <a:buNone/>
-                      </a:pPr>
-                      <a:r>
-                        <a:rPr sz="2300" b="0" lang="ja-JP">
-                          <a:solidFill>
-                            <a:srgbClr val="111111"/>
-                          </a:solidFill>
-                          <a:latin typeface="游ゴシック"/>
-                          <a:ea typeface="游ゴシック"/>
-                        </a:rPr>
-                        <a:t>0.969</a:t>
-                      </a:r>
-                    </a:p>
-                  </a:txBody>
-                  <a:tcPr marL="118872" marR="91440" marT="64008" marB="36576" anchor="ctr">
-                    <a:solidFill>
-                      <a:srgbClr val="FFF4D8"/>
-                    </a:solidFill>
-                    <a:lnL w="7000">
-                      <a:solidFill>
-                        <a:srgbClr val="BFBFBF"/>
-                      </a:solidFill>
-                    </a:lnL>
-                    <a:lnR w="7000">
-                      <a:solidFill>
-                        <a:srgbClr val="BFBFBF"/>
-                      </a:solidFill>
-                    </a:lnR>
-                    <a:lnT w="7000">
-                      <a:solidFill>
-                        <a:srgbClr val="BFBFBF"/>
-                      </a:solidFill>
-                    </a:lnT>
-                    <a:lnB w="7000">
-                      <a:solidFill>
-                        <a:srgbClr val="BFBFBF"/>
-                      </a:solidFill>
-                    </a:lnB>
-                  </a:tcPr>
-                </a:tc>
-              </a:tr>
-            </a:tbl>
-          </a:graphicData>
-        </a:graphic>
-      </p:graphicFrame>
-      <p:sp>
-        <p:nvSpPr>
-          <p:cNvPr id="6" name="TextBox 5"/>
-          <p:cNvSpPr txBox="1"/>
-          <p:nvPr/>
-        </p:nvSpPr>
-        <p:spPr>
-          <a:xfrm>
-            <a:off x="838504" y="5148072"/>
-            <a:ext cx="10515600" cy="1115568"/>
-          </a:xfrm>
-          <a:prstGeom prst="rect">
-            <a:avLst/>
-          </a:prstGeom>
-          <a:noFill/>
-        </p:spPr>
-        <p:txBody>
-          <a:bodyPr wrap="square" lIns="0" rIns="0" tIns="0" bIns="0">
-            <a:noAutofit/>
-          </a:bodyPr>
-          <a:lstStyle/>
+              <a:t>• 分かったこと：結果を判断するには、表示を見る時刻が重要</a:t>
+            </a:r>
+          </a:p>
           <a:p>
             <a:pPr algn="l">
               <a:lnSpc>
                 <a:spcPct val="112000"/>
               </a:lnSpc>
               <a:spcAft>
-                <a:spcPts val="0"/>
+                <a:spcPts val="2700"/>
               </a:spcAft>
               <a:buNone/>
             </a:pPr>
             <a:r>
-              <a:rPr sz="2500" b="0" lang="ja-JP">
+              <a:rPr sz="2900" b="0" lang="ja-JP">
                 <a:solidFill>
-                  <a:srgbClr val="B02121"/>
+                  <a:srgbClr val="111111"/>
                 </a:solidFill>
                 <a:latin typeface="游ゴシック"/>
                 <a:ea typeface="游ゴシック"/>
               </a:rPr>
-              <a:t>元の自動照合では、2候補群を「カウント不変」と整理。</a:t>
-            </a:r>
-            <a:br/>
-            <a:r>
-              <a:rPr sz="2500" b="0" lang="ja-JP">
-                <a:solidFill>
-                  <a:srgbClr val="B02121"/>
-                </a:solidFill>
-                <a:latin typeface="游ゴシック"/>
-                <a:ea typeface="游ゴシック"/>
-              </a:rPr>
-              <a:t>ファウルを2件正しく判定できたという意味ではない。</a:t>
+              <a:t>• 残ったこと：ファウルなどの結果を、正しく確定すること</a:t>
             </a:r>
           </a:p>
         </p:txBody>
@@ -12634,7 +10904,7 @@
                 <a:latin typeface="游ゴシック Light"/>
                 <a:ea typeface="游ゴシック Light"/>
               </a:rPr>
-              <a:t>表示の採用時刻で照合結果が変わる</a:t>
+              <a:t>来週すること</a:t>
             </a:r>
           </a:p>
         </p:txBody>
@@ -12691,8 +10961,8 @@
         </p:nvSpPr>
         <p:spPr>
           <a:xfrm>
-            <a:off x="838504" y="1810512"/>
-            <a:ext cx="10515600" cy="411480"/>
+            <a:off x="838504" y="1819656"/>
+            <a:ext cx="10515600" cy="4526280"/>
           </a:xfrm>
           <a:prstGeom prst="rect">
             <a:avLst/>
@@ -12710,87 +10980,82 @@
                 <a:spcPct val="112000"/>
               </a:lnSpc>
               <a:spcAft>
-                <a:spcPts val="1000"/>
+                <a:spcPts val="2200"/>
               </a:spcAft>
               <a:buNone/>
             </a:pPr>
             <a:r>
-              <a:rPr sz="2600" b="0" lang="ja-JP">
+              <a:rPr sz="2800" b="0" lang="ja-JP">
                 <a:solidFill>
                   <a:srgbClr val="111111"/>
                 </a:solidFill>
                 <a:latin typeface="游ゴシック"/>
                 <a:ea typeface="游ゴシック"/>
               </a:rPr>
-              <a:t>候補11：155.31–157.27秒 ／ 後の取得値も確認</a:t>
-            </a:r>
-          </a:p>
-        </p:txBody>
-      </p:sp>
-      <p:pic>
-        <p:nvPicPr>
-          <p:cNvPr id="5" name="Picture 4" descr="lag_case11"/>
-          <p:cNvPicPr>
-            <a:picLocks noChangeAspect="1"/>
-          </p:cNvPicPr>
-          <p:nvPr/>
-        </p:nvPicPr>
-        <p:blipFill>
-          <a:blip r:embed="rId2"/>
-          <a:stretch>
-            <a:fillRect/>
-          </a:stretch>
-        </p:blipFill>
-        <p:spPr>
-          <a:xfrm>
-            <a:off x="838504" y="2386584"/>
-            <a:ext cx="10515600" cy="3724275"/>
-          </a:xfrm>
-          <a:prstGeom prst="rect">
-            <a:avLst/>
-          </a:prstGeom>
-        </p:spPr>
-      </p:pic>
-      <p:sp>
-        <p:nvSpPr>
-          <p:cNvPr id="6" name="TextBox 5"/>
-          <p:cNvSpPr txBox="1"/>
-          <p:nvPr/>
-        </p:nvSpPr>
-        <p:spPr>
-          <a:xfrm>
-            <a:off x="838504" y="6254496"/>
-            <a:ext cx="10515600" cy="292608"/>
-          </a:xfrm>
-          <a:prstGeom prst="rect">
-            <a:avLst/>
-          </a:prstGeom>
-          <a:noFill/>
-        </p:spPr>
-        <p:txBody>
-          <a:bodyPr wrap="square" lIns="0" rIns="0" tIns="0" bIns="0">
-            <a:noAutofit/>
-          </a:bodyPr>
-          <a:lstStyle/>
+              <a:t>• 実際の投球区間と結果を記録し、正解を用意する</a:t>
+            </a:r>
+          </a:p>
           <a:p>
             <a:pPr algn="l">
               <a:lnSpc>
                 <a:spcPct val="112000"/>
               </a:lnSpc>
               <a:spcAft>
-                <a:spcPts val="1000"/>
+                <a:spcPts val="2200"/>
               </a:spcAft>
               <a:buNone/>
             </a:pPr>
             <a:r>
-              <a:rPr sz="2100" b="0" lang="ja-JP">
+              <a:rPr sz="2800" b="0" lang="ja-JP">
                 <a:solidFill>
-                  <a:srgbClr val="B02121"/>
+                  <a:srgbClr val="111111"/>
                 </a:solidFill>
                 <a:latin typeface="游ゴシック"/>
                 <a:ea typeface="游ゴシック"/>
               </a:rPr>
-              <a:t>158.0秒：B0 → 161.5秒：B1　直後の表示だけでは不変となる。</a:t>
+              <a:t>• 今回の投球後の表示かどうか、確認する方法を検討する</a:t>
+            </a:r>
+          </a:p>
+          <a:p>
+            <a:pPr algn="l">
+              <a:lnSpc>
+                <a:spcPct val="112000"/>
+              </a:lnSpc>
+              <a:spcAft>
+                <a:spcPts val="2200"/>
+              </a:spcAft>
+              <a:buNone/>
+            </a:pPr>
+            <a:r>
+              <a:rPr sz="2800" b="0" lang="ja-JP">
+                <a:solidFill>
+                  <a:srgbClr val="111111"/>
+                </a:solidFill>
+                <a:latin typeface="游ゴシック"/>
+                <a:ea typeface="游ゴシック"/>
+              </a:rPr>
+              <a:t>• 投球を見つける精度と、結果を決める精度を分けて評価する</a:t>
+            </a:r>
+          </a:p>
+          <a:p>
+            <a:pPr algn="l">
+              <a:lnSpc>
+                <a:spcPct val="112000"/>
+              </a:lnSpc>
+              <a:spcAft>
+                <a:spcPts val="2200"/>
+              </a:spcAft>
+              <a:buNone/>
+            </a:pPr>
+            <a:r>
+              <a:rPr sz="2800" b="0" lang="ja-JP">
+                <a:solidFill>
+                  <a:srgbClr val="111111"/>
+                </a:solidFill>
+                <a:latin typeface="游ゴシック"/>
+                <a:ea typeface="游ゴシック"/>
+              </a:rPr>
+              <a:t>• 今回の動画で検討した後、別の動画でも確認する</a:t>
             </a:r>
           </a:p>
         </p:txBody>
